--- a/S1-CL3-Cloud-Infrastructure-Improvement/delivery/topic_01/Topic_01_Slides.pptx
+++ b/S1-CL3-Cloud-Infrastructure-Improvement/delivery/topic_01/Topic_01_Slides.pptx
@@ -3386,7 +3386,7 @@
           <a:noFill/>
         </p:spPr>
         <p:txBody>
-          <a:bodyPr wrap="square" anchor="t" lIns="0" rIns="0" tIns="0" bIns="0">
+          <a:bodyPr wrap="square" anchor="ctr" lIns="0" rIns="0" tIns="0" bIns="0">
             <a:spAutoFit/>
           </a:bodyPr>
           <a:lstStyle/>
@@ -3403,7 +3403,7 @@
               </a:spcAft>
             </a:pPr>
             <a:r>
-              <a:rPr sz="1800" b="1" i="0">
+              <a:rPr sz="2400" b="1" i="0">
                 <a:solidFill>
                   <a:srgbClr val="EDAB0C"/>
                 </a:solidFill>
@@ -3412,7 +3412,7 @@
               <a:t>■  </a:t>
             </a:r>
             <a:r>
-              <a:rPr sz="1800" b="0" i="0">
+              <a:rPr sz="2400" b="0" i="0">
                 <a:solidFill>
                   <a:srgbClr val="2A2929"/>
                 </a:solidFill>
@@ -3434,7 +3434,7 @@
               </a:spcAft>
             </a:pPr>
             <a:r>
-              <a:rPr sz="1800" b="1" i="0">
+              <a:rPr sz="2400" b="1" i="0">
                 <a:solidFill>
                   <a:srgbClr val="EDAB0C"/>
                 </a:solidFill>
@@ -3443,7 +3443,7 @@
               <a:t>■  </a:t>
             </a:r>
             <a:r>
-              <a:rPr sz="1800" b="0" i="0">
+              <a:rPr sz="2400" b="0" i="0">
                 <a:solidFill>
                   <a:srgbClr val="2A2929"/>
                 </a:solidFill>
@@ -3465,7 +3465,7 @@
               </a:spcAft>
             </a:pPr>
             <a:r>
-              <a:rPr sz="1800" b="1" i="0">
+              <a:rPr sz="2400" b="1" i="0">
                 <a:solidFill>
                   <a:srgbClr val="EDAB0C"/>
                 </a:solidFill>
@@ -3474,7 +3474,7 @@
               <a:t>■  </a:t>
             </a:r>
             <a:r>
-              <a:rPr sz="1800" b="0" i="0">
+              <a:rPr sz="2400" b="0" i="0">
                 <a:solidFill>
                   <a:srgbClr val="2A2929"/>
                 </a:solidFill>
@@ -4464,7 +4464,7 @@
           <a:noFill/>
         </p:spPr>
         <p:txBody>
-          <a:bodyPr wrap="square" anchor="t" lIns="0" rIns="0" tIns="0" bIns="0">
+          <a:bodyPr wrap="square" anchor="ctr" lIns="0" rIns="0" tIns="0" bIns="0">
             <a:spAutoFit/>
           </a:bodyPr>
           <a:lstStyle/>
@@ -4481,7 +4481,7 @@
               </a:spcAft>
             </a:pPr>
             <a:r>
-              <a:rPr sz="1800" b="1" i="0">
+              <a:rPr sz="2400" b="1" i="0">
                 <a:solidFill>
                   <a:srgbClr val="EDAB0C"/>
                 </a:solidFill>
@@ -4490,7 +4490,7 @@
               <a:t>■  </a:t>
             </a:r>
             <a:r>
-              <a:rPr sz="1800" b="0" i="0">
+              <a:rPr sz="2400" b="0" i="0">
                 <a:solidFill>
                   <a:srgbClr val="2A2929"/>
                 </a:solidFill>
@@ -4512,7 +4512,7 @@
               </a:spcAft>
             </a:pPr>
             <a:r>
-              <a:rPr sz="1800" b="1" i="0">
+              <a:rPr sz="2400" b="1" i="0">
                 <a:solidFill>
                   <a:srgbClr val="EDAB0C"/>
                 </a:solidFill>
@@ -4521,7 +4521,7 @@
               <a:t>■  </a:t>
             </a:r>
             <a:r>
-              <a:rPr sz="1800" b="0" i="0">
+              <a:rPr sz="2400" b="0" i="0">
                 <a:solidFill>
                   <a:srgbClr val="2A2929"/>
                 </a:solidFill>
@@ -4543,7 +4543,7 @@
               </a:spcAft>
             </a:pPr>
             <a:r>
-              <a:rPr sz="1800" b="1" i="0">
+              <a:rPr sz="2400" b="1" i="0">
                 <a:solidFill>
                   <a:srgbClr val="EDAB0C"/>
                 </a:solidFill>
@@ -4552,7 +4552,7 @@
               <a:t>■  </a:t>
             </a:r>
             <a:r>
-              <a:rPr sz="1800" b="0" i="0">
+              <a:rPr sz="2400" b="0" i="0">
                 <a:solidFill>
                   <a:srgbClr val="2A2929"/>
                 </a:solidFill>
@@ -4806,7 +4806,7 @@
           <a:noFill/>
         </p:spPr>
         <p:txBody>
-          <a:bodyPr wrap="square" anchor="t" lIns="0" rIns="0" tIns="0" bIns="0">
+          <a:bodyPr wrap="square" anchor="ctr" lIns="0" rIns="0" tIns="0" bIns="0">
             <a:spAutoFit/>
           </a:bodyPr>
           <a:lstStyle/>
@@ -4823,7 +4823,7 @@
               </a:spcAft>
             </a:pPr>
             <a:r>
-              <a:rPr sz="1800" b="1" i="0">
+              <a:rPr sz="2400" b="1" i="0">
                 <a:solidFill>
                   <a:srgbClr val="EDAB0C"/>
                 </a:solidFill>
@@ -4832,7 +4832,7 @@
               <a:t>■  </a:t>
             </a:r>
             <a:r>
-              <a:rPr sz="1800" b="0" i="0">
+              <a:rPr sz="2400" b="0" i="0">
                 <a:solidFill>
                   <a:srgbClr val="2A2929"/>
                 </a:solidFill>
@@ -4854,7 +4854,7 @@
               </a:spcAft>
             </a:pPr>
             <a:r>
-              <a:rPr sz="1800" b="1" i="0">
+              <a:rPr sz="2400" b="1" i="0">
                 <a:solidFill>
                   <a:srgbClr val="EDAB0C"/>
                 </a:solidFill>
@@ -4863,7 +4863,7 @@
               <a:t>■  </a:t>
             </a:r>
             <a:r>
-              <a:rPr sz="1800" b="0" i="0">
+              <a:rPr sz="2400" b="0" i="0">
                 <a:solidFill>
                   <a:srgbClr val="2A2929"/>
                 </a:solidFill>
@@ -4885,7 +4885,7 @@
               </a:spcAft>
             </a:pPr>
             <a:r>
-              <a:rPr sz="1800" b="1" i="0">
+              <a:rPr sz="2400" b="1" i="0">
                 <a:solidFill>
                   <a:srgbClr val="EDAB0C"/>
                 </a:solidFill>
@@ -4894,7 +4894,7 @@
               <a:t>■  </a:t>
             </a:r>
             <a:r>
-              <a:rPr sz="1800" b="0" i="0">
+              <a:rPr sz="2400" b="0" i="0">
                 <a:solidFill>
                   <a:srgbClr val="2A2929"/>
                 </a:solidFill>
@@ -7181,7 +7181,7 @@
           <a:noFill/>
         </p:spPr>
         <p:txBody>
-          <a:bodyPr wrap="square" anchor="t" lIns="0" rIns="0" tIns="0" bIns="0">
+          <a:bodyPr wrap="square" anchor="ctr" lIns="0" rIns="0" tIns="0" bIns="0">
             <a:spAutoFit/>
           </a:bodyPr>
           <a:lstStyle/>
@@ -7198,7 +7198,7 @@
               </a:spcAft>
             </a:pPr>
             <a:r>
-              <a:rPr sz="1800" b="1" i="0">
+              <a:rPr sz="2400" b="1" i="0">
                 <a:solidFill>
                   <a:srgbClr val="EDAB0C"/>
                 </a:solidFill>
@@ -7207,7 +7207,7 @@
               <a:t>■  </a:t>
             </a:r>
             <a:r>
-              <a:rPr sz="1800" b="0" i="0">
+              <a:rPr sz="2400" b="0" i="0">
                 <a:solidFill>
                   <a:srgbClr val="2A2929"/>
                 </a:solidFill>
@@ -7229,7 +7229,7 @@
               </a:spcAft>
             </a:pPr>
             <a:r>
-              <a:rPr sz="1800" b="1" i="0">
+              <a:rPr sz="2400" b="1" i="0">
                 <a:solidFill>
                   <a:srgbClr val="EDAB0C"/>
                 </a:solidFill>
@@ -7238,7 +7238,7 @@
               <a:t>■  </a:t>
             </a:r>
             <a:r>
-              <a:rPr sz="1800" b="0" i="0">
+              <a:rPr sz="2400" b="0" i="0">
                 <a:solidFill>
                   <a:srgbClr val="2A2929"/>
                 </a:solidFill>
@@ -7260,7 +7260,7 @@
               </a:spcAft>
             </a:pPr>
             <a:r>
-              <a:rPr sz="1800" b="1" i="0">
+              <a:rPr sz="2400" b="1" i="0">
                 <a:solidFill>
                   <a:srgbClr val="EDAB0C"/>
                 </a:solidFill>
@@ -7269,7 +7269,7 @@
               <a:t>■  </a:t>
             </a:r>
             <a:r>
-              <a:rPr sz="1800" b="0" i="0">
+              <a:rPr sz="2400" b="0" i="0">
                 <a:solidFill>
                   <a:srgbClr val="2A2929"/>
                 </a:solidFill>
@@ -7889,7 +7889,7 @@
           <a:noFill/>
         </p:spPr>
         <p:txBody>
-          <a:bodyPr wrap="square" anchor="t" lIns="0" rIns="0" tIns="0" bIns="0">
+          <a:bodyPr wrap="square" anchor="ctr" lIns="0" rIns="0" tIns="0" bIns="0">
             <a:spAutoFit/>
           </a:bodyPr>
           <a:lstStyle/>
@@ -7906,7 +7906,7 @@
               </a:spcAft>
             </a:pPr>
             <a:r>
-              <a:rPr sz="1800" b="1" i="0">
+              <a:rPr sz="2400" b="1" i="0">
                 <a:solidFill>
                   <a:srgbClr val="EDAB0C"/>
                 </a:solidFill>
@@ -7915,7 +7915,7 @@
               <a:t>■  </a:t>
             </a:r>
             <a:r>
-              <a:rPr sz="1800" b="0" i="0">
+              <a:rPr sz="2400" b="0" i="0">
                 <a:solidFill>
                   <a:srgbClr val="2A2929"/>
                 </a:solidFill>
@@ -7937,7 +7937,7 @@
               </a:spcAft>
             </a:pPr>
             <a:r>
-              <a:rPr sz="1800" b="1" i="0">
+              <a:rPr sz="2400" b="1" i="0">
                 <a:solidFill>
                   <a:srgbClr val="EDAB0C"/>
                 </a:solidFill>
@@ -7946,7 +7946,7 @@
               <a:t>■  </a:t>
             </a:r>
             <a:r>
-              <a:rPr sz="1800" b="0" i="0">
+              <a:rPr sz="2400" b="0" i="0">
                 <a:solidFill>
                   <a:srgbClr val="2A2929"/>
                 </a:solidFill>
@@ -7968,7 +7968,7 @@
               </a:spcAft>
             </a:pPr>
             <a:r>
-              <a:rPr sz="1800" b="1" i="0">
+              <a:rPr sz="2400" b="1" i="0">
                 <a:solidFill>
                   <a:srgbClr val="EDAB0C"/>
                 </a:solidFill>
@@ -7977,7 +7977,7 @@
               <a:t>■  </a:t>
             </a:r>
             <a:r>
-              <a:rPr sz="1800" b="0" i="0">
+              <a:rPr sz="2400" b="0" i="0">
                 <a:solidFill>
                   <a:srgbClr val="2A2929"/>
                 </a:solidFill>
@@ -8967,7 +8967,7 @@
           <a:noFill/>
         </p:spPr>
         <p:txBody>
-          <a:bodyPr wrap="square" anchor="t" lIns="0" rIns="0" tIns="0" bIns="0">
+          <a:bodyPr wrap="square" anchor="ctr" lIns="0" rIns="0" tIns="0" bIns="0">
             <a:spAutoFit/>
           </a:bodyPr>
           <a:lstStyle/>
@@ -8984,7 +8984,7 @@
               </a:spcAft>
             </a:pPr>
             <a:r>
-              <a:rPr sz="1800" b="1" i="0">
+              <a:rPr sz="2400" b="1" i="0">
                 <a:solidFill>
                   <a:srgbClr val="EDAB0C"/>
                 </a:solidFill>
@@ -8993,7 +8993,7 @@
               <a:t>■  </a:t>
             </a:r>
             <a:r>
-              <a:rPr sz="1800" b="0" i="0">
+              <a:rPr sz="2400" b="0" i="0">
                 <a:solidFill>
                   <a:srgbClr val="2A2929"/>
                 </a:solidFill>
@@ -9015,7 +9015,7 @@
               </a:spcAft>
             </a:pPr>
             <a:r>
-              <a:rPr sz="1800" b="1" i="0">
+              <a:rPr sz="2400" b="1" i="0">
                 <a:solidFill>
                   <a:srgbClr val="EDAB0C"/>
                 </a:solidFill>
@@ -9024,7 +9024,7 @@
               <a:t>■  </a:t>
             </a:r>
             <a:r>
-              <a:rPr sz="1800" b="0" i="0">
+              <a:rPr sz="2400" b="0" i="0">
                 <a:solidFill>
                   <a:srgbClr val="2A2929"/>
                 </a:solidFill>
@@ -9046,7 +9046,7 @@
               </a:spcAft>
             </a:pPr>
             <a:r>
-              <a:rPr sz="1800" b="1" i="0">
+              <a:rPr sz="2400" b="1" i="0">
                 <a:solidFill>
                   <a:srgbClr val="EDAB0C"/>
                 </a:solidFill>
@@ -9055,7 +9055,7 @@
               <a:t>■  </a:t>
             </a:r>
             <a:r>
-              <a:rPr sz="1800" b="0" i="0">
+              <a:rPr sz="2400" b="0" i="0">
                 <a:solidFill>
                   <a:srgbClr val="2A2929"/>
                 </a:solidFill>

--- a/S1-CL3-Cloud-Infrastructure-Improvement/delivery/topic_01/Topic_01_Slides.pptx
+++ b/S1-CL3-Cloud-Infrastructure-Improvement/delivery/topic_01/Topic_01_Slides.pptx
@@ -7,21 +7,21 @@
   <p:sldIdLst>
     <p:sldId id="256" r:id="rId7"/>
     <p:sldId id="257" r:id="rId8"/>
-    <p:sldId id="258" r:id="rId9"/>
-    <p:sldId id="259" r:id="rId10"/>
-    <p:sldId id="260" r:id="rId11"/>
-    <p:sldId id="261" r:id="rId12"/>
-    <p:sldId id="262" r:id="rId13"/>
-    <p:sldId id="263" r:id="rId14"/>
-    <p:sldId id="264" r:id="rId15"/>
-    <p:sldId id="265" r:id="rId16"/>
-    <p:sldId id="266" r:id="rId17"/>
-    <p:sldId id="267" r:id="rId18"/>
-    <p:sldId id="268" r:id="rId19"/>
-    <p:sldId id="269" r:id="rId20"/>
-    <p:sldId id="270" r:id="rId21"/>
-    <p:sldId id="271" r:id="rId22"/>
-    <p:sldId id="272" r:id="rId23"/>
+    <p:sldId id="258" r:id="rId10"/>
+    <p:sldId id="259" r:id="rId11"/>
+    <p:sldId id="260" r:id="rId12"/>
+    <p:sldId id="261" r:id="rId13"/>
+    <p:sldId id="262" r:id="rId14"/>
+    <p:sldId id="263" r:id="rId15"/>
+    <p:sldId id="264" r:id="rId16"/>
+    <p:sldId id="265" r:id="rId17"/>
+    <p:sldId id="266" r:id="rId18"/>
+    <p:sldId id="267" r:id="rId19"/>
+    <p:sldId id="268" r:id="rId20"/>
+    <p:sldId id="269" r:id="rId21"/>
+    <p:sldId id="270" r:id="rId22"/>
+    <p:sldId id="271" r:id="rId23"/>
+    <p:sldId id="272" r:id="rId24"/>
   </p:sldIdLst>
   <p:sldSz cx="12191695" cy="6858000" type="screen4x3"/>
   <p:notesSz cx="6858000" cy="9144000"/>
@@ -121,6 +121,1926 @@
     </a:lvl9pPr>
   </p:defaultTextStyle>
 </p:presentation>
+</file>
+
+<file path=ppt/notesMasters/notesMaster1.xml><?xml version="1.0" encoding="utf-8"?>
+<p:notesMaster xmlns:a="http://schemas.openxmlformats.org/drawingml/2006/main" xmlns:p="http://schemas.openxmlformats.org/presentationml/2006/main" xmlns:r="http://schemas.openxmlformats.org/officeDocument/2006/relationships">
+  <p:cSld>
+    <p:bg>
+      <p:bgRef idx="1001">
+        <a:schemeClr val="bg1"/>
+      </p:bgRef>
+    </p:bg>
+    <p:spTree>
+      <p:nvGrpSpPr>
+        <p:cNvPr id="1" name=""/>
+        <p:cNvGrpSpPr/>
+        <p:nvPr/>
+      </p:nvGrpSpPr>
+      <p:grpSpPr>
+        <a:xfrm>
+          <a:off x="0" y="0"/>
+          <a:ext cx="0" cy="0"/>
+          <a:chOff x="0" y="0"/>
+          <a:chExt cx="0" cy="0"/>
+        </a:xfrm>
+      </p:grpSpPr>
+      <p:sp>
+        <p:nvSpPr>
+          <p:cNvPr id="2" name="Header Placeholder 1"/>
+          <p:cNvSpPr>
+            <a:spLocks noGrp="1"/>
+          </p:cNvSpPr>
+          <p:nvPr>
+            <p:ph type="hdr" sz="quarter"/>
+          </p:nvPr>
+        </p:nvSpPr>
+        <p:spPr>
+          <a:xfrm>
+            <a:off x="0" y="0"/>
+            <a:ext cx="2971800" cy="457200"/>
+          </a:xfrm>
+          <a:prstGeom prst="rect">
+            <a:avLst/>
+          </a:prstGeom>
+        </p:spPr>
+        <p:txBody>
+          <a:bodyPr vert="horz" lIns="91440" tIns="45720" rIns="91440" bIns="45720" rtlCol="0"/>
+          <a:lstStyle>
+            <a:lvl1pPr algn="l">
+              <a:defRPr sz="1200"/>
+            </a:lvl1pPr>
+          </a:lstStyle>
+          <a:p>
+            <a:endParaRPr lang="en-US"/>
+          </a:p>
+        </p:txBody>
+      </p:sp>
+      <p:sp>
+        <p:nvSpPr>
+          <p:cNvPr id="3" name="Date Placeholder 2"/>
+          <p:cNvSpPr>
+            <a:spLocks noGrp="1"/>
+          </p:cNvSpPr>
+          <p:nvPr>
+            <p:ph type="dt" idx="1"/>
+          </p:nvPr>
+        </p:nvSpPr>
+        <p:spPr>
+          <a:xfrm>
+            <a:off x="3884613" y="0"/>
+            <a:ext cx="2971800" cy="457200"/>
+          </a:xfrm>
+          <a:prstGeom prst="rect">
+            <a:avLst/>
+          </a:prstGeom>
+        </p:spPr>
+        <p:txBody>
+          <a:bodyPr vert="horz" lIns="91440" tIns="45720" rIns="91440" bIns="45720" rtlCol="0"/>
+          <a:lstStyle>
+            <a:lvl1pPr algn="r">
+              <a:defRPr sz="1200"/>
+            </a:lvl1pPr>
+          </a:lstStyle>
+          <a:p>
+            <a:fld id="{0F89C1C7-3DCD-1040-A9CF-14679D8B5DDD}" type="datetimeFigureOut">
+              <a:rPr lang="en-US" smtClean="0"/>
+              <a:t>10/17/16</a:t>
+            </a:fld>
+            <a:endParaRPr lang="en-US"/>
+          </a:p>
+        </p:txBody>
+      </p:sp>
+      <p:sp>
+        <p:nvSpPr>
+          <p:cNvPr id="4" name="Slide Image Placeholder 3"/>
+          <p:cNvSpPr>
+            <a:spLocks noGrp="1" noRot="1" noChangeAspect="1"/>
+          </p:cNvSpPr>
+          <p:nvPr>
+            <p:ph type="sldImg" idx="2"/>
+          </p:nvPr>
+        </p:nvSpPr>
+        <p:spPr>
+          <a:xfrm>
+            <a:off x="1143000" y="685800"/>
+            <a:ext cx="4572000" cy="3429000"/>
+          </a:xfrm>
+          <a:prstGeom prst="rect">
+            <a:avLst/>
+          </a:prstGeom>
+          <a:noFill/>
+          <a:ln w="12700">
+            <a:solidFill>
+              <a:prstClr val="black"/>
+            </a:solidFill>
+          </a:ln>
+        </p:spPr>
+        <p:txBody>
+          <a:bodyPr vert="horz" lIns="91440" tIns="45720" rIns="91440" bIns="45720" rtlCol="0" anchor="ctr"/>
+          <a:lstStyle/>
+          <a:p>
+            <a:endParaRPr lang="en-US"/>
+          </a:p>
+        </p:txBody>
+      </p:sp>
+      <p:sp>
+        <p:nvSpPr>
+          <p:cNvPr id="5" name="Notes Placeholder 4"/>
+          <p:cNvSpPr>
+            <a:spLocks noGrp="1"/>
+          </p:cNvSpPr>
+          <p:nvPr>
+            <p:ph type="body" sz="quarter" idx="3"/>
+          </p:nvPr>
+        </p:nvSpPr>
+        <p:spPr>
+          <a:xfrm>
+            <a:off x="685800" y="4343400"/>
+            <a:ext cx="5486400" cy="4114800"/>
+          </a:xfrm>
+          <a:prstGeom prst="rect">
+            <a:avLst/>
+          </a:prstGeom>
+        </p:spPr>
+        <p:txBody>
+          <a:bodyPr vert="horz" lIns="91440" tIns="45720" rIns="91440" bIns="45720" rtlCol="0"/>
+          <a:lstStyle/>
+          <a:p>
+            <a:pPr lvl="0"/>
+            <a:r>
+              <a:rPr lang="en-US" smtClean="0"/>
+              <a:t>Click to edit Master text styles</a:t>
+            </a:r>
+          </a:p>
+          <a:p>
+            <a:pPr lvl="1"/>
+            <a:r>
+              <a:rPr lang="en-US" smtClean="0"/>
+              <a:t>Second level</a:t>
+            </a:r>
+          </a:p>
+          <a:p>
+            <a:pPr lvl="2"/>
+            <a:r>
+              <a:rPr lang="en-US" smtClean="0"/>
+              <a:t>Third level</a:t>
+            </a:r>
+          </a:p>
+          <a:p>
+            <a:pPr lvl="3"/>
+            <a:r>
+              <a:rPr lang="en-US" smtClean="0"/>
+              <a:t>Fourth level</a:t>
+            </a:r>
+          </a:p>
+          <a:p>
+            <a:pPr lvl="4"/>
+            <a:r>
+              <a:rPr lang="en-US" smtClean="0"/>
+              <a:t>Fifth level</a:t>
+            </a:r>
+            <a:endParaRPr lang="en-US"/>
+          </a:p>
+        </p:txBody>
+      </p:sp>
+      <p:sp>
+        <p:nvSpPr>
+          <p:cNvPr id="6" name="Footer Placeholder 5"/>
+          <p:cNvSpPr>
+            <a:spLocks noGrp="1"/>
+          </p:cNvSpPr>
+          <p:nvPr>
+            <p:ph type="ftr" sz="quarter" idx="4"/>
+          </p:nvPr>
+        </p:nvSpPr>
+        <p:spPr>
+          <a:xfrm>
+            <a:off x="0" y="8685213"/>
+            <a:ext cx="2971800" cy="457200"/>
+          </a:xfrm>
+          <a:prstGeom prst="rect">
+            <a:avLst/>
+          </a:prstGeom>
+        </p:spPr>
+        <p:txBody>
+          <a:bodyPr vert="horz" lIns="91440" tIns="45720" rIns="91440" bIns="45720" rtlCol="0" anchor="b"/>
+          <a:lstStyle>
+            <a:lvl1pPr algn="l">
+              <a:defRPr sz="1200"/>
+            </a:lvl1pPr>
+          </a:lstStyle>
+          <a:p>
+            <a:endParaRPr lang="en-US"/>
+          </a:p>
+        </p:txBody>
+      </p:sp>
+      <p:sp>
+        <p:nvSpPr>
+          <p:cNvPr id="7" name="Slide Number Placeholder 6"/>
+          <p:cNvSpPr>
+            <a:spLocks noGrp="1"/>
+          </p:cNvSpPr>
+          <p:nvPr>
+            <p:ph type="sldNum" sz="quarter" idx="5"/>
+          </p:nvPr>
+        </p:nvSpPr>
+        <p:spPr>
+          <a:xfrm>
+            <a:off x="3884613" y="8685213"/>
+            <a:ext cx="2971800" cy="457200"/>
+          </a:xfrm>
+          <a:prstGeom prst="rect">
+            <a:avLst/>
+          </a:prstGeom>
+        </p:spPr>
+        <p:txBody>
+          <a:bodyPr vert="horz" lIns="91440" tIns="45720" rIns="91440" bIns="45720" rtlCol="0" anchor="b"/>
+          <a:lstStyle>
+            <a:lvl1pPr algn="r">
+              <a:defRPr sz="1200"/>
+            </a:lvl1pPr>
+          </a:lstStyle>
+          <a:p>
+            <a:fld id="{BB5E49A5-4136-284D-997B-48E1D791AD67}" type="slidenum">
+              <a:rPr lang="en-US" smtClean="0"/>
+              <a:t>‹#›</a:t>
+            </a:fld>
+            <a:endParaRPr lang="en-US"/>
+          </a:p>
+        </p:txBody>
+      </p:sp>
+    </p:spTree>
+    <p:extLst>
+      <p:ext uri="{BB962C8B-B14F-4D97-AF65-F5344CB8AC3E}">
+        <p14:creationId xmlns:p14="http://schemas.microsoft.com/office/powerpoint/2010/main" val="2623252185"/>
+      </p:ext>
+    </p:extLst>
+  </p:cSld>
+  <p:clrMap bg1="lt1" tx1="dk1" bg2="lt2" tx2="dk2" accent1="accent1" accent2="accent2" accent3="accent3" accent4="accent4" accent5="accent5" accent6="accent6" hlink="hlink" folHlink="folHlink"/>
+  <p:notesStyle>
+    <a:lvl1pPr marL="0" algn="l" defTabSz="457200" rtl="0" eaLnBrk="1" latinLnBrk="0" hangingPunct="1">
+      <a:defRPr sz="1200" kern="1200">
+        <a:solidFill>
+          <a:schemeClr val="tx1"/>
+        </a:solidFill>
+        <a:latin typeface="+mn-lt"/>
+        <a:ea typeface="+mn-ea"/>
+        <a:cs typeface="+mn-cs"/>
+      </a:defRPr>
+    </a:lvl1pPr>
+    <a:lvl2pPr marL="457200" algn="l" defTabSz="457200" rtl="0" eaLnBrk="1" latinLnBrk="0" hangingPunct="1">
+      <a:defRPr sz="1200" kern="1200">
+        <a:solidFill>
+          <a:schemeClr val="tx1"/>
+        </a:solidFill>
+        <a:latin typeface="+mn-lt"/>
+        <a:ea typeface="+mn-ea"/>
+        <a:cs typeface="+mn-cs"/>
+      </a:defRPr>
+    </a:lvl2pPr>
+    <a:lvl3pPr marL="914400" algn="l" defTabSz="457200" rtl="0" eaLnBrk="1" latinLnBrk="0" hangingPunct="1">
+      <a:defRPr sz="1200" kern="1200">
+        <a:solidFill>
+          <a:schemeClr val="tx1"/>
+        </a:solidFill>
+        <a:latin typeface="+mn-lt"/>
+        <a:ea typeface="+mn-ea"/>
+        <a:cs typeface="+mn-cs"/>
+      </a:defRPr>
+    </a:lvl3pPr>
+    <a:lvl4pPr marL="1371600" algn="l" defTabSz="457200" rtl="0" eaLnBrk="1" latinLnBrk="0" hangingPunct="1">
+      <a:defRPr sz="1200" kern="1200">
+        <a:solidFill>
+          <a:schemeClr val="tx1"/>
+        </a:solidFill>
+        <a:latin typeface="+mn-lt"/>
+        <a:ea typeface="+mn-ea"/>
+        <a:cs typeface="+mn-cs"/>
+      </a:defRPr>
+    </a:lvl4pPr>
+    <a:lvl5pPr marL="1828800" algn="l" defTabSz="457200" rtl="0" eaLnBrk="1" latinLnBrk="0" hangingPunct="1">
+      <a:defRPr sz="1200" kern="1200">
+        <a:solidFill>
+          <a:schemeClr val="tx1"/>
+        </a:solidFill>
+        <a:latin typeface="+mn-lt"/>
+        <a:ea typeface="+mn-ea"/>
+        <a:cs typeface="+mn-cs"/>
+      </a:defRPr>
+    </a:lvl5pPr>
+    <a:lvl6pPr marL="2286000" algn="l" defTabSz="457200" rtl="0" eaLnBrk="1" latinLnBrk="0" hangingPunct="1">
+      <a:defRPr sz="1200" kern="1200">
+        <a:solidFill>
+          <a:schemeClr val="tx1"/>
+        </a:solidFill>
+        <a:latin typeface="+mn-lt"/>
+        <a:ea typeface="+mn-ea"/>
+        <a:cs typeface="+mn-cs"/>
+      </a:defRPr>
+    </a:lvl6pPr>
+    <a:lvl7pPr marL="2743200" algn="l" defTabSz="457200" rtl="0" eaLnBrk="1" latinLnBrk="0" hangingPunct="1">
+      <a:defRPr sz="1200" kern="1200">
+        <a:solidFill>
+          <a:schemeClr val="tx1"/>
+        </a:solidFill>
+        <a:latin typeface="+mn-lt"/>
+        <a:ea typeface="+mn-ea"/>
+        <a:cs typeface="+mn-cs"/>
+      </a:defRPr>
+    </a:lvl7pPr>
+    <a:lvl8pPr marL="3200400" algn="l" defTabSz="457200" rtl="0" eaLnBrk="1" latinLnBrk="0" hangingPunct="1">
+      <a:defRPr sz="1200" kern="1200">
+        <a:solidFill>
+          <a:schemeClr val="tx1"/>
+        </a:solidFill>
+        <a:latin typeface="+mn-lt"/>
+        <a:ea typeface="+mn-ea"/>
+        <a:cs typeface="+mn-cs"/>
+      </a:defRPr>
+    </a:lvl8pPr>
+    <a:lvl9pPr marL="3657600" algn="l" defTabSz="457200" rtl="0" eaLnBrk="1" latinLnBrk="0" hangingPunct="1">
+      <a:defRPr sz="1200" kern="1200">
+        <a:solidFill>
+          <a:schemeClr val="tx1"/>
+        </a:solidFill>
+        <a:latin typeface="+mn-lt"/>
+        <a:ea typeface="+mn-ea"/>
+        <a:cs typeface="+mn-cs"/>
+      </a:defRPr>
+    </a:lvl9pPr>
+  </p:notesStyle>
+</p:notesMaster>
+</file>
+
+<file path=ppt/notesSlides/notesSlide1.xml><?xml version="1.0" encoding="utf-8"?>
+<p:notes xmlns:a="http://schemas.openxmlformats.org/drawingml/2006/main" xmlns:p="http://schemas.openxmlformats.org/presentationml/2006/main" xmlns:r="http://schemas.openxmlformats.org/officeDocument/2006/relationships">
+  <p:cSld>
+    <p:spTree>
+      <p:nvGrpSpPr>
+        <p:cNvPr id="1" name=""/>
+        <p:cNvGrpSpPr/>
+        <p:nvPr/>
+      </p:nvGrpSpPr>
+      <p:grpSpPr>
+        <a:xfrm>
+          <a:off x="0" y="0"/>
+          <a:ext cx="0" cy="0"/>
+          <a:chOff x="0" y="0"/>
+          <a:chExt cx="0" cy="0"/>
+        </a:xfrm>
+      </p:grpSpPr>
+      <p:sp>
+        <p:nvSpPr>
+          <p:cNvPr id="2" name="Slide Image Placeholder 1"/>
+          <p:cNvSpPr>
+            <a:spLocks noGrp="1"/>
+          </p:cNvSpPr>
+          <p:nvPr>
+            <p:ph type="sldImg" idx="2"/>
+          </p:nvPr>
+        </p:nvSpPr>
+        <p:spPr/>
+      </p:sp>
+      <p:sp>
+        <p:nvSpPr>
+          <p:cNvPr id="3" name="Notes Placeholder 2"/>
+          <p:cNvSpPr>
+            <a:spLocks noGrp="1"/>
+          </p:cNvSpPr>
+          <p:nvPr>
+            <p:ph type="body" idx="3" sz="quarter"/>
+          </p:nvPr>
+        </p:nvSpPr>
+        <p:spPr/>
+        <p:txBody>
+          <a:bodyPr/>
+          <a:lstStyle/>
+          <a:p>
+            <a:r>
+              <a:t>Frame the whole cluster's opening move — before you improve a cloud system you first understand the</a:t>
+            </a:r>
+          </a:p>
+          <a:p>
+            <a:r>
+              <a:t>one you have. This is the ANALYSIS half of AT1's Solution Design; set the posture, don't teach a</a:t>
+            </a:r>
+          </a:p>
+          <a:p>
+            <a:r>
+              <a:t>section yet.</a:t>
+            </a:r>
+          </a:p>
+          <a:p>
+            <a:r>
+              <a:t>• First two bullets: Topic 1 opens AT1 — review the baseline, evaluate it, set the goals; the design</a:t>
+            </a:r>
+          </a:p>
+          <a:p>
+            <a:r>
+              <a:t>of the fix is Topics 2–4. Diagnosis precedes design.</a:t>
+            </a:r>
+          </a:p>
+          <a:p>
+            <a:r>
+              <a:t>• Third bullet: name the vehicle — Ledgerline, YAT's Accounting system, running single-AZ in the</a:t>
+            </a:r>
+          </a:p>
+          <a:p>
+            <a:r>
+              <a:t>cloud. It is the system they analyse and improve for the assessment.</a:t>
+            </a:r>
+          </a:p>
+          <a:p>
+            <a:r>
+              <a:t>• Fourth bullet (the discipline): stay at analysis — diagnose and justify, do NOT design the changes</a:t>
+            </a:r>
+          </a:p>
+          <a:p>
+            <a:r>
+              <a:t>yet. Hold that line all Topic.</a:t>
+            </a:r>
+          </a:p>
+          <a:p>
+            <a:r>
+              <a:t>Misconception to pre-empt: "we already know the fix is Multi-AZ, let's design it." No — you must first</a:t>
+            </a:r>
+          </a:p>
+          <a:p>
+            <a:r>
+              <a:t>review, evaluate business impact and set goals; a fix proposed before the goals exist has nothing to</a:t>
+            </a:r>
+          </a:p>
+          <a:p>
+            <a:r>
+              <a:t>be measured against.</a:t>
+            </a:r>
+          </a:p>
+          <a:p>
+            <a:r>
+              <a:t>Question to pose: "Why analyse a system you're about to change — why not go straight to the</a:t>
+            </a:r>
+          </a:p>
+          <a:p>
+            <a:r>
+              <a:t>improvement?" (you can't justify or measure a change without the baseline + goals it answers).</a:t>
+            </a:r>
+          </a:p>
+          <a:p>
+            <a:r>
+              <a:t>UoC/AT1 tie: this Topic develops ICTCLD504 PC 1.1–1.6, PC 2.1 and PE 3; the output is the analysis +</a:t>
+            </a:r>
+          </a:p>
+          <a:p>
+            <a:r>
+              <a:t>goals/metrics sections of the AT1 Solution Design.</a:t>
+            </a:r>
+          </a:p>
+        </p:txBody>
+      </p:sp>
+      <p:sp>
+        <p:nvSpPr>
+          <p:cNvPr id="4" name="Slide Number Placeholder 3"/>
+          <p:cNvSpPr>
+            <a:spLocks noGrp="1"/>
+          </p:cNvSpPr>
+          <p:nvPr>
+            <p:ph type="sldNum" idx="5" sz="quarter"/>
+          </p:nvPr>
+        </p:nvSpPr>
+        <p:spPr/>
+      </p:sp>
+    </p:spTree>
+  </p:cSld>
+  <p:clrMapOvr>
+    <a:masterClrMapping/>
+  </p:clrMapOvr>
+</p:notes>
+</file>
+
+<file path=ppt/notesSlides/notesSlide10.xml><?xml version="1.0" encoding="utf-8"?>
+<p:notes xmlns:a="http://schemas.openxmlformats.org/drawingml/2006/main" xmlns:p="http://schemas.openxmlformats.org/presentationml/2006/main" xmlns:r="http://schemas.openxmlformats.org/officeDocument/2006/relationships">
+  <p:cSld>
+    <p:spTree>
+      <p:nvGrpSpPr>
+        <p:cNvPr id="1" name=""/>
+        <p:cNvGrpSpPr/>
+        <p:nvPr/>
+      </p:nvGrpSpPr>
+      <p:grpSpPr>
+        <a:xfrm>
+          <a:off x="0" y="0"/>
+          <a:ext cx="0" cy="0"/>
+          <a:chOff x="0" y="0"/>
+          <a:chExt cx="0" cy="0"/>
+        </a:xfrm>
+      </p:grpSpPr>
+      <p:sp>
+        <p:nvSpPr>
+          <p:cNvPr id="2" name="Slide Image Placeholder 1"/>
+          <p:cNvSpPr>
+            <a:spLocks noGrp="1"/>
+          </p:cNvSpPr>
+          <p:nvPr>
+            <p:ph type="sldImg" idx="2"/>
+          </p:nvPr>
+        </p:nvSpPr>
+        <p:spPr/>
+      </p:sp>
+      <p:sp>
+        <p:nvSpPr>
+          <p:cNvPr id="3" name="Notes Placeholder 2"/>
+          <p:cNvSpPr>
+            <a:spLocks noGrp="1"/>
+          </p:cNvSpPr>
+          <p:nvPr>
+            <p:ph type="body" idx="3" sz="quarter"/>
+          </p:nvPr>
+        </p:nvSpPr>
+        <p:spPr/>
+        <p:txBody>
+          <a:bodyPr/>
+          <a:lstStyle/>
+          <a:p>
+            <a:r>
+              <a:t>Apply the goal/metric discipline to Ledgerline — set concrete goals and confirm the metrics that make</a:t>
+            </a:r>
+          </a:p>
+          <a:p>
+            <a:r>
+              <a:t>them testable. This slide produces the yardstick the rest of the cluster measures against.</a:t>
+            </a:r>
+          </a:p>
+          <a:p>
+            <a:r>
+              <a:t>• First bullet: set the security / reliability / high-performance / cost goals for Ledgerline FROM its</a:t>
+            </a:r>
+          </a:p>
+          <a:p>
+            <a:r>
+              <a:t>business requirements — trace each to a stated need.</a:t>
+            </a:r>
+          </a:p>
+          <a:p>
+            <a:r>
+              <a:t>• Second bullet: evaluate and confirm the performance METRICS the improved application is measured</a:t>
+            </a:r>
+          </a:p>
+          <a:p>
+            <a:r>
+              <a:t>against — availability %, RTO/RPO, response time, cost per period (PC 2.1). A goal without a metric</a:t>
+            </a:r>
+          </a:p>
+          <a:p>
+            <a:r>
+              <a:t>can't be tested.</a:t>
+            </a:r>
+          </a:p>
+          <a:p>
+            <a:r>
+              <a:t>• Third bullet (the payoff): write them so a LATER Topic can test against them — these goals and</a:t>
+            </a:r>
+          </a:p>
+          <a:p>
+            <a:r>
+              <a:t>metrics are the yardstick for the design (Topics 2–3) and the AT3 build.</a:t>
+            </a:r>
+          </a:p>
+          <a:p>
+            <a:r>
+              <a:t>Misconception to pre-empt: "the metric is 'be reliable'." No — that's the goal restated; a metric is a</a:t>
+            </a:r>
+          </a:p>
+          <a:p>
+            <a:r>
+              <a:t>number with a target (e.g. availability ≥ 99.5%, RTO ≤ 1 business day). Push them to numbers.</a:t>
+            </a:r>
+          </a:p>
+          <a:p>
+            <a:r>
+              <a:t>Question to pose: "Reliability goal: survive an AZ failure. What metric proves it, and what's the</a:t>
+            </a:r>
+          </a:p>
+          <a:p>
+            <a:r>
+              <a:t>target?" (availability % / RTO / RPO with a number).</a:t>
+            </a:r>
+          </a:p>
+          <a:p>
+            <a:r>
+              <a:t>UoC/AT1 tie: ICTCLD504 PC 1.6 (goals) + PC 2.1 (confirm performance metrics) + PE 3 → AT1 Solution</a:t>
+            </a:r>
+          </a:p>
+          <a:p>
+            <a:r>
+              <a:t>Design goals &amp; metrics sections.</a:t>
+            </a:r>
+          </a:p>
+        </p:txBody>
+      </p:sp>
+      <p:sp>
+        <p:nvSpPr>
+          <p:cNvPr id="4" name="Slide Number Placeholder 3"/>
+          <p:cNvSpPr>
+            <a:spLocks noGrp="1"/>
+          </p:cNvSpPr>
+          <p:nvPr>
+            <p:ph type="sldNum" idx="5" sz="quarter"/>
+          </p:nvPr>
+        </p:nvSpPr>
+        <p:spPr/>
+      </p:sp>
+    </p:spTree>
+  </p:cSld>
+  <p:clrMapOvr>
+    <a:masterClrMapping/>
+  </p:clrMapOvr>
+</p:notes>
+</file>
+
+<file path=ppt/notesSlides/notesSlide11.xml><?xml version="1.0" encoding="utf-8"?>
+<p:notes xmlns:a="http://schemas.openxmlformats.org/drawingml/2006/main" xmlns:p="http://schemas.openxmlformats.org/presentationml/2006/main" xmlns:r="http://schemas.openxmlformats.org/officeDocument/2006/relationships">
+  <p:cSld>
+    <p:spTree>
+      <p:nvGrpSpPr>
+        <p:cNvPr id="1" name=""/>
+        <p:cNvGrpSpPr/>
+        <p:nvPr/>
+      </p:nvGrpSpPr>
+      <p:grpSpPr>
+        <a:xfrm>
+          <a:off x="0" y="0"/>
+          <a:ext cx="0" cy="0"/>
+          <a:chOff x="0" y="0"/>
+          <a:chExt cx="0" cy="0"/>
+        </a:xfrm>
+      </p:grpSpPr>
+      <p:sp>
+        <p:nvSpPr>
+          <p:cNvPr id="2" name="Slide Image Placeholder 1"/>
+          <p:cNvSpPr>
+            <a:spLocks noGrp="1"/>
+          </p:cNvSpPr>
+          <p:nvPr>
+            <p:ph type="sldImg" idx="2"/>
+          </p:nvPr>
+        </p:nvSpPr>
+        <p:spPr/>
+      </p:sp>
+      <p:sp>
+        <p:nvSpPr>
+          <p:cNvPr id="3" name="Notes Placeholder 2"/>
+          <p:cNvSpPr>
+            <a:spLocks noGrp="1"/>
+          </p:cNvSpPr>
+          <p:nvPr>
+            <p:ph type="body" idx="3" sz="quarter"/>
+          </p:nvPr>
+        </p:nvSpPr>
+        <p:spPr/>
+        <p:txBody>
+          <a:bodyPr/>
+          <a:lstStyle/>
+          <a:p>
+            <a:r>
+              <a:t>Facilitation — the Section 3 practice; students set goals + metrics for the practice engagement, the</a:t>
+            </a:r>
+          </a:p>
+          <a:p>
+            <a:r>
+              <a:t>yardstick they'll design against in the practice work that mirrors Topics 2–3.</a:t>
+            </a:r>
+          </a:p>
+          <a:p>
+            <a:r>
+              <a:t>Tell students: "For the practice engagement, set goals across security, reliability, performance and</a:t>
+            </a:r>
+          </a:p>
+          <a:p>
+            <a:r>
+              <a:t>cost. Then confirm the metric each goal is measured by — a number with a target."</a:t>
+            </a:r>
+          </a:p>
+          <a:p>
+            <a:r>
+              <a:t>Steps (put on the board):</a:t>
+            </a:r>
+          </a:p>
+          <a:p>
+            <a:r>
+              <a:t>1. Write one goal per concern — security, reliability, performance, cost — each traced to a business</a:t>
+            </a:r>
+          </a:p>
+          <a:p>
+            <a:r>
+              <a:t>need.</a:t>
+            </a:r>
+          </a:p>
+          <a:p>
+            <a:r>
+              <a:t>2. For each goal, confirm the metric that proves it and set a target (availability %, RTO/RPO, response</a:t>
+            </a:r>
+          </a:p>
+          <a:p>
+            <a:r>
+              <a:t>time, cost per period).</a:t>
+            </a:r>
+          </a:p>
+          <a:p>
+            <a:r>
+              <a:t>3. Sanity-check: could a later Topic TEST against these? If not, tighten them.</a:t>
+            </a:r>
+          </a:p>
+          <a:p>
+            <a:r>
+              <a:t>Must produce: four goals, each with a named metric and a target value.</a:t>
+            </a:r>
+          </a:p>
+          <a:p>
+            <a:r>
+              <a:t>Timing: ~25 min then discuss. Where they get stuck: goals that are really solutions ("use auto</a:t>
+            </a:r>
+          </a:p>
+          <a:p>
+            <a:r>
+              <a:t>scaling"), and metrics with no number — circulate and push outcome-goals + numeric targets.</a:t>
+            </a:r>
+          </a:p>
+          <a:p>
+            <a:r>
+              <a:t>Share-back prompt: take one goal/metric pair and ask the room whether the metric actually proves the</a:t>
+            </a:r>
+          </a:p>
+          <a:p>
+            <a:r>
+              <a:t>goal.</a:t>
+            </a:r>
+          </a:p>
+          <a:p>
+            <a:r>
+              <a:t>No-leakage note: the website is the practice vehicle; AT1 assesses goal/metric setting on Ledgerline —</a:t>
+            </a:r>
+          </a:p>
+          <a:p>
+            <a:r>
+              <a:t>comparable, not identical.</a:t>
+            </a:r>
+          </a:p>
+        </p:txBody>
+      </p:sp>
+      <p:sp>
+        <p:nvSpPr>
+          <p:cNvPr id="4" name="Slide Number Placeholder 3"/>
+          <p:cNvSpPr>
+            <a:spLocks noGrp="1"/>
+          </p:cNvSpPr>
+          <p:nvPr>
+            <p:ph type="sldNum" idx="5" sz="quarter"/>
+          </p:nvPr>
+        </p:nvSpPr>
+        <p:spPr/>
+      </p:sp>
+    </p:spTree>
+  </p:cSld>
+  <p:clrMapOvr>
+    <a:masterClrMapping/>
+  </p:clrMapOvr>
+</p:notes>
+</file>
+
+<file path=ppt/notesSlides/notesSlide2.xml><?xml version="1.0" encoding="utf-8"?>
+<p:notes xmlns:a="http://schemas.openxmlformats.org/drawingml/2006/main" xmlns:p="http://schemas.openxmlformats.org/presentationml/2006/main" xmlns:r="http://schemas.openxmlformats.org/officeDocument/2006/relationships">
+  <p:cSld>
+    <p:spTree>
+      <p:nvGrpSpPr>
+        <p:cNvPr id="1" name=""/>
+        <p:cNvGrpSpPr/>
+        <p:nvPr/>
+      </p:nvGrpSpPr>
+      <p:grpSpPr>
+        <a:xfrm>
+          <a:off x="0" y="0"/>
+          <a:ext cx="0" cy="0"/>
+          <a:chOff x="0" y="0"/>
+          <a:chExt cx="0" cy="0"/>
+        </a:xfrm>
+      </p:grpSpPr>
+      <p:sp>
+        <p:nvSpPr>
+          <p:cNvPr id="2" name="Slide Image Placeholder 1"/>
+          <p:cNvSpPr>
+            <a:spLocks noGrp="1"/>
+          </p:cNvSpPr>
+          <p:nvPr>
+            <p:ph type="sldImg" idx="2"/>
+          </p:nvPr>
+        </p:nvSpPr>
+        <p:spPr/>
+      </p:sp>
+      <p:sp>
+        <p:nvSpPr>
+          <p:cNvPr id="3" name="Notes Placeholder 2"/>
+          <p:cNvSpPr>
+            <a:spLocks noGrp="1"/>
+          </p:cNvSpPr>
+          <p:nvPr>
+            <p:ph type="body" idx="3" sz="quarter"/>
+          </p:nvPr>
+        </p:nvSpPr>
+        <p:spPr/>
+        <p:txBody>
+          <a:bodyPr/>
+          <a:lstStyle/>
+          <a:p>
+            <a:r>
+              <a:t>Open Section 1 with the vendor-neutral METHOD — how you read any cloud architecture — before applying</a:t>
+            </a:r>
+          </a:p>
+          <a:p>
+            <a:r>
+              <a:t>it to Ledgerline. This is a technique slide; teach the frame, not the system yet.</a:t>
+            </a:r>
+          </a:p>
+          <a:p>
+            <a:r>
+              <a:t>• First bullet: a structured review reads an architecture against pillars — security, reliability,</a:t>
+            </a:r>
+          </a:p>
+          <a:p>
+            <a:r>
+              <a:t>performance, cost. Name the four; they recur all cluster.</a:t>
+            </a:r>
+          </a:p>
+          <a:p>
+            <a:r>
+              <a:t>• Second bullet: frame the review with the industry technology standards used in cloud solutions</a:t>
+            </a:r>
+          </a:p>
+          <a:p>
+            <a:r>
+              <a:t>(KE 1) and the standard hardware/software products the platform is built on — compute families,</a:t>
+            </a:r>
+          </a:p>
+          <a:p>
+            <a:r>
+              <a:t>managed databases, object/block storage (KE 2). This is the vocabulary the review is written in.</a:t>
+            </a:r>
+          </a:p>
+          <a:p>
+            <a:r>
+              <a:t>• Third bullet: keep it vendor-neutral HERE; they apply it to Ledgerline, a real AWS baseline, on the</a:t>
+            </a:r>
+          </a:p>
+          <a:p>
+            <a:r>
+              <a:t>next slide.</a:t>
+            </a:r>
+          </a:p>
+          <a:p>
+            <a:r>
+              <a:t>Misconception to pre-empt: "reviewing = listing what's there." No — a review EVALUATES against the</a:t>
+            </a:r>
+          </a:p>
+          <a:p>
+            <a:r>
+              <a:t>pillars; an inventory with no judgement isn't a review.</a:t>
+            </a:r>
+          </a:p>
+          <a:p>
+            <a:r>
+              <a:t>Question to pose: "Name the four pillars you read an architecture against — and which one a single-AZ</a:t>
+            </a:r>
+          </a:p>
+          <a:p>
+            <a:r>
+              <a:t>design most obviously fails." (reliability — sets up the Ledgerline slide).</a:t>
+            </a:r>
+          </a:p>
+          <a:p>
+            <a:r>
+              <a:t>UoC/AT1 tie: ICTCLD504 KE 1 / KE 2 (the standards + standard products the review draws on) → AT1</a:t>
+            </a:r>
+          </a:p>
+          <a:p>
+            <a:r>
+              <a:t>Solution Design baseline analysis + the Part A KE appendix.</a:t>
+            </a:r>
+          </a:p>
+        </p:txBody>
+      </p:sp>
+      <p:sp>
+        <p:nvSpPr>
+          <p:cNvPr id="4" name="Slide Number Placeholder 3"/>
+          <p:cNvSpPr>
+            <a:spLocks noGrp="1"/>
+          </p:cNvSpPr>
+          <p:nvPr>
+            <p:ph type="sldNum" idx="5" sz="quarter"/>
+          </p:nvPr>
+        </p:nvSpPr>
+        <p:spPr/>
+      </p:sp>
+    </p:spTree>
+  </p:cSld>
+  <p:clrMapOvr>
+    <a:masterClrMapping/>
+  </p:clrMapOvr>
+</p:notes>
+</file>
+
+<file path=ppt/notesSlides/notesSlide3.xml><?xml version="1.0" encoding="utf-8"?>
+<p:notes xmlns:a="http://schemas.openxmlformats.org/drawingml/2006/main" xmlns:p="http://schemas.openxmlformats.org/presentationml/2006/main" xmlns:r="http://schemas.openxmlformats.org/officeDocument/2006/relationships">
+  <p:cSld>
+    <p:spTree>
+      <p:nvGrpSpPr>
+        <p:cNvPr id="1" name=""/>
+        <p:cNvGrpSpPr/>
+        <p:nvPr/>
+      </p:nvGrpSpPr>
+      <p:grpSpPr>
+        <a:xfrm>
+          <a:off x="0" y="0"/>
+          <a:ext cx="0" cy="0"/>
+          <a:chOff x="0" y="0"/>
+          <a:chExt cx="0" cy="0"/>
+        </a:xfrm>
+      </p:grpSpPr>
+      <p:sp>
+        <p:nvSpPr>
+          <p:cNvPr id="2" name="Slide Image Placeholder 1"/>
+          <p:cNvSpPr>
+            <a:spLocks noGrp="1"/>
+          </p:cNvSpPr>
+          <p:nvPr>
+            <p:ph type="sldImg" idx="2"/>
+          </p:nvPr>
+        </p:nvSpPr>
+        <p:spPr/>
+      </p:sp>
+      <p:sp>
+        <p:nvSpPr>
+          <p:cNvPr id="3" name="Notes Placeholder 2"/>
+          <p:cNvSpPr>
+            <a:spLocks noGrp="1"/>
+          </p:cNvSpPr>
+          <p:nvPr>
+            <p:ph type="body" idx="3" sz="quarter"/>
+          </p:nvPr>
+        </p:nvSpPr>
+        <p:spPr/>
+        <p:txBody>
+          <a:bodyPr/>
+          <a:lstStyle/>
+          <a:p>
+            <a:r>
+              <a:t>Apply the method to the actual system — walk the Ledgerline baseline off the diagram so students can</a:t>
+            </a:r>
+          </a:p>
+          <a:p>
+            <a:r>
+              <a:t>SEE the single-AZ topology they'll evaluate next.</a:t>
+            </a:r>
+          </a:p>
+          <a:p>
+            <a:r>
+              <a:t>• First bullet: identify and review the current architecture — a VPC, ONE Availability Zone, an app</a:t>
+            </a:r>
+          </a:p>
+          <a:p>
+            <a:r>
+              <a:t>tier and a single RDS database. Point to each on the diagram.</a:t>
+            </a:r>
+          </a:p>
+          <a:p>
+            <a:r>
+              <a:t>• Second bullet: read the topology top-down — network → compute → database → storage — noting how each</a:t>
+            </a:r>
+          </a:p>
+          <a:p>
+            <a:r>
+              <a:t>resource is deployed today. Model the reading order; it's the same order they'll design in.</a:t>
+            </a:r>
+          </a:p>
+          <a:p>
+            <a:r>
+              <a:t>• Third bullet: cloud adoption reshapes the IT system — managed services, elasticity and shared</a:t>
+            </a:r>
+          </a:p>
+          <a:p>
+            <a:r>
+              <a:t>responsibility change how you run and improve it (KE 3). This is why "review" here isn't the same as</a:t>
+            </a:r>
+          </a:p>
+          <a:p>
+            <a:r>
+              <a:t>reviewing an on-prem box.</a:t>
+            </a:r>
+          </a:p>
+          <a:p>
+            <a:r>
+              <a:t>Misconception to pre-empt: "single-AZ just means one server." No — it means every tier shares one</a:t>
+            </a:r>
+          </a:p>
+          <a:p>
+            <a:r>
+              <a:t>failure domain; the whole VPC's resources sit in one AZ, so one AZ outage takes it all down.</a:t>
+            </a:r>
+          </a:p>
+          <a:p>
+            <a:r>
+              <a:t>Question to pose: "Trace the request path on the diagram — where is the single point of failure?"</a:t>
+            </a:r>
+          </a:p>
+          <a:p>
+            <a:r>
+              <a:t>(the one AZ; every tier lives in it).</a:t>
+            </a:r>
+          </a:p>
+          <a:p>
+            <a:r>
+              <a:t>UoC/AT1 tie: ICTCLD504 PC 1.1 (identify &amp; review the architecture) + KE 3 → AT1 Solution Design</a:t>
+            </a:r>
+          </a:p>
+          <a:p>
+            <a:r>
+              <a:t>baseline section.</a:t>
+            </a:r>
+          </a:p>
+        </p:txBody>
+      </p:sp>
+      <p:sp>
+        <p:nvSpPr>
+          <p:cNvPr id="4" name="Slide Number Placeholder 3"/>
+          <p:cNvSpPr>
+            <a:spLocks noGrp="1"/>
+          </p:cNvSpPr>
+          <p:nvPr>
+            <p:ph type="sldNum" idx="5" sz="quarter"/>
+          </p:nvPr>
+        </p:nvSpPr>
+        <p:spPr/>
+      </p:sp>
+    </p:spTree>
+  </p:cSld>
+  <p:clrMapOvr>
+    <a:masterClrMapping/>
+  </p:clrMapOvr>
+</p:notes>
+</file>
+
+<file path=ppt/notesSlides/notesSlide4.xml><?xml version="1.0" encoding="utf-8"?>
+<p:notes xmlns:a="http://schemas.openxmlformats.org/drawingml/2006/main" xmlns:p="http://schemas.openxmlformats.org/presentationml/2006/main" xmlns:r="http://schemas.openxmlformats.org/officeDocument/2006/relationships">
+  <p:cSld>
+    <p:spTree>
+      <p:nvGrpSpPr>
+        <p:cNvPr id="1" name=""/>
+        <p:cNvGrpSpPr/>
+        <p:nvPr/>
+      </p:nvGrpSpPr>
+      <p:grpSpPr>
+        <a:xfrm>
+          <a:off x="0" y="0"/>
+          <a:ext cx="0" cy="0"/>
+          <a:chOff x="0" y="0"/>
+          <a:chExt cx="0" cy="0"/>
+        </a:xfrm>
+      </p:grpSpPr>
+      <p:sp>
+        <p:nvSpPr>
+          <p:cNvPr id="2" name="Slide Image Placeholder 1"/>
+          <p:cNvSpPr>
+            <a:spLocks noGrp="1"/>
+          </p:cNvSpPr>
+          <p:nvPr>
+            <p:ph type="sldImg" idx="2"/>
+          </p:nvPr>
+        </p:nvSpPr>
+        <p:spPr/>
+      </p:sp>
+      <p:sp>
+        <p:nvSpPr>
+          <p:cNvPr id="3" name="Notes Placeholder 2"/>
+          <p:cNvSpPr>
+            <a:spLocks noGrp="1"/>
+          </p:cNvSpPr>
+          <p:nvPr>
+            <p:ph type="body" idx="3" sz="quarter"/>
+          </p:nvPr>
+        </p:nvSpPr>
+        <p:spPr/>
+        <p:txBody>
+          <a:bodyPr/>
+          <a:lstStyle/>
+          <a:p>
+            <a:r>
+              <a:t>The evaluation slide — teach students to state impact in BUSINESS terms, and plant the constraint that</a:t>
+            </a:r>
+          </a:p>
+          <a:p>
+            <a:r>
+              <a:t>drives the whole cluster. This is the analytical heart of Section 1.</a:t>
+            </a:r>
+          </a:p>
+          <a:p>
+            <a:r>
+              <a:t>• First bullet: evaluate the baseline and name the business impact of its design decisions — single-AZ</a:t>
+            </a:r>
+          </a:p>
+          <a:p>
+            <a:r>
+              <a:t>means single points of failure; one AZ outage takes Accounting down.</a:t>
+            </a:r>
+          </a:p>
+          <a:p>
+            <a:r>
+              <a:t>• Second bullet (plant it deliberately): the accounting product is vendor-certified single-instance</a:t>
+            </a:r>
+          </a:p>
+          <a:p>
+            <a:r>
+              <a:t>only, so the database CANNOT go Multi-AZ. Have them write it down now — it is the reliability</a:t>
+            </a:r>
+          </a:p>
+          <a:p>
+            <a:r>
+              <a:t>cost-benefit centrepiece in Topic 2.</a:t>
+            </a:r>
+          </a:p>
+          <a:p>
+            <a:r>
+              <a:t>• Third bullet: impact is a BUSINESS statement, not a technical one — downtime, lost billing, risk to</a:t>
+            </a:r>
+          </a:p>
+          <a:p>
+            <a:r>
+              <a:t>close-of-month. That's the language the goals in C3 will answer.</a:t>
+            </a:r>
+          </a:p>
+          <a:p>
+            <a:r>
+              <a:t>Misconception to pre-empt: "the impact is 'the server goes down'." No — that's the technical event; the</a:t>
+            </a:r>
+          </a:p>
+          <a:p>
+            <a:r>
+              <a:t>business impact is what it COSTS (billing halts, month-end close at risk). Push them from event to cost.</a:t>
+            </a:r>
+          </a:p>
+          <a:p>
+            <a:r>
+              <a:t>Question to pose: "If the single AZ fails during end-of-month close, what does that cost YAT — in</a:t>
+            </a:r>
+          </a:p>
+          <a:p>
+            <a:r>
+              <a:t>business terms?" (draws out the impact language the goals answer).</a:t>
+            </a:r>
+          </a:p>
+          <a:p>
+            <a:r>
+              <a:t>UoC/AT1 tie: ICTCLD504 PC 1.2 (evaluate architecture &amp; identify business impact of design decisions) →</a:t>
+            </a:r>
+          </a:p>
+          <a:p>
+            <a:r>
+              <a:t>AT1 Solution Design baseline analysis.</a:t>
+            </a:r>
+          </a:p>
+        </p:txBody>
+      </p:sp>
+      <p:sp>
+        <p:nvSpPr>
+          <p:cNvPr id="4" name="Slide Number Placeholder 3"/>
+          <p:cNvSpPr>
+            <a:spLocks noGrp="1"/>
+          </p:cNvSpPr>
+          <p:nvPr>
+            <p:ph type="sldNum" idx="5" sz="quarter"/>
+          </p:nvPr>
+        </p:nvSpPr>
+        <p:spPr/>
+      </p:sp>
+    </p:spTree>
+  </p:cSld>
+  <p:clrMapOvr>
+    <a:masterClrMapping/>
+  </p:clrMapOvr>
+</p:notes>
+</file>
+
+<file path=ppt/notesSlides/notesSlide5.xml><?xml version="1.0" encoding="utf-8"?>
+<p:notes xmlns:a="http://schemas.openxmlformats.org/drawingml/2006/main" xmlns:p="http://schemas.openxmlformats.org/presentationml/2006/main" xmlns:r="http://schemas.openxmlformats.org/officeDocument/2006/relationships">
+  <p:cSld>
+    <p:spTree>
+      <p:nvGrpSpPr>
+        <p:cNvPr id="1" name=""/>
+        <p:cNvGrpSpPr/>
+        <p:nvPr/>
+      </p:nvGrpSpPr>
+      <p:grpSpPr>
+        <a:xfrm>
+          <a:off x="0" y="0"/>
+          <a:ext cx="0" cy="0"/>
+          <a:chOff x="0" y="0"/>
+          <a:chExt cx="0" cy="0"/>
+        </a:xfrm>
+      </p:grpSpPr>
+      <p:sp>
+        <p:nvSpPr>
+          <p:cNvPr id="2" name="Slide Image Placeholder 1"/>
+          <p:cNvSpPr>
+            <a:spLocks noGrp="1"/>
+          </p:cNvSpPr>
+          <p:nvPr>
+            <p:ph type="sldImg" idx="2"/>
+          </p:nvPr>
+        </p:nvSpPr>
+        <p:spPr/>
+      </p:sp>
+      <p:sp>
+        <p:nvSpPr>
+          <p:cNvPr id="3" name="Notes Placeholder 2"/>
+          <p:cNvSpPr>
+            <a:spLocks noGrp="1"/>
+          </p:cNvSpPr>
+          <p:nvPr>
+            <p:ph type="body" idx="3" sz="quarter"/>
+          </p:nvPr>
+        </p:nvSpPr>
+        <p:spPr/>
+        <p:txBody>
+          <a:bodyPr/>
+          <a:lstStyle/>
+          <a:p>
+            <a:r>
+              <a:t>Facilitation — the Section 1 practice; students run the SAME baseline review on the practice</a:t>
+            </a:r>
+          </a:p>
+          <a:p>
+            <a:r>
+              <a:t>engagement (the website) before doing it on Ledgerline for the assessment.</a:t>
+            </a:r>
+          </a:p>
+          <a:p>
+            <a:r>
+              <a:t>Tell students: "On the practice engagement — the website — identify and review its current</a:t>
+            </a:r>
+          </a:p>
+          <a:p>
+            <a:r>
+              <a:t>architecture the same way we just read Ledgerline. Evaluate it and name the business impact of its</a:t>
+            </a:r>
+          </a:p>
+          <a:p>
+            <a:r>
+              <a:t>design decisions."</a:t>
+            </a:r>
+          </a:p>
+          <a:p>
+            <a:r>
+              <a:t>Steps (put on the board):</a:t>
+            </a:r>
+          </a:p>
+          <a:p>
+            <a:r>
+              <a:t>1. Read the practice architecture top-down — network, compute, database, storage.</a:t>
+            </a:r>
+          </a:p>
+          <a:p>
+            <a:r>
+              <a:t>2. Note how each tier is deployed today and where a single failure or bottleneck sits.</a:t>
+            </a:r>
+          </a:p>
+          <a:p>
+            <a:r>
+              <a:t>3. For each weak point, write the BUSINESS impact — where would an outage or a bottleneck hurt the</a:t>
+            </a:r>
+          </a:p>
+          <a:p>
+            <a:r>
+              <a:t>business?</a:t>
+            </a:r>
+          </a:p>
+          <a:p>
+            <a:r>
+              <a:t>Must produce: a short written review of the practice baseline with at least two business-impact</a:t>
+            </a:r>
+          </a:p>
+          <a:p>
+            <a:r>
+              <a:t>statements (not technical events).</a:t>
+            </a:r>
+          </a:p>
+          <a:p>
+            <a:r>
+              <a:t>Timing: ~25 min then discuss. Where they get stuck: they list resources without evaluating them —</a:t>
+            </a:r>
+          </a:p>
+          <a:p>
+            <a:r>
+              <a:t>circulate and push "so what does that cost the business?"; also watch for technical-only impacts.</a:t>
+            </a:r>
+          </a:p>
+          <a:p>
+            <a:r>
+              <a:t>Share-back prompt: take one student's biggest business impact and ask the room whether it's stated in</a:t>
+            </a:r>
+          </a:p>
+          <a:p>
+            <a:r>
+              <a:t>business or technical language.</a:t>
+            </a:r>
+          </a:p>
+          <a:p>
+            <a:r>
+              <a:t>No-leakage note: the website is the PRACTICE vehicle — AT1 assesses this same review skill on</a:t>
+            </a:r>
+          </a:p>
+          <a:p>
+            <a:r>
+              <a:t>Ledgerline (comparable, not identical); keep them on the practice engagement here.</a:t>
+            </a:r>
+          </a:p>
+        </p:txBody>
+      </p:sp>
+      <p:sp>
+        <p:nvSpPr>
+          <p:cNvPr id="4" name="Slide Number Placeholder 3"/>
+          <p:cNvSpPr>
+            <a:spLocks noGrp="1"/>
+          </p:cNvSpPr>
+          <p:nvPr>
+            <p:ph type="sldNum" idx="5" sz="quarter"/>
+          </p:nvPr>
+        </p:nvSpPr>
+        <p:spPr/>
+      </p:sp>
+    </p:spTree>
+  </p:cSld>
+  <p:clrMapOvr>
+    <a:masterClrMapping/>
+  </p:clrMapOvr>
+</p:notes>
+</file>
+
+<file path=ppt/notesSlides/notesSlide6.xml><?xml version="1.0" encoding="utf-8"?>
+<p:notes xmlns:a="http://schemas.openxmlformats.org/drawingml/2006/main" xmlns:p="http://schemas.openxmlformats.org/presentationml/2006/main" xmlns:r="http://schemas.openxmlformats.org/officeDocument/2006/relationships">
+  <p:cSld>
+    <p:spTree>
+      <p:nvGrpSpPr>
+        <p:cNvPr id="1" name=""/>
+        <p:cNvGrpSpPr/>
+        <p:nvPr/>
+      </p:nvGrpSpPr>
+      <p:grpSpPr>
+        <a:xfrm>
+          <a:off x="0" y="0"/>
+          <a:ext cx="0" cy="0"/>
+          <a:chOff x="0" y="0"/>
+          <a:chExt cx="0" cy="0"/>
+        </a:xfrm>
+      </p:grpSpPr>
+      <p:sp>
+        <p:nvSpPr>
+          <p:cNvPr id="2" name="Slide Image Placeholder 1"/>
+          <p:cNvSpPr>
+            <a:spLocks noGrp="1"/>
+          </p:cNvSpPr>
+          <p:nvPr>
+            <p:ph type="sldImg" idx="2"/>
+          </p:nvPr>
+        </p:nvSpPr>
+        <p:spPr/>
+      </p:sp>
+      <p:sp>
+        <p:nvSpPr>
+          <p:cNvPr id="3" name="Notes Placeholder 2"/>
+          <p:cNvSpPr>
+            <a:spLocks noGrp="1"/>
+          </p:cNvSpPr>
+          <p:nvPr>
+            <p:ph type="body" idx="3" sz="quarter"/>
+          </p:nvPr>
+        </p:nvSpPr>
+        <p:spPr/>
+        <p:txBody>
+          <a:bodyPr/>
+          <a:lstStyle/>
+          <a:p>
+            <a:r>
+              <a:t>Open Section 2 with the OPTION SPACE — the patterns a cloud architecture can use — kept deliberately</a:t>
+            </a:r>
+          </a:p>
+          <a:p>
+            <a:r>
+              <a:t>abstract so the next slide can narrow them to Ledgerline. A menu, not a decision.</a:t>
+            </a:r>
+          </a:p>
+          <a:p>
+            <a:r>
+              <a:t>• First bullet: name the options — Multi-AZ redundancy, horizontal scaling + load balancing, managed</a:t>
+            </a:r>
+          </a:p>
+          <a:p>
+            <a:r>
+              <a:t>vs self-run data tiers, caching, decoupling. Give each a one-line "what it buys."</a:t>
+            </a:r>
+          </a:p>
+          <a:p>
+            <a:r>
+              <a:t>• Second bullet (the framing): each option is a pattern with a COST and a BENEFIT — there is no single</a:t>
+            </a:r>
+          </a:p>
+          <a:p>
+            <a:r>
+              <a:t>right answer, only a fit to the business. This is the mindset the whole cluster runs on.</a:t>
+            </a:r>
+          </a:p>
+          <a:p>
+            <a:r>
+              <a:t>• Third bullet: the four improvement concerns you weigh options against — security, reliability,</a:t>
+            </a:r>
+          </a:p>
+          <a:p>
+            <a:r>
+              <a:t>scalability, cost.</a:t>
+            </a:r>
+          </a:p>
+          <a:p>
+            <a:r>
+              <a:t>Misconception to pre-empt: "more redundancy / more scaling is always better." No — every option costs;</a:t>
+            </a:r>
+          </a:p>
+          <a:p>
+            <a:r>
+              <a:t>the skill is fit, not maximising. Gold-plating loses marks.</a:t>
+            </a:r>
+          </a:p>
+          <a:p>
+            <a:r>
+              <a:t>Question to pose: "Multi-AZ improves reliability — so should every system have it?" (No — only where the</a:t>
+            </a:r>
+          </a:p>
+          <a:p>
+            <a:r>
+              <a:t>reliability benefit justifies the cost; sets up the Ledgerline DB call in Topic 2).</a:t>
+            </a:r>
+          </a:p>
+          <a:p>
+            <a:r>
+              <a:t>UoC/AT1 tie: ICTCLD504 PC 1.3 (identify design patterns &amp; architectural options) → AT1 Solution Design</a:t>
+            </a:r>
+          </a:p>
+          <a:p>
+            <a:r>
+              <a:t>options analysis.</a:t>
+            </a:r>
+          </a:p>
+        </p:txBody>
+      </p:sp>
+      <p:sp>
+        <p:nvSpPr>
+          <p:cNvPr id="4" name="Slide Number Placeholder 3"/>
+          <p:cNvSpPr>
+            <a:spLocks noGrp="1"/>
+          </p:cNvSpPr>
+          <p:nvPr>
+            <p:ph type="sldNum" idx="5" sz="quarter"/>
+          </p:nvPr>
+        </p:nvSpPr>
+        <p:spPr/>
+      </p:sp>
+    </p:spTree>
+  </p:cSld>
+  <p:clrMapOvr>
+    <a:masterClrMapping/>
+  </p:clrMapOvr>
+</p:notes>
+</file>
+
+<file path=ppt/notesSlides/notesSlide7.xml><?xml version="1.0" encoding="utf-8"?>
+<p:notes xmlns:a="http://schemas.openxmlformats.org/drawingml/2006/main" xmlns:p="http://schemas.openxmlformats.org/presentationml/2006/main" xmlns:r="http://schemas.openxmlformats.org/officeDocument/2006/relationships">
+  <p:cSld>
+    <p:spTree>
+      <p:nvGrpSpPr>
+        <p:cNvPr id="1" name=""/>
+        <p:cNvGrpSpPr/>
+        <p:nvPr/>
+      </p:nvGrpSpPr>
+      <p:grpSpPr>
+        <a:xfrm>
+          <a:off x="0" y="0"/>
+          <a:ext cx="0" cy="0"/>
+          <a:chOff x="0" y="0"/>
+          <a:chExt cx="0" cy="0"/>
+        </a:xfrm>
+      </p:grpSpPr>
+      <p:sp>
+        <p:nvSpPr>
+          <p:cNvPr id="2" name="Slide Image Placeholder 1"/>
+          <p:cNvSpPr>
+            <a:spLocks noGrp="1"/>
+          </p:cNvSpPr>
+          <p:nvPr>
+            <p:ph type="sldImg" idx="2"/>
+          </p:nvPr>
+        </p:nvSpPr>
+        <p:spPr/>
+      </p:sp>
+      <p:sp>
+        <p:nvSpPr>
+          <p:cNvPr id="3" name="Notes Placeholder 2"/>
+          <p:cNvSpPr>
+            <a:spLocks noGrp="1"/>
+          </p:cNvSpPr>
+          <p:nvPr>
+            <p:ph type="body" idx="3" sz="quarter"/>
+          </p:nvPr>
+        </p:nvSpPr>
+        <p:spPr/>
+        <p:txBody>
+          <a:bodyPr/>
+          <a:lstStyle/>
+          <a:p>
+            <a:r>
+              <a:t>Narrow the menu to Ledgerline — teach students to assess options AGAINST a specific business model,</a:t>
+            </a:r>
+          </a:p>
+          <a:p>
+            <a:r>
+              <a:t>then commit to a shortlist. This is where analysis becomes decisions.</a:t>
+            </a:r>
+          </a:p>
+          <a:p>
+            <a:r>
+              <a:t>• First bullet: determine and assess the benefits and differences of the options against Ledgerline's</a:t>
+            </a:r>
+          </a:p>
+          <a:p>
+            <a:r>
+              <a:t>CURRENT business model and needs — not in the abstract. The same option can be right for one business</a:t>
+            </a:r>
+          </a:p>
+          <a:p>
+            <a:r>
+              <a:t>and wrong for another.</a:t>
+            </a:r>
+          </a:p>
+          <a:p>
+            <a:r>
+              <a:t>• Second bullet: the single-instance-DB constraint (from C1) rules some reliability options out — which</a:t>
+            </a:r>
+          </a:p>
+          <a:p>
+            <a:r>
+              <a:t>actually SHARPENS the ones that remain. A constraint is analytical signal, not just a limitation.</a:t>
+            </a:r>
+          </a:p>
+          <a:p>
+            <a:r>
+              <a:t>• Third bullet: confirm the system design decisions to carry forward according to business needs — the</a:t>
+            </a:r>
+          </a:p>
+          <a:p>
+            <a:r>
+              <a:t>shortlist Topics 2–3 will actually design.</a:t>
+            </a:r>
+          </a:p>
+          <a:p>
+            <a:r>
+              <a:t>Misconception to pre-empt: "assess = describe each option." No — assess means judge FIT and pick; they</a:t>
+            </a:r>
+          </a:p>
+          <a:p>
+            <a:r>
+              <a:t>must end with confirmed decisions, not a balanced-sounding list.</a:t>
+            </a:r>
+          </a:p>
+          <a:p>
+            <a:r>
+              <a:t>Question to pose: "The single-instance DB rules out a Multi-AZ database — does that make the analysis</a:t>
+            </a:r>
+          </a:p>
+          <a:p>
+            <a:r>
+              <a:t>harder or easier?" (easier — it removes an option, so you argue the remaining ones).</a:t>
+            </a:r>
+          </a:p>
+          <a:p>
+            <a:r>
+              <a:t>UoC/AT1 tie: ICTCLD504 PC 1.4 (assess options against the business model) + PC 1.5 (confirm design</a:t>
+            </a:r>
+          </a:p>
+          <a:p>
+            <a:r>
+              <a:t>decisions) → AT1 Solution Design options + decisions.</a:t>
+            </a:r>
+          </a:p>
+        </p:txBody>
+      </p:sp>
+      <p:sp>
+        <p:nvSpPr>
+          <p:cNvPr id="4" name="Slide Number Placeholder 3"/>
+          <p:cNvSpPr>
+            <a:spLocks noGrp="1"/>
+          </p:cNvSpPr>
+          <p:nvPr>
+            <p:ph type="sldNum" idx="5" sz="quarter"/>
+          </p:nvPr>
+        </p:nvSpPr>
+        <p:spPr/>
+      </p:sp>
+    </p:spTree>
+  </p:cSld>
+  <p:clrMapOvr>
+    <a:masterClrMapping/>
+  </p:clrMapOvr>
+</p:notes>
+</file>
+
+<file path=ppt/notesSlides/notesSlide8.xml><?xml version="1.0" encoding="utf-8"?>
+<p:notes xmlns:a="http://schemas.openxmlformats.org/drawingml/2006/main" xmlns:p="http://schemas.openxmlformats.org/presentationml/2006/main" xmlns:r="http://schemas.openxmlformats.org/officeDocument/2006/relationships">
+  <p:cSld>
+    <p:spTree>
+      <p:nvGrpSpPr>
+        <p:cNvPr id="1" name=""/>
+        <p:cNvGrpSpPr/>
+        <p:nvPr/>
+      </p:nvGrpSpPr>
+      <p:grpSpPr>
+        <a:xfrm>
+          <a:off x="0" y="0"/>
+          <a:ext cx="0" cy="0"/>
+          <a:chOff x="0" y="0"/>
+          <a:chExt cx="0" cy="0"/>
+        </a:xfrm>
+      </p:grpSpPr>
+      <p:sp>
+        <p:nvSpPr>
+          <p:cNvPr id="2" name="Slide Image Placeholder 1"/>
+          <p:cNvSpPr>
+            <a:spLocks noGrp="1"/>
+          </p:cNvSpPr>
+          <p:nvPr>
+            <p:ph type="sldImg" idx="2"/>
+          </p:nvPr>
+        </p:nvSpPr>
+        <p:spPr/>
+      </p:sp>
+      <p:sp>
+        <p:nvSpPr>
+          <p:cNvPr id="3" name="Notes Placeholder 2"/>
+          <p:cNvSpPr>
+            <a:spLocks noGrp="1"/>
+          </p:cNvSpPr>
+          <p:nvPr>
+            <p:ph type="body" idx="3" sz="quarter"/>
+          </p:nvPr>
+        </p:nvSpPr>
+        <p:spPr/>
+        <p:txBody>
+          <a:bodyPr/>
+          <a:lstStyle/>
+          <a:p>
+            <a:r>
+              <a:t>Facilitation — the Section 2 practice; students list and assess options for the practice engagement,</a:t>
+            </a:r>
+          </a:p>
+          <a:p>
+            <a:r>
+              <a:t>then commit to decisions — mirroring the Ledgerline options work.</a:t>
+            </a:r>
+          </a:p>
+          <a:p>
+            <a:r>
+              <a:t>Tell students: "For the practice engagement, list the architectural options open to it and assess each</a:t>
+            </a:r>
+          </a:p>
+          <a:p>
+            <a:r>
+              <a:t>against its business model and needs. Then confirm which decisions you'd carry forward — and note what</a:t>
+            </a:r>
+          </a:p>
+          <a:p>
+            <a:r>
+              <a:t>you rule out, and why."</a:t>
+            </a:r>
+          </a:p>
+          <a:p>
+            <a:r>
+              <a:t>Steps (put on the board):</a:t>
+            </a:r>
+          </a:p>
+          <a:p>
+            <a:r>
+              <a:t>1. List the options open to the practice architecture (redundancy, scaling, managed vs self-run,</a:t>
+            </a:r>
+          </a:p>
+          <a:p>
+            <a:r>
+              <a:t>caching, decoupling).</a:t>
+            </a:r>
+          </a:p>
+          <a:p>
+            <a:r>
+              <a:t>2. Assess each against the practice engagement's business model and needs — cost vs benefit, fit not</a:t>
+            </a:r>
+          </a:p>
+          <a:p>
+            <a:r>
+              <a:t>maximum.</a:t>
+            </a:r>
+          </a:p>
+          <a:p>
+            <a:r>
+              <a:t>3. Confirm the decisions worth carrying forward; record the ones you RULE OUT and the reason.</a:t>
+            </a:r>
+          </a:p>
+          <a:p>
+            <a:r>
+              <a:t>Must produce: a shortlist of confirmed design decisions plus a short "ruled out, because…" list.</a:t>
+            </a:r>
+          </a:p>
+          <a:p>
+            <a:r>
+              <a:t>Timing: ~25 min then discuss. Where they get stuck: they keep every option "just in case" — push them</a:t>
+            </a:r>
+          </a:p>
+          <a:p>
+            <a:r>
+              <a:t>to commit and to justify a rejection (rejecting an option with a reason is a marked skill).</a:t>
+            </a:r>
+          </a:p>
+          <a:p>
+            <a:r>
+              <a:t>Share-back prompt: ask one student for an option they RULED OUT and why — the reasoning is the skill.</a:t>
+            </a:r>
+          </a:p>
+          <a:p>
+            <a:r>
+              <a:t>No-leakage note: the website is the practice vehicle; AT1 assesses the same options-and-decisions skill</a:t>
+            </a:r>
+          </a:p>
+          <a:p>
+            <a:r>
+              <a:t>on Ledgerline — comparable, not identical.</a:t>
+            </a:r>
+          </a:p>
+        </p:txBody>
+      </p:sp>
+      <p:sp>
+        <p:nvSpPr>
+          <p:cNvPr id="4" name="Slide Number Placeholder 3"/>
+          <p:cNvSpPr>
+            <a:spLocks noGrp="1"/>
+          </p:cNvSpPr>
+          <p:nvPr>
+            <p:ph type="sldNum" idx="5" sz="quarter"/>
+          </p:nvPr>
+        </p:nvSpPr>
+        <p:spPr/>
+      </p:sp>
+    </p:spTree>
+  </p:cSld>
+  <p:clrMapOvr>
+    <a:masterClrMapping/>
+  </p:clrMapOvr>
+</p:notes>
+</file>
+
+<file path=ppt/notesSlides/notesSlide9.xml><?xml version="1.0" encoding="utf-8"?>
+<p:notes xmlns:a="http://schemas.openxmlformats.org/drawingml/2006/main" xmlns:p="http://schemas.openxmlformats.org/presentationml/2006/main" xmlns:r="http://schemas.openxmlformats.org/officeDocument/2006/relationships">
+  <p:cSld>
+    <p:spTree>
+      <p:nvGrpSpPr>
+        <p:cNvPr id="1" name=""/>
+        <p:cNvGrpSpPr/>
+        <p:nvPr/>
+      </p:nvGrpSpPr>
+      <p:grpSpPr>
+        <a:xfrm>
+          <a:off x="0" y="0"/>
+          <a:ext cx="0" cy="0"/>
+          <a:chOff x="0" y="0"/>
+          <a:chExt cx="0" cy="0"/>
+        </a:xfrm>
+      </p:grpSpPr>
+      <p:sp>
+        <p:nvSpPr>
+          <p:cNvPr id="2" name="Slide Image Placeholder 1"/>
+          <p:cNvSpPr>
+            <a:spLocks noGrp="1"/>
+          </p:cNvSpPr>
+          <p:nvPr>
+            <p:ph type="sldImg" idx="2"/>
+          </p:nvPr>
+        </p:nvSpPr>
+        <p:spPr/>
+      </p:sp>
+      <p:sp>
+        <p:nvSpPr>
+          <p:cNvPr id="3" name="Notes Placeholder 2"/>
+          <p:cNvSpPr>
+            <a:spLocks noGrp="1"/>
+          </p:cNvSpPr>
+          <p:nvPr>
+            <p:ph type="body" idx="3" sz="quarter"/>
+          </p:nvPr>
+        </p:nvSpPr>
+        <p:spPr/>
+        <p:txBody>
+          <a:bodyPr/>
+          <a:lstStyle/>
+          <a:p>
+            <a:r>
+              <a:t>Open Section 3 by teaching what a GOAL is versus a METRIC — the yardstick discipline the whole</a:t>
+            </a:r>
+          </a:p>
+          <a:p>
+            <a:r>
+              <a:t>improvement is later measured against.</a:t>
+            </a:r>
+          </a:p>
+          <a:p>
+            <a:r>
+              <a:t>• First bullet: set business goals across the four well-architected concerns — security, reliability,</a:t>
+            </a:r>
+          </a:p>
+          <a:p>
+            <a:r>
+              <a:t>high-performance and cost efficiency (PC 1.6, PE 3).</a:t>
+            </a:r>
+          </a:p>
+          <a:p>
+            <a:r>
+              <a:t>• Second bullet: a goal is directional and business-owned ("survive an AZ failure without data loss");</a:t>
+            </a:r>
+          </a:p>
+          <a:p>
+            <a:r>
+              <a:t>a METRIC makes it measurable (availability %, RTO/RPO). Say both words; students blur them.</a:t>
+            </a:r>
+          </a:p>
+          <a:p>
+            <a:r>
+              <a:t>• Third bullet: goals come from business REQUIREMENTS and needs — not from the technology you happen to</a:t>
+            </a:r>
+          </a:p>
+          <a:p>
+            <a:r>
+              <a:t>like. Technology-led goals are the classic trap.</a:t>
+            </a:r>
+          </a:p>
+          <a:p>
+            <a:r>
+              <a:t>Misconception to pre-empt: "the goal is 'use Multi-AZ'." No — that's a solution masquerading as a goal;</a:t>
+            </a:r>
+          </a:p>
+          <a:p>
+            <a:r>
+              <a:t>the goal is the business outcome ("survive an AZ failure"), and the solution is chosen to meet it.</a:t>
+            </a:r>
+          </a:p>
+          <a:p>
+            <a:r>
+              <a:t>Question to pose: "'Go Multi-AZ' — is that a goal or a solution? What's the goal underneath it?"</a:t>
+            </a:r>
+          </a:p>
+          <a:p>
+            <a:r>
+              <a:t>(survive an AZ failure without data loss — the outcome the solution serves).</a:t>
+            </a:r>
+          </a:p>
+          <a:p>
+            <a:r>
+              <a:t>UoC/AT1 tie: ICTCLD504 PC 1.6 + PE 3 (set business goals across the four concerns) → AT1 Solution</a:t>
+            </a:r>
+          </a:p>
+          <a:p>
+            <a:r>
+              <a:t>Design goals section.</a:t>
+            </a:r>
+          </a:p>
+        </p:txBody>
+      </p:sp>
+      <p:sp>
+        <p:nvSpPr>
+          <p:cNvPr id="4" name="Slide Number Placeholder 3"/>
+          <p:cNvSpPr>
+            <a:spLocks noGrp="1"/>
+          </p:cNvSpPr>
+          <p:nvPr>
+            <p:ph type="sldNum" idx="5" sz="quarter"/>
+          </p:nvPr>
+        </p:nvSpPr>
+        <p:spPr/>
+      </p:sp>
+    </p:spTree>
+  </p:cSld>
+  <p:clrMapOvr>
+    <a:masterClrMapping/>
+  </p:clrMapOvr>
+</p:notes>
 </file>
 
 <file path=ppt/slideLayouts/slideLayout1.xml><?xml version="1.0" encoding="utf-8"?>
@@ -9514,4 +11434,324 @@
   </a:objectDefaults>
   <a:extraClrSchemeLst/>
 </a:theme>
+</file>
+
+<file path=ppt/theme/theme2.xml><?xml version="1.0" encoding="utf-8"?>
+<a:theme xmlns:a="http://schemas.openxmlformats.org/drawingml/2006/main" name="Office Theme">
+  <a:themeElements>
+    <a:clrScheme name="Office">
+      <a:dk1>
+        <a:sysClr val="windowText" lastClr="000000"/>
+      </a:dk1>
+      <a:lt1>
+        <a:sysClr val="window" lastClr="FFFFFF"/>
+      </a:lt1>
+      <a:dk2>
+        <a:srgbClr val="1F497D"/>
+      </a:dk2>
+      <a:lt2>
+        <a:srgbClr val="EEECE1"/>
+      </a:lt2>
+      <a:accent1>
+        <a:srgbClr val="4F81BD"/>
+      </a:accent1>
+      <a:accent2>
+        <a:srgbClr val="C0504D"/>
+      </a:accent2>
+      <a:accent3>
+        <a:srgbClr val="9BBB59"/>
+      </a:accent3>
+      <a:accent4>
+        <a:srgbClr val="8064A2"/>
+      </a:accent4>
+      <a:accent5>
+        <a:srgbClr val="4BACC6"/>
+      </a:accent5>
+      <a:accent6>
+        <a:srgbClr val="F79646"/>
+      </a:accent6>
+      <a:hlink>
+        <a:srgbClr val="0000FF"/>
+      </a:hlink>
+      <a:folHlink>
+        <a:srgbClr val="800080"/>
+      </a:folHlink>
+    </a:clrScheme>
+    <a:fontScheme name="Office">
+      <a:majorFont>
+        <a:latin typeface="Calibri"/>
+        <a:ea typeface=""/>
+        <a:cs typeface=""/>
+        <a:font script="Jpan" typeface="ＭＳ Ｐゴシック"/>
+        <a:font script="Hang" typeface="맑은 고딕"/>
+        <a:font script="Hans" typeface="宋体"/>
+        <a:font script="Hant" typeface="新細明體"/>
+        <a:font script="Arab" typeface="Times New Roman"/>
+        <a:font script="Hebr" typeface="Times New Roman"/>
+        <a:font script="Thai" typeface="Angsana New"/>
+        <a:font script="Ethi" typeface="Nyala"/>
+        <a:font script="Beng" typeface="Vrinda"/>
+        <a:font script="Gujr" typeface="Shruti"/>
+        <a:font script="Khmr" typeface="MoolBoran"/>
+        <a:font script="Knda" typeface="Tunga"/>
+        <a:font script="Guru" typeface="Raavi"/>
+        <a:font script="Cans" typeface="Euphemia"/>
+        <a:font script="Cher" typeface="Plantagenet Cherokee"/>
+        <a:font script="Yiii" typeface="Microsoft Yi Baiti"/>
+        <a:font script="Tibt" typeface="Microsoft Himalaya"/>
+        <a:font script="Thaa" typeface="MV Boli"/>
+        <a:font script="Deva" typeface="Mangal"/>
+        <a:font script="Telu" typeface="Gautami"/>
+        <a:font script="Taml" typeface="Latha"/>
+        <a:font script="Syrc" typeface="Estrangelo Edessa"/>
+        <a:font script="Orya" typeface="Kalinga"/>
+        <a:font script="Mlym" typeface="Kartika"/>
+        <a:font script="Laoo" typeface="DokChampa"/>
+        <a:font script="Sinh" typeface="Iskoola Pota"/>
+        <a:font script="Mong" typeface="Mongolian Baiti"/>
+        <a:font script="Viet" typeface="Times New Roman"/>
+        <a:font script="Uigh" typeface="Microsoft Uighur"/>
+        <a:font script="Geor" typeface="Sylfaen"/>
+      </a:majorFont>
+      <a:minorFont>
+        <a:latin typeface="Calibri"/>
+        <a:ea typeface=""/>
+        <a:cs typeface=""/>
+        <a:font script="Jpan" typeface="ＭＳ Ｐゴシック"/>
+        <a:font script="Hang" typeface="맑은 고딕"/>
+        <a:font script="Hans" typeface="宋体"/>
+        <a:font script="Hant" typeface="新細明體"/>
+        <a:font script="Arab" typeface="Arial"/>
+        <a:font script="Hebr" typeface="Arial"/>
+        <a:font script="Thai" typeface="Cordia New"/>
+        <a:font script="Ethi" typeface="Nyala"/>
+        <a:font script="Beng" typeface="Vrinda"/>
+        <a:font script="Gujr" typeface="Shruti"/>
+        <a:font script="Khmr" typeface="DaunPenh"/>
+        <a:font script="Knda" typeface="Tunga"/>
+        <a:font script="Guru" typeface="Raavi"/>
+        <a:font script="Cans" typeface="Euphemia"/>
+        <a:font script="Cher" typeface="Plantagenet Cherokee"/>
+        <a:font script="Yiii" typeface="Microsoft Yi Baiti"/>
+        <a:font script="Tibt" typeface="Microsoft Himalaya"/>
+        <a:font script="Thaa" typeface="MV Boli"/>
+        <a:font script="Deva" typeface="Mangal"/>
+        <a:font script="Telu" typeface="Gautami"/>
+        <a:font script="Taml" typeface="Latha"/>
+        <a:font script="Syrc" typeface="Estrangelo Edessa"/>
+        <a:font script="Orya" typeface="Kalinga"/>
+        <a:font script="Mlym" typeface="Kartika"/>
+        <a:font script="Laoo" typeface="DokChampa"/>
+        <a:font script="Sinh" typeface="Iskoola Pota"/>
+        <a:font script="Mong" typeface="Mongolian Baiti"/>
+        <a:font script="Viet" typeface="Arial"/>
+        <a:font script="Uigh" typeface="Microsoft Uighur"/>
+        <a:font script="Geor" typeface="Sylfaen"/>
+      </a:minorFont>
+    </a:fontScheme>
+    <a:fmtScheme name="Office">
+      <a:fillStyleLst>
+        <a:solidFill>
+          <a:schemeClr val="phClr"/>
+        </a:solidFill>
+        <a:gradFill rotWithShape="1">
+          <a:gsLst>
+            <a:gs pos="0">
+              <a:schemeClr val="phClr">
+                <a:tint val="50000"/>
+                <a:satMod val="300000"/>
+              </a:schemeClr>
+            </a:gs>
+            <a:gs pos="35000">
+              <a:schemeClr val="phClr">
+                <a:tint val="37000"/>
+                <a:satMod val="300000"/>
+              </a:schemeClr>
+            </a:gs>
+            <a:gs pos="100000">
+              <a:schemeClr val="phClr">
+                <a:tint val="15000"/>
+                <a:satMod val="350000"/>
+              </a:schemeClr>
+            </a:gs>
+          </a:gsLst>
+          <a:lin ang="16200000" scaled="1"/>
+        </a:gradFill>
+        <a:gradFill rotWithShape="1">
+          <a:gsLst>
+            <a:gs pos="0">
+              <a:schemeClr val="phClr">
+                <a:tint val="100000"/>
+                <a:shade val="100000"/>
+                <a:satMod val="130000"/>
+              </a:schemeClr>
+            </a:gs>
+            <a:gs pos="100000">
+              <a:schemeClr val="phClr">
+                <a:tint val="50000"/>
+                <a:shade val="100000"/>
+                <a:satMod val="350000"/>
+              </a:schemeClr>
+            </a:gs>
+          </a:gsLst>
+          <a:lin ang="16200000" scaled="0"/>
+        </a:gradFill>
+      </a:fillStyleLst>
+      <a:lnStyleLst>
+        <a:ln w="9525" cap="flat" cmpd="sng" algn="ctr">
+          <a:solidFill>
+            <a:schemeClr val="phClr">
+              <a:shade val="95000"/>
+              <a:satMod val="105000"/>
+            </a:schemeClr>
+          </a:solidFill>
+          <a:prstDash val="solid"/>
+        </a:ln>
+        <a:ln w="25400" cap="flat" cmpd="sng" algn="ctr">
+          <a:solidFill>
+            <a:schemeClr val="phClr"/>
+          </a:solidFill>
+          <a:prstDash val="solid"/>
+        </a:ln>
+        <a:ln w="38100" cap="flat" cmpd="sng" algn="ctr">
+          <a:solidFill>
+            <a:schemeClr val="phClr"/>
+          </a:solidFill>
+          <a:prstDash val="solid"/>
+        </a:ln>
+      </a:lnStyleLst>
+      <a:effectStyleLst>
+        <a:effectStyle>
+          <a:effectLst>
+            <a:outerShdw blurRad="40000" dist="20000" dir="5400000" rotWithShape="0">
+              <a:srgbClr val="000000">
+                <a:alpha val="38000"/>
+              </a:srgbClr>
+            </a:outerShdw>
+          </a:effectLst>
+        </a:effectStyle>
+        <a:effectStyle>
+          <a:effectLst>
+            <a:outerShdw blurRad="40000" dist="23000" dir="5400000" rotWithShape="0">
+              <a:srgbClr val="000000">
+                <a:alpha val="35000"/>
+              </a:srgbClr>
+            </a:outerShdw>
+          </a:effectLst>
+        </a:effectStyle>
+        <a:effectStyle>
+          <a:effectLst>
+            <a:outerShdw blurRad="40000" dist="23000" dir="5400000" rotWithShape="0">
+              <a:srgbClr val="000000">
+                <a:alpha val="35000"/>
+              </a:srgbClr>
+            </a:outerShdw>
+          </a:effectLst>
+          <a:scene3d>
+            <a:camera prst="orthographicFront">
+              <a:rot lat="0" lon="0" rev="0"/>
+            </a:camera>
+            <a:lightRig rig="threePt" dir="t">
+              <a:rot lat="0" lon="0" rev="1200000"/>
+            </a:lightRig>
+          </a:scene3d>
+          <a:sp3d>
+            <a:bevelT w="63500" h="25400"/>
+          </a:sp3d>
+        </a:effectStyle>
+      </a:effectStyleLst>
+      <a:bgFillStyleLst>
+        <a:solidFill>
+          <a:schemeClr val="phClr"/>
+        </a:solidFill>
+        <a:gradFill rotWithShape="1">
+          <a:gsLst>
+            <a:gs pos="0">
+              <a:schemeClr val="phClr">
+                <a:tint val="40000"/>
+                <a:satMod val="350000"/>
+              </a:schemeClr>
+            </a:gs>
+            <a:gs pos="40000">
+              <a:schemeClr val="phClr">
+                <a:tint val="45000"/>
+                <a:shade val="99000"/>
+                <a:satMod val="350000"/>
+              </a:schemeClr>
+            </a:gs>
+            <a:gs pos="100000">
+              <a:schemeClr val="phClr">
+                <a:shade val="20000"/>
+                <a:satMod val="255000"/>
+              </a:schemeClr>
+            </a:gs>
+          </a:gsLst>
+          <a:path path="circle">
+            <a:fillToRect l="50000" t="-80000" r="50000" b="180000"/>
+          </a:path>
+        </a:gradFill>
+        <a:gradFill rotWithShape="1">
+          <a:gsLst>
+            <a:gs pos="0">
+              <a:schemeClr val="phClr">
+                <a:tint val="80000"/>
+                <a:satMod val="300000"/>
+              </a:schemeClr>
+            </a:gs>
+            <a:gs pos="100000">
+              <a:schemeClr val="phClr">
+                <a:shade val="30000"/>
+                <a:satMod val="200000"/>
+              </a:schemeClr>
+            </a:gs>
+          </a:gsLst>
+          <a:path path="circle">
+            <a:fillToRect l="50000" t="50000" r="50000" b="50000"/>
+          </a:path>
+        </a:gradFill>
+      </a:bgFillStyleLst>
+    </a:fmtScheme>
+  </a:themeElements>
+  <a:objectDefaults>
+    <a:spDef>
+      <a:spPr/>
+      <a:bodyPr/>
+      <a:lstStyle/>
+      <a:style>
+        <a:lnRef idx="1">
+          <a:schemeClr val="accent1"/>
+        </a:lnRef>
+        <a:fillRef idx="3">
+          <a:schemeClr val="accent1"/>
+        </a:fillRef>
+        <a:effectRef idx="2">
+          <a:schemeClr val="accent1"/>
+        </a:effectRef>
+        <a:fontRef idx="minor">
+          <a:schemeClr val="lt1"/>
+        </a:fontRef>
+      </a:style>
+    </a:spDef>
+    <a:lnDef>
+      <a:spPr/>
+      <a:bodyPr/>
+      <a:lstStyle/>
+      <a:style>
+        <a:lnRef idx="2">
+          <a:schemeClr val="accent1"/>
+        </a:lnRef>
+        <a:fillRef idx="0">
+          <a:schemeClr val="accent1"/>
+        </a:fillRef>
+        <a:effectRef idx="1">
+          <a:schemeClr val="accent1"/>
+        </a:effectRef>
+        <a:fontRef idx="minor">
+          <a:schemeClr val="tx1"/>
+        </a:fontRef>
+      </a:style>
+    </a:lnDef>
+  </a:objectDefaults>
+  <a:extraClrSchemeLst/>
+</a:theme>
 </file>
--- a/S1-CL3-Cloud-Infrastructure-Improvement/delivery/topic_01/Topic_01_Slides.pptx
+++ b/S1-CL3-Cloud-Infrastructure-Improvement/delivery/topic_01/Topic_01_Slides.pptx
@@ -4,26 +4,29 @@
   <p:sldMasterIdLst>
     <p:sldMasterId id="2147483648" r:id="rId1"/>
   </p:sldMasterIdLst>
+  <p:notesMasterIdLst>
+    <p:notesMasterId r:id="rId19"/>
+  </p:notesMasterIdLst>
   <p:sldIdLst>
-    <p:sldId id="256" r:id="rId7"/>
-    <p:sldId id="257" r:id="rId8"/>
-    <p:sldId id="258" r:id="rId10"/>
-    <p:sldId id="259" r:id="rId11"/>
-    <p:sldId id="260" r:id="rId12"/>
-    <p:sldId id="261" r:id="rId13"/>
-    <p:sldId id="262" r:id="rId14"/>
-    <p:sldId id="263" r:id="rId15"/>
-    <p:sldId id="264" r:id="rId16"/>
-    <p:sldId id="265" r:id="rId17"/>
-    <p:sldId id="266" r:id="rId18"/>
-    <p:sldId id="267" r:id="rId19"/>
-    <p:sldId id="268" r:id="rId20"/>
-    <p:sldId id="269" r:id="rId21"/>
-    <p:sldId id="270" r:id="rId22"/>
-    <p:sldId id="271" r:id="rId23"/>
-    <p:sldId id="272" r:id="rId24"/>
+    <p:sldId id="256" r:id="rId2"/>
+    <p:sldId id="257" r:id="rId3"/>
+    <p:sldId id="258" r:id="rId4"/>
+    <p:sldId id="259" r:id="rId5"/>
+    <p:sldId id="260" r:id="rId6"/>
+    <p:sldId id="261" r:id="rId7"/>
+    <p:sldId id="262" r:id="rId8"/>
+    <p:sldId id="263" r:id="rId9"/>
+    <p:sldId id="264" r:id="rId10"/>
+    <p:sldId id="265" r:id="rId11"/>
+    <p:sldId id="266" r:id="rId12"/>
+    <p:sldId id="267" r:id="rId13"/>
+    <p:sldId id="268" r:id="rId14"/>
+    <p:sldId id="269" r:id="rId15"/>
+    <p:sldId id="270" r:id="rId16"/>
+    <p:sldId id="271" r:id="rId17"/>
+    <p:sldId id="272" r:id="rId18"/>
   </p:sldIdLst>
-  <p:sldSz cx="12191695" cy="6858000" type="screen4x3"/>
+  <p:sldSz cx="12192000" cy="6858000"/>
   <p:notesSz cx="6858000" cy="9144000"/>
   <p:defaultTextStyle>
     <a:defPPr>
@@ -120,11 +123,27 @@
       </a:defRPr>
     </a:lvl9pPr>
   </p:defaultTextStyle>
+  <p:extLst>
+    <p:ext uri="{EFAFB233-063F-42B5-8137-9DF3F51BA10A}">
+      <p15:sldGuideLst xmlns:p15="http://schemas.microsoft.com/office/powerpoint/2012/main">
+        <p15:guide id="1" orient="horz" pos="2160">
+          <p15:clr>
+            <a:srgbClr val="A4A3A4"/>
+          </p15:clr>
+        </p15:guide>
+        <p15:guide id="2" pos="2880">
+          <p15:clr>
+            <a:srgbClr val="A4A3A4"/>
+          </p15:clr>
+        </p15:guide>
+      </p15:sldGuideLst>
+    </p:ext>
+  </p:extLst>
 </p:presentation>
 </file>
 
 <file path=ppt/notesMasters/notesMaster1.xml><?xml version="1.0" encoding="utf-8"?>
-<p:notesMaster xmlns:a="http://schemas.openxmlformats.org/drawingml/2006/main" xmlns:p="http://schemas.openxmlformats.org/presentationml/2006/main" xmlns:r="http://schemas.openxmlformats.org/officeDocument/2006/relationships">
+<p:notesMaster xmlns:a="http://schemas.openxmlformats.org/drawingml/2006/main" xmlns:r="http://schemas.openxmlformats.org/officeDocument/2006/relationships" xmlns:p="http://schemas.openxmlformats.org/presentationml/2006/main">
   <p:cSld>
     <p:bg>
       <p:bgRef idx="1001">
@@ -158,7 +177,7 @@
         <p:spPr>
           <a:xfrm>
             <a:off x="0" y="0"/>
-            <a:ext cx="2971800" cy="457200"/>
+            <a:ext cx="2971800" cy="458788"/>
           </a:xfrm>
           <a:prstGeom prst="rect">
             <a:avLst/>
@@ -189,7 +208,7 @@
         <p:spPr>
           <a:xfrm>
             <a:off x="3884613" y="0"/>
-            <a:ext cx="2971800" cy="457200"/>
+            <a:ext cx="2971800" cy="458788"/>
           </a:xfrm>
           <a:prstGeom prst="rect">
             <a:avLst/>
@@ -203,9 +222,9 @@
             </a:lvl1pPr>
           </a:lstStyle>
           <a:p>
-            <a:fld id="{0F89C1C7-3DCD-1040-A9CF-14679D8B5DDD}" type="datetimeFigureOut">
+            <a:fld id="{81DD04AB-B2DC-2C44-9147-3918CC5D531E}" type="datetimeFigureOut">
               <a:rPr lang="en-US" smtClean="0"/>
-              <a:t>10/17/16</a:t>
+              <a:t>7/9/26</a:t>
             </a:fld>
             <a:endParaRPr lang="en-US"/>
           </a:p>
@@ -223,8 +242,8 @@
         </p:nvSpPr>
         <p:spPr>
           <a:xfrm>
-            <a:off x="1143000" y="685800"/>
-            <a:ext cx="4572000" cy="3429000"/>
+            <a:off x="685800" y="1143000"/>
+            <a:ext cx="5486400" cy="3086100"/>
           </a:xfrm>
           <a:prstGeom prst="rect">
             <a:avLst/>
@@ -256,8 +275,8 @@
         </p:nvSpPr>
         <p:spPr>
           <a:xfrm>
-            <a:off x="685800" y="4343400"/>
-            <a:ext cx="5486400" cy="4114800"/>
+            <a:off x="685800" y="4400550"/>
+            <a:ext cx="5486400" cy="3600450"/>
           </a:xfrm>
           <a:prstGeom prst="rect">
             <a:avLst/>
@@ -269,35 +288,35 @@
           <a:p>
             <a:pPr lvl="0"/>
             <a:r>
-              <a:rPr lang="en-US" smtClean="0"/>
+              <a:rPr lang="en-GB"/>
               <a:t>Click to edit Master text styles</a:t>
             </a:r>
           </a:p>
           <a:p>
             <a:pPr lvl="1"/>
             <a:r>
-              <a:rPr lang="en-US" smtClean="0"/>
+              <a:rPr lang="en-GB"/>
               <a:t>Second level</a:t>
             </a:r>
           </a:p>
           <a:p>
             <a:pPr lvl="2"/>
             <a:r>
-              <a:rPr lang="en-US" smtClean="0"/>
+              <a:rPr lang="en-GB"/>
               <a:t>Third level</a:t>
             </a:r>
           </a:p>
           <a:p>
             <a:pPr lvl="3"/>
             <a:r>
-              <a:rPr lang="en-US" smtClean="0"/>
+              <a:rPr lang="en-GB"/>
               <a:t>Fourth level</a:t>
             </a:r>
           </a:p>
           <a:p>
             <a:pPr lvl="4"/>
             <a:r>
-              <a:rPr lang="en-US" smtClean="0"/>
+              <a:rPr lang="en-GB"/>
               <a:t>Fifth level</a:t>
             </a:r>
             <a:endParaRPr lang="en-US"/>
@@ -317,7 +336,7 @@
         <p:spPr>
           <a:xfrm>
             <a:off x="0" y="8685213"/>
-            <a:ext cx="2971800" cy="457200"/>
+            <a:ext cx="2971800" cy="458787"/>
           </a:xfrm>
           <a:prstGeom prst="rect">
             <a:avLst/>
@@ -348,7 +367,7 @@
         <p:spPr>
           <a:xfrm>
             <a:off x="3884613" y="8685213"/>
-            <a:ext cx="2971800" cy="457200"/>
+            <a:ext cx="2971800" cy="458787"/>
           </a:xfrm>
           <a:prstGeom prst="rect">
             <a:avLst/>
@@ -362,7 +381,7 @@
             </a:lvl1pPr>
           </a:lstStyle>
           <a:p>
-            <a:fld id="{BB5E49A5-4136-284D-997B-48E1D791AD67}" type="slidenum">
+            <a:fld id="{5E83A831-8944-C345-861C-1D0BDE2110C0}" type="slidenum">
               <a:rPr lang="en-US" smtClean="0"/>
               <a:t>‹#›</a:t>
             </a:fld>
@@ -373,13 +392,13 @@
     </p:spTree>
     <p:extLst>
       <p:ext uri="{BB962C8B-B14F-4D97-AF65-F5344CB8AC3E}">
-        <p14:creationId xmlns:p14="http://schemas.microsoft.com/office/powerpoint/2010/main" val="2623252185"/>
+        <p14:creationId xmlns:p14="http://schemas.microsoft.com/office/powerpoint/2010/main" val="2729961678"/>
       </p:ext>
     </p:extLst>
   </p:cSld>
   <p:clrMap bg1="lt1" tx1="dk1" bg2="lt2" tx2="dk2" accent1="accent1" accent2="accent2" accent3="accent3" accent4="accent4" accent5="accent5" accent6="accent6" hlink="hlink" folHlink="folHlink"/>
   <p:notesStyle>
-    <a:lvl1pPr marL="0" algn="l" defTabSz="457200" rtl="0" eaLnBrk="1" latinLnBrk="0" hangingPunct="1">
+    <a:lvl1pPr marL="0" algn="l" defTabSz="914400" rtl="0" eaLnBrk="1" latinLnBrk="0" hangingPunct="1">
       <a:defRPr sz="1200" kern="1200">
         <a:solidFill>
           <a:schemeClr val="tx1"/>
@@ -389,7 +408,7 @@
         <a:cs typeface="+mn-cs"/>
       </a:defRPr>
     </a:lvl1pPr>
-    <a:lvl2pPr marL="457200" algn="l" defTabSz="457200" rtl="0" eaLnBrk="1" latinLnBrk="0" hangingPunct="1">
+    <a:lvl2pPr marL="457200" algn="l" defTabSz="914400" rtl="0" eaLnBrk="1" latinLnBrk="0" hangingPunct="1">
       <a:defRPr sz="1200" kern="1200">
         <a:solidFill>
           <a:schemeClr val="tx1"/>
@@ -399,7 +418,7 @@
         <a:cs typeface="+mn-cs"/>
       </a:defRPr>
     </a:lvl2pPr>
-    <a:lvl3pPr marL="914400" algn="l" defTabSz="457200" rtl="0" eaLnBrk="1" latinLnBrk="0" hangingPunct="1">
+    <a:lvl3pPr marL="914400" algn="l" defTabSz="914400" rtl="0" eaLnBrk="1" latinLnBrk="0" hangingPunct="1">
       <a:defRPr sz="1200" kern="1200">
         <a:solidFill>
           <a:schemeClr val="tx1"/>
@@ -409,7 +428,7 @@
         <a:cs typeface="+mn-cs"/>
       </a:defRPr>
     </a:lvl3pPr>
-    <a:lvl4pPr marL="1371600" algn="l" defTabSz="457200" rtl="0" eaLnBrk="1" latinLnBrk="0" hangingPunct="1">
+    <a:lvl4pPr marL="1371600" algn="l" defTabSz="914400" rtl="0" eaLnBrk="1" latinLnBrk="0" hangingPunct="1">
       <a:defRPr sz="1200" kern="1200">
         <a:solidFill>
           <a:schemeClr val="tx1"/>
@@ -419,7 +438,7 @@
         <a:cs typeface="+mn-cs"/>
       </a:defRPr>
     </a:lvl4pPr>
-    <a:lvl5pPr marL="1828800" algn="l" defTabSz="457200" rtl="0" eaLnBrk="1" latinLnBrk="0" hangingPunct="1">
+    <a:lvl5pPr marL="1828800" algn="l" defTabSz="914400" rtl="0" eaLnBrk="1" latinLnBrk="0" hangingPunct="1">
       <a:defRPr sz="1200" kern="1200">
         <a:solidFill>
           <a:schemeClr val="tx1"/>
@@ -429,7 +448,7 @@
         <a:cs typeface="+mn-cs"/>
       </a:defRPr>
     </a:lvl5pPr>
-    <a:lvl6pPr marL="2286000" algn="l" defTabSz="457200" rtl="0" eaLnBrk="1" latinLnBrk="0" hangingPunct="1">
+    <a:lvl6pPr marL="2286000" algn="l" defTabSz="914400" rtl="0" eaLnBrk="1" latinLnBrk="0" hangingPunct="1">
       <a:defRPr sz="1200" kern="1200">
         <a:solidFill>
           <a:schemeClr val="tx1"/>
@@ -439,7 +458,7 @@
         <a:cs typeface="+mn-cs"/>
       </a:defRPr>
     </a:lvl6pPr>
-    <a:lvl7pPr marL="2743200" algn="l" defTabSz="457200" rtl="0" eaLnBrk="1" latinLnBrk="0" hangingPunct="1">
+    <a:lvl7pPr marL="2743200" algn="l" defTabSz="914400" rtl="0" eaLnBrk="1" latinLnBrk="0" hangingPunct="1">
       <a:defRPr sz="1200" kern="1200">
         <a:solidFill>
           <a:schemeClr val="tx1"/>
@@ -449,7 +468,7 @@
         <a:cs typeface="+mn-cs"/>
       </a:defRPr>
     </a:lvl7pPr>
-    <a:lvl8pPr marL="3200400" algn="l" defTabSz="457200" rtl="0" eaLnBrk="1" latinLnBrk="0" hangingPunct="1">
+    <a:lvl8pPr marL="3200400" algn="l" defTabSz="914400" rtl="0" eaLnBrk="1" latinLnBrk="0" hangingPunct="1">
       <a:defRPr sz="1200" kern="1200">
         <a:solidFill>
           <a:schemeClr val="tx1"/>
@@ -459,7 +478,7 @@
         <a:cs typeface="+mn-cs"/>
       </a:defRPr>
     </a:lvl8pPr>
-    <a:lvl9pPr marL="3657600" algn="l" defTabSz="457200" rtl="0" eaLnBrk="1" latinLnBrk="0" hangingPunct="1">
+    <a:lvl9pPr marL="3657600" algn="l" defTabSz="914400" rtl="0" eaLnBrk="1" latinLnBrk="0" hangingPunct="1">
       <a:defRPr sz="1200" kern="1200">
         <a:solidFill>
           <a:schemeClr val="tx1"/>
@@ -474,7 +493,7 @@
 </file>
 
 <file path=ppt/notesSlides/notesSlide1.xml><?xml version="1.0" encoding="utf-8"?>
-<p:notes xmlns:a="http://schemas.openxmlformats.org/drawingml/2006/main" xmlns:p="http://schemas.openxmlformats.org/presentationml/2006/main" xmlns:r="http://schemas.openxmlformats.org/officeDocument/2006/relationships">
+<p:notes xmlns:a="http://schemas.openxmlformats.org/drawingml/2006/main" xmlns:r="http://schemas.openxmlformats.org/officeDocument/2006/relationships" xmlns:p="http://schemas.openxmlformats.org/presentationml/2006/main">
   <p:cSld>
     <p:spTree>
       <p:nvGrpSpPr>
@@ -494,7 +513,7 @@
         <p:nvSpPr>
           <p:cNvPr id="2" name="Slide Image Placeholder 1"/>
           <p:cNvSpPr>
-            <a:spLocks noGrp="1"/>
+            <a:spLocks noGrp="1" noRot="1" noChangeAspect="1"/>
           </p:cNvSpPr>
           <p:nvPr>
             <p:ph type="sldImg" idx="2"/>
@@ -509,7 +528,7 @@
             <a:spLocks noGrp="1"/>
           </p:cNvSpPr>
           <p:nvPr>
-            <p:ph type="body" idx="3" sz="quarter"/>
+            <p:ph type="body" sz="quarter" idx="3"/>
           </p:nvPr>
         </p:nvSpPr>
         <p:spPr/>
@@ -605,7 +624,7 @@
             <a:spLocks noGrp="1"/>
           </p:cNvSpPr>
           <p:nvPr>
-            <p:ph type="sldNum" idx="5" sz="quarter"/>
+            <p:ph type="sldNum" sz="quarter" idx="5"/>
           </p:nvPr>
         </p:nvSpPr>
         <p:spPr/>
@@ -619,7 +638,7 @@
 </file>
 
 <file path=ppt/notesSlides/notesSlide10.xml><?xml version="1.0" encoding="utf-8"?>
-<p:notes xmlns:a="http://schemas.openxmlformats.org/drawingml/2006/main" xmlns:p="http://schemas.openxmlformats.org/presentationml/2006/main" xmlns:r="http://schemas.openxmlformats.org/officeDocument/2006/relationships">
+<p:notes xmlns:a="http://schemas.openxmlformats.org/drawingml/2006/main" xmlns:r="http://schemas.openxmlformats.org/officeDocument/2006/relationships" xmlns:p="http://schemas.openxmlformats.org/presentationml/2006/main">
   <p:cSld>
     <p:spTree>
       <p:nvGrpSpPr>
@@ -639,7 +658,7 @@
         <p:nvSpPr>
           <p:cNvPr id="2" name="Slide Image Placeholder 1"/>
           <p:cNvSpPr>
-            <a:spLocks noGrp="1"/>
+            <a:spLocks noGrp="1" noRot="1" noChangeAspect="1"/>
           </p:cNvSpPr>
           <p:nvPr>
             <p:ph type="sldImg" idx="2"/>
@@ -654,7 +673,7 @@
             <a:spLocks noGrp="1"/>
           </p:cNvSpPr>
           <p:nvPr>
-            <p:ph type="body" idx="3" sz="quarter"/>
+            <p:ph type="body" sz="quarter" idx="3"/>
           </p:nvPr>
         </p:nvSpPr>
         <p:spPr/>
@@ -745,7 +764,7 @@
             <a:spLocks noGrp="1"/>
           </p:cNvSpPr>
           <p:nvPr>
-            <p:ph type="sldNum" idx="5" sz="quarter"/>
+            <p:ph type="sldNum" sz="quarter" idx="5"/>
           </p:nvPr>
         </p:nvSpPr>
         <p:spPr/>
@@ -759,7 +778,7 @@
 </file>
 
 <file path=ppt/notesSlides/notesSlide11.xml><?xml version="1.0" encoding="utf-8"?>
-<p:notes xmlns:a="http://schemas.openxmlformats.org/drawingml/2006/main" xmlns:p="http://schemas.openxmlformats.org/presentationml/2006/main" xmlns:r="http://schemas.openxmlformats.org/officeDocument/2006/relationships">
+<p:notes xmlns:a="http://schemas.openxmlformats.org/drawingml/2006/main" xmlns:r="http://schemas.openxmlformats.org/officeDocument/2006/relationships" xmlns:p="http://schemas.openxmlformats.org/presentationml/2006/main">
   <p:cSld>
     <p:spTree>
       <p:nvGrpSpPr>
@@ -779,7 +798,7 @@
         <p:nvSpPr>
           <p:cNvPr id="2" name="Slide Image Placeholder 1"/>
           <p:cNvSpPr>
-            <a:spLocks noGrp="1"/>
+            <a:spLocks noGrp="1" noRot="1" noChangeAspect="1"/>
           </p:cNvSpPr>
           <p:nvPr>
             <p:ph type="sldImg" idx="2"/>
@@ -794,7 +813,7 @@
             <a:spLocks noGrp="1"/>
           </p:cNvSpPr>
           <p:nvPr>
-            <p:ph type="body" idx="3" sz="quarter"/>
+            <p:ph type="body" sz="quarter" idx="3"/>
           </p:nvPr>
         </p:nvSpPr>
         <p:spPr/>
@@ -895,7 +914,7 @@
             <a:spLocks noGrp="1"/>
           </p:cNvSpPr>
           <p:nvPr>
-            <p:ph type="sldNum" idx="5" sz="quarter"/>
+            <p:ph type="sldNum" sz="quarter" idx="5"/>
           </p:nvPr>
         </p:nvSpPr>
         <p:spPr/>
@@ -909,7 +928,7 @@
 </file>
 
 <file path=ppt/notesSlides/notesSlide2.xml><?xml version="1.0" encoding="utf-8"?>
-<p:notes xmlns:a="http://schemas.openxmlformats.org/drawingml/2006/main" xmlns:p="http://schemas.openxmlformats.org/presentationml/2006/main" xmlns:r="http://schemas.openxmlformats.org/officeDocument/2006/relationships">
+<p:notes xmlns:a="http://schemas.openxmlformats.org/drawingml/2006/main" xmlns:r="http://schemas.openxmlformats.org/officeDocument/2006/relationships" xmlns:p="http://schemas.openxmlformats.org/presentationml/2006/main">
   <p:cSld>
     <p:spTree>
       <p:nvGrpSpPr>
@@ -929,7 +948,7 @@
         <p:nvSpPr>
           <p:cNvPr id="2" name="Slide Image Placeholder 1"/>
           <p:cNvSpPr>
-            <a:spLocks noGrp="1"/>
+            <a:spLocks noGrp="1" noRot="1" noChangeAspect="1"/>
           </p:cNvSpPr>
           <p:nvPr>
             <p:ph type="sldImg" idx="2"/>
@@ -944,7 +963,7 @@
             <a:spLocks noGrp="1"/>
           </p:cNvSpPr>
           <p:nvPr>
-            <p:ph type="body" idx="3" sz="quarter"/>
+            <p:ph type="body" sz="quarter" idx="3"/>
           </p:nvPr>
         </p:nvSpPr>
         <p:spPr/>
@@ -1035,7 +1054,7 @@
             <a:spLocks noGrp="1"/>
           </p:cNvSpPr>
           <p:nvPr>
-            <p:ph type="sldNum" idx="5" sz="quarter"/>
+            <p:ph type="sldNum" sz="quarter" idx="5"/>
           </p:nvPr>
         </p:nvSpPr>
         <p:spPr/>
@@ -1049,7 +1068,7 @@
 </file>
 
 <file path=ppt/notesSlides/notesSlide3.xml><?xml version="1.0" encoding="utf-8"?>
-<p:notes xmlns:a="http://schemas.openxmlformats.org/drawingml/2006/main" xmlns:p="http://schemas.openxmlformats.org/presentationml/2006/main" xmlns:r="http://schemas.openxmlformats.org/officeDocument/2006/relationships">
+<p:notes xmlns:a="http://schemas.openxmlformats.org/drawingml/2006/main" xmlns:r="http://schemas.openxmlformats.org/officeDocument/2006/relationships" xmlns:p="http://schemas.openxmlformats.org/presentationml/2006/main">
   <p:cSld>
     <p:spTree>
       <p:nvGrpSpPr>
@@ -1069,7 +1088,7 @@
         <p:nvSpPr>
           <p:cNvPr id="2" name="Slide Image Placeholder 1"/>
           <p:cNvSpPr>
-            <a:spLocks noGrp="1"/>
+            <a:spLocks noGrp="1" noRot="1" noChangeAspect="1"/>
           </p:cNvSpPr>
           <p:nvPr>
             <p:ph type="sldImg" idx="2"/>
@@ -1084,7 +1103,7 @@
             <a:spLocks noGrp="1"/>
           </p:cNvSpPr>
           <p:nvPr>
-            <p:ph type="body" idx="3" sz="quarter"/>
+            <p:ph type="body" sz="quarter" idx="3"/>
           </p:nvPr>
         </p:nvSpPr>
         <p:spPr/>
@@ -1175,7 +1194,7 @@
             <a:spLocks noGrp="1"/>
           </p:cNvSpPr>
           <p:nvPr>
-            <p:ph type="sldNum" idx="5" sz="quarter"/>
+            <p:ph type="sldNum" sz="quarter" idx="5"/>
           </p:nvPr>
         </p:nvSpPr>
         <p:spPr/>
@@ -1189,7 +1208,7 @@
 </file>
 
 <file path=ppt/notesSlides/notesSlide4.xml><?xml version="1.0" encoding="utf-8"?>
-<p:notes xmlns:a="http://schemas.openxmlformats.org/drawingml/2006/main" xmlns:p="http://schemas.openxmlformats.org/presentationml/2006/main" xmlns:r="http://schemas.openxmlformats.org/officeDocument/2006/relationships">
+<p:notes xmlns:a="http://schemas.openxmlformats.org/drawingml/2006/main" xmlns:r="http://schemas.openxmlformats.org/officeDocument/2006/relationships" xmlns:p="http://schemas.openxmlformats.org/presentationml/2006/main">
   <p:cSld>
     <p:spTree>
       <p:nvGrpSpPr>
@@ -1209,7 +1228,7 @@
         <p:nvSpPr>
           <p:cNvPr id="2" name="Slide Image Placeholder 1"/>
           <p:cNvSpPr>
-            <a:spLocks noGrp="1"/>
+            <a:spLocks noGrp="1" noRot="1" noChangeAspect="1"/>
           </p:cNvSpPr>
           <p:nvPr>
             <p:ph type="sldImg" idx="2"/>
@@ -1224,7 +1243,7 @@
             <a:spLocks noGrp="1"/>
           </p:cNvSpPr>
           <p:nvPr>
-            <p:ph type="body" idx="3" sz="quarter"/>
+            <p:ph type="body" sz="quarter" idx="3"/>
           </p:nvPr>
         </p:nvSpPr>
         <p:spPr/>
@@ -1315,7 +1334,7 @@
             <a:spLocks noGrp="1"/>
           </p:cNvSpPr>
           <p:nvPr>
-            <p:ph type="sldNum" idx="5" sz="quarter"/>
+            <p:ph type="sldNum" sz="quarter" idx="5"/>
           </p:nvPr>
         </p:nvSpPr>
         <p:spPr/>
@@ -1329,7 +1348,7 @@
 </file>
 
 <file path=ppt/notesSlides/notesSlide5.xml><?xml version="1.0" encoding="utf-8"?>
-<p:notes xmlns:a="http://schemas.openxmlformats.org/drawingml/2006/main" xmlns:p="http://schemas.openxmlformats.org/presentationml/2006/main" xmlns:r="http://schemas.openxmlformats.org/officeDocument/2006/relationships">
+<p:notes xmlns:a="http://schemas.openxmlformats.org/drawingml/2006/main" xmlns:r="http://schemas.openxmlformats.org/officeDocument/2006/relationships" xmlns:p="http://schemas.openxmlformats.org/presentationml/2006/main">
   <p:cSld>
     <p:spTree>
       <p:nvGrpSpPr>
@@ -1349,7 +1368,7 @@
         <p:nvSpPr>
           <p:cNvPr id="2" name="Slide Image Placeholder 1"/>
           <p:cNvSpPr>
-            <a:spLocks noGrp="1"/>
+            <a:spLocks noGrp="1" noRot="1" noChangeAspect="1"/>
           </p:cNvSpPr>
           <p:nvPr>
             <p:ph type="sldImg" idx="2"/>
@@ -1364,7 +1383,7 @@
             <a:spLocks noGrp="1"/>
           </p:cNvSpPr>
           <p:nvPr>
-            <p:ph type="body" idx="3" sz="quarter"/>
+            <p:ph type="body" sz="quarter" idx="3"/>
           </p:nvPr>
         </p:nvSpPr>
         <p:spPr/>
@@ -1470,7 +1489,7 @@
             <a:spLocks noGrp="1"/>
           </p:cNvSpPr>
           <p:nvPr>
-            <p:ph type="sldNum" idx="5" sz="quarter"/>
+            <p:ph type="sldNum" sz="quarter" idx="5"/>
           </p:nvPr>
         </p:nvSpPr>
         <p:spPr/>
@@ -1484,7 +1503,7 @@
 </file>
 
 <file path=ppt/notesSlides/notesSlide6.xml><?xml version="1.0" encoding="utf-8"?>
-<p:notes xmlns:a="http://schemas.openxmlformats.org/drawingml/2006/main" xmlns:p="http://schemas.openxmlformats.org/presentationml/2006/main" xmlns:r="http://schemas.openxmlformats.org/officeDocument/2006/relationships">
+<p:notes xmlns:a="http://schemas.openxmlformats.org/drawingml/2006/main" xmlns:r="http://schemas.openxmlformats.org/officeDocument/2006/relationships" xmlns:p="http://schemas.openxmlformats.org/presentationml/2006/main">
   <p:cSld>
     <p:spTree>
       <p:nvGrpSpPr>
@@ -1504,7 +1523,7 @@
         <p:nvSpPr>
           <p:cNvPr id="2" name="Slide Image Placeholder 1"/>
           <p:cNvSpPr>
-            <a:spLocks noGrp="1"/>
+            <a:spLocks noGrp="1" noRot="1" noChangeAspect="1"/>
           </p:cNvSpPr>
           <p:nvPr>
             <p:ph type="sldImg" idx="2"/>
@@ -1519,7 +1538,7 @@
             <a:spLocks noGrp="1"/>
           </p:cNvSpPr>
           <p:nvPr>
-            <p:ph type="body" idx="3" sz="quarter"/>
+            <p:ph type="body" sz="quarter" idx="3"/>
           </p:nvPr>
         </p:nvSpPr>
         <p:spPr/>
@@ -1605,7 +1624,7 @@
             <a:spLocks noGrp="1"/>
           </p:cNvSpPr>
           <p:nvPr>
-            <p:ph type="sldNum" idx="5" sz="quarter"/>
+            <p:ph type="sldNum" sz="quarter" idx="5"/>
           </p:nvPr>
         </p:nvSpPr>
         <p:spPr/>
@@ -1619,7 +1638,7 @@
 </file>
 
 <file path=ppt/notesSlides/notesSlide7.xml><?xml version="1.0" encoding="utf-8"?>
-<p:notes xmlns:a="http://schemas.openxmlformats.org/drawingml/2006/main" xmlns:p="http://schemas.openxmlformats.org/presentationml/2006/main" xmlns:r="http://schemas.openxmlformats.org/officeDocument/2006/relationships">
+<p:notes xmlns:a="http://schemas.openxmlformats.org/drawingml/2006/main" xmlns:r="http://schemas.openxmlformats.org/officeDocument/2006/relationships" xmlns:p="http://schemas.openxmlformats.org/presentationml/2006/main">
   <p:cSld>
     <p:spTree>
       <p:nvGrpSpPr>
@@ -1639,7 +1658,7 @@
         <p:nvSpPr>
           <p:cNvPr id="2" name="Slide Image Placeholder 1"/>
           <p:cNvSpPr>
-            <a:spLocks noGrp="1"/>
+            <a:spLocks noGrp="1" noRot="1" noChangeAspect="1"/>
           </p:cNvSpPr>
           <p:nvPr>
             <p:ph type="sldImg" idx="2"/>
@@ -1654,7 +1673,7 @@
             <a:spLocks noGrp="1"/>
           </p:cNvSpPr>
           <p:nvPr>
-            <p:ph type="body" idx="3" sz="quarter"/>
+            <p:ph type="body" sz="quarter" idx="3"/>
           </p:nvPr>
         </p:nvSpPr>
         <p:spPr/>
@@ -1745,7 +1764,7 @@
             <a:spLocks noGrp="1"/>
           </p:cNvSpPr>
           <p:nvPr>
-            <p:ph type="sldNum" idx="5" sz="quarter"/>
+            <p:ph type="sldNum" sz="quarter" idx="5"/>
           </p:nvPr>
         </p:nvSpPr>
         <p:spPr/>
@@ -1759,7 +1778,7 @@
 </file>
 
 <file path=ppt/notesSlides/notesSlide8.xml><?xml version="1.0" encoding="utf-8"?>
-<p:notes xmlns:a="http://schemas.openxmlformats.org/drawingml/2006/main" xmlns:p="http://schemas.openxmlformats.org/presentationml/2006/main" xmlns:r="http://schemas.openxmlformats.org/officeDocument/2006/relationships">
+<p:notes xmlns:a="http://schemas.openxmlformats.org/drawingml/2006/main" xmlns:r="http://schemas.openxmlformats.org/officeDocument/2006/relationships" xmlns:p="http://schemas.openxmlformats.org/presentationml/2006/main">
   <p:cSld>
     <p:spTree>
       <p:nvGrpSpPr>
@@ -1779,7 +1798,7 @@
         <p:nvSpPr>
           <p:cNvPr id="2" name="Slide Image Placeholder 1"/>
           <p:cNvSpPr>
-            <a:spLocks noGrp="1"/>
+            <a:spLocks noGrp="1" noRot="1" noChangeAspect="1"/>
           </p:cNvSpPr>
           <p:nvPr>
             <p:ph type="sldImg" idx="2"/>
@@ -1794,7 +1813,7 @@
             <a:spLocks noGrp="1"/>
           </p:cNvSpPr>
           <p:nvPr>
-            <p:ph type="body" idx="3" sz="quarter"/>
+            <p:ph type="body" sz="quarter" idx="3"/>
           </p:nvPr>
         </p:nvSpPr>
         <p:spPr/>
@@ -1895,7 +1914,7 @@
             <a:spLocks noGrp="1"/>
           </p:cNvSpPr>
           <p:nvPr>
-            <p:ph type="sldNum" idx="5" sz="quarter"/>
+            <p:ph type="sldNum" sz="quarter" idx="5"/>
           </p:nvPr>
         </p:nvSpPr>
         <p:spPr/>
@@ -1909,7 +1928,7 @@
 </file>
 
 <file path=ppt/notesSlides/notesSlide9.xml><?xml version="1.0" encoding="utf-8"?>
-<p:notes xmlns:a="http://schemas.openxmlformats.org/drawingml/2006/main" xmlns:p="http://schemas.openxmlformats.org/presentationml/2006/main" xmlns:r="http://schemas.openxmlformats.org/officeDocument/2006/relationships">
+<p:notes xmlns:a="http://schemas.openxmlformats.org/drawingml/2006/main" xmlns:r="http://schemas.openxmlformats.org/officeDocument/2006/relationships" xmlns:p="http://schemas.openxmlformats.org/presentationml/2006/main">
   <p:cSld>
     <p:spTree>
       <p:nvGrpSpPr>
@@ -1929,7 +1948,7 @@
         <p:nvSpPr>
           <p:cNvPr id="2" name="Slide Image Placeholder 1"/>
           <p:cNvSpPr>
-            <a:spLocks noGrp="1"/>
+            <a:spLocks noGrp="1" noRot="1" noChangeAspect="1"/>
           </p:cNvSpPr>
           <p:nvPr>
             <p:ph type="sldImg" idx="2"/>
@@ -1944,7 +1963,7 @@
             <a:spLocks noGrp="1"/>
           </p:cNvSpPr>
           <p:nvPr>
-            <p:ph type="body" idx="3" sz="quarter"/>
+            <p:ph type="body" sz="quarter" idx="3"/>
           </p:nvPr>
         </p:nvSpPr>
         <p:spPr/>
@@ -2030,7 +2049,7 @@
             <a:spLocks noGrp="1"/>
           </p:cNvSpPr>
           <p:nvPr>
-            <p:ph type="sldNum" idx="5" sz="quarter"/>
+            <p:ph type="sldNum" sz="quarter" idx="5"/>
           </p:nvPr>
         </p:nvSpPr>
         <p:spPr/>
@@ -2081,10 +2100,9 @@
           <a:lstStyle/>
           <a:p>
             <a:r>
-              <a:rPr lang="en-US" smtClean="0"/>
+              <a:rPr lang="en-US"/>
               <a:t>Click to edit Master title style</a:t>
             </a:r>
-            <a:endParaRPr lang="en-US"/>
           </a:p>
         </p:txBody>
       </p:sp>
@@ -2200,10 +2218,9 @@
           </a:lstStyle>
           <a:p>
             <a:r>
-              <a:rPr lang="en-US" smtClean="0"/>
+              <a:rPr lang="en-US"/>
               <a:t>Click to edit Master subtitle style</a:t>
             </a:r>
-            <a:endParaRPr lang="en-US"/>
           </a:p>
         </p:txBody>
       </p:sp>
@@ -2224,7 +2241,7 @@
           <a:p>
             <a:fld id="{5BCAD085-E8A6-8845-BD4E-CB4CCA059FC4}" type="datetimeFigureOut">
               <a:rPr lang="en-US" smtClean="0"/>
-              <a:t>1/27/13</a:t>
+              <a:t>7/9/26</a:t>
             </a:fld>
             <a:endParaRPr lang="en-US"/>
           </a:p>
@@ -2318,10 +2335,9 @@
           <a:lstStyle/>
           <a:p>
             <a:r>
-              <a:rPr lang="en-US" smtClean="0"/>
+              <a:rPr lang="en-US"/>
               <a:t>Click to edit Master title style</a:t>
             </a:r>
-            <a:endParaRPr lang="en-US"/>
           </a:p>
         </p:txBody>
       </p:sp>
@@ -2342,38 +2358,37 @@
           <a:p>
             <a:pPr lvl="0"/>
             <a:r>
-              <a:rPr lang="en-US" smtClean="0"/>
+              <a:rPr lang="en-US"/>
               <a:t>Click to edit Master text styles</a:t>
             </a:r>
           </a:p>
           <a:p>
             <a:pPr lvl="1"/>
             <a:r>
-              <a:rPr lang="en-US" smtClean="0"/>
+              <a:rPr lang="en-US"/>
               <a:t>Second level</a:t>
             </a:r>
           </a:p>
           <a:p>
             <a:pPr lvl="2"/>
             <a:r>
-              <a:rPr lang="en-US" smtClean="0"/>
+              <a:rPr lang="en-US"/>
               <a:t>Third level</a:t>
             </a:r>
           </a:p>
           <a:p>
             <a:pPr lvl="3"/>
             <a:r>
-              <a:rPr lang="en-US" smtClean="0"/>
+              <a:rPr lang="en-US"/>
               <a:t>Fourth level</a:t>
             </a:r>
           </a:p>
           <a:p>
             <a:pPr lvl="4"/>
             <a:r>
-              <a:rPr lang="en-US" smtClean="0"/>
+              <a:rPr lang="en-US"/>
               <a:t>Fifth level</a:t>
             </a:r>
-            <a:endParaRPr lang="en-US"/>
           </a:p>
         </p:txBody>
       </p:sp>
@@ -2394,7 +2409,7 @@
           <a:p>
             <a:fld id="{5BCAD085-E8A6-8845-BD4E-CB4CCA059FC4}" type="datetimeFigureOut">
               <a:rPr lang="en-US" smtClean="0"/>
-              <a:t>1/27/13</a:t>
+              <a:t>7/9/26</a:t>
             </a:fld>
             <a:endParaRPr lang="en-US"/>
           </a:p>
@@ -2493,10 +2508,9 @@
           <a:lstStyle/>
           <a:p>
             <a:r>
-              <a:rPr lang="en-US" smtClean="0"/>
+              <a:rPr lang="en-US"/>
               <a:t>Click to edit Master title style</a:t>
             </a:r>
-            <a:endParaRPr lang="en-US"/>
           </a:p>
         </p:txBody>
       </p:sp>
@@ -2522,38 +2536,37 @@
           <a:p>
             <a:pPr lvl="0"/>
             <a:r>
-              <a:rPr lang="en-US" smtClean="0"/>
+              <a:rPr lang="en-US"/>
               <a:t>Click to edit Master text styles</a:t>
             </a:r>
           </a:p>
           <a:p>
             <a:pPr lvl="1"/>
             <a:r>
-              <a:rPr lang="en-US" smtClean="0"/>
+              <a:rPr lang="en-US"/>
               <a:t>Second level</a:t>
             </a:r>
           </a:p>
           <a:p>
             <a:pPr lvl="2"/>
             <a:r>
-              <a:rPr lang="en-US" smtClean="0"/>
+              <a:rPr lang="en-US"/>
               <a:t>Third level</a:t>
             </a:r>
           </a:p>
           <a:p>
             <a:pPr lvl="3"/>
             <a:r>
-              <a:rPr lang="en-US" smtClean="0"/>
+              <a:rPr lang="en-US"/>
               <a:t>Fourth level</a:t>
             </a:r>
           </a:p>
           <a:p>
             <a:pPr lvl="4"/>
             <a:r>
-              <a:rPr lang="en-US" smtClean="0"/>
+              <a:rPr lang="en-US"/>
               <a:t>Fifth level</a:t>
             </a:r>
-            <a:endParaRPr lang="en-US"/>
           </a:p>
         </p:txBody>
       </p:sp>
@@ -2574,7 +2587,7 @@
           <a:p>
             <a:fld id="{5BCAD085-E8A6-8845-BD4E-CB4CCA059FC4}" type="datetimeFigureOut">
               <a:rPr lang="en-US" smtClean="0"/>
-              <a:t>1/27/13</a:t>
+              <a:t>7/9/26</a:t>
             </a:fld>
             <a:endParaRPr lang="en-US"/>
           </a:p>
@@ -2668,10 +2681,9 @@
           <a:lstStyle/>
           <a:p>
             <a:r>
-              <a:rPr lang="en-US" smtClean="0"/>
+              <a:rPr lang="en-US"/>
               <a:t>Click to edit Master title style</a:t>
             </a:r>
-            <a:endParaRPr lang="en-US"/>
           </a:p>
         </p:txBody>
       </p:sp>
@@ -2692,38 +2704,37 @@
           <a:p>
             <a:pPr lvl="0"/>
             <a:r>
-              <a:rPr lang="en-US" smtClean="0"/>
+              <a:rPr lang="en-US"/>
               <a:t>Click to edit Master text styles</a:t>
             </a:r>
           </a:p>
           <a:p>
             <a:pPr lvl="1"/>
             <a:r>
-              <a:rPr lang="en-US" smtClean="0"/>
+              <a:rPr lang="en-US"/>
               <a:t>Second level</a:t>
             </a:r>
           </a:p>
           <a:p>
             <a:pPr lvl="2"/>
             <a:r>
-              <a:rPr lang="en-US" smtClean="0"/>
+              <a:rPr lang="en-US"/>
               <a:t>Third level</a:t>
             </a:r>
           </a:p>
           <a:p>
             <a:pPr lvl="3"/>
             <a:r>
-              <a:rPr lang="en-US" smtClean="0"/>
+              <a:rPr lang="en-US"/>
               <a:t>Fourth level</a:t>
             </a:r>
           </a:p>
           <a:p>
             <a:pPr lvl="4"/>
             <a:r>
-              <a:rPr lang="en-US" smtClean="0"/>
+              <a:rPr lang="en-US"/>
               <a:t>Fifth level</a:t>
             </a:r>
-            <a:endParaRPr lang="en-US"/>
           </a:p>
         </p:txBody>
       </p:sp>
@@ -2744,7 +2755,7 @@
           <a:p>
             <a:fld id="{5BCAD085-E8A6-8845-BD4E-CB4CCA059FC4}" type="datetimeFigureOut">
               <a:rPr lang="en-US" smtClean="0"/>
-              <a:t>1/27/13</a:t>
+              <a:t>7/9/26</a:t>
             </a:fld>
             <a:endParaRPr lang="en-US"/>
           </a:p>
@@ -2847,10 +2858,9 @@
           </a:lstStyle>
           <a:p>
             <a:r>
-              <a:rPr lang="en-US" smtClean="0"/>
+              <a:rPr lang="en-US"/>
               <a:t>Click to edit Master title style</a:t>
             </a:r>
-            <a:endParaRPr lang="en-US"/>
           </a:p>
         </p:txBody>
       </p:sp>
@@ -2967,7 +2977,7 @@
           <a:p>
             <a:pPr lvl="0"/>
             <a:r>
-              <a:rPr lang="en-US" smtClean="0"/>
+              <a:rPr lang="en-US"/>
               <a:t>Click to edit Master text styles</a:t>
             </a:r>
           </a:p>
@@ -2990,7 +3000,7 @@
           <a:p>
             <a:fld id="{5BCAD085-E8A6-8845-BD4E-CB4CCA059FC4}" type="datetimeFigureOut">
               <a:rPr lang="en-US" smtClean="0"/>
-              <a:t>1/27/13</a:t>
+              <a:t>7/9/26</a:t>
             </a:fld>
             <a:endParaRPr lang="en-US"/>
           </a:p>
@@ -3084,10 +3094,9 @@
           <a:lstStyle/>
           <a:p>
             <a:r>
-              <a:rPr lang="en-US" smtClean="0"/>
+              <a:rPr lang="en-US"/>
               <a:t>Click to edit Master title style</a:t>
             </a:r>
-            <a:endParaRPr lang="en-US"/>
           </a:p>
         </p:txBody>
       </p:sp>
@@ -3141,38 +3150,37 @@
           <a:p>
             <a:pPr lvl="0"/>
             <a:r>
-              <a:rPr lang="en-US" smtClean="0"/>
+              <a:rPr lang="en-US"/>
               <a:t>Click to edit Master text styles</a:t>
             </a:r>
           </a:p>
           <a:p>
             <a:pPr lvl="1"/>
             <a:r>
-              <a:rPr lang="en-US" smtClean="0"/>
+              <a:rPr lang="en-US"/>
               <a:t>Second level</a:t>
             </a:r>
           </a:p>
           <a:p>
             <a:pPr lvl="2"/>
             <a:r>
-              <a:rPr lang="en-US" smtClean="0"/>
+              <a:rPr lang="en-US"/>
               <a:t>Third level</a:t>
             </a:r>
           </a:p>
           <a:p>
             <a:pPr lvl="3"/>
             <a:r>
-              <a:rPr lang="en-US" smtClean="0"/>
+              <a:rPr lang="en-US"/>
               <a:t>Fourth level</a:t>
             </a:r>
           </a:p>
           <a:p>
             <a:pPr lvl="4"/>
             <a:r>
-              <a:rPr lang="en-US" smtClean="0"/>
+              <a:rPr lang="en-US"/>
               <a:t>Fifth level</a:t>
             </a:r>
-            <a:endParaRPr lang="en-US"/>
           </a:p>
         </p:txBody>
       </p:sp>
@@ -3226,38 +3234,37 @@
           <a:p>
             <a:pPr lvl="0"/>
             <a:r>
-              <a:rPr lang="en-US" smtClean="0"/>
+              <a:rPr lang="en-US"/>
               <a:t>Click to edit Master text styles</a:t>
             </a:r>
           </a:p>
           <a:p>
             <a:pPr lvl="1"/>
             <a:r>
-              <a:rPr lang="en-US" smtClean="0"/>
+              <a:rPr lang="en-US"/>
               <a:t>Second level</a:t>
             </a:r>
           </a:p>
           <a:p>
             <a:pPr lvl="2"/>
             <a:r>
-              <a:rPr lang="en-US" smtClean="0"/>
+              <a:rPr lang="en-US"/>
               <a:t>Third level</a:t>
             </a:r>
           </a:p>
           <a:p>
             <a:pPr lvl="3"/>
             <a:r>
-              <a:rPr lang="en-US" smtClean="0"/>
+              <a:rPr lang="en-US"/>
               <a:t>Fourth level</a:t>
             </a:r>
           </a:p>
           <a:p>
             <a:pPr lvl="4"/>
             <a:r>
-              <a:rPr lang="en-US" smtClean="0"/>
+              <a:rPr lang="en-US"/>
               <a:t>Fifth level</a:t>
             </a:r>
-            <a:endParaRPr lang="en-US"/>
           </a:p>
         </p:txBody>
       </p:sp>
@@ -3278,7 +3285,7 @@
           <a:p>
             <a:fld id="{5BCAD085-E8A6-8845-BD4E-CB4CCA059FC4}" type="datetimeFigureOut">
               <a:rPr lang="en-US" smtClean="0"/>
-              <a:t>1/27/13</a:t>
+              <a:t>7/9/26</a:t>
             </a:fld>
             <a:endParaRPr lang="en-US"/>
           </a:p>
@@ -3376,10 +3383,9 @@
           </a:lstStyle>
           <a:p>
             <a:r>
-              <a:rPr lang="en-US" smtClean="0"/>
+              <a:rPr lang="en-US"/>
               <a:t>Click to edit Master title style</a:t>
             </a:r>
-            <a:endParaRPr lang="en-US"/>
           </a:p>
         </p:txBody>
       </p:sp>
@@ -3442,7 +3448,7 @@
           <a:p>
             <a:pPr lvl="0"/>
             <a:r>
-              <a:rPr lang="en-US" smtClean="0"/>
+              <a:rPr lang="en-US"/>
               <a:t>Click to edit Master text styles</a:t>
             </a:r>
           </a:p>
@@ -3498,38 +3504,37 @@
           <a:p>
             <a:pPr lvl="0"/>
             <a:r>
-              <a:rPr lang="en-US" smtClean="0"/>
+              <a:rPr lang="en-US"/>
               <a:t>Click to edit Master text styles</a:t>
             </a:r>
           </a:p>
           <a:p>
             <a:pPr lvl="1"/>
             <a:r>
-              <a:rPr lang="en-US" smtClean="0"/>
+              <a:rPr lang="en-US"/>
               <a:t>Second level</a:t>
             </a:r>
           </a:p>
           <a:p>
             <a:pPr lvl="2"/>
             <a:r>
-              <a:rPr lang="en-US" smtClean="0"/>
+              <a:rPr lang="en-US"/>
               <a:t>Third level</a:t>
             </a:r>
           </a:p>
           <a:p>
             <a:pPr lvl="3"/>
             <a:r>
-              <a:rPr lang="en-US" smtClean="0"/>
+              <a:rPr lang="en-US"/>
               <a:t>Fourth level</a:t>
             </a:r>
           </a:p>
           <a:p>
             <a:pPr lvl="4"/>
             <a:r>
-              <a:rPr lang="en-US" smtClean="0"/>
+              <a:rPr lang="en-US"/>
               <a:t>Fifth level</a:t>
             </a:r>
-            <a:endParaRPr lang="en-US"/>
           </a:p>
         </p:txBody>
       </p:sp>
@@ -3592,7 +3597,7 @@
           <a:p>
             <a:pPr lvl="0"/>
             <a:r>
-              <a:rPr lang="en-US" smtClean="0"/>
+              <a:rPr lang="en-US"/>
               <a:t>Click to edit Master text styles</a:t>
             </a:r>
           </a:p>
@@ -3648,38 +3653,37 @@
           <a:p>
             <a:pPr lvl="0"/>
             <a:r>
-              <a:rPr lang="en-US" smtClean="0"/>
+              <a:rPr lang="en-US"/>
               <a:t>Click to edit Master text styles</a:t>
             </a:r>
           </a:p>
           <a:p>
             <a:pPr lvl="1"/>
             <a:r>
-              <a:rPr lang="en-US" smtClean="0"/>
+              <a:rPr lang="en-US"/>
               <a:t>Second level</a:t>
             </a:r>
           </a:p>
           <a:p>
             <a:pPr lvl="2"/>
             <a:r>
-              <a:rPr lang="en-US" smtClean="0"/>
+              <a:rPr lang="en-US"/>
               <a:t>Third level</a:t>
             </a:r>
           </a:p>
           <a:p>
             <a:pPr lvl="3"/>
             <a:r>
-              <a:rPr lang="en-US" smtClean="0"/>
+              <a:rPr lang="en-US"/>
               <a:t>Fourth level</a:t>
             </a:r>
           </a:p>
           <a:p>
             <a:pPr lvl="4"/>
             <a:r>
-              <a:rPr lang="en-US" smtClean="0"/>
+              <a:rPr lang="en-US"/>
               <a:t>Fifth level</a:t>
             </a:r>
-            <a:endParaRPr lang="en-US"/>
           </a:p>
         </p:txBody>
       </p:sp>
@@ -3700,7 +3704,7 @@
           <a:p>
             <a:fld id="{5BCAD085-E8A6-8845-BD4E-CB4CCA059FC4}" type="datetimeFigureOut">
               <a:rPr lang="en-US" smtClean="0"/>
-              <a:t>1/27/13</a:t>
+              <a:t>7/9/26</a:t>
             </a:fld>
             <a:endParaRPr lang="en-US"/>
           </a:p>
@@ -3794,10 +3798,9 @@
           <a:lstStyle/>
           <a:p>
             <a:r>
-              <a:rPr lang="en-US" smtClean="0"/>
+              <a:rPr lang="en-US"/>
               <a:t>Click to edit Master title style</a:t>
             </a:r>
-            <a:endParaRPr lang="en-US"/>
           </a:p>
         </p:txBody>
       </p:sp>
@@ -3818,7 +3821,7 @@
           <a:p>
             <a:fld id="{5BCAD085-E8A6-8845-BD4E-CB4CCA059FC4}" type="datetimeFigureOut">
               <a:rPr lang="en-US" smtClean="0"/>
-              <a:t>1/27/13</a:t>
+              <a:t>7/9/26</a:t>
             </a:fld>
             <a:endParaRPr lang="en-US"/>
           </a:p>
@@ -3913,7 +3916,7 @@
           <a:p>
             <a:fld id="{5BCAD085-E8A6-8845-BD4E-CB4CCA059FC4}" type="datetimeFigureOut">
               <a:rPr lang="en-US" smtClean="0"/>
-              <a:t>1/27/13</a:t>
+              <a:t>7/9/26</a:t>
             </a:fld>
             <a:endParaRPr lang="en-US"/>
           </a:p>
@@ -4016,10 +4019,9 @@
           </a:lstStyle>
           <a:p>
             <a:r>
-              <a:rPr lang="en-US" smtClean="0"/>
+              <a:rPr lang="en-US"/>
               <a:t>Click to edit Master title style</a:t>
             </a:r>
-            <a:endParaRPr lang="en-US"/>
           </a:p>
         </p:txBody>
       </p:sp>
@@ -4073,38 +4075,37 @@
           <a:p>
             <a:pPr lvl="0"/>
             <a:r>
-              <a:rPr lang="en-US" smtClean="0"/>
+              <a:rPr lang="en-US"/>
               <a:t>Click to edit Master text styles</a:t>
             </a:r>
           </a:p>
           <a:p>
             <a:pPr lvl="1"/>
             <a:r>
-              <a:rPr lang="en-US" smtClean="0"/>
+              <a:rPr lang="en-US"/>
               <a:t>Second level</a:t>
             </a:r>
           </a:p>
           <a:p>
             <a:pPr lvl="2"/>
             <a:r>
-              <a:rPr lang="en-US" smtClean="0"/>
+              <a:rPr lang="en-US"/>
               <a:t>Third level</a:t>
             </a:r>
           </a:p>
           <a:p>
             <a:pPr lvl="3"/>
             <a:r>
-              <a:rPr lang="en-US" smtClean="0"/>
+              <a:rPr lang="en-US"/>
               <a:t>Fourth level</a:t>
             </a:r>
           </a:p>
           <a:p>
             <a:pPr lvl="4"/>
             <a:r>
-              <a:rPr lang="en-US" smtClean="0"/>
+              <a:rPr lang="en-US"/>
               <a:t>Fifth level</a:t>
             </a:r>
-            <a:endParaRPr lang="en-US"/>
           </a:p>
         </p:txBody>
       </p:sp>
@@ -4167,7 +4168,7 @@
           <a:p>
             <a:pPr lvl="0"/>
             <a:r>
-              <a:rPr lang="en-US" smtClean="0"/>
+              <a:rPr lang="en-US"/>
               <a:t>Click to edit Master text styles</a:t>
             </a:r>
           </a:p>
@@ -4190,7 +4191,7 @@
           <a:p>
             <a:fld id="{5BCAD085-E8A6-8845-BD4E-CB4CCA059FC4}" type="datetimeFigureOut">
               <a:rPr lang="en-US" smtClean="0"/>
-              <a:t>1/27/13</a:t>
+              <a:t>7/9/26</a:t>
             </a:fld>
             <a:endParaRPr lang="en-US"/>
           </a:p>
@@ -4293,10 +4294,9 @@
           </a:lstStyle>
           <a:p>
             <a:r>
-              <a:rPr lang="en-US" smtClean="0"/>
+              <a:rPr lang="en-US"/>
               <a:t>Click to edit Master title style</a:t>
             </a:r>
-            <a:endParaRPr lang="en-US"/>
           </a:p>
         </p:txBody>
       </p:sp>
@@ -4420,7 +4420,7 @@
           <a:p>
             <a:pPr lvl="0"/>
             <a:r>
-              <a:rPr lang="en-US" smtClean="0"/>
+              <a:rPr lang="en-US"/>
               <a:t>Click to edit Master text styles</a:t>
             </a:r>
           </a:p>
@@ -4443,7 +4443,7 @@
           <a:p>
             <a:fld id="{5BCAD085-E8A6-8845-BD4E-CB4CCA059FC4}" type="datetimeFigureOut">
               <a:rPr lang="en-US" smtClean="0"/>
-              <a:t>1/27/13</a:t>
+              <a:t>7/9/26</a:t>
             </a:fld>
             <a:endParaRPr lang="en-US"/>
           </a:p>
@@ -4552,10 +4552,9 @@
           <a:lstStyle/>
           <a:p>
             <a:r>
-              <a:rPr lang="en-US" smtClean="0"/>
+              <a:rPr lang="en-US"/>
               <a:t>Click to edit Master title style</a:t>
             </a:r>
-            <a:endParaRPr lang="en-US"/>
           </a:p>
         </p:txBody>
       </p:sp>
@@ -4586,38 +4585,37 @@
           <a:p>
             <a:pPr lvl="0"/>
             <a:r>
-              <a:rPr lang="en-US" smtClean="0"/>
+              <a:rPr lang="en-US"/>
               <a:t>Click to edit Master text styles</a:t>
             </a:r>
           </a:p>
           <a:p>
             <a:pPr lvl="1"/>
             <a:r>
-              <a:rPr lang="en-US" smtClean="0"/>
+              <a:rPr lang="en-US"/>
               <a:t>Second level</a:t>
             </a:r>
           </a:p>
           <a:p>
             <a:pPr lvl="2"/>
             <a:r>
-              <a:rPr lang="en-US" smtClean="0"/>
+              <a:rPr lang="en-US"/>
               <a:t>Third level</a:t>
             </a:r>
           </a:p>
           <a:p>
             <a:pPr lvl="3"/>
             <a:r>
-              <a:rPr lang="en-US" smtClean="0"/>
+              <a:rPr lang="en-US"/>
               <a:t>Fourth level</a:t>
             </a:r>
           </a:p>
           <a:p>
             <a:pPr lvl="4"/>
             <a:r>
-              <a:rPr lang="en-US" smtClean="0"/>
+              <a:rPr lang="en-US"/>
               <a:t>Fifth level</a:t>
             </a:r>
-            <a:endParaRPr lang="en-US"/>
           </a:p>
         </p:txBody>
       </p:sp>
@@ -4656,7 +4654,7 @@
           <a:p>
             <a:fld id="{5BCAD085-E8A6-8845-BD4E-CB4CCA059FC4}" type="datetimeFigureOut">
               <a:rPr lang="en-US" smtClean="0"/>
-              <a:t>1/27/13</a:t>
+              <a:t>7/9/26</a:t>
             </a:fld>
             <a:endParaRPr lang="en-US"/>
           </a:p>
@@ -5015,7 +5013,7 @@
 </file>
 
 <file path=ppt/slides/slide1.xml><?xml version="1.0" encoding="utf-8"?>
-<p:sld xmlns:a="http://schemas.openxmlformats.org/drawingml/2006/main" xmlns:p="http://schemas.openxmlformats.org/presentationml/2006/main" xmlns:r="http://schemas.openxmlformats.org/officeDocument/2006/relationships">
+<p:sld xmlns:a="http://schemas.openxmlformats.org/drawingml/2006/main" xmlns:r="http://schemas.openxmlformats.org/officeDocument/2006/relationships" xmlns:p="http://schemas.openxmlformats.org/presentationml/2006/main">
   <p:cSld>
     <p:bg>
       <p:bgPr>
@@ -5031,7 +5029,14 @@
         <p:cNvGrpSpPr/>
         <p:nvPr/>
       </p:nvGrpSpPr>
-      <p:grpSpPr/>
+      <p:grpSpPr>
+        <a:xfrm>
+          <a:off x="0" y="0"/>
+          <a:ext cx="0" cy="0"/>
+          <a:chOff x="0" y="0"/>
+          <a:chExt cx="0" cy="0"/>
+        </a:xfrm>
+      </p:grpSpPr>
       <p:sp>
         <p:nvSpPr>
           <p:cNvPr id="2" name="Rectangle 1"/>
@@ -5073,6 +5078,7 @@
           <a:lstStyle/>
           <a:p>
             <a:pPr algn="ctr"/>
+            <a:endParaRPr/>
           </a:p>
         </p:txBody>
       </p:sp>
@@ -5093,7 +5099,7 @@
           <a:noFill/>
         </p:spPr>
         <p:txBody>
-          <a:bodyPr wrap="square" anchor="t" lIns="0" rIns="0" tIns="0" bIns="0">
+          <a:bodyPr wrap="square" lIns="0" tIns="0" rIns="0" bIns="0" anchor="t">
             <a:spAutoFit/>
           </a:bodyPr>
           <a:lstStyle/>
@@ -5159,7 +5165,7 @@
           <a:noFill/>
         </p:spPr>
         <p:txBody>
-          <a:bodyPr wrap="square" anchor="t" lIns="0" rIns="0" tIns="0" bIns="0">
+          <a:bodyPr wrap="square" lIns="0" tIns="0" rIns="0" bIns="0" anchor="t">
             <a:spAutoFit/>
           </a:bodyPr>
           <a:lstStyle/>
@@ -5194,7 +5200,7 @@
 </file>
 
 <file path=ppt/slides/slide10.xml><?xml version="1.0" encoding="utf-8"?>
-<p:sld xmlns:a="http://schemas.openxmlformats.org/drawingml/2006/main" xmlns:p="http://schemas.openxmlformats.org/presentationml/2006/main" xmlns:r="http://schemas.openxmlformats.org/officeDocument/2006/relationships">
+<p:sld xmlns:a="http://schemas.openxmlformats.org/drawingml/2006/main" xmlns:r="http://schemas.openxmlformats.org/officeDocument/2006/relationships" xmlns:p="http://schemas.openxmlformats.org/presentationml/2006/main">
   <p:cSld>
     <p:bg>
       <p:bgPr>
@@ -5210,7 +5216,14 @@
         <p:cNvGrpSpPr/>
         <p:nvPr/>
       </p:nvGrpSpPr>
-      <p:grpSpPr/>
+      <p:grpSpPr>
+        <a:xfrm>
+          <a:off x="0" y="0"/>
+          <a:ext cx="0" cy="0"/>
+          <a:chOff x="0" y="0"/>
+          <a:chExt cx="0" cy="0"/>
+        </a:xfrm>
+      </p:grpSpPr>
       <p:sp>
         <p:nvSpPr>
           <p:cNvPr id="2" name="TextBox 1"/>
@@ -5228,7 +5241,7 @@
           <a:noFill/>
         </p:spPr>
         <p:txBody>
-          <a:bodyPr wrap="square" anchor="t" lIns="0" rIns="0" tIns="0" bIns="0">
+          <a:bodyPr wrap="square" lIns="0" tIns="0" rIns="0" bIns="0" anchor="t">
             <a:spAutoFit/>
           </a:bodyPr>
           <a:lstStyle/>
@@ -5286,6 +5299,7 @@
           <a:lstStyle/>
           <a:p>
             <a:pPr algn="ctr"/>
+            <a:endParaRPr/>
           </a:p>
         </p:txBody>
       </p:sp>
@@ -5306,7 +5320,7 @@
           <a:noFill/>
         </p:spPr>
         <p:txBody>
-          <a:bodyPr wrap="square" anchor="ctr" lIns="0" rIns="0" tIns="0" bIns="0">
+          <a:bodyPr wrap="square" lIns="0" tIns="0" rIns="0" bIns="0" anchor="ctr">
             <a:spAutoFit/>
           </a:bodyPr>
           <a:lstStyle/>
@@ -5446,6 +5460,7 @@
           <a:lstStyle/>
           <a:p>
             <a:pPr algn="ctr"/>
+            <a:endParaRPr/>
           </a:p>
         </p:txBody>
       </p:sp>
@@ -5466,7 +5481,7 @@
           <a:noFill/>
         </p:spPr>
         <p:txBody>
-          <a:bodyPr wrap="square" anchor="t" lIns="0" rIns="0" tIns="0" bIns="0">
+          <a:bodyPr wrap="square" lIns="0" tIns="0" rIns="0" bIns="0" anchor="t">
             <a:spAutoFit/>
           </a:bodyPr>
           <a:lstStyle/>
@@ -5509,7 +5524,7 @@
           <a:noFill/>
         </p:spPr>
         <p:txBody>
-          <a:bodyPr wrap="square" anchor="t" lIns="0" rIns="0" tIns="0" bIns="0">
+          <a:bodyPr wrap="square" lIns="0" tIns="0" rIns="0" bIns="0" anchor="t">
             <a:spAutoFit/>
           </a:bodyPr>
           <a:lstStyle/>
@@ -5536,7 +5551,7 @@
 </file>
 
 <file path=ppt/slides/slide11.xml><?xml version="1.0" encoding="utf-8"?>
-<p:sld xmlns:a="http://schemas.openxmlformats.org/drawingml/2006/main" xmlns:p="http://schemas.openxmlformats.org/presentationml/2006/main" xmlns:r="http://schemas.openxmlformats.org/officeDocument/2006/relationships">
+<p:sld xmlns:a="http://schemas.openxmlformats.org/drawingml/2006/main" xmlns:r="http://schemas.openxmlformats.org/officeDocument/2006/relationships" xmlns:p="http://schemas.openxmlformats.org/presentationml/2006/main">
   <p:cSld>
     <p:bg>
       <p:bgPr>
@@ -5552,7 +5567,14 @@
         <p:cNvGrpSpPr/>
         <p:nvPr/>
       </p:nvGrpSpPr>
-      <p:grpSpPr/>
+      <p:grpSpPr>
+        <a:xfrm>
+          <a:off x="0" y="0"/>
+          <a:ext cx="0" cy="0"/>
+          <a:chOff x="0" y="0"/>
+          <a:chExt cx="0" cy="0"/>
+        </a:xfrm>
+      </p:grpSpPr>
       <p:sp>
         <p:nvSpPr>
           <p:cNvPr id="2" name="Rectangle 1"/>
@@ -5594,6 +5616,7 @@
           <a:lstStyle/>
           <a:p>
             <a:pPr algn="ctr"/>
+            <a:endParaRPr/>
           </a:p>
         </p:txBody>
       </p:sp>
@@ -5667,7 +5690,7 @@
           <a:noFill/>
         </p:spPr>
         <p:txBody>
-          <a:bodyPr wrap="square" anchor="ctr" lIns="0" rIns="0" tIns="0" bIns="0">
+          <a:bodyPr wrap="square" lIns="0" tIns="0" rIns="0" bIns="0" anchor="ctr">
             <a:spAutoFit/>
           </a:bodyPr>
           <a:lstStyle/>
@@ -5701,7 +5724,7 @@
           <a:noFill/>
         </p:spPr>
         <p:txBody>
-          <a:bodyPr wrap="square" anchor="t" lIns="0" rIns="0" tIns="0" bIns="0">
+          <a:bodyPr wrap="square" lIns="0" tIns="0" rIns="0" bIns="0" anchor="t">
             <a:spAutoFit/>
           </a:bodyPr>
           <a:lstStyle/>
@@ -5812,6 +5835,7 @@
           <a:lstStyle/>
           <a:p>
             <a:pPr algn="ctr"/>
+            <a:endParaRPr/>
           </a:p>
         </p:txBody>
       </p:sp>
@@ -5832,7 +5856,7 @@
           <a:noFill/>
         </p:spPr>
         <p:txBody>
-          <a:bodyPr wrap="square" anchor="ctr" lIns="0" rIns="0" tIns="0" bIns="0">
+          <a:bodyPr wrap="square" lIns="0" tIns="0" rIns="0" bIns="0" anchor="ctr">
             <a:spAutoFit/>
           </a:bodyPr>
           <a:lstStyle/>
@@ -5890,6 +5914,7 @@
           <a:lstStyle/>
           <a:p>
             <a:pPr algn="ctr"/>
+            <a:endParaRPr/>
           </a:p>
         </p:txBody>
       </p:sp>
@@ -5910,7 +5935,7 @@
           <a:noFill/>
         </p:spPr>
         <p:txBody>
-          <a:bodyPr wrap="square" anchor="t" lIns="0" rIns="0" tIns="0" bIns="0">
+          <a:bodyPr wrap="square" lIns="0" tIns="0" rIns="0" bIns="0" anchor="t">
             <a:spAutoFit/>
           </a:bodyPr>
           <a:lstStyle/>
@@ -5953,7 +5978,7 @@
           <a:noFill/>
         </p:spPr>
         <p:txBody>
-          <a:bodyPr wrap="square" anchor="t" lIns="0" rIns="0" tIns="0" bIns="0">
+          <a:bodyPr wrap="square" lIns="0" tIns="0" rIns="0" bIns="0" anchor="t">
             <a:spAutoFit/>
           </a:bodyPr>
           <a:lstStyle/>
@@ -5980,7 +6005,7 @@
 </file>
 
 <file path=ppt/slides/slide12.xml><?xml version="1.0" encoding="utf-8"?>
-<p:sld xmlns:a="http://schemas.openxmlformats.org/drawingml/2006/main" xmlns:p="http://schemas.openxmlformats.org/presentationml/2006/main" xmlns:r="http://schemas.openxmlformats.org/officeDocument/2006/relationships">
+<p:sld xmlns:a="http://schemas.openxmlformats.org/drawingml/2006/main" xmlns:r="http://schemas.openxmlformats.org/officeDocument/2006/relationships" xmlns:p="http://schemas.openxmlformats.org/presentationml/2006/main">
   <p:cSld>
     <p:bg>
       <p:bgPr>
@@ -5996,7 +6021,14 @@
         <p:cNvGrpSpPr/>
         <p:nvPr/>
       </p:nvGrpSpPr>
-      <p:grpSpPr/>
+      <p:grpSpPr>
+        <a:xfrm>
+          <a:off x="0" y="0"/>
+          <a:ext cx="0" cy="0"/>
+          <a:chOff x="0" y="0"/>
+          <a:chExt cx="0" cy="0"/>
+        </a:xfrm>
+      </p:grpSpPr>
       <p:sp>
         <p:nvSpPr>
           <p:cNvPr id="2" name="Rectangle 1"/>
@@ -6038,6 +6070,7 @@
           <a:lstStyle/>
           <a:p>
             <a:pPr algn="ctr"/>
+            <a:endParaRPr/>
           </a:p>
         </p:txBody>
       </p:sp>
@@ -6058,7 +6091,7 @@
           <a:noFill/>
         </p:spPr>
         <p:txBody>
-          <a:bodyPr wrap="square" anchor="t" lIns="0" rIns="0" tIns="0" bIns="0">
+          <a:bodyPr wrap="square" lIns="0" tIns="0" rIns="0" bIns="0" anchor="t">
             <a:spAutoFit/>
           </a:bodyPr>
           <a:lstStyle/>
@@ -6092,7 +6125,7 @@
           <a:noFill/>
         </p:spPr>
         <p:txBody>
-          <a:bodyPr wrap="square" anchor="t" lIns="0" rIns="0" tIns="0" bIns="0">
+          <a:bodyPr wrap="square" lIns="0" tIns="0" rIns="0" bIns="0" anchor="t">
             <a:spAutoFit/>
           </a:bodyPr>
           <a:lstStyle/>
@@ -6182,6 +6215,7 @@
           <a:lstStyle/>
           <a:p>
             <a:pPr algn="ctr"/>
+            <a:endParaRPr/>
           </a:p>
         </p:txBody>
       </p:sp>
@@ -6202,7 +6236,7 @@
           <a:noFill/>
         </p:spPr>
         <p:txBody>
-          <a:bodyPr wrap="square" anchor="t" lIns="0" rIns="0" tIns="0" bIns="0">
+          <a:bodyPr wrap="square" lIns="0" tIns="0" rIns="0" bIns="0" anchor="t">
             <a:spAutoFit/>
           </a:bodyPr>
           <a:lstStyle/>
@@ -6245,21 +6279,13 @@
           <a:noFill/>
         </p:spPr>
         <p:txBody>
-          <a:bodyPr wrap="square" anchor="t" lIns="0" rIns="0" tIns="0" bIns="0">
+          <a:bodyPr wrap="square" lIns="0" tIns="0" rIns="0" bIns="0" anchor="t">
             <a:spAutoFit/>
           </a:bodyPr>
           <a:lstStyle/>
           <a:p>
             <a:pPr algn="r"/>
-            <a:r>
-              <a:rPr sz="1100" b="0" i="0">
-                <a:solidFill>
-                  <a:srgbClr val="7A7A7A"/>
-                </a:solidFill>
-                <a:latin typeface="Roboto"/>
-              </a:rPr>
-              <a:t/>
-            </a:r>
+            <a:endParaRPr/>
           </a:p>
         </p:txBody>
       </p:sp>
@@ -6272,7 +6298,7 @@
 </file>
 
 <file path=ppt/slides/slide13.xml><?xml version="1.0" encoding="utf-8"?>
-<p:sld xmlns:a="http://schemas.openxmlformats.org/drawingml/2006/main" xmlns:p="http://schemas.openxmlformats.org/presentationml/2006/main" xmlns:r="http://schemas.openxmlformats.org/officeDocument/2006/relationships">
+<p:sld xmlns:a="http://schemas.openxmlformats.org/drawingml/2006/main" xmlns:r="http://schemas.openxmlformats.org/officeDocument/2006/relationships" xmlns:p="http://schemas.openxmlformats.org/presentationml/2006/main">
   <p:cSld>
     <p:bg>
       <p:bgPr>
@@ -6288,7 +6314,14 @@
         <p:cNvGrpSpPr/>
         <p:nvPr/>
       </p:nvGrpSpPr>
-      <p:grpSpPr/>
+      <p:grpSpPr>
+        <a:xfrm>
+          <a:off x="0" y="0"/>
+          <a:ext cx="0" cy="0"/>
+          <a:chOff x="0" y="0"/>
+          <a:chExt cx="0" cy="0"/>
+        </a:xfrm>
+      </p:grpSpPr>
       <p:sp>
         <p:nvSpPr>
           <p:cNvPr id="2" name="TextBox 1"/>
@@ -6306,7 +6339,7 @@
           <a:noFill/>
         </p:spPr>
         <p:txBody>
-          <a:bodyPr wrap="square" anchor="t" lIns="0" rIns="0" tIns="0" bIns="0">
+          <a:bodyPr wrap="square" lIns="0" tIns="0" rIns="0" bIns="0" anchor="t">
             <a:spAutoFit/>
           </a:bodyPr>
           <a:lstStyle/>
@@ -6364,6 +6397,7 @@
           <a:lstStyle/>
           <a:p>
             <a:pPr algn="ctr"/>
+            <a:endParaRPr/>
           </a:p>
         </p:txBody>
       </p:sp>
@@ -6384,7 +6418,7 @@
           <a:noFill/>
         </p:spPr>
         <p:txBody>
-          <a:bodyPr wrap="square" anchor="ctr" lIns="0" rIns="0" tIns="0" bIns="0">
+          <a:bodyPr wrap="square" lIns="0" tIns="0" rIns="0" bIns="0" anchor="ctr">
             <a:spAutoFit/>
           </a:bodyPr>
           <a:lstStyle/>
@@ -6524,6 +6558,7 @@
           <a:lstStyle/>
           <a:p>
             <a:pPr algn="ctr"/>
+            <a:endParaRPr/>
           </a:p>
         </p:txBody>
       </p:sp>
@@ -6544,7 +6579,7 @@
           <a:noFill/>
         </p:spPr>
         <p:txBody>
-          <a:bodyPr wrap="square" anchor="t" lIns="0" rIns="0" tIns="0" bIns="0">
+          <a:bodyPr wrap="square" lIns="0" tIns="0" rIns="0" bIns="0" anchor="t">
             <a:spAutoFit/>
           </a:bodyPr>
           <a:lstStyle/>
@@ -6587,7 +6622,7 @@
           <a:noFill/>
         </p:spPr>
         <p:txBody>
-          <a:bodyPr wrap="square" anchor="t" lIns="0" rIns="0" tIns="0" bIns="0">
+          <a:bodyPr wrap="square" lIns="0" tIns="0" rIns="0" bIns="0" anchor="t">
             <a:spAutoFit/>
           </a:bodyPr>
           <a:lstStyle/>
@@ -6614,7 +6649,7 @@
 </file>
 
 <file path=ppt/slides/slide14.xml><?xml version="1.0" encoding="utf-8"?>
-<p:sld xmlns:a="http://schemas.openxmlformats.org/drawingml/2006/main" xmlns:p="http://schemas.openxmlformats.org/presentationml/2006/main" xmlns:r="http://schemas.openxmlformats.org/officeDocument/2006/relationships">
+<p:sld xmlns:a="http://schemas.openxmlformats.org/drawingml/2006/main" xmlns:r="http://schemas.openxmlformats.org/officeDocument/2006/relationships" xmlns:p="http://schemas.openxmlformats.org/presentationml/2006/main">
   <p:cSld>
     <p:bg>
       <p:bgPr>
@@ -6630,7 +6665,14 @@
         <p:cNvGrpSpPr/>
         <p:nvPr/>
       </p:nvGrpSpPr>
-      <p:grpSpPr/>
+      <p:grpSpPr>
+        <a:xfrm>
+          <a:off x="0" y="0"/>
+          <a:ext cx="0" cy="0"/>
+          <a:chOff x="0" y="0"/>
+          <a:chExt cx="0" cy="0"/>
+        </a:xfrm>
+      </p:grpSpPr>
       <p:sp>
         <p:nvSpPr>
           <p:cNvPr id="2" name="TextBox 1"/>
@@ -6648,7 +6690,7 @@
           <a:noFill/>
         </p:spPr>
         <p:txBody>
-          <a:bodyPr wrap="square" anchor="t" lIns="0" rIns="0" tIns="0" bIns="0">
+          <a:bodyPr wrap="square" lIns="0" tIns="0" rIns="0" bIns="0" anchor="t">
             <a:spAutoFit/>
           </a:bodyPr>
           <a:lstStyle/>
@@ -6706,6 +6748,7 @@
           <a:lstStyle/>
           <a:p>
             <a:pPr algn="ctr"/>
+            <a:endParaRPr/>
           </a:p>
         </p:txBody>
       </p:sp>
@@ -6726,7 +6769,7 @@
           <a:noFill/>
         </p:spPr>
         <p:txBody>
-          <a:bodyPr wrap="square" anchor="ctr" lIns="0" rIns="0" tIns="0" bIns="0">
+          <a:bodyPr wrap="square" lIns="0" tIns="0" rIns="0" bIns="0" anchor="ctr">
             <a:spAutoFit/>
           </a:bodyPr>
           <a:lstStyle/>
@@ -6866,6 +6909,7 @@
           <a:lstStyle/>
           <a:p>
             <a:pPr algn="ctr"/>
+            <a:endParaRPr/>
           </a:p>
         </p:txBody>
       </p:sp>
@@ -6886,7 +6930,7 @@
           <a:noFill/>
         </p:spPr>
         <p:txBody>
-          <a:bodyPr wrap="square" anchor="t" lIns="0" rIns="0" tIns="0" bIns="0">
+          <a:bodyPr wrap="square" lIns="0" tIns="0" rIns="0" bIns="0" anchor="t">
             <a:spAutoFit/>
           </a:bodyPr>
           <a:lstStyle/>
@@ -6929,7 +6973,7 @@
           <a:noFill/>
         </p:spPr>
         <p:txBody>
-          <a:bodyPr wrap="square" anchor="t" lIns="0" rIns="0" tIns="0" bIns="0">
+          <a:bodyPr wrap="square" lIns="0" tIns="0" rIns="0" bIns="0" anchor="t">
             <a:spAutoFit/>
           </a:bodyPr>
           <a:lstStyle/>
@@ -6956,7 +7000,7 @@
 </file>
 
 <file path=ppt/slides/slide15.xml><?xml version="1.0" encoding="utf-8"?>
-<p:sld xmlns:a="http://schemas.openxmlformats.org/drawingml/2006/main" xmlns:p="http://schemas.openxmlformats.org/presentationml/2006/main" xmlns:r="http://schemas.openxmlformats.org/officeDocument/2006/relationships">
+<p:sld xmlns:a="http://schemas.openxmlformats.org/drawingml/2006/main" xmlns:r="http://schemas.openxmlformats.org/officeDocument/2006/relationships" xmlns:p="http://schemas.openxmlformats.org/presentationml/2006/main">
   <p:cSld>
     <p:bg>
       <p:bgPr>
@@ -6972,7 +7016,14 @@
         <p:cNvGrpSpPr/>
         <p:nvPr/>
       </p:nvGrpSpPr>
-      <p:grpSpPr/>
+      <p:grpSpPr>
+        <a:xfrm>
+          <a:off x="0" y="0"/>
+          <a:ext cx="0" cy="0"/>
+          <a:chOff x="0" y="0"/>
+          <a:chExt cx="0" cy="0"/>
+        </a:xfrm>
+      </p:grpSpPr>
       <p:sp>
         <p:nvSpPr>
           <p:cNvPr id="2" name="Rectangle 1"/>
@@ -7014,6 +7065,7 @@
           <a:lstStyle/>
           <a:p>
             <a:pPr algn="ctr"/>
+            <a:endParaRPr/>
           </a:p>
         </p:txBody>
       </p:sp>
@@ -7087,7 +7139,7 @@
           <a:noFill/>
         </p:spPr>
         <p:txBody>
-          <a:bodyPr wrap="square" anchor="ctr" lIns="0" rIns="0" tIns="0" bIns="0">
+          <a:bodyPr wrap="square" lIns="0" tIns="0" rIns="0" bIns="0" anchor="ctr">
             <a:spAutoFit/>
           </a:bodyPr>
           <a:lstStyle/>
@@ -7121,7 +7173,7 @@
           <a:noFill/>
         </p:spPr>
         <p:txBody>
-          <a:bodyPr wrap="square" anchor="t" lIns="0" rIns="0" tIns="0" bIns="0">
+          <a:bodyPr wrap="square" lIns="0" tIns="0" rIns="0" bIns="0" anchor="t">
             <a:spAutoFit/>
           </a:bodyPr>
           <a:lstStyle/>
@@ -7232,6 +7284,7 @@
           <a:lstStyle/>
           <a:p>
             <a:pPr algn="ctr"/>
+            <a:endParaRPr/>
           </a:p>
         </p:txBody>
       </p:sp>
@@ -7252,7 +7305,7 @@
           <a:noFill/>
         </p:spPr>
         <p:txBody>
-          <a:bodyPr wrap="square" anchor="ctr" lIns="0" rIns="0" tIns="0" bIns="0">
+          <a:bodyPr wrap="square" lIns="0" tIns="0" rIns="0" bIns="0" anchor="ctr">
             <a:spAutoFit/>
           </a:bodyPr>
           <a:lstStyle/>
@@ -7310,6 +7363,7 @@
           <a:lstStyle/>
           <a:p>
             <a:pPr algn="ctr"/>
+            <a:endParaRPr/>
           </a:p>
         </p:txBody>
       </p:sp>
@@ -7330,7 +7384,7 @@
           <a:noFill/>
         </p:spPr>
         <p:txBody>
-          <a:bodyPr wrap="square" anchor="t" lIns="0" rIns="0" tIns="0" bIns="0">
+          <a:bodyPr wrap="square" lIns="0" tIns="0" rIns="0" bIns="0" anchor="t">
             <a:spAutoFit/>
           </a:bodyPr>
           <a:lstStyle/>
@@ -7373,7 +7427,7 @@
           <a:noFill/>
         </p:spPr>
         <p:txBody>
-          <a:bodyPr wrap="square" anchor="t" lIns="0" rIns="0" tIns="0" bIns="0">
+          <a:bodyPr wrap="square" lIns="0" tIns="0" rIns="0" bIns="0" anchor="t">
             <a:spAutoFit/>
           </a:bodyPr>
           <a:lstStyle/>
@@ -7400,7 +7454,7 @@
 </file>
 
 <file path=ppt/slides/slide16.xml><?xml version="1.0" encoding="utf-8"?>
-<p:sld xmlns:a="http://schemas.openxmlformats.org/drawingml/2006/main" xmlns:p="http://schemas.openxmlformats.org/presentationml/2006/main" xmlns:r="http://schemas.openxmlformats.org/officeDocument/2006/relationships">
+<p:sld xmlns:a="http://schemas.openxmlformats.org/drawingml/2006/main" xmlns:r="http://schemas.openxmlformats.org/officeDocument/2006/relationships" xmlns:p="http://schemas.openxmlformats.org/presentationml/2006/main">
   <p:cSld>
     <p:bg>
       <p:bgPr>
@@ -7416,7 +7470,14 @@
         <p:cNvGrpSpPr/>
         <p:nvPr/>
       </p:nvGrpSpPr>
-      <p:grpSpPr/>
+      <p:grpSpPr>
+        <a:xfrm>
+          <a:off x="0" y="0"/>
+          <a:ext cx="0" cy="0"/>
+          <a:chOff x="0" y="0"/>
+          <a:chExt cx="0" cy="0"/>
+        </a:xfrm>
+      </p:grpSpPr>
       <p:sp>
         <p:nvSpPr>
           <p:cNvPr id="2" name="TextBox 1"/>
@@ -7434,7 +7495,7 @@
           <a:noFill/>
         </p:spPr>
         <p:txBody>
-          <a:bodyPr wrap="square" anchor="t" lIns="0" rIns="0" tIns="0" bIns="0">
+          <a:bodyPr wrap="square" lIns="0" tIns="0" rIns="0" bIns="0" anchor="t">
             <a:spAutoFit/>
           </a:bodyPr>
           <a:lstStyle/>
@@ -7508,6 +7569,7 @@
           <a:lstStyle/>
           <a:p>
             <a:pPr algn="ctr"/>
+            <a:endParaRPr/>
           </a:p>
         </p:txBody>
       </p:sp>
@@ -7554,6 +7616,7 @@
           <a:lstStyle/>
           <a:p>
             <a:pPr algn="ctr"/>
+            <a:endParaRPr/>
           </a:p>
         </p:txBody>
       </p:sp>
@@ -7598,6 +7661,7 @@
           <a:lstStyle/>
           <a:p>
             <a:pPr algn="ctr"/>
+            <a:endParaRPr/>
           </a:p>
         </p:txBody>
       </p:sp>
@@ -7618,7 +7682,7 @@
           <a:noFill/>
         </p:spPr>
         <p:txBody>
-          <a:bodyPr wrap="square" anchor="ctr" lIns="0" rIns="0" tIns="0" bIns="0">
+          <a:bodyPr wrap="square" lIns="0" tIns="0" rIns="0" bIns="0" anchor="ctr">
             <a:spAutoFit/>
           </a:bodyPr>
           <a:lstStyle/>
@@ -7683,6 +7747,7 @@
           <a:lstStyle/>
           <a:p>
             <a:pPr algn="ctr"/>
+            <a:endParaRPr/>
           </a:p>
         </p:txBody>
       </p:sp>
@@ -7727,6 +7792,7 @@
           <a:lstStyle/>
           <a:p>
             <a:pPr algn="ctr"/>
+            <a:endParaRPr/>
           </a:p>
         </p:txBody>
       </p:sp>
@@ -7747,7 +7813,7 @@
           <a:noFill/>
         </p:spPr>
         <p:txBody>
-          <a:bodyPr wrap="square" anchor="ctr" lIns="0" rIns="0" tIns="0" bIns="0">
+          <a:bodyPr wrap="square" lIns="0" tIns="0" rIns="0" bIns="0" anchor="ctr">
             <a:spAutoFit/>
           </a:bodyPr>
           <a:lstStyle/>
@@ -7812,6 +7878,7 @@
           <a:lstStyle/>
           <a:p>
             <a:pPr algn="ctr"/>
+            <a:endParaRPr/>
           </a:p>
         </p:txBody>
       </p:sp>
@@ -7856,6 +7923,7 @@
           <a:lstStyle/>
           <a:p>
             <a:pPr algn="ctr"/>
+            <a:endParaRPr/>
           </a:p>
         </p:txBody>
       </p:sp>
@@ -7876,7 +7944,7 @@
           <a:noFill/>
         </p:spPr>
         <p:txBody>
-          <a:bodyPr wrap="square" anchor="ctr" lIns="0" rIns="0" tIns="0" bIns="0">
+          <a:bodyPr wrap="square" lIns="0" tIns="0" rIns="0" bIns="0" anchor="ctr">
             <a:spAutoFit/>
           </a:bodyPr>
           <a:lstStyle/>
@@ -7941,6 +8009,7 @@
           <a:lstStyle/>
           <a:p>
             <a:pPr algn="ctr"/>
+            <a:endParaRPr/>
           </a:p>
         </p:txBody>
       </p:sp>
@@ -7985,6 +8054,7 @@
           <a:lstStyle/>
           <a:p>
             <a:pPr algn="ctr"/>
+            <a:endParaRPr/>
           </a:p>
         </p:txBody>
       </p:sp>
@@ -8005,7 +8075,7 @@
           <a:noFill/>
         </p:spPr>
         <p:txBody>
-          <a:bodyPr wrap="square" anchor="ctr" lIns="0" rIns="0" tIns="0" bIns="0">
+          <a:bodyPr wrap="square" lIns="0" tIns="0" rIns="0" bIns="0" anchor="ctr">
             <a:spAutoFit/>
           </a:bodyPr>
           <a:lstStyle/>
@@ -8068,6 +8138,7 @@
           <a:lstStyle/>
           <a:p>
             <a:pPr algn="ctr"/>
+            <a:endParaRPr/>
           </a:p>
         </p:txBody>
       </p:sp>
@@ -8088,7 +8159,7 @@
           <a:noFill/>
         </p:spPr>
         <p:txBody>
-          <a:bodyPr wrap="square" anchor="t" lIns="0" rIns="0" tIns="0" bIns="0">
+          <a:bodyPr wrap="square" lIns="0" tIns="0" rIns="0" bIns="0" anchor="t">
             <a:spAutoFit/>
           </a:bodyPr>
           <a:lstStyle/>
@@ -8131,7 +8202,7 @@
           <a:noFill/>
         </p:spPr>
         <p:txBody>
-          <a:bodyPr wrap="square" anchor="t" lIns="0" rIns="0" tIns="0" bIns="0">
+          <a:bodyPr wrap="square" lIns="0" tIns="0" rIns="0" bIns="0" anchor="t">
             <a:spAutoFit/>
           </a:bodyPr>
           <a:lstStyle/>
@@ -8158,7 +8229,7 @@
 </file>
 
 <file path=ppt/slides/slide17.xml><?xml version="1.0" encoding="utf-8"?>
-<p:sld xmlns:a="http://schemas.openxmlformats.org/drawingml/2006/main" xmlns:p="http://schemas.openxmlformats.org/presentationml/2006/main" xmlns:r="http://schemas.openxmlformats.org/officeDocument/2006/relationships">
+<p:sld xmlns:a="http://schemas.openxmlformats.org/drawingml/2006/main" xmlns:r="http://schemas.openxmlformats.org/officeDocument/2006/relationships" xmlns:p="http://schemas.openxmlformats.org/presentationml/2006/main">
   <p:cSld>
     <p:bg>
       <p:bgPr>
@@ -8174,7 +8245,14 @@
         <p:cNvGrpSpPr/>
         <p:nvPr/>
       </p:nvGrpSpPr>
-      <p:grpSpPr/>
+      <p:grpSpPr>
+        <a:xfrm>
+          <a:off x="0" y="0"/>
+          <a:ext cx="0" cy="0"/>
+          <a:chOff x="0" y="0"/>
+          <a:chExt cx="0" cy="0"/>
+        </a:xfrm>
+      </p:grpSpPr>
       <p:sp>
         <p:nvSpPr>
           <p:cNvPr id="2" name="Rectangle 1"/>
@@ -8216,6 +8294,7 @@
           <a:lstStyle/>
           <a:p>
             <a:pPr algn="ctr"/>
+            <a:endParaRPr/>
           </a:p>
         </p:txBody>
       </p:sp>
@@ -8236,7 +8315,7 @@
           <a:noFill/>
         </p:spPr>
         <p:txBody>
-          <a:bodyPr wrap="square" anchor="t" lIns="0" rIns="0" tIns="0" bIns="0">
+          <a:bodyPr wrap="square" lIns="0" tIns="0" rIns="0" bIns="0" anchor="t">
             <a:spAutoFit/>
           </a:bodyPr>
           <a:lstStyle/>
@@ -8300,7 +8379,7 @@
 </file>
 
 <file path=ppt/slides/slide2.xml><?xml version="1.0" encoding="utf-8"?>
-<p:sld xmlns:a="http://schemas.openxmlformats.org/drawingml/2006/main" xmlns:p="http://schemas.openxmlformats.org/presentationml/2006/main" xmlns:r="http://schemas.openxmlformats.org/officeDocument/2006/relationships">
+<p:sld xmlns:a="http://schemas.openxmlformats.org/drawingml/2006/main" xmlns:r="http://schemas.openxmlformats.org/officeDocument/2006/relationships" xmlns:p="http://schemas.openxmlformats.org/presentationml/2006/main">
   <p:cSld>
     <p:bg>
       <p:bgPr>
@@ -8316,7 +8395,14 @@
         <p:cNvGrpSpPr/>
         <p:nvPr/>
       </p:nvGrpSpPr>
-      <p:grpSpPr/>
+      <p:grpSpPr>
+        <a:xfrm>
+          <a:off x="0" y="0"/>
+          <a:ext cx="0" cy="0"/>
+          <a:chOff x="0" y="0"/>
+          <a:chExt cx="0" cy="0"/>
+        </a:xfrm>
+      </p:grpSpPr>
       <p:sp>
         <p:nvSpPr>
           <p:cNvPr id="2" name="TextBox 1"/>
@@ -8334,7 +8420,7 @@
           <a:noFill/>
         </p:spPr>
         <p:txBody>
-          <a:bodyPr wrap="square" anchor="t" lIns="0" rIns="0" tIns="0" bIns="0">
+          <a:bodyPr wrap="square" lIns="0" tIns="0" rIns="0" bIns="0" anchor="t">
             <a:spAutoFit/>
           </a:bodyPr>
           <a:lstStyle/>
@@ -8392,6 +8478,7 @@
           <a:lstStyle/>
           <a:p>
             <a:pPr algn="ctr"/>
+            <a:endParaRPr/>
           </a:p>
         </p:txBody>
       </p:sp>
@@ -8412,7 +8499,7 @@
           <a:noFill/>
         </p:spPr>
         <p:txBody>
-          <a:bodyPr wrap="square" anchor="t" lIns="0" rIns="0" tIns="0" bIns="0">
+          <a:bodyPr wrap="square" lIns="0" tIns="0" rIns="0" bIns="0" anchor="t">
             <a:spAutoFit/>
           </a:bodyPr>
           <a:lstStyle/>
@@ -8551,7 +8638,7 @@
           <p:nvPr/>
         </p:nvPicPr>
         <p:blipFill>
-          <a:blip r:embed="rId2"/>
+          <a:blip r:embed="rId3"/>
           <a:stretch>
             <a:fillRect/>
           </a:stretch>
@@ -8607,6 +8694,7 @@
           <a:lstStyle/>
           <a:p>
             <a:pPr algn="ctr"/>
+            <a:endParaRPr/>
           </a:p>
         </p:txBody>
       </p:sp>
@@ -8627,7 +8715,7 @@
           <a:noFill/>
         </p:spPr>
         <p:txBody>
-          <a:bodyPr wrap="square" anchor="t" lIns="0" rIns="0" tIns="0" bIns="0">
+          <a:bodyPr wrap="square" lIns="0" tIns="0" rIns="0" bIns="0" anchor="t">
             <a:spAutoFit/>
           </a:bodyPr>
           <a:lstStyle/>
@@ -8670,7 +8758,7 @@
           <a:noFill/>
         </p:spPr>
         <p:txBody>
-          <a:bodyPr wrap="square" anchor="t" lIns="0" rIns="0" tIns="0" bIns="0">
+          <a:bodyPr wrap="square" lIns="0" tIns="0" rIns="0" bIns="0" anchor="t">
             <a:spAutoFit/>
           </a:bodyPr>
           <a:lstStyle/>
@@ -8697,7 +8785,7 @@
 </file>
 
 <file path=ppt/slides/slide3.xml><?xml version="1.0" encoding="utf-8"?>
-<p:sld xmlns:a="http://schemas.openxmlformats.org/drawingml/2006/main" xmlns:p="http://schemas.openxmlformats.org/presentationml/2006/main" xmlns:r="http://schemas.openxmlformats.org/officeDocument/2006/relationships">
+<p:sld xmlns:a="http://schemas.openxmlformats.org/drawingml/2006/main" xmlns:r="http://schemas.openxmlformats.org/officeDocument/2006/relationships" xmlns:p="http://schemas.openxmlformats.org/presentationml/2006/main">
   <p:cSld>
     <p:bg>
       <p:bgPr>
@@ -8713,7 +8801,14 @@
         <p:cNvGrpSpPr/>
         <p:nvPr/>
       </p:nvGrpSpPr>
-      <p:grpSpPr/>
+      <p:grpSpPr>
+        <a:xfrm>
+          <a:off x="0" y="0"/>
+          <a:ext cx="0" cy="0"/>
+          <a:chOff x="0" y="0"/>
+          <a:chExt cx="0" cy="0"/>
+        </a:xfrm>
+      </p:grpSpPr>
       <p:sp>
         <p:nvSpPr>
           <p:cNvPr id="2" name="Rectangle 1"/>
@@ -8755,6 +8850,7 @@
           <a:lstStyle/>
           <a:p>
             <a:pPr algn="ctr"/>
+            <a:endParaRPr/>
           </a:p>
         </p:txBody>
       </p:sp>
@@ -8775,7 +8871,7 @@
           <a:noFill/>
         </p:spPr>
         <p:txBody>
-          <a:bodyPr wrap="square" anchor="t" lIns="0" rIns="0" tIns="0" bIns="0">
+          <a:bodyPr wrap="square" lIns="0" tIns="0" rIns="0" bIns="0" anchor="t">
             <a:spAutoFit/>
           </a:bodyPr>
           <a:lstStyle/>
@@ -8809,7 +8905,7 @@
           <a:noFill/>
         </p:spPr>
         <p:txBody>
-          <a:bodyPr wrap="square" anchor="t" lIns="0" rIns="0" tIns="0" bIns="0">
+          <a:bodyPr wrap="square" lIns="0" tIns="0" rIns="0" bIns="0" anchor="t">
             <a:spAutoFit/>
           </a:bodyPr>
           <a:lstStyle/>
@@ -8899,6 +8995,7 @@
           <a:lstStyle/>
           <a:p>
             <a:pPr algn="ctr"/>
+            <a:endParaRPr/>
           </a:p>
         </p:txBody>
       </p:sp>
@@ -8919,7 +9016,7 @@
           <a:noFill/>
         </p:spPr>
         <p:txBody>
-          <a:bodyPr wrap="square" anchor="t" lIns="0" rIns="0" tIns="0" bIns="0">
+          <a:bodyPr wrap="square" lIns="0" tIns="0" rIns="0" bIns="0" anchor="t">
             <a:spAutoFit/>
           </a:bodyPr>
           <a:lstStyle/>
@@ -8962,21 +9059,13 @@
           <a:noFill/>
         </p:spPr>
         <p:txBody>
-          <a:bodyPr wrap="square" anchor="t" lIns="0" rIns="0" tIns="0" bIns="0">
+          <a:bodyPr wrap="square" lIns="0" tIns="0" rIns="0" bIns="0" anchor="t">
             <a:spAutoFit/>
           </a:bodyPr>
           <a:lstStyle/>
           <a:p>
             <a:pPr algn="r"/>
-            <a:r>
-              <a:rPr sz="1100" b="0" i="0">
-                <a:solidFill>
-                  <a:srgbClr val="7A7A7A"/>
-                </a:solidFill>
-                <a:latin typeface="Roboto"/>
-              </a:rPr>
-              <a:t/>
-            </a:r>
+            <a:endParaRPr/>
           </a:p>
         </p:txBody>
       </p:sp>
@@ -8989,7 +9078,7 @@
 </file>
 
 <file path=ppt/slides/slide4.xml><?xml version="1.0" encoding="utf-8"?>
-<p:sld xmlns:a="http://schemas.openxmlformats.org/drawingml/2006/main" xmlns:p="http://schemas.openxmlformats.org/presentationml/2006/main" xmlns:r="http://schemas.openxmlformats.org/officeDocument/2006/relationships">
+<p:sld xmlns:a="http://schemas.openxmlformats.org/drawingml/2006/main" xmlns:r="http://schemas.openxmlformats.org/officeDocument/2006/relationships" xmlns:p="http://schemas.openxmlformats.org/presentationml/2006/main">
   <p:cSld>
     <p:bg>
       <p:bgPr>
@@ -9005,7 +9094,14 @@
         <p:cNvGrpSpPr/>
         <p:nvPr/>
       </p:nvGrpSpPr>
-      <p:grpSpPr/>
+      <p:grpSpPr>
+        <a:xfrm>
+          <a:off x="0" y="0"/>
+          <a:ext cx="0" cy="0"/>
+          <a:chOff x="0" y="0"/>
+          <a:chExt cx="0" cy="0"/>
+        </a:xfrm>
+      </p:grpSpPr>
       <p:sp>
         <p:nvSpPr>
           <p:cNvPr id="2" name="TextBox 1"/>
@@ -9023,7 +9119,7 @@
           <a:noFill/>
         </p:spPr>
         <p:txBody>
-          <a:bodyPr wrap="square" anchor="t" lIns="0" rIns="0" tIns="0" bIns="0">
+          <a:bodyPr wrap="square" lIns="0" tIns="0" rIns="0" bIns="0" anchor="t">
             <a:spAutoFit/>
           </a:bodyPr>
           <a:lstStyle/>
@@ -9081,6 +9177,7 @@
           <a:lstStyle/>
           <a:p>
             <a:pPr algn="ctr"/>
+            <a:endParaRPr/>
           </a:p>
         </p:txBody>
       </p:sp>
@@ -9101,7 +9198,7 @@
           <a:noFill/>
         </p:spPr>
         <p:txBody>
-          <a:bodyPr wrap="square" anchor="ctr" lIns="0" rIns="0" tIns="0" bIns="0">
+          <a:bodyPr wrap="square" lIns="0" tIns="0" rIns="0" bIns="0" anchor="ctr">
             <a:spAutoFit/>
           </a:bodyPr>
           <a:lstStyle/>
@@ -9241,6 +9338,7 @@
           <a:lstStyle/>
           <a:p>
             <a:pPr algn="ctr"/>
+            <a:endParaRPr/>
           </a:p>
         </p:txBody>
       </p:sp>
@@ -9261,7 +9359,7 @@
           <a:noFill/>
         </p:spPr>
         <p:txBody>
-          <a:bodyPr wrap="square" anchor="t" lIns="0" rIns="0" tIns="0" bIns="0">
+          <a:bodyPr wrap="square" lIns="0" tIns="0" rIns="0" bIns="0" anchor="t">
             <a:spAutoFit/>
           </a:bodyPr>
           <a:lstStyle/>
@@ -9304,7 +9402,7 @@
           <a:noFill/>
         </p:spPr>
         <p:txBody>
-          <a:bodyPr wrap="square" anchor="t" lIns="0" rIns="0" tIns="0" bIns="0">
+          <a:bodyPr wrap="square" lIns="0" tIns="0" rIns="0" bIns="0" anchor="t">
             <a:spAutoFit/>
           </a:bodyPr>
           <a:lstStyle/>
@@ -9331,7 +9429,7 @@
 </file>
 
 <file path=ppt/slides/slide5.xml><?xml version="1.0" encoding="utf-8"?>
-<p:sld xmlns:a="http://schemas.openxmlformats.org/drawingml/2006/main" xmlns:p="http://schemas.openxmlformats.org/presentationml/2006/main" xmlns:r="http://schemas.openxmlformats.org/officeDocument/2006/relationships">
+<p:sld xmlns:a="http://schemas.openxmlformats.org/drawingml/2006/main" xmlns:r="http://schemas.openxmlformats.org/officeDocument/2006/relationships" xmlns:p="http://schemas.openxmlformats.org/presentationml/2006/main">
   <p:cSld>
     <p:bg>
       <p:bgPr>
@@ -9347,7 +9445,38 @@
         <p:cNvGrpSpPr/>
         <p:nvPr/>
       </p:nvGrpSpPr>
-      <p:grpSpPr/>
+      <p:grpSpPr>
+        <a:xfrm>
+          <a:off x="0" y="0"/>
+          <a:ext cx="0" cy="0"/>
+          <a:chOff x="0" y="0"/>
+          <a:chExt cx="0" cy="0"/>
+        </a:xfrm>
+      </p:grpSpPr>
+      <p:pic>
+        <p:nvPicPr>
+          <p:cNvPr id="5" name="Picture 4" descr="ledgerline-baseline.png"/>
+          <p:cNvPicPr>
+            <a:picLocks noChangeAspect="1"/>
+          </p:cNvPicPr>
+          <p:nvPr/>
+        </p:nvPicPr>
+        <p:blipFill>
+          <a:blip r:embed="rId3"/>
+          <a:stretch>
+            <a:fillRect/>
+          </a:stretch>
+        </p:blipFill>
+        <p:spPr>
+          <a:xfrm>
+            <a:off x="4931229" y="1060191"/>
+            <a:ext cx="6590211" cy="4471929"/>
+          </a:xfrm>
+          <a:prstGeom prst="rect">
+            <a:avLst/>
+          </a:prstGeom>
+        </p:spPr>
+      </p:pic>
       <p:sp>
         <p:nvSpPr>
           <p:cNvPr id="2" name="TextBox 1"/>
@@ -9365,7 +9494,7 @@
           <a:noFill/>
         </p:spPr>
         <p:txBody>
-          <a:bodyPr wrap="square" anchor="t" lIns="0" rIns="0" tIns="0" bIns="0">
+          <a:bodyPr wrap="square" lIns="0" tIns="0" rIns="0" bIns="0" anchor="t">
             <a:spAutoFit/>
           </a:bodyPr>
           <a:lstStyle/>
@@ -9423,6 +9552,7 @@
           <a:lstStyle/>
           <a:p>
             <a:pPr algn="ctr"/>
+            <a:endParaRPr/>
           </a:p>
         </p:txBody>
       </p:sp>
@@ -9443,7 +9573,7 @@
           <a:noFill/>
         </p:spPr>
         <p:txBody>
-          <a:bodyPr wrap="square" anchor="t" lIns="0" rIns="0" tIns="0" bIns="0">
+          <a:bodyPr wrap="square" lIns="0" tIns="0" rIns="0" bIns="0" anchor="t">
             <a:spAutoFit/>
           </a:bodyPr>
           <a:lstStyle/>
@@ -9542,30 +9672,6 @@
           </a:p>
         </p:txBody>
       </p:sp>
-      <p:pic>
-        <p:nvPicPr>
-          <p:cNvPr id="5" name="Picture 4" descr="ledgerline-baseline.png"/>
-          <p:cNvPicPr>
-            <a:picLocks noChangeAspect="1"/>
-          </p:cNvPicPr>
-          <p:nvPr/>
-        </p:nvPicPr>
-        <p:blipFill>
-          <a:blip r:embed="rId2"/>
-          <a:stretch>
-            <a:fillRect/>
-          </a:stretch>
-        </p:blipFill>
-        <p:spPr>
-          <a:xfrm>
-            <a:off x="6400800" y="2057400"/>
-            <a:ext cx="5120640" cy="3474720"/>
-          </a:xfrm>
-          <a:prstGeom prst="rect">
-            <a:avLst/>
-          </a:prstGeom>
-        </p:spPr>
-      </p:pic>
       <p:sp>
         <p:nvSpPr>
           <p:cNvPr id="6" name="Rectangle 5"/>
@@ -9607,6 +9713,7 @@
           <a:lstStyle/>
           <a:p>
             <a:pPr algn="ctr"/>
+            <a:endParaRPr/>
           </a:p>
         </p:txBody>
       </p:sp>
@@ -9627,7 +9734,7 @@
           <a:noFill/>
         </p:spPr>
         <p:txBody>
-          <a:bodyPr wrap="square" anchor="t" lIns="0" rIns="0" tIns="0" bIns="0">
+          <a:bodyPr wrap="square" lIns="0" tIns="0" rIns="0" bIns="0" anchor="t">
             <a:spAutoFit/>
           </a:bodyPr>
           <a:lstStyle/>
@@ -9670,7 +9777,7 @@
           <a:noFill/>
         </p:spPr>
         <p:txBody>
-          <a:bodyPr wrap="square" anchor="t" lIns="0" rIns="0" tIns="0" bIns="0">
+          <a:bodyPr wrap="square" lIns="0" tIns="0" rIns="0" bIns="0" anchor="t">
             <a:spAutoFit/>
           </a:bodyPr>
           <a:lstStyle/>
@@ -9697,7 +9804,7 @@
 </file>
 
 <file path=ppt/slides/slide6.xml><?xml version="1.0" encoding="utf-8"?>
-<p:sld xmlns:a="http://schemas.openxmlformats.org/drawingml/2006/main" xmlns:p="http://schemas.openxmlformats.org/presentationml/2006/main" xmlns:r="http://schemas.openxmlformats.org/officeDocument/2006/relationships">
+<p:sld xmlns:a="http://schemas.openxmlformats.org/drawingml/2006/main" xmlns:r="http://schemas.openxmlformats.org/officeDocument/2006/relationships" xmlns:p="http://schemas.openxmlformats.org/presentationml/2006/main">
   <p:cSld>
     <p:bg>
       <p:bgPr>
@@ -9713,7 +9820,14 @@
         <p:cNvGrpSpPr/>
         <p:nvPr/>
       </p:nvGrpSpPr>
-      <p:grpSpPr/>
+      <p:grpSpPr>
+        <a:xfrm>
+          <a:off x="0" y="0"/>
+          <a:ext cx="0" cy="0"/>
+          <a:chOff x="0" y="0"/>
+          <a:chExt cx="0" cy="0"/>
+        </a:xfrm>
+      </p:grpSpPr>
       <p:sp>
         <p:nvSpPr>
           <p:cNvPr id="2" name="TextBox 1"/>
@@ -9731,7 +9845,7 @@
           <a:noFill/>
         </p:spPr>
         <p:txBody>
-          <a:bodyPr wrap="square" anchor="t" lIns="0" rIns="0" tIns="0" bIns="0">
+          <a:bodyPr wrap="square" lIns="0" tIns="0" rIns="0" bIns="0" anchor="t">
             <a:spAutoFit/>
           </a:bodyPr>
           <a:lstStyle/>
@@ -9789,6 +9903,7 @@
           <a:lstStyle/>
           <a:p>
             <a:pPr algn="ctr"/>
+            <a:endParaRPr/>
           </a:p>
         </p:txBody>
       </p:sp>
@@ -9809,7 +9924,7 @@
           <a:noFill/>
         </p:spPr>
         <p:txBody>
-          <a:bodyPr wrap="square" anchor="ctr" lIns="0" rIns="0" tIns="0" bIns="0">
+          <a:bodyPr wrap="square" lIns="0" tIns="0" rIns="0" bIns="0" anchor="ctr">
             <a:spAutoFit/>
           </a:bodyPr>
           <a:lstStyle/>
@@ -9949,6 +10064,7 @@
           <a:lstStyle/>
           <a:p>
             <a:pPr algn="ctr"/>
+            <a:endParaRPr/>
           </a:p>
         </p:txBody>
       </p:sp>
@@ -9969,7 +10085,7 @@
           <a:noFill/>
         </p:spPr>
         <p:txBody>
-          <a:bodyPr wrap="square" anchor="t" lIns="0" rIns="0" tIns="0" bIns="0">
+          <a:bodyPr wrap="square" lIns="0" tIns="0" rIns="0" bIns="0" anchor="t">
             <a:spAutoFit/>
           </a:bodyPr>
           <a:lstStyle/>
@@ -10012,7 +10128,7 @@
           <a:noFill/>
         </p:spPr>
         <p:txBody>
-          <a:bodyPr wrap="square" anchor="t" lIns="0" rIns="0" tIns="0" bIns="0">
+          <a:bodyPr wrap="square" lIns="0" tIns="0" rIns="0" bIns="0" anchor="t">
             <a:spAutoFit/>
           </a:bodyPr>
           <a:lstStyle/>
@@ -10039,7 +10155,7 @@
 </file>
 
 <file path=ppt/slides/slide7.xml><?xml version="1.0" encoding="utf-8"?>
-<p:sld xmlns:a="http://schemas.openxmlformats.org/drawingml/2006/main" xmlns:p="http://schemas.openxmlformats.org/presentationml/2006/main" xmlns:r="http://schemas.openxmlformats.org/officeDocument/2006/relationships">
+<p:sld xmlns:a="http://schemas.openxmlformats.org/drawingml/2006/main" xmlns:r="http://schemas.openxmlformats.org/officeDocument/2006/relationships" xmlns:p="http://schemas.openxmlformats.org/presentationml/2006/main">
   <p:cSld>
     <p:bg>
       <p:bgPr>
@@ -10055,7 +10171,14 @@
         <p:cNvGrpSpPr/>
         <p:nvPr/>
       </p:nvGrpSpPr>
-      <p:grpSpPr/>
+      <p:grpSpPr>
+        <a:xfrm>
+          <a:off x="0" y="0"/>
+          <a:ext cx="0" cy="0"/>
+          <a:chOff x="0" y="0"/>
+          <a:chExt cx="0" cy="0"/>
+        </a:xfrm>
+      </p:grpSpPr>
       <p:sp>
         <p:nvSpPr>
           <p:cNvPr id="2" name="Rectangle 1"/>
@@ -10097,6 +10220,7 @@
           <a:lstStyle/>
           <a:p>
             <a:pPr algn="ctr"/>
+            <a:endParaRPr/>
           </a:p>
         </p:txBody>
       </p:sp>
@@ -10170,7 +10294,7 @@
           <a:noFill/>
         </p:spPr>
         <p:txBody>
-          <a:bodyPr wrap="square" anchor="ctr" lIns="0" rIns="0" tIns="0" bIns="0">
+          <a:bodyPr wrap="square" lIns="0" tIns="0" rIns="0" bIns="0" anchor="ctr">
             <a:spAutoFit/>
           </a:bodyPr>
           <a:lstStyle/>
@@ -10204,7 +10328,7 @@
           <a:noFill/>
         </p:spPr>
         <p:txBody>
-          <a:bodyPr wrap="square" anchor="t" lIns="0" rIns="0" tIns="0" bIns="0">
+          <a:bodyPr wrap="square" lIns="0" tIns="0" rIns="0" bIns="0" anchor="t">
             <a:spAutoFit/>
           </a:bodyPr>
           <a:lstStyle/>
@@ -10315,6 +10439,7 @@
           <a:lstStyle/>
           <a:p>
             <a:pPr algn="ctr"/>
+            <a:endParaRPr/>
           </a:p>
         </p:txBody>
       </p:sp>
@@ -10335,7 +10460,7 @@
           <a:noFill/>
         </p:spPr>
         <p:txBody>
-          <a:bodyPr wrap="square" anchor="ctr" lIns="0" rIns="0" tIns="0" bIns="0">
+          <a:bodyPr wrap="square" lIns="0" tIns="0" rIns="0" bIns="0" anchor="ctr">
             <a:spAutoFit/>
           </a:bodyPr>
           <a:lstStyle/>
@@ -10393,6 +10518,7 @@
           <a:lstStyle/>
           <a:p>
             <a:pPr algn="ctr"/>
+            <a:endParaRPr/>
           </a:p>
         </p:txBody>
       </p:sp>
@@ -10413,7 +10539,7 @@
           <a:noFill/>
         </p:spPr>
         <p:txBody>
-          <a:bodyPr wrap="square" anchor="t" lIns="0" rIns="0" tIns="0" bIns="0">
+          <a:bodyPr wrap="square" lIns="0" tIns="0" rIns="0" bIns="0" anchor="t">
             <a:spAutoFit/>
           </a:bodyPr>
           <a:lstStyle/>
@@ -10456,7 +10582,7 @@
           <a:noFill/>
         </p:spPr>
         <p:txBody>
-          <a:bodyPr wrap="square" anchor="t" lIns="0" rIns="0" tIns="0" bIns="0">
+          <a:bodyPr wrap="square" lIns="0" tIns="0" rIns="0" bIns="0" anchor="t">
             <a:spAutoFit/>
           </a:bodyPr>
           <a:lstStyle/>
@@ -10483,7 +10609,7 @@
 </file>
 
 <file path=ppt/slides/slide8.xml><?xml version="1.0" encoding="utf-8"?>
-<p:sld xmlns:a="http://schemas.openxmlformats.org/drawingml/2006/main" xmlns:p="http://schemas.openxmlformats.org/presentationml/2006/main" xmlns:r="http://schemas.openxmlformats.org/officeDocument/2006/relationships">
+<p:sld xmlns:a="http://schemas.openxmlformats.org/drawingml/2006/main" xmlns:r="http://schemas.openxmlformats.org/officeDocument/2006/relationships" xmlns:p="http://schemas.openxmlformats.org/presentationml/2006/main">
   <p:cSld>
     <p:bg>
       <p:bgPr>
@@ -10499,7 +10625,14 @@
         <p:cNvGrpSpPr/>
         <p:nvPr/>
       </p:nvGrpSpPr>
-      <p:grpSpPr/>
+      <p:grpSpPr>
+        <a:xfrm>
+          <a:off x="0" y="0"/>
+          <a:ext cx="0" cy="0"/>
+          <a:chOff x="0" y="0"/>
+          <a:chExt cx="0" cy="0"/>
+        </a:xfrm>
+      </p:grpSpPr>
       <p:sp>
         <p:nvSpPr>
           <p:cNvPr id="2" name="Rectangle 1"/>
@@ -10541,6 +10674,7 @@
           <a:lstStyle/>
           <a:p>
             <a:pPr algn="ctr"/>
+            <a:endParaRPr/>
           </a:p>
         </p:txBody>
       </p:sp>
@@ -10561,7 +10695,7 @@
           <a:noFill/>
         </p:spPr>
         <p:txBody>
-          <a:bodyPr wrap="square" anchor="t" lIns="0" rIns="0" tIns="0" bIns="0">
+          <a:bodyPr wrap="square" lIns="0" tIns="0" rIns="0" bIns="0" anchor="t">
             <a:spAutoFit/>
           </a:bodyPr>
           <a:lstStyle/>
@@ -10595,7 +10729,7 @@
           <a:noFill/>
         </p:spPr>
         <p:txBody>
-          <a:bodyPr wrap="square" anchor="t" lIns="0" rIns="0" tIns="0" bIns="0">
+          <a:bodyPr wrap="square" lIns="0" tIns="0" rIns="0" bIns="0" anchor="t">
             <a:spAutoFit/>
           </a:bodyPr>
           <a:lstStyle/>
@@ -10685,6 +10819,7 @@
           <a:lstStyle/>
           <a:p>
             <a:pPr algn="ctr"/>
+            <a:endParaRPr/>
           </a:p>
         </p:txBody>
       </p:sp>
@@ -10705,7 +10840,7 @@
           <a:noFill/>
         </p:spPr>
         <p:txBody>
-          <a:bodyPr wrap="square" anchor="t" lIns="0" rIns="0" tIns="0" bIns="0">
+          <a:bodyPr wrap="square" lIns="0" tIns="0" rIns="0" bIns="0" anchor="t">
             <a:spAutoFit/>
           </a:bodyPr>
           <a:lstStyle/>
@@ -10748,21 +10883,13 @@
           <a:noFill/>
         </p:spPr>
         <p:txBody>
-          <a:bodyPr wrap="square" anchor="t" lIns="0" rIns="0" tIns="0" bIns="0">
+          <a:bodyPr wrap="square" lIns="0" tIns="0" rIns="0" bIns="0" anchor="t">
             <a:spAutoFit/>
           </a:bodyPr>
           <a:lstStyle/>
           <a:p>
             <a:pPr algn="r"/>
-            <a:r>
-              <a:rPr sz="1100" b="0" i="0">
-                <a:solidFill>
-                  <a:srgbClr val="7A7A7A"/>
-                </a:solidFill>
-                <a:latin typeface="Roboto"/>
-              </a:rPr>
-              <a:t/>
-            </a:r>
+            <a:endParaRPr/>
           </a:p>
         </p:txBody>
       </p:sp>
@@ -10775,7 +10902,7 @@
 </file>
 
 <file path=ppt/slides/slide9.xml><?xml version="1.0" encoding="utf-8"?>
-<p:sld xmlns:a="http://schemas.openxmlformats.org/drawingml/2006/main" xmlns:p="http://schemas.openxmlformats.org/presentationml/2006/main" xmlns:r="http://schemas.openxmlformats.org/officeDocument/2006/relationships">
+<p:sld xmlns:a="http://schemas.openxmlformats.org/drawingml/2006/main" xmlns:r="http://schemas.openxmlformats.org/officeDocument/2006/relationships" xmlns:p="http://schemas.openxmlformats.org/presentationml/2006/main">
   <p:cSld>
     <p:bg>
       <p:bgPr>
@@ -10791,7 +10918,14 @@
         <p:cNvGrpSpPr/>
         <p:nvPr/>
       </p:nvGrpSpPr>
-      <p:grpSpPr/>
+      <p:grpSpPr>
+        <a:xfrm>
+          <a:off x="0" y="0"/>
+          <a:ext cx="0" cy="0"/>
+          <a:chOff x="0" y="0"/>
+          <a:chExt cx="0" cy="0"/>
+        </a:xfrm>
+      </p:grpSpPr>
       <p:sp>
         <p:nvSpPr>
           <p:cNvPr id="2" name="TextBox 1"/>
@@ -10809,7 +10943,7 @@
           <a:noFill/>
         </p:spPr>
         <p:txBody>
-          <a:bodyPr wrap="square" anchor="t" lIns="0" rIns="0" tIns="0" bIns="0">
+          <a:bodyPr wrap="square" lIns="0" tIns="0" rIns="0" bIns="0" anchor="t">
             <a:spAutoFit/>
           </a:bodyPr>
           <a:lstStyle/>
@@ -10867,6 +11001,7 @@
           <a:lstStyle/>
           <a:p>
             <a:pPr algn="ctr"/>
+            <a:endParaRPr/>
           </a:p>
         </p:txBody>
       </p:sp>
@@ -10887,7 +11022,7 @@
           <a:noFill/>
         </p:spPr>
         <p:txBody>
-          <a:bodyPr wrap="square" anchor="ctr" lIns="0" rIns="0" tIns="0" bIns="0">
+          <a:bodyPr wrap="square" lIns="0" tIns="0" rIns="0" bIns="0" anchor="ctr">
             <a:spAutoFit/>
           </a:bodyPr>
           <a:lstStyle/>
@@ -11027,6 +11162,7 @@
           <a:lstStyle/>
           <a:p>
             <a:pPr algn="ctr"/>
+            <a:endParaRPr/>
           </a:p>
         </p:txBody>
       </p:sp>
@@ -11047,7 +11183,7 @@
           <a:noFill/>
         </p:spPr>
         <p:txBody>
-          <a:bodyPr wrap="square" anchor="t" lIns="0" rIns="0" tIns="0" bIns="0">
+          <a:bodyPr wrap="square" lIns="0" tIns="0" rIns="0" bIns="0" anchor="t">
             <a:spAutoFit/>
           </a:bodyPr>
           <a:lstStyle/>
@@ -11090,7 +11226,7 @@
           <a:noFill/>
         </p:spPr>
         <p:txBody>
-          <a:bodyPr wrap="square" anchor="t" lIns="0" rIns="0" tIns="0" bIns="0">
+          <a:bodyPr wrap="square" lIns="0" tIns="0" rIns="0" bIns="0" anchor="t">
             <a:spAutoFit/>
           </a:bodyPr>
           <a:lstStyle/>
@@ -11447,44 +11583,44 @@
         <a:sysClr val="window" lastClr="FFFFFF"/>
       </a:lt1>
       <a:dk2>
-        <a:srgbClr val="1F497D"/>
+        <a:srgbClr val="0E2841"/>
       </a:dk2>
       <a:lt2>
-        <a:srgbClr val="EEECE1"/>
+        <a:srgbClr val="E8E8E8"/>
       </a:lt2>
       <a:accent1>
-        <a:srgbClr val="4F81BD"/>
+        <a:srgbClr val="156082"/>
       </a:accent1>
       <a:accent2>
-        <a:srgbClr val="C0504D"/>
+        <a:srgbClr val="E97132"/>
       </a:accent2>
       <a:accent3>
-        <a:srgbClr val="9BBB59"/>
+        <a:srgbClr val="196B24"/>
       </a:accent3>
       <a:accent4>
-        <a:srgbClr val="8064A2"/>
+        <a:srgbClr val="0F9ED5"/>
       </a:accent4>
       <a:accent5>
-        <a:srgbClr val="4BACC6"/>
+        <a:srgbClr val="A02B93"/>
       </a:accent5>
       <a:accent6>
-        <a:srgbClr val="F79646"/>
+        <a:srgbClr val="4EA72E"/>
       </a:accent6>
       <a:hlink>
-        <a:srgbClr val="0000FF"/>
+        <a:srgbClr val="467886"/>
       </a:hlink>
       <a:folHlink>
-        <a:srgbClr val="800080"/>
+        <a:srgbClr val="96607D"/>
       </a:folHlink>
     </a:clrScheme>
     <a:fontScheme name="Office">
       <a:majorFont>
-        <a:latin typeface="Calibri"/>
+        <a:latin typeface="Aptos Display" panose="02110004020202020204"/>
         <a:ea typeface=""/>
         <a:cs typeface=""/>
-        <a:font script="Jpan" typeface="ＭＳ Ｐゴシック"/>
+        <a:font script="Jpan" typeface="游ゴシック Light"/>
         <a:font script="Hang" typeface="맑은 고딕"/>
-        <a:font script="Hans" typeface="宋体"/>
+        <a:font script="Hans" typeface="等线 Light"/>
         <a:font script="Hant" typeface="新細明體"/>
         <a:font script="Arab" typeface="Times New Roman"/>
         <a:font script="Hebr" typeface="Times New Roman"/>
@@ -11512,14 +11648,31 @@
         <a:font script="Viet" typeface="Times New Roman"/>
         <a:font script="Uigh" typeface="Microsoft Uighur"/>
         <a:font script="Geor" typeface="Sylfaen"/>
+        <a:font script="Armn" typeface="Arial"/>
+        <a:font script="Bugi" typeface="Leelawadee UI"/>
+        <a:font script="Bopo" typeface="Microsoft JhengHei"/>
+        <a:font script="Java" typeface="Javanese Text"/>
+        <a:font script="Lisu" typeface="Segoe UI"/>
+        <a:font script="Mymr" typeface="Myanmar Text"/>
+        <a:font script="Nkoo" typeface="Ebrima"/>
+        <a:font script="Olck" typeface="Nirmala UI"/>
+        <a:font script="Osma" typeface="Ebrima"/>
+        <a:font script="Phag" typeface="Phagspa"/>
+        <a:font script="Syrn" typeface="Estrangelo Edessa"/>
+        <a:font script="Syrj" typeface="Estrangelo Edessa"/>
+        <a:font script="Syre" typeface="Estrangelo Edessa"/>
+        <a:font script="Sora" typeface="Nirmala UI"/>
+        <a:font script="Tale" typeface="Microsoft Tai Le"/>
+        <a:font script="Talu" typeface="Microsoft New Tai Lue"/>
+        <a:font script="Tfng" typeface="Ebrima"/>
       </a:majorFont>
       <a:minorFont>
-        <a:latin typeface="Calibri"/>
+        <a:latin typeface="Aptos" panose="02110004020202020204"/>
         <a:ea typeface=""/>
         <a:cs typeface=""/>
-        <a:font script="Jpan" typeface="ＭＳ Ｐゴシック"/>
+        <a:font script="Jpan" typeface="游ゴシック"/>
         <a:font script="Hang" typeface="맑은 고딕"/>
-        <a:font script="Hans" typeface="宋体"/>
+        <a:font script="Hans" typeface="等线"/>
         <a:font script="Hant" typeface="新細明體"/>
         <a:font script="Arab" typeface="Arial"/>
         <a:font script="Hebr" typeface="Arial"/>
@@ -11547,6 +11700,23 @@
         <a:font script="Viet" typeface="Arial"/>
         <a:font script="Uigh" typeface="Microsoft Uighur"/>
         <a:font script="Geor" typeface="Sylfaen"/>
+        <a:font script="Armn" typeface="Arial"/>
+        <a:font script="Bugi" typeface="Leelawadee UI"/>
+        <a:font script="Bopo" typeface="Microsoft JhengHei"/>
+        <a:font script="Java" typeface="Javanese Text"/>
+        <a:font script="Lisu" typeface="Segoe UI"/>
+        <a:font script="Mymr" typeface="Myanmar Text"/>
+        <a:font script="Nkoo" typeface="Ebrima"/>
+        <a:font script="Olck" typeface="Nirmala UI"/>
+        <a:font script="Osma" typeface="Ebrima"/>
+        <a:font script="Phag" typeface="Phagspa"/>
+        <a:font script="Syrn" typeface="Estrangelo Edessa"/>
+        <a:font script="Syrj" typeface="Estrangelo Edessa"/>
+        <a:font script="Syre" typeface="Estrangelo Edessa"/>
+        <a:font script="Sora" typeface="Nirmala UI"/>
+        <a:font script="Tale" typeface="Microsoft Tai Le"/>
+        <a:font script="Talu" typeface="Microsoft New Tai Lue"/>
+        <a:font script="Tfng" typeface="Ebrima"/>
       </a:minorFont>
     </a:fontScheme>
     <a:fmtScheme name="Office">
@@ -11558,180 +11728,136 @@
           <a:gsLst>
             <a:gs pos="0">
               <a:schemeClr val="phClr">
-                <a:tint val="50000"/>
-                <a:satMod val="300000"/>
+                <a:lumMod val="110000"/>
+                <a:satMod val="105000"/>
+                <a:tint val="67000"/>
               </a:schemeClr>
             </a:gs>
-            <a:gs pos="35000">
+            <a:gs pos="50000">
               <a:schemeClr val="phClr">
-                <a:tint val="37000"/>
-                <a:satMod val="300000"/>
+                <a:lumMod val="105000"/>
+                <a:satMod val="103000"/>
+                <a:tint val="73000"/>
               </a:schemeClr>
             </a:gs>
             <a:gs pos="100000">
               <a:schemeClr val="phClr">
-                <a:tint val="15000"/>
-                <a:satMod val="350000"/>
+                <a:lumMod val="105000"/>
+                <a:satMod val="109000"/>
+                <a:tint val="81000"/>
               </a:schemeClr>
             </a:gs>
           </a:gsLst>
-          <a:lin ang="16200000" scaled="1"/>
+          <a:lin ang="5400000" scaled="0"/>
         </a:gradFill>
         <a:gradFill rotWithShape="1">
           <a:gsLst>
             <a:gs pos="0">
               <a:schemeClr val="phClr">
-                <a:tint val="100000"/>
+                <a:satMod val="103000"/>
+                <a:lumMod val="102000"/>
+                <a:tint val="94000"/>
+              </a:schemeClr>
+            </a:gs>
+            <a:gs pos="50000">
+              <a:schemeClr val="phClr">
+                <a:satMod val="110000"/>
+                <a:lumMod val="100000"/>
                 <a:shade val="100000"/>
-                <a:satMod val="130000"/>
               </a:schemeClr>
             </a:gs>
             <a:gs pos="100000">
               <a:schemeClr val="phClr">
-                <a:tint val="50000"/>
-                <a:shade val="100000"/>
-                <a:satMod val="350000"/>
+                <a:lumMod val="99000"/>
+                <a:satMod val="120000"/>
+                <a:shade val="78000"/>
               </a:schemeClr>
             </a:gs>
           </a:gsLst>
-          <a:lin ang="16200000" scaled="0"/>
+          <a:lin ang="5400000" scaled="0"/>
         </a:gradFill>
       </a:fillStyleLst>
       <a:lnStyleLst>
-        <a:ln w="9525" cap="flat" cmpd="sng" algn="ctr">
+        <a:ln w="12700" cap="flat" cmpd="sng" algn="ctr">
           <a:solidFill>
-            <a:schemeClr val="phClr">
-              <a:shade val="95000"/>
-              <a:satMod val="105000"/>
-            </a:schemeClr>
+            <a:schemeClr val="phClr"/>
           </a:solidFill>
           <a:prstDash val="solid"/>
+          <a:miter lim="800000"/>
+        </a:ln>
+        <a:ln w="19050" cap="flat" cmpd="sng" algn="ctr">
+          <a:solidFill>
+            <a:schemeClr val="phClr"/>
+          </a:solidFill>
+          <a:prstDash val="solid"/>
+          <a:miter lim="800000"/>
         </a:ln>
         <a:ln w="25400" cap="flat" cmpd="sng" algn="ctr">
           <a:solidFill>
             <a:schemeClr val="phClr"/>
           </a:solidFill>
           <a:prstDash val="solid"/>
-        </a:ln>
-        <a:ln w="38100" cap="flat" cmpd="sng" algn="ctr">
-          <a:solidFill>
-            <a:schemeClr val="phClr"/>
-          </a:solidFill>
-          <a:prstDash val="solid"/>
+          <a:miter lim="800000"/>
         </a:ln>
       </a:lnStyleLst>
       <a:effectStyleLst>
         <a:effectStyle>
+          <a:effectLst/>
+        </a:effectStyle>
+        <a:effectStyle>
+          <a:effectLst/>
+        </a:effectStyle>
+        <a:effectStyle>
           <a:effectLst>
-            <a:outerShdw blurRad="40000" dist="20000" dir="5400000" rotWithShape="0">
+            <a:outerShdw blurRad="57150" dist="19050" dir="5400000" algn="ctr" rotWithShape="0">
               <a:srgbClr val="000000">
-                <a:alpha val="38000"/>
+                <a:alpha val="63000"/>
               </a:srgbClr>
             </a:outerShdw>
           </a:effectLst>
-        </a:effectStyle>
-        <a:effectStyle>
-          <a:effectLst>
-            <a:outerShdw blurRad="40000" dist="23000" dir="5400000" rotWithShape="0">
-              <a:srgbClr val="000000">
-                <a:alpha val="35000"/>
-              </a:srgbClr>
-            </a:outerShdw>
-          </a:effectLst>
-        </a:effectStyle>
-        <a:effectStyle>
-          <a:effectLst>
-            <a:outerShdw blurRad="40000" dist="23000" dir="5400000" rotWithShape="0">
-              <a:srgbClr val="000000">
-                <a:alpha val="35000"/>
-              </a:srgbClr>
-            </a:outerShdw>
-          </a:effectLst>
-          <a:scene3d>
-            <a:camera prst="orthographicFront">
-              <a:rot lat="0" lon="0" rev="0"/>
-            </a:camera>
-            <a:lightRig rig="threePt" dir="t">
-              <a:rot lat="0" lon="0" rev="1200000"/>
-            </a:lightRig>
-          </a:scene3d>
-          <a:sp3d>
-            <a:bevelT w="63500" h="25400"/>
-          </a:sp3d>
         </a:effectStyle>
       </a:effectStyleLst>
       <a:bgFillStyleLst>
         <a:solidFill>
           <a:schemeClr val="phClr"/>
         </a:solidFill>
+        <a:solidFill>
+          <a:schemeClr val="phClr">
+            <a:tint val="95000"/>
+            <a:satMod val="170000"/>
+          </a:schemeClr>
+        </a:solidFill>
         <a:gradFill rotWithShape="1">
           <a:gsLst>
             <a:gs pos="0">
               <a:schemeClr val="phClr">
-                <a:tint val="40000"/>
-                <a:satMod val="350000"/>
+                <a:tint val="93000"/>
+                <a:satMod val="150000"/>
+                <a:shade val="98000"/>
+                <a:lumMod val="102000"/>
               </a:schemeClr>
             </a:gs>
-            <a:gs pos="40000">
+            <a:gs pos="50000">
               <a:schemeClr val="phClr">
-                <a:tint val="45000"/>
-                <a:shade val="99000"/>
-                <a:satMod val="350000"/>
+                <a:tint val="98000"/>
+                <a:satMod val="130000"/>
+                <a:shade val="90000"/>
+                <a:lumMod val="103000"/>
               </a:schemeClr>
             </a:gs>
             <a:gs pos="100000">
               <a:schemeClr val="phClr">
-                <a:shade val="20000"/>
-                <a:satMod val="255000"/>
+                <a:shade val="63000"/>
+                <a:satMod val="120000"/>
               </a:schemeClr>
             </a:gs>
           </a:gsLst>
-          <a:path path="circle">
-            <a:fillToRect l="50000" t="-80000" r="50000" b="180000"/>
-          </a:path>
-        </a:gradFill>
-        <a:gradFill rotWithShape="1">
-          <a:gsLst>
-            <a:gs pos="0">
-              <a:schemeClr val="phClr">
-                <a:tint val="80000"/>
-                <a:satMod val="300000"/>
-              </a:schemeClr>
-            </a:gs>
-            <a:gs pos="100000">
-              <a:schemeClr val="phClr">
-                <a:shade val="30000"/>
-                <a:satMod val="200000"/>
-              </a:schemeClr>
-            </a:gs>
-          </a:gsLst>
-          <a:path path="circle">
-            <a:fillToRect l="50000" t="50000" r="50000" b="50000"/>
-          </a:path>
+          <a:lin ang="5400000" scaled="0"/>
         </a:gradFill>
       </a:bgFillStyleLst>
     </a:fmtScheme>
   </a:themeElements>
   <a:objectDefaults>
-    <a:spDef>
-      <a:spPr/>
-      <a:bodyPr/>
-      <a:lstStyle/>
-      <a:style>
-        <a:lnRef idx="1">
-          <a:schemeClr val="accent1"/>
-        </a:lnRef>
-        <a:fillRef idx="3">
-          <a:schemeClr val="accent1"/>
-        </a:fillRef>
-        <a:effectRef idx="2">
-          <a:schemeClr val="accent1"/>
-        </a:effectRef>
-        <a:fontRef idx="minor">
-          <a:schemeClr val="lt1"/>
-        </a:fontRef>
-      </a:style>
-    </a:spDef>
     <a:lnDef>
       <a:spPr/>
       <a:bodyPr/>
@@ -11753,5 +11879,10 @@
     </a:lnDef>
   </a:objectDefaults>
   <a:extraClrSchemeLst/>
+  <a:extLst>
+    <a:ext uri="{05A4C25C-085E-4340-85A3-A5531E510DB2}">
+      <thm15:themeFamily xmlns:thm15="http://schemas.microsoft.com/office/thememl/2012/main" name="Office Theme" id="{2E142A2C-CD16-42D6-873A-C26D2A0506FA}" vid="{1BDDFF52-6CD6-40A5-AB3C-68EB2F1E4D0A}"/>
+    </a:ext>
+  </a:extLst>
 </a:theme>
 </file>
--- a/S1-CL3-Cloud-Infrastructure-Improvement/delivery/topic_01/Topic_01_Slides.pptx
+++ b/S1-CL3-Cloud-Infrastructure-Improvement/delivery/topic_01/Topic_01_Slides.pptx
@@ -4,29 +4,26 @@
   <p:sldMasterIdLst>
     <p:sldMasterId id="2147483648" r:id="rId1"/>
   </p:sldMasterIdLst>
-  <p:notesMasterIdLst>
-    <p:notesMasterId r:id="rId19"/>
-  </p:notesMasterIdLst>
   <p:sldIdLst>
-    <p:sldId id="256" r:id="rId2"/>
-    <p:sldId id="257" r:id="rId3"/>
-    <p:sldId id="258" r:id="rId4"/>
-    <p:sldId id="259" r:id="rId5"/>
-    <p:sldId id="260" r:id="rId6"/>
-    <p:sldId id="261" r:id="rId7"/>
-    <p:sldId id="262" r:id="rId8"/>
-    <p:sldId id="263" r:id="rId9"/>
-    <p:sldId id="264" r:id="rId10"/>
-    <p:sldId id="265" r:id="rId11"/>
-    <p:sldId id="266" r:id="rId12"/>
-    <p:sldId id="267" r:id="rId13"/>
-    <p:sldId id="268" r:id="rId14"/>
-    <p:sldId id="269" r:id="rId15"/>
-    <p:sldId id="270" r:id="rId16"/>
-    <p:sldId id="271" r:id="rId17"/>
-    <p:sldId id="272" r:id="rId18"/>
+    <p:sldId id="256" r:id="rId7"/>
+    <p:sldId id="257" r:id="rId8"/>
+    <p:sldId id="258" r:id="rId10"/>
+    <p:sldId id="259" r:id="rId11"/>
+    <p:sldId id="260" r:id="rId12"/>
+    <p:sldId id="261" r:id="rId13"/>
+    <p:sldId id="262" r:id="rId14"/>
+    <p:sldId id="263" r:id="rId15"/>
+    <p:sldId id="264" r:id="rId16"/>
+    <p:sldId id="265" r:id="rId17"/>
+    <p:sldId id="266" r:id="rId18"/>
+    <p:sldId id="267" r:id="rId19"/>
+    <p:sldId id="268" r:id="rId20"/>
+    <p:sldId id="269" r:id="rId21"/>
+    <p:sldId id="270" r:id="rId22"/>
+    <p:sldId id="271" r:id="rId23"/>
+    <p:sldId id="272" r:id="rId24"/>
   </p:sldIdLst>
-  <p:sldSz cx="12192000" cy="6858000"/>
+  <p:sldSz cx="12191695" cy="6858000" type="screen4x3"/>
   <p:notesSz cx="6858000" cy="9144000"/>
   <p:defaultTextStyle>
     <a:defPPr>
@@ -123,27 +120,11 @@
       </a:defRPr>
     </a:lvl9pPr>
   </p:defaultTextStyle>
-  <p:extLst>
-    <p:ext uri="{EFAFB233-063F-42B5-8137-9DF3F51BA10A}">
-      <p15:sldGuideLst xmlns:p15="http://schemas.microsoft.com/office/powerpoint/2012/main">
-        <p15:guide id="1" orient="horz" pos="2160">
-          <p15:clr>
-            <a:srgbClr val="A4A3A4"/>
-          </p15:clr>
-        </p15:guide>
-        <p15:guide id="2" pos="2880">
-          <p15:clr>
-            <a:srgbClr val="A4A3A4"/>
-          </p15:clr>
-        </p15:guide>
-      </p15:sldGuideLst>
-    </p:ext>
-  </p:extLst>
 </p:presentation>
 </file>
 
 <file path=ppt/notesMasters/notesMaster1.xml><?xml version="1.0" encoding="utf-8"?>
-<p:notesMaster xmlns:a="http://schemas.openxmlformats.org/drawingml/2006/main" xmlns:r="http://schemas.openxmlformats.org/officeDocument/2006/relationships" xmlns:p="http://schemas.openxmlformats.org/presentationml/2006/main">
+<p:notesMaster xmlns:a="http://schemas.openxmlformats.org/drawingml/2006/main" xmlns:p="http://schemas.openxmlformats.org/presentationml/2006/main" xmlns:r="http://schemas.openxmlformats.org/officeDocument/2006/relationships">
   <p:cSld>
     <p:bg>
       <p:bgRef idx="1001">
@@ -177,7 +158,7 @@
         <p:spPr>
           <a:xfrm>
             <a:off x="0" y="0"/>
-            <a:ext cx="2971800" cy="458788"/>
+            <a:ext cx="2971800" cy="457200"/>
           </a:xfrm>
           <a:prstGeom prst="rect">
             <a:avLst/>
@@ -208,7 +189,7 @@
         <p:spPr>
           <a:xfrm>
             <a:off x="3884613" y="0"/>
-            <a:ext cx="2971800" cy="458788"/>
+            <a:ext cx="2971800" cy="457200"/>
           </a:xfrm>
           <a:prstGeom prst="rect">
             <a:avLst/>
@@ -222,9 +203,9 @@
             </a:lvl1pPr>
           </a:lstStyle>
           <a:p>
-            <a:fld id="{81DD04AB-B2DC-2C44-9147-3918CC5D531E}" type="datetimeFigureOut">
+            <a:fld id="{0F89C1C7-3DCD-1040-A9CF-14679D8B5DDD}" type="datetimeFigureOut">
               <a:rPr lang="en-US" smtClean="0"/>
-              <a:t>7/9/26</a:t>
+              <a:t>10/17/16</a:t>
             </a:fld>
             <a:endParaRPr lang="en-US"/>
           </a:p>
@@ -242,8 +223,8 @@
         </p:nvSpPr>
         <p:spPr>
           <a:xfrm>
-            <a:off x="685800" y="1143000"/>
-            <a:ext cx="5486400" cy="3086100"/>
+            <a:off x="1143000" y="685800"/>
+            <a:ext cx="4572000" cy="3429000"/>
           </a:xfrm>
           <a:prstGeom prst="rect">
             <a:avLst/>
@@ -275,8 +256,8 @@
         </p:nvSpPr>
         <p:spPr>
           <a:xfrm>
-            <a:off x="685800" y="4400550"/>
-            <a:ext cx="5486400" cy="3600450"/>
+            <a:off x="685800" y="4343400"/>
+            <a:ext cx="5486400" cy="4114800"/>
           </a:xfrm>
           <a:prstGeom prst="rect">
             <a:avLst/>
@@ -288,35 +269,35 @@
           <a:p>
             <a:pPr lvl="0"/>
             <a:r>
-              <a:rPr lang="en-GB"/>
+              <a:rPr lang="en-US" smtClean="0"/>
               <a:t>Click to edit Master text styles</a:t>
             </a:r>
           </a:p>
           <a:p>
             <a:pPr lvl="1"/>
             <a:r>
-              <a:rPr lang="en-GB"/>
+              <a:rPr lang="en-US" smtClean="0"/>
               <a:t>Second level</a:t>
             </a:r>
           </a:p>
           <a:p>
             <a:pPr lvl="2"/>
             <a:r>
-              <a:rPr lang="en-GB"/>
+              <a:rPr lang="en-US" smtClean="0"/>
               <a:t>Third level</a:t>
             </a:r>
           </a:p>
           <a:p>
             <a:pPr lvl="3"/>
             <a:r>
-              <a:rPr lang="en-GB"/>
+              <a:rPr lang="en-US" smtClean="0"/>
               <a:t>Fourth level</a:t>
             </a:r>
           </a:p>
           <a:p>
             <a:pPr lvl="4"/>
             <a:r>
-              <a:rPr lang="en-GB"/>
+              <a:rPr lang="en-US" smtClean="0"/>
               <a:t>Fifth level</a:t>
             </a:r>
             <a:endParaRPr lang="en-US"/>
@@ -336,7 +317,7 @@
         <p:spPr>
           <a:xfrm>
             <a:off x="0" y="8685213"/>
-            <a:ext cx="2971800" cy="458787"/>
+            <a:ext cx="2971800" cy="457200"/>
           </a:xfrm>
           <a:prstGeom prst="rect">
             <a:avLst/>
@@ -367,7 +348,7 @@
         <p:spPr>
           <a:xfrm>
             <a:off x="3884613" y="8685213"/>
-            <a:ext cx="2971800" cy="458787"/>
+            <a:ext cx="2971800" cy="457200"/>
           </a:xfrm>
           <a:prstGeom prst="rect">
             <a:avLst/>
@@ -381,7 +362,7 @@
             </a:lvl1pPr>
           </a:lstStyle>
           <a:p>
-            <a:fld id="{5E83A831-8944-C345-861C-1D0BDE2110C0}" type="slidenum">
+            <a:fld id="{BB5E49A5-4136-284D-997B-48E1D791AD67}" type="slidenum">
               <a:rPr lang="en-US" smtClean="0"/>
               <a:t>‹#›</a:t>
             </a:fld>
@@ -392,13 +373,13 @@
     </p:spTree>
     <p:extLst>
       <p:ext uri="{BB962C8B-B14F-4D97-AF65-F5344CB8AC3E}">
-        <p14:creationId xmlns:p14="http://schemas.microsoft.com/office/powerpoint/2010/main" val="2729961678"/>
+        <p14:creationId xmlns:p14="http://schemas.microsoft.com/office/powerpoint/2010/main" val="2623252185"/>
       </p:ext>
     </p:extLst>
   </p:cSld>
   <p:clrMap bg1="lt1" tx1="dk1" bg2="lt2" tx2="dk2" accent1="accent1" accent2="accent2" accent3="accent3" accent4="accent4" accent5="accent5" accent6="accent6" hlink="hlink" folHlink="folHlink"/>
   <p:notesStyle>
-    <a:lvl1pPr marL="0" algn="l" defTabSz="914400" rtl="0" eaLnBrk="1" latinLnBrk="0" hangingPunct="1">
+    <a:lvl1pPr marL="0" algn="l" defTabSz="457200" rtl="0" eaLnBrk="1" latinLnBrk="0" hangingPunct="1">
       <a:defRPr sz="1200" kern="1200">
         <a:solidFill>
           <a:schemeClr val="tx1"/>
@@ -408,7 +389,7 @@
         <a:cs typeface="+mn-cs"/>
       </a:defRPr>
     </a:lvl1pPr>
-    <a:lvl2pPr marL="457200" algn="l" defTabSz="914400" rtl="0" eaLnBrk="1" latinLnBrk="0" hangingPunct="1">
+    <a:lvl2pPr marL="457200" algn="l" defTabSz="457200" rtl="0" eaLnBrk="1" latinLnBrk="0" hangingPunct="1">
       <a:defRPr sz="1200" kern="1200">
         <a:solidFill>
           <a:schemeClr val="tx1"/>
@@ -418,7 +399,7 @@
         <a:cs typeface="+mn-cs"/>
       </a:defRPr>
     </a:lvl2pPr>
-    <a:lvl3pPr marL="914400" algn="l" defTabSz="914400" rtl="0" eaLnBrk="1" latinLnBrk="0" hangingPunct="1">
+    <a:lvl3pPr marL="914400" algn="l" defTabSz="457200" rtl="0" eaLnBrk="1" latinLnBrk="0" hangingPunct="1">
       <a:defRPr sz="1200" kern="1200">
         <a:solidFill>
           <a:schemeClr val="tx1"/>
@@ -428,7 +409,7 @@
         <a:cs typeface="+mn-cs"/>
       </a:defRPr>
     </a:lvl3pPr>
-    <a:lvl4pPr marL="1371600" algn="l" defTabSz="914400" rtl="0" eaLnBrk="1" latinLnBrk="0" hangingPunct="1">
+    <a:lvl4pPr marL="1371600" algn="l" defTabSz="457200" rtl="0" eaLnBrk="1" latinLnBrk="0" hangingPunct="1">
       <a:defRPr sz="1200" kern="1200">
         <a:solidFill>
           <a:schemeClr val="tx1"/>
@@ -438,7 +419,7 @@
         <a:cs typeface="+mn-cs"/>
       </a:defRPr>
     </a:lvl4pPr>
-    <a:lvl5pPr marL="1828800" algn="l" defTabSz="914400" rtl="0" eaLnBrk="1" latinLnBrk="0" hangingPunct="1">
+    <a:lvl5pPr marL="1828800" algn="l" defTabSz="457200" rtl="0" eaLnBrk="1" latinLnBrk="0" hangingPunct="1">
       <a:defRPr sz="1200" kern="1200">
         <a:solidFill>
           <a:schemeClr val="tx1"/>
@@ -448,7 +429,7 @@
         <a:cs typeface="+mn-cs"/>
       </a:defRPr>
     </a:lvl5pPr>
-    <a:lvl6pPr marL="2286000" algn="l" defTabSz="914400" rtl="0" eaLnBrk="1" latinLnBrk="0" hangingPunct="1">
+    <a:lvl6pPr marL="2286000" algn="l" defTabSz="457200" rtl="0" eaLnBrk="1" latinLnBrk="0" hangingPunct="1">
       <a:defRPr sz="1200" kern="1200">
         <a:solidFill>
           <a:schemeClr val="tx1"/>
@@ -458,7 +439,7 @@
         <a:cs typeface="+mn-cs"/>
       </a:defRPr>
     </a:lvl6pPr>
-    <a:lvl7pPr marL="2743200" algn="l" defTabSz="914400" rtl="0" eaLnBrk="1" latinLnBrk="0" hangingPunct="1">
+    <a:lvl7pPr marL="2743200" algn="l" defTabSz="457200" rtl="0" eaLnBrk="1" latinLnBrk="0" hangingPunct="1">
       <a:defRPr sz="1200" kern="1200">
         <a:solidFill>
           <a:schemeClr val="tx1"/>
@@ -468,7 +449,7 @@
         <a:cs typeface="+mn-cs"/>
       </a:defRPr>
     </a:lvl7pPr>
-    <a:lvl8pPr marL="3200400" algn="l" defTabSz="914400" rtl="0" eaLnBrk="1" latinLnBrk="0" hangingPunct="1">
+    <a:lvl8pPr marL="3200400" algn="l" defTabSz="457200" rtl="0" eaLnBrk="1" latinLnBrk="0" hangingPunct="1">
       <a:defRPr sz="1200" kern="1200">
         <a:solidFill>
           <a:schemeClr val="tx1"/>
@@ -478,7 +459,7 @@
         <a:cs typeface="+mn-cs"/>
       </a:defRPr>
     </a:lvl8pPr>
-    <a:lvl9pPr marL="3657600" algn="l" defTabSz="914400" rtl="0" eaLnBrk="1" latinLnBrk="0" hangingPunct="1">
+    <a:lvl9pPr marL="3657600" algn="l" defTabSz="457200" rtl="0" eaLnBrk="1" latinLnBrk="0" hangingPunct="1">
       <a:defRPr sz="1200" kern="1200">
         <a:solidFill>
           <a:schemeClr val="tx1"/>
@@ -493,7 +474,7 @@
 </file>
 
 <file path=ppt/notesSlides/notesSlide1.xml><?xml version="1.0" encoding="utf-8"?>
-<p:notes xmlns:a="http://schemas.openxmlformats.org/drawingml/2006/main" xmlns:r="http://schemas.openxmlformats.org/officeDocument/2006/relationships" xmlns:p="http://schemas.openxmlformats.org/presentationml/2006/main">
+<p:notes xmlns:a="http://schemas.openxmlformats.org/drawingml/2006/main" xmlns:p="http://schemas.openxmlformats.org/presentationml/2006/main" xmlns:r="http://schemas.openxmlformats.org/officeDocument/2006/relationships">
   <p:cSld>
     <p:spTree>
       <p:nvGrpSpPr>
@@ -513,7 +494,7 @@
         <p:nvSpPr>
           <p:cNvPr id="2" name="Slide Image Placeholder 1"/>
           <p:cNvSpPr>
-            <a:spLocks noGrp="1" noRot="1" noChangeAspect="1"/>
+            <a:spLocks noGrp="1"/>
           </p:cNvSpPr>
           <p:nvPr>
             <p:ph type="sldImg" idx="2"/>
@@ -528,7 +509,7 @@
             <a:spLocks noGrp="1"/>
           </p:cNvSpPr>
           <p:nvPr>
-            <p:ph type="body" sz="quarter" idx="3"/>
+            <p:ph type="body" idx="3" sz="quarter"/>
           </p:nvPr>
         </p:nvSpPr>
         <p:spPr/>
@@ -624,7 +605,7 @@
             <a:spLocks noGrp="1"/>
           </p:cNvSpPr>
           <p:nvPr>
-            <p:ph type="sldNum" sz="quarter" idx="5"/>
+            <p:ph type="sldNum" idx="5" sz="quarter"/>
           </p:nvPr>
         </p:nvSpPr>
         <p:spPr/>
@@ -638,7 +619,7 @@
 </file>
 
 <file path=ppt/notesSlides/notesSlide10.xml><?xml version="1.0" encoding="utf-8"?>
-<p:notes xmlns:a="http://schemas.openxmlformats.org/drawingml/2006/main" xmlns:r="http://schemas.openxmlformats.org/officeDocument/2006/relationships" xmlns:p="http://schemas.openxmlformats.org/presentationml/2006/main">
+<p:notes xmlns:a="http://schemas.openxmlformats.org/drawingml/2006/main" xmlns:p="http://schemas.openxmlformats.org/presentationml/2006/main" xmlns:r="http://schemas.openxmlformats.org/officeDocument/2006/relationships">
   <p:cSld>
     <p:spTree>
       <p:nvGrpSpPr>
@@ -658,7 +639,7 @@
         <p:nvSpPr>
           <p:cNvPr id="2" name="Slide Image Placeholder 1"/>
           <p:cNvSpPr>
-            <a:spLocks noGrp="1" noRot="1" noChangeAspect="1"/>
+            <a:spLocks noGrp="1"/>
           </p:cNvSpPr>
           <p:nvPr>
             <p:ph type="sldImg" idx="2"/>
@@ -673,7 +654,7 @@
             <a:spLocks noGrp="1"/>
           </p:cNvSpPr>
           <p:nvPr>
-            <p:ph type="body" sz="quarter" idx="3"/>
+            <p:ph type="body" idx="3" sz="quarter"/>
           </p:nvPr>
         </p:nvSpPr>
         <p:spPr/>
@@ -764,7 +745,7 @@
             <a:spLocks noGrp="1"/>
           </p:cNvSpPr>
           <p:nvPr>
-            <p:ph type="sldNum" sz="quarter" idx="5"/>
+            <p:ph type="sldNum" idx="5" sz="quarter"/>
           </p:nvPr>
         </p:nvSpPr>
         <p:spPr/>
@@ -778,7 +759,7 @@
 </file>
 
 <file path=ppt/notesSlides/notesSlide11.xml><?xml version="1.0" encoding="utf-8"?>
-<p:notes xmlns:a="http://schemas.openxmlformats.org/drawingml/2006/main" xmlns:r="http://schemas.openxmlformats.org/officeDocument/2006/relationships" xmlns:p="http://schemas.openxmlformats.org/presentationml/2006/main">
+<p:notes xmlns:a="http://schemas.openxmlformats.org/drawingml/2006/main" xmlns:p="http://schemas.openxmlformats.org/presentationml/2006/main" xmlns:r="http://schemas.openxmlformats.org/officeDocument/2006/relationships">
   <p:cSld>
     <p:spTree>
       <p:nvGrpSpPr>
@@ -798,7 +779,7 @@
         <p:nvSpPr>
           <p:cNvPr id="2" name="Slide Image Placeholder 1"/>
           <p:cNvSpPr>
-            <a:spLocks noGrp="1" noRot="1" noChangeAspect="1"/>
+            <a:spLocks noGrp="1"/>
           </p:cNvSpPr>
           <p:nvPr>
             <p:ph type="sldImg" idx="2"/>
@@ -813,7 +794,7 @@
             <a:spLocks noGrp="1"/>
           </p:cNvSpPr>
           <p:nvPr>
-            <p:ph type="body" sz="quarter" idx="3"/>
+            <p:ph type="body" idx="3" sz="quarter"/>
           </p:nvPr>
         </p:nvSpPr>
         <p:spPr/>
@@ -914,7 +895,7 @@
             <a:spLocks noGrp="1"/>
           </p:cNvSpPr>
           <p:nvPr>
-            <p:ph type="sldNum" sz="quarter" idx="5"/>
+            <p:ph type="sldNum" idx="5" sz="quarter"/>
           </p:nvPr>
         </p:nvSpPr>
         <p:spPr/>
@@ -928,7 +909,7 @@
 </file>
 
 <file path=ppt/notesSlides/notesSlide2.xml><?xml version="1.0" encoding="utf-8"?>
-<p:notes xmlns:a="http://schemas.openxmlformats.org/drawingml/2006/main" xmlns:r="http://schemas.openxmlformats.org/officeDocument/2006/relationships" xmlns:p="http://schemas.openxmlformats.org/presentationml/2006/main">
+<p:notes xmlns:a="http://schemas.openxmlformats.org/drawingml/2006/main" xmlns:p="http://schemas.openxmlformats.org/presentationml/2006/main" xmlns:r="http://schemas.openxmlformats.org/officeDocument/2006/relationships">
   <p:cSld>
     <p:spTree>
       <p:nvGrpSpPr>
@@ -948,7 +929,7 @@
         <p:nvSpPr>
           <p:cNvPr id="2" name="Slide Image Placeholder 1"/>
           <p:cNvSpPr>
-            <a:spLocks noGrp="1" noRot="1" noChangeAspect="1"/>
+            <a:spLocks noGrp="1"/>
           </p:cNvSpPr>
           <p:nvPr>
             <p:ph type="sldImg" idx="2"/>
@@ -963,7 +944,7 @@
             <a:spLocks noGrp="1"/>
           </p:cNvSpPr>
           <p:nvPr>
-            <p:ph type="body" sz="quarter" idx="3"/>
+            <p:ph type="body" idx="3" sz="quarter"/>
           </p:nvPr>
         </p:nvSpPr>
         <p:spPr/>
@@ -1054,7 +1035,7 @@
             <a:spLocks noGrp="1"/>
           </p:cNvSpPr>
           <p:nvPr>
-            <p:ph type="sldNum" sz="quarter" idx="5"/>
+            <p:ph type="sldNum" idx="5" sz="quarter"/>
           </p:nvPr>
         </p:nvSpPr>
         <p:spPr/>
@@ -1068,7 +1049,7 @@
 </file>
 
 <file path=ppt/notesSlides/notesSlide3.xml><?xml version="1.0" encoding="utf-8"?>
-<p:notes xmlns:a="http://schemas.openxmlformats.org/drawingml/2006/main" xmlns:r="http://schemas.openxmlformats.org/officeDocument/2006/relationships" xmlns:p="http://schemas.openxmlformats.org/presentationml/2006/main">
+<p:notes xmlns:a="http://schemas.openxmlformats.org/drawingml/2006/main" xmlns:p="http://schemas.openxmlformats.org/presentationml/2006/main" xmlns:r="http://schemas.openxmlformats.org/officeDocument/2006/relationships">
   <p:cSld>
     <p:spTree>
       <p:nvGrpSpPr>
@@ -1088,7 +1069,7 @@
         <p:nvSpPr>
           <p:cNvPr id="2" name="Slide Image Placeholder 1"/>
           <p:cNvSpPr>
-            <a:spLocks noGrp="1" noRot="1" noChangeAspect="1"/>
+            <a:spLocks noGrp="1"/>
           </p:cNvSpPr>
           <p:nvPr>
             <p:ph type="sldImg" idx="2"/>
@@ -1103,7 +1084,7 @@
             <a:spLocks noGrp="1"/>
           </p:cNvSpPr>
           <p:nvPr>
-            <p:ph type="body" sz="quarter" idx="3"/>
+            <p:ph type="body" idx="3" sz="quarter"/>
           </p:nvPr>
         </p:nvSpPr>
         <p:spPr/>
@@ -1194,7 +1175,7 @@
             <a:spLocks noGrp="1"/>
           </p:cNvSpPr>
           <p:nvPr>
-            <p:ph type="sldNum" sz="quarter" idx="5"/>
+            <p:ph type="sldNum" idx="5" sz="quarter"/>
           </p:nvPr>
         </p:nvSpPr>
         <p:spPr/>
@@ -1208,7 +1189,7 @@
 </file>
 
 <file path=ppt/notesSlides/notesSlide4.xml><?xml version="1.0" encoding="utf-8"?>
-<p:notes xmlns:a="http://schemas.openxmlformats.org/drawingml/2006/main" xmlns:r="http://schemas.openxmlformats.org/officeDocument/2006/relationships" xmlns:p="http://schemas.openxmlformats.org/presentationml/2006/main">
+<p:notes xmlns:a="http://schemas.openxmlformats.org/drawingml/2006/main" xmlns:p="http://schemas.openxmlformats.org/presentationml/2006/main" xmlns:r="http://schemas.openxmlformats.org/officeDocument/2006/relationships">
   <p:cSld>
     <p:spTree>
       <p:nvGrpSpPr>
@@ -1228,7 +1209,7 @@
         <p:nvSpPr>
           <p:cNvPr id="2" name="Slide Image Placeholder 1"/>
           <p:cNvSpPr>
-            <a:spLocks noGrp="1" noRot="1" noChangeAspect="1"/>
+            <a:spLocks noGrp="1"/>
           </p:cNvSpPr>
           <p:nvPr>
             <p:ph type="sldImg" idx="2"/>
@@ -1243,7 +1224,7 @@
             <a:spLocks noGrp="1"/>
           </p:cNvSpPr>
           <p:nvPr>
-            <p:ph type="body" sz="quarter" idx="3"/>
+            <p:ph type="body" idx="3" sz="quarter"/>
           </p:nvPr>
         </p:nvSpPr>
         <p:spPr/>
@@ -1334,7 +1315,7 @@
             <a:spLocks noGrp="1"/>
           </p:cNvSpPr>
           <p:nvPr>
-            <p:ph type="sldNum" sz="quarter" idx="5"/>
+            <p:ph type="sldNum" idx="5" sz="quarter"/>
           </p:nvPr>
         </p:nvSpPr>
         <p:spPr/>
@@ -1348,7 +1329,7 @@
 </file>
 
 <file path=ppt/notesSlides/notesSlide5.xml><?xml version="1.0" encoding="utf-8"?>
-<p:notes xmlns:a="http://schemas.openxmlformats.org/drawingml/2006/main" xmlns:r="http://schemas.openxmlformats.org/officeDocument/2006/relationships" xmlns:p="http://schemas.openxmlformats.org/presentationml/2006/main">
+<p:notes xmlns:a="http://schemas.openxmlformats.org/drawingml/2006/main" xmlns:p="http://schemas.openxmlformats.org/presentationml/2006/main" xmlns:r="http://schemas.openxmlformats.org/officeDocument/2006/relationships">
   <p:cSld>
     <p:spTree>
       <p:nvGrpSpPr>
@@ -1368,7 +1349,7 @@
         <p:nvSpPr>
           <p:cNvPr id="2" name="Slide Image Placeholder 1"/>
           <p:cNvSpPr>
-            <a:spLocks noGrp="1" noRot="1" noChangeAspect="1"/>
+            <a:spLocks noGrp="1"/>
           </p:cNvSpPr>
           <p:nvPr>
             <p:ph type="sldImg" idx="2"/>
@@ -1383,7 +1364,7 @@
             <a:spLocks noGrp="1"/>
           </p:cNvSpPr>
           <p:nvPr>
-            <p:ph type="body" sz="quarter" idx="3"/>
+            <p:ph type="body" idx="3" sz="quarter"/>
           </p:nvPr>
         </p:nvSpPr>
         <p:spPr/>
@@ -1489,7 +1470,7 @@
             <a:spLocks noGrp="1"/>
           </p:cNvSpPr>
           <p:nvPr>
-            <p:ph type="sldNum" sz="quarter" idx="5"/>
+            <p:ph type="sldNum" idx="5" sz="quarter"/>
           </p:nvPr>
         </p:nvSpPr>
         <p:spPr/>
@@ -1503,7 +1484,7 @@
 </file>
 
 <file path=ppt/notesSlides/notesSlide6.xml><?xml version="1.0" encoding="utf-8"?>
-<p:notes xmlns:a="http://schemas.openxmlformats.org/drawingml/2006/main" xmlns:r="http://schemas.openxmlformats.org/officeDocument/2006/relationships" xmlns:p="http://schemas.openxmlformats.org/presentationml/2006/main">
+<p:notes xmlns:a="http://schemas.openxmlformats.org/drawingml/2006/main" xmlns:p="http://schemas.openxmlformats.org/presentationml/2006/main" xmlns:r="http://schemas.openxmlformats.org/officeDocument/2006/relationships">
   <p:cSld>
     <p:spTree>
       <p:nvGrpSpPr>
@@ -1523,7 +1504,7 @@
         <p:nvSpPr>
           <p:cNvPr id="2" name="Slide Image Placeholder 1"/>
           <p:cNvSpPr>
-            <a:spLocks noGrp="1" noRot="1" noChangeAspect="1"/>
+            <a:spLocks noGrp="1"/>
           </p:cNvSpPr>
           <p:nvPr>
             <p:ph type="sldImg" idx="2"/>
@@ -1538,7 +1519,7 @@
             <a:spLocks noGrp="1"/>
           </p:cNvSpPr>
           <p:nvPr>
-            <p:ph type="body" sz="quarter" idx="3"/>
+            <p:ph type="body" idx="3" sz="quarter"/>
           </p:nvPr>
         </p:nvSpPr>
         <p:spPr/>
@@ -1624,7 +1605,7 @@
             <a:spLocks noGrp="1"/>
           </p:cNvSpPr>
           <p:nvPr>
-            <p:ph type="sldNum" sz="quarter" idx="5"/>
+            <p:ph type="sldNum" idx="5" sz="quarter"/>
           </p:nvPr>
         </p:nvSpPr>
         <p:spPr/>
@@ -1638,7 +1619,7 @@
 </file>
 
 <file path=ppt/notesSlides/notesSlide7.xml><?xml version="1.0" encoding="utf-8"?>
-<p:notes xmlns:a="http://schemas.openxmlformats.org/drawingml/2006/main" xmlns:r="http://schemas.openxmlformats.org/officeDocument/2006/relationships" xmlns:p="http://schemas.openxmlformats.org/presentationml/2006/main">
+<p:notes xmlns:a="http://schemas.openxmlformats.org/drawingml/2006/main" xmlns:p="http://schemas.openxmlformats.org/presentationml/2006/main" xmlns:r="http://schemas.openxmlformats.org/officeDocument/2006/relationships">
   <p:cSld>
     <p:spTree>
       <p:nvGrpSpPr>
@@ -1658,7 +1639,7 @@
         <p:nvSpPr>
           <p:cNvPr id="2" name="Slide Image Placeholder 1"/>
           <p:cNvSpPr>
-            <a:spLocks noGrp="1" noRot="1" noChangeAspect="1"/>
+            <a:spLocks noGrp="1"/>
           </p:cNvSpPr>
           <p:nvPr>
             <p:ph type="sldImg" idx="2"/>
@@ -1673,7 +1654,7 @@
             <a:spLocks noGrp="1"/>
           </p:cNvSpPr>
           <p:nvPr>
-            <p:ph type="body" sz="quarter" idx="3"/>
+            <p:ph type="body" idx="3" sz="quarter"/>
           </p:nvPr>
         </p:nvSpPr>
         <p:spPr/>
@@ -1764,7 +1745,7 @@
             <a:spLocks noGrp="1"/>
           </p:cNvSpPr>
           <p:nvPr>
-            <p:ph type="sldNum" sz="quarter" idx="5"/>
+            <p:ph type="sldNum" idx="5" sz="quarter"/>
           </p:nvPr>
         </p:nvSpPr>
         <p:spPr/>
@@ -1778,7 +1759,7 @@
 </file>
 
 <file path=ppt/notesSlides/notesSlide8.xml><?xml version="1.0" encoding="utf-8"?>
-<p:notes xmlns:a="http://schemas.openxmlformats.org/drawingml/2006/main" xmlns:r="http://schemas.openxmlformats.org/officeDocument/2006/relationships" xmlns:p="http://schemas.openxmlformats.org/presentationml/2006/main">
+<p:notes xmlns:a="http://schemas.openxmlformats.org/drawingml/2006/main" xmlns:p="http://schemas.openxmlformats.org/presentationml/2006/main" xmlns:r="http://schemas.openxmlformats.org/officeDocument/2006/relationships">
   <p:cSld>
     <p:spTree>
       <p:nvGrpSpPr>
@@ -1798,7 +1779,7 @@
         <p:nvSpPr>
           <p:cNvPr id="2" name="Slide Image Placeholder 1"/>
           <p:cNvSpPr>
-            <a:spLocks noGrp="1" noRot="1" noChangeAspect="1"/>
+            <a:spLocks noGrp="1"/>
           </p:cNvSpPr>
           <p:nvPr>
             <p:ph type="sldImg" idx="2"/>
@@ -1813,7 +1794,7 @@
             <a:spLocks noGrp="1"/>
           </p:cNvSpPr>
           <p:nvPr>
-            <p:ph type="body" sz="quarter" idx="3"/>
+            <p:ph type="body" idx="3" sz="quarter"/>
           </p:nvPr>
         </p:nvSpPr>
         <p:spPr/>
@@ -1914,7 +1895,7 @@
             <a:spLocks noGrp="1"/>
           </p:cNvSpPr>
           <p:nvPr>
-            <p:ph type="sldNum" sz="quarter" idx="5"/>
+            <p:ph type="sldNum" idx="5" sz="quarter"/>
           </p:nvPr>
         </p:nvSpPr>
         <p:spPr/>
@@ -1928,7 +1909,7 @@
 </file>
 
 <file path=ppt/notesSlides/notesSlide9.xml><?xml version="1.0" encoding="utf-8"?>
-<p:notes xmlns:a="http://schemas.openxmlformats.org/drawingml/2006/main" xmlns:r="http://schemas.openxmlformats.org/officeDocument/2006/relationships" xmlns:p="http://schemas.openxmlformats.org/presentationml/2006/main">
+<p:notes xmlns:a="http://schemas.openxmlformats.org/drawingml/2006/main" xmlns:p="http://schemas.openxmlformats.org/presentationml/2006/main" xmlns:r="http://schemas.openxmlformats.org/officeDocument/2006/relationships">
   <p:cSld>
     <p:spTree>
       <p:nvGrpSpPr>
@@ -1948,7 +1929,7 @@
         <p:nvSpPr>
           <p:cNvPr id="2" name="Slide Image Placeholder 1"/>
           <p:cNvSpPr>
-            <a:spLocks noGrp="1" noRot="1" noChangeAspect="1"/>
+            <a:spLocks noGrp="1"/>
           </p:cNvSpPr>
           <p:nvPr>
             <p:ph type="sldImg" idx="2"/>
@@ -1963,7 +1944,7 @@
             <a:spLocks noGrp="1"/>
           </p:cNvSpPr>
           <p:nvPr>
-            <p:ph type="body" sz="quarter" idx="3"/>
+            <p:ph type="body" idx="3" sz="quarter"/>
           </p:nvPr>
         </p:nvSpPr>
         <p:spPr/>
@@ -2049,7 +2030,7 @@
             <a:spLocks noGrp="1"/>
           </p:cNvSpPr>
           <p:nvPr>
-            <p:ph type="sldNum" sz="quarter" idx="5"/>
+            <p:ph type="sldNum" idx="5" sz="quarter"/>
           </p:nvPr>
         </p:nvSpPr>
         <p:spPr/>
@@ -2100,9 +2081,10 @@
           <a:lstStyle/>
           <a:p>
             <a:r>
-              <a:rPr lang="en-US"/>
+              <a:rPr lang="en-US" smtClean="0"/>
               <a:t>Click to edit Master title style</a:t>
             </a:r>
+            <a:endParaRPr lang="en-US"/>
           </a:p>
         </p:txBody>
       </p:sp>
@@ -2218,9 +2200,10 @@
           </a:lstStyle>
           <a:p>
             <a:r>
-              <a:rPr lang="en-US"/>
+              <a:rPr lang="en-US" smtClean="0"/>
               <a:t>Click to edit Master subtitle style</a:t>
             </a:r>
+            <a:endParaRPr lang="en-US"/>
           </a:p>
         </p:txBody>
       </p:sp>
@@ -2241,7 +2224,7 @@
           <a:p>
             <a:fld id="{5BCAD085-E8A6-8845-BD4E-CB4CCA059FC4}" type="datetimeFigureOut">
               <a:rPr lang="en-US" smtClean="0"/>
-              <a:t>7/9/26</a:t>
+              <a:t>1/27/13</a:t>
             </a:fld>
             <a:endParaRPr lang="en-US"/>
           </a:p>
@@ -2335,9 +2318,10 @@
           <a:lstStyle/>
           <a:p>
             <a:r>
-              <a:rPr lang="en-US"/>
+              <a:rPr lang="en-US" smtClean="0"/>
               <a:t>Click to edit Master title style</a:t>
             </a:r>
+            <a:endParaRPr lang="en-US"/>
           </a:p>
         </p:txBody>
       </p:sp>
@@ -2358,37 +2342,38 @@
           <a:p>
             <a:pPr lvl="0"/>
             <a:r>
-              <a:rPr lang="en-US"/>
+              <a:rPr lang="en-US" smtClean="0"/>
               <a:t>Click to edit Master text styles</a:t>
             </a:r>
           </a:p>
           <a:p>
             <a:pPr lvl="1"/>
             <a:r>
-              <a:rPr lang="en-US"/>
+              <a:rPr lang="en-US" smtClean="0"/>
               <a:t>Second level</a:t>
             </a:r>
           </a:p>
           <a:p>
             <a:pPr lvl="2"/>
             <a:r>
-              <a:rPr lang="en-US"/>
+              <a:rPr lang="en-US" smtClean="0"/>
               <a:t>Third level</a:t>
             </a:r>
           </a:p>
           <a:p>
             <a:pPr lvl="3"/>
             <a:r>
-              <a:rPr lang="en-US"/>
+              <a:rPr lang="en-US" smtClean="0"/>
               <a:t>Fourth level</a:t>
             </a:r>
           </a:p>
           <a:p>
             <a:pPr lvl="4"/>
             <a:r>
-              <a:rPr lang="en-US"/>
+              <a:rPr lang="en-US" smtClean="0"/>
               <a:t>Fifth level</a:t>
             </a:r>
+            <a:endParaRPr lang="en-US"/>
           </a:p>
         </p:txBody>
       </p:sp>
@@ -2409,7 +2394,7 @@
           <a:p>
             <a:fld id="{5BCAD085-E8A6-8845-BD4E-CB4CCA059FC4}" type="datetimeFigureOut">
               <a:rPr lang="en-US" smtClean="0"/>
-              <a:t>7/9/26</a:t>
+              <a:t>1/27/13</a:t>
             </a:fld>
             <a:endParaRPr lang="en-US"/>
           </a:p>
@@ -2508,9 +2493,10 @@
           <a:lstStyle/>
           <a:p>
             <a:r>
-              <a:rPr lang="en-US"/>
+              <a:rPr lang="en-US" smtClean="0"/>
               <a:t>Click to edit Master title style</a:t>
             </a:r>
+            <a:endParaRPr lang="en-US"/>
           </a:p>
         </p:txBody>
       </p:sp>
@@ -2536,37 +2522,38 @@
           <a:p>
             <a:pPr lvl="0"/>
             <a:r>
-              <a:rPr lang="en-US"/>
+              <a:rPr lang="en-US" smtClean="0"/>
               <a:t>Click to edit Master text styles</a:t>
             </a:r>
           </a:p>
           <a:p>
             <a:pPr lvl="1"/>
             <a:r>
-              <a:rPr lang="en-US"/>
+              <a:rPr lang="en-US" smtClean="0"/>
               <a:t>Second level</a:t>
             </a:r>
           </a:p>
           <a:p>
             <a:pPr lvl="2"/>
             <a:r>
-              <a:rPr lang="en-US"/>
+              <a:rPr lang="en-US" smtClean="0"/>
               <a:t>Third level</a:t>
             </a:r>
           </a:p>
           <a:p>
             <a:pPr lvl="3"/>
             <a:r>
-              <a:rPr lang="en-US"/>
+              <a:rPr lang="en-US" smtClean="0"/>
               <a:t>Fourth level</a:t>
             </a:r>
           </a:p>
           <a:p>
             <a:pPr lvl="4"/>
             <a:r>
-              <a:rPr lang="en-US"/>
+              <a:rPr lang="en-US" smtClean="0"/>
               <a:t>Fifth level</a:t>
             </a:r>
+            <a:endParaRPr lang="en-US"/>
           </a:p>
         </p:txBody>
       </p:sp>
@@ -2587,7 +2574,7 @@
           <a:p>
             <a:fld id="{5BCAD085-E8A6-8845-BD4E-CB4CCA059FC4}" type="datetimeFigureOut">
               <a:rPr lang="en-US" smtClean="0"/>
-              <a:t>7/9/26</a:t>
+              <a:t>1/27/13</a:t>
             </a:fld>
             <a:endParaRPr lang="en-US"/>
           </a:p>
@@ -2681,9 +2668,10 @@
           <a:lstStyle/>
           <a:p>
             <a:r>
-              <a:rPr lang="en-US"/>
+              <a:rPr lang="en-US" smtClean="0"/>
               <a:t>Click to edit Master title style</a:t>
             </a:r>
+            <a:endParaRPr lang="en-US"/>
           </a:p>
         </p:txBody>
       </p:sp>
@@ -2704,37 +2692,38 @@
           <a:p>
             <a:pPr lvl="0"/>
             <a:r>
-              <a:rPr lang="en-US"/>
+              <a:rPr lang="en-US" smtClean="0"/>
               <a:t>Click to edit Master text styles</a:t>
             </a:r>
           </a:p>
           <a:p>
             <a:pPr lvl="1"/>
             <a:r>
-              <a:rPr lang="en-US"/>
+              <a:rPr lang="en-US" smtClean="0"/>
               <a:t>Second level</a:t>
             </a:r>
           </a:p>
           <a:p>
             <a:pPr lvl="2"/>
             <a:r>
-              <a:rPr lang="en-US"/>
+              <a:rPr lang="en-US" smtClean="0"/>
               <a:t>Third level</a:t>
             </a:r>
           </a:p>
           <a:p>
             <a:pPr lvl="3"/>
             <a:r>
-              <a:rPr lang="en-US"/>
+              <a:rPr lang="en-US" smtClean="0"/>
               <a:t>Fourth level</a:t>
             </a:r>
           </a:p>
           <a:p>
             <a:pPr lvl="4"/>
             <a:r>
-              <a:rPr lang="en-US"/>
+              <a:rPr lang="en-US" smtClean="0"/>
               <a:t>Fifth level</a:t>
             </a:r>
+            <a:endParaRPr lang="en-US"/>
           </a:p>
         </p:txBody>
       </p:sp>
@@ -2755,7 +2744,7 @@
           <a:p>
             <a:fld id="{5BCAD085-E8A6-8845-BD4E-CB4CCA059FC4}" type="datetimeFigureOut">
               <a:rPr lang="en-US" smtClean="0"/>
-              <a:t>7/9/26</a:t>
+              <a:t>1/27/13</a:t>
             </a:fld>
             <a:endParaRPr lang="en-US"/>
           </a:p>
@@ -2858,9 +2847,10 @@
           </a:lstStyle>
           <a:p>
             <a:r>
-              <a:rPr lang="en-US"/>
+              <a:rPr lang="en-US" smtClean="0"/>
               <a:t>Click to edit Master title style</a:t>
             </a:r>
+            <a:endParaRPr lang="en-US"/>
           </a:p>
         </p:txBody>
       </p:sp>
@@ -2977,7 +2967,7 @@
           <a:p>
             <a:pPr lvl="0"/>
             <a:r>
-              <a:rPr lang="en-US"/>
+              <a:rPr lang="en-US" smtClean="0"/>
               <a:t>Click to edit Master text styles</a:t>
             </a:r>
           </a:p>
@@ -3000,7 +2990,7 @@
           <a:p>
             <a:fld id="{5BCAD085-E8A6-8845-BD4E-CB4CCA059FC4}" type="datetimeFigureOut">
               <a:rPr lang="en-US" smtClean="0"/>
-              <a:t>7/9/26</a:t>
+              <a:t>1/27/13</a:t>
             </a:fld>
             <a:endParaRPr lang="en-US"/>
           </a:p>
@@ -3094,9 +3084,10 @@
           <a:lstStyle/>
           <a:p>
             <a:r>
-              <a:rPr lang="en-US"/>
+              <a:rPr lang="en-US" smtClean="0"/>
               <a:t>Click to edit Master title style</a:t>
             </a:r>
+            <a:endParaRPr lang="en-US"/>
           </a:p>
         </p:txBody>
       </p:sp>
@@ -3150,37 +3141,38 @@
           <a:p>
             <a:pPr lvl="0"/>
             <a:r>
-              <a:rPr lang="en-US"/>
+              <a:rPr lang="en-US" smtClean="0"/>
               <a:t>Click to edit Master text styles</a:t>
             </a:r>
           </a:p>
           <a:p>
             <a:pPr lvl="1"/>
             <a:r>
-              <a:rPr lang="en-US"/>
+              <a:rPr lang="en-US" smtClean="0"/>
               <a:t>Second level</a:t>
             </a:r>
           </a:p>
           <a:p>
             <a:pPr lvl="2"/>
             <a:r>
-              <a:rPr lang="en-US"/>
+              <a:rPr lang="en-US" smtClean="0"/>
               <a:t>Third level</a:t>
             </a:r>
           </a:p>
           <a:p>
             <a:pPr lvl="3"/>
             <a:r>
-              <a:rPr lang="en-US"/>
+              <a:rPr lang="en-US" smtClean="0"/>
               <a:t>Fourth level</a:t>
             </a:r>
           </a:p>
           <a:p>
             <a:pPr lvl="4"/>
             <a:r>
-              <a:rPr lang="en-US"/>
+              <a:rPr lang="en-US" smtClean="0"/>
               <a:t>Fifth level</a:t>
             </a:r>
+            <a:endParaRPr lang="en-US"/>
           </a:p>
         </p:txBody>
       </p:sp>
@@ -3234,37 +3226,38 @@
           <a:p>
             <a:pPr lvl="0"/>
             <a:r>
-              <a:rPr lang="en-US"/>
+              <a:rPr lang="en-US" smtClean="0"/>
               <a:t>Click to edit Master text styles</a:t>
             </a:r>
           </a:p>
           <a:p>
             <a:pPr lvl="1"/>
             <a:r>
-              <a:rPr lang="en-US"/>
+              <a:rPr lang="en-US" smtClean="0"/>
               <a:t>Second level</a:t>
             </a:r>
           </a:p>
           <a:p>
             <a:pPr lvl="2"/>
             <a:r>
-              <a:rPr lang="en-US"/>
+              <a:rPr lang="en-US" smtClean="0"/>
               <a:t>Third level</a:t>
             </a:r>
           </a:p>
           <a:p>
             <a:pPr lvl="3"/>
             <a:r>
-              <a:rPr lang="en-US"/>
+              <a:rPr lang="en-US" smtClean="0"/>
               <a:t>Fourth level</a:t>
             </a:r>
           </a:p>
           <a:p>
             <a:pPr lvl="4"/>
             <a:r>
-              <a:rPr lang="en-US"/>
+              <a:rPr lang="en-US" smtClean="0"/>
               <a:t>Fifth level</a:t>
             </a:r>
+            <a:endParaRPr lang="en-US"/>
           </a:p>
         </p:txBody>
       </p:sp>
@@ -3285,7 +3278,7 @@
           <a:p>
             <a:fld id="{5BCAD085-E8A6-8845-BD4E-CB4CCA059FC4}" type="datetimeFigureOut">
               <a:rPr lang="en-US" smtClean="0"/>
-              <a:t>7/9/26</a:t>
+              <a:t>1/27/13</a:t>
             </a:fld>
             <a:endParaRPr lang="en-US"/>
           </a:p>
@@ -3383,9 +3376,10 @@
           </a:lstStyle>
           <a:p>
             <a:r>
-              <a:rPr lang="en-US"/>
+              <a:rPr lang="en-US" smtClean="0"/>
               <a:t>Click to edit Master title style</a:t>
             </a:r>
+            <a:endParaRPr lang="en-US"/>
           </a:p>
         </p:txBody>
       </p:sp>
@@ -3448,7 +3442,7 @@
           <a:p>
             <a:pPr lvl="0"/>
             <a:r>
-              <a:rPr lang="en-US"/>
+              <a:rPr lang="en-US" smtClean="0"/>
               <a:t>Click to edit Master text styles</a:t>
             </a:r>
           </a:p>
@@ -3504,37 +3498,38 @@
           <a:p>
             <a:pPr lvl="0"/>
             <a:r>
-              <a:rPr lang="en-US"/>
+              <a:rPr lang="en-US" smtClean="0"/>
               <a:t>Click to edit Master text styles</a:t>
             </a:r>
           </a:p>
           <a:p>
             <a:pPr lvl="1"/>
             <a:r>
-              <a:rPr lang="en-US"/>
+              <a:rPr lang="en-US" smtClean="0"/>
               <a:t>Second level</a:t>
             </a:r>
           </a:p>
           <a:p>
             <a:pPr lvl="2"/>
             <a:r>
-              <a:rPr lang="en-US"/>
+              <a:rPr lang="en-US" smtClean="0"/>
               <a:t>Third level</a:t>
             </a:r>
           </a:p>
           <a:p>
             <a:pPr lvl="3"/>
             <a:r>
-              <a:rPr lang="en-US"/>
+              <a:rPr lang="en-US" smtClean="0"/>
               <a:t>Fourth level</a:t>
             </a:r>
           </a:p>
           <a:p>
             <a:pPr lvl="4"/>
             <a:r>
-              <a:rPr lang="en-US"/>
+              <a:rPr lang="en-US" smtClean="0"/>
               <a:t>Fifth level</a:t>
             </a:r>
+            <a:endParaRPr lang="en-US"/>
           </a:p>
         </p:txBody>
       </p:sp>
@@ -3597,7 +3592,7 @@
           <a:p>
             <a:pPr lvl="0"/>
             <a:r>
-              <a:rPr lang="en-US"/>
+              <a:rPr lang="en-US" smtClean="0"/>
               <a:t>Click to edit Master text styles</a:t>
             </a:r>
           </a:p>
@@ -3653,37 +3648,38 @@
           <a:p>
             <a:pPr lvl="0"/>
             <a:r>
-              <a:rPr lang="en-US"/>
+              <a:rPr lang="en-US" smtClean="0"/>
               <a:t>Click to edit Master text styles</a:t>
             </a:r>
           </a:p>
           <a:p>
             <a:pPr lvl="1"/>
             <a:r>
-              <a:rPr lang="en-US"/>
+              <a:rPr lang="en-US" smtClean="0"/>
               <a:t>Second level</a:t>
             </a:r>
           </a:p>
           <a:p>
             <a:pPr lvl="2"/>
             <a:r>
-              <a:rPr lang="en-US"/>
+              <a:rPr lang="en-US" smtClean="0"/>
               <a:t>Third level</a:t>
             </a:r>
           </a:p>
           <a:p>
             <a:pPr lvl="3"/>
             <a:r>
-              <a:rPr lang="en-US"/>
+              <a:rPr lang="en-US" smtClean="0"/>
               <a:t>Fourth level</a:t>
             </a:r>
           </a:p>
           <a:p>
             <a:pPr lvl="4"/>
             <a:r>
-              <a:rPr lang="en-US"/>
+              <a:rPr lang="en-US" smtClean="0"/>
               <a:t>Fifth level</a:t>
             </a:r>
+            <a:endParaRPr lang="en-US"/>
           </a:p>
         </p:txBody>
       </p:sp>
@@ -3704,7 +3700,7 @@
           <a:p>
             <a:fld id="{5BCAD085-E8A6-8845-BD4E-CB4CCA059FC4}" type="datetimeFigureOut">
               <a:rPr lang="en-US" smtClean="0"/>
-              <a:t>7/9/26</a:t>
+              <a:t>1/27/13</a:t>
             </a:fld>
             <a:endParaRPr lang="en-US"/>
           </a:p>
@@ -3798,9 +3794,10 @@
           <a:lstStyle/>
           <a:p>
             <a:r>
-              <a:rPr lang="en-US"/>
+              <a:rPr lang="en-US" smtClean="0"/>
               <a:t>Click to edit Master title style</a:t>
             </a:r>
+            <a:endParaRPr lang="en-US"/>
           </a:p>
         </p:txBody>
       </p:sp>
@@ -3821,7 +3818,7 @@
           <a:p>
             <a:fld id="{5BCAD085-E8A6-8845-BD4E-CB4CCA059FC4}" type="datetimeFigureOut">
               <a:rPr lang="en-US" smtClean="0"/>
-              <a:t>7/9/26</a:t>
+              <a:t>1/27/13</a:t>
             </a:fld>
             <a:endParaRPr lang="en-US"/>
           </a:p>
@@ -3916,7 +3913,7 @@
           <a:p>
             <a:fld id="{5BCAD085-E8A6-8845-BD4E-CB4CCA059FC4}" type="datetimeFigureOut">
               <a:rPr lang="en-US" smtClean="0"/>
-              <a:t>7/9/26</a:t>
+              <a:t>1/27/13</a:t>
             </a:fld>
             <a:endParaRPr lang="en-US"/>
           </a:p>
@@ -4019,9 +4016,10 @@
           </a:lstStyle>
           <a:p>
             <a:r>
-              <a:rPr lang="en-US"/>
+              <a:rPr lang="en-US" smtClean="0"/>
               <a:t>Click to edit Master title style</a:t>
             </a:r>
+            <a:endParaRPr lang="en-US"/>
           </a:p>
         </p:txBody>
       </p:sp>
@@ -4075,37 +4073,38 @@
           <a:p>
             <a:pPr lvl="0"/>
             <a:r>
-              <a:rPr lang="en-US"/>
+              <a:rPr lang="en-US" smtClean="0"/>
               <a:t>Click to edit Master text styles</a:t>
             </a:r>
           </a:p>
           <a:p>
             <a:pPr lvl="1"/>
             <a:r>
-              <a:rPr lang="en-US"/>
+              <a:rPr lang="en-US" smtClean="0"/>
               <a:t>Second level</a:t>
             </a:r>
           </a:p>
           <a:p>
             <a:pPr lvl="2"/>
             <a:r>
-              <a:rPr lang="en-US"/>
+              <a:rPr lang="en-US" smtClean="0"/>
               <a:t>Third level</a:t>
             </a:r>
           </a:p>
           <a:p>
             <a:pPr lvl="3"/>
             <a:r>
-              <a:rPr lang="en-US"/>
+              <a:rPr lang="en-US" smtClean="0"/>
               <a:t>Fourth level</a:t>
             </a:r>
           </a:p>
           <a:p>
             <a:pPr lvl="4"/>
             <a:r>
-              <a:rPr lang="en-US"/>
+              <a:rPr lang="en-US" smtClean="0"/>
               <a:t>Fifth level</a:t>
             </a:r>
+            <a:endParaRPr lang="en-US"/>
           </a:p>
         </p:txBody>
       </p:sp>
@@ -4168,7 +4167,7 @@
           <a:p>
             <a:pPr lvl="0"/>
             <a:r>
-              <a:rPr lang="en-US"/>
+              <a:rPr lang="en-US" smtClean="0"/>
               <a:t>Click to edit Master text styles</a:t>
             </a:r>
           </a:p>
@@ -4191,7 +4190,7 @@
           <a:p>
             <a:fld id="{5BCAD085-E8A6-8845-BD4E-CB4CCA059FC4}" type="datetimeFigureOut">
               <a:rPr lang="en-US" smtClean="0"/>
-              <a:t>7/9/26</a:t>
+              <a:t>1/27/13</a:t>
             </a:fld>
             <a:endParaRPr lang="en-US"/>
           </a:p>
@@ -4294,9 +4293,10 @@
           </a:lstStyle>
           <a:p>
             <a:r>
-              <a:rPr lang="en-US"/>
+              <a:rPr lang="en-US" smtClean="0"/>
               <a:t>Click to edit Master title style</a:t>
             </a:r>
+            <a:endParaRPr lang="en-US"/>
           </a:p>
         </p:txBody>
       </p:sp>
@@ -4420,7 +4420,7 @@
           <a:p>
             <a:pPr lvl="0"/>
             <a:r>
-              <a:rPr lang="en-US"/>
+              <a:rPr lang="en-US" smtClean="0"/>
               <a:t>Click to edit Master text styles</a:t>
             </a:r>
           </a:p>
@@ -4443,7 +4443,7 @@
           <a:p>
             <a:fld id="{5BCAD085-E8A6-8845-BD4E-CB4CCA059FC4}" type="datetimeFigureOut">
               <a:rPr lang="en-US" smtClean="0"/>
-              <a:t>7/9/26</a:t>
+              <a:t>1/27/13</a:t>
             </a:fld>
             <a:endParaRPr lang="en-US"/>
           </a:p>
@@ -4552,9 +4552,10 @@
           <a:lstStyle/>
           <a:p>
             <a:r>
-              <a:rPr lang="en-US"/>
+              <a:rPr lang="en-US" smtClean="0"/>
               <a:t>Click to edit Master title style</a:t>
             </a:r>
+            <a:endParaRPr lang="en-US"/>
           </a:p>
         </p:txBody>
       </p:sp>
@@ -4585,37 +4586,38 @@
           <a:p>
             <a:pPr lvl="0"/>
             <a:r>
-              <a:rPr lang="en-US"/>
+              <a:rPr lang="en-US" smtClean="0"/>
               <a:t>Click to edit Master text styles</a:t>
             </a:r>
           </a:p>
           <a:p>
             <a:pPr lvl="1"/>
             <a:r>
-              <a:rPr lang="en-US"/>
+              <a:rPr lang="en-US" smtClean="0"/>
               <a:t>Second level</a:t>
             </a:r>
           </a:p>
           <a:p>
             <a:pPr lvl="2"/>
             <a:r>
-              <a:rPr lang="en-US"/>
+              <a:rPr lang="en-US" smtClean="0"/>
               <a:t>Third level</a:t>
             </a:r>
           </a:p>
           <a:p>
             <a:pPr lvl="3"/>
             <a:r>
-              <a:rPr lang="en-US"/>
+              <a:rPr lang="en-US" smtClean="0"/>
               <a:t>Fourth level</a:t>
             </a:r>
           </a:p>
           <a:p>
             <a:pPr lvl="4"/>
             <a:r>
-              <a:rPr lang="en-US"/>
+              <a:rPr lang="en-US" smtClean="0"/>
               <a:t>Fifth level</a:t>
             </a:r>
+            <a:endParaRPr lang="en-US"/>
           </a:p>
         </p:txBody>
       </p:sp>
@@ -4654,7 +4656,7 @@
           <a:p>
             <a:fld id="{5BCAD085-E8A6-8845-BD4E-CB4CCA059FC4}" type="datetimeFigureOut">
               <a:rPr lang="en-US" smtClean="0"/>
-              <a:t>7/9/26</a:t>
+              <a:t>1/27/13</a:t>
             </a:fld>
             <a:endParaRPr lang="en-US"/>
           </a:p>
@@ -5013,7 +5015,7 @@
 </file>
 
 <file path=ppt/slides/slide1.xml><?xml version="1.0" encoding="utf-8"?>
-<p:sld xmlns:a="http://schemas.openxmlformats.org/drawingml/2006/main" xmlns:r="http://schemas.openxmlformats.org/officeDocument/2006/relationships" xmlns:p="http://schemas.openxmlformats.org/presentationml/2006/main">
+<p:sld xmlns:a="http://schemas.openxmlformats.org/drawingml/2006/main" xmlns:p="http://schemas.openxmlformats.org/presentationml/2006/main" xmlns:r="http://schemas.openxmlformats.org/officeDocument/2006/relationships">
   <p:cSld>
     <p:bg>
       <p:bgPr>
@@ -5029,14 +5031,7 @@
         <p:cNvGrpSpPr/>
         <p:nvPr/>
       </p:nvGrpSpPr>
-      <p:grpSpPr>
-        <a:xfrm>
-          <a:off x="0" y="0"/>
-          <a:ext cx="0" cy="0"/>
-          <a:chOff x="0" y="0"/>
-          <a:chExt cx="0" cy="0"/>
-        </a:xfrm>
-      </p:grpSpPr>
+      <p:grpSpPr/>
       <p:sp>
         <p:nvSpPr>
           <p:cNvPr id="2" name="Rectangle 1"/>
@@ -5078,7 +5073,6 @@
           <a:lstStyle/>
           <a:p>
             <a:pPr algn="ctr"/>
-            <a:endParaRPr/>
           </a:p>
         </p:txBody>
       </p:sp>
@@ -5099,7 +5093,7 @@
           <a:noFill/>
         </p:spPr>
         <p:txBody>
-          <a:bodyPr wrap="square" lIns="0" tIns="0" rIns="0" bIns="0" anchor="t">
+          <a:bodyPr wrap="square" anchor="t" lIns="0" rIns="0" tIns="0" bIns="0">
             <a:spAutoFit/>
           </a:bodyPr>
           <a:lstStyle/>
@@ -5165,7 +5159,7 @@
           <a:noFill/>
         </p:spPr>
         <p:txBody>
-          <a:bodyPr wrap="square" lIns="0" tIns="0" rIns="0" bIns="0" anchor="t">
+          <a:bodyPr wrap="square" anchor="t" lIns="0" rIns="0" tIns="0" bIns="0">
             <a:spAutoFit/>
           </a:bodyPr>
           <a:lstStyle/>
@@ -5200,7 +5194,7 @@
 </file>
 
 <file path=ppt/slides/slide10.xml><?xml version="1.0" encoding="utf-8"?>
-<p:sld xmlns:a="http://schemas.openxmlformats.org/drawingml/2006/main" xmlns:r="http://schemas.openxmlformats.org/officeDocument/2006/relationships" xmlns:p="http://schemas.openxmlformats.org/presentationml/2006/main">
+<p:sld xmlns:a="http://schemas.openxmlformats.org/drawingml/2006/main" xmlns:p="http://schemas.openxmlformats.org/presentationml/2006/main" xmlns:r="http://schemas.openxmlformats.org/officeDocument/2006/relationships">
   <p:cSld>
     <p:bg>
       <p:bgPr>
@@ -5216,14 +5210,7 @@
         <p:cNvGrpSpPr/>
         <p:nvPr/>
       </p:nvGrpSpPr>
-      <p:grpSpPr>
-        <a:xfrm>
-          <a:off x="0" y="0"/>
-          <a:ext cx="0" cy="0"/>
-          <a:chOff x="0" y="0"/>
-          <a:chExt cx="0" cy="0"/>
-        </a:xfrm>
-      </p:grpSpPr>
+      <p:grpSpPr/>
       <p:sp>
         <p:nvSpPr>
           <p:cNvPr id="2" name="TextBox 1"/>
@@ -5241,7 +5228,7 @@
           <a:noFill/>
         </p:spPr>
         <p:txBody>
-          <a:bodyPr wrap="square" lIns="0" tIns="0" rIns="0" bIns="0" anchor="t">
+          <a:bodyPr wrap="square" anchor="t" lIns="0" rIns="0" tIns="0" bIns="0">
             <a:spAutoFit/>
           </a:bodyPr>
           <a:lstStyle/>
@@ -5299,7 +5286,6 @@
           <a:lstStyle/>
           <a:p>
             <a:pPr algn="ctr"/>
-            <a:endParaRPr/>
           </a:p>
         </p:txBody>
       </p:sp>
@@ -5320,7 +5306,7 @@
           <a:noFill/>
         </p:spPr>
         <p:txBody>
-          <a:bodyPr wrap="square" lIns="0" tIns="0" rIns="0" bIns="0" anchor="ctr">
+          <a:bodyPr wrap="square" anchor="ctr" lIns="0" rIns="0" tIns="0" bIns="0">
             <a:spAutoFit/>
           </a:bodyPr>
           <a:lstStyle/>
@@ -5352,7 +5338,7 @@
                 </a:solidFill>
                 <a:latin typeface="Roboto"/>
               </a:rPr>
-              <a:t>Determine and assess the benefits and differences of cloud/architectural options **against Ledgerline's current business model and needs** — not in the abstract.</a:t>
+              <a:t>Determine and assess the benefits and differences of cloud/architectural options against Ledgerline's current business model and needs — not in the abstract.</a:t>
             </a:r>
           </a:p>
           <a:p>
@@ -5460,7 +5446,6 @@
           <a:lstStyle/>
           <a:p>
             <a:pPr algn="ctr"/>
-            <a:endParaRPr/>
           </a:p>
         </p:txBody>
       </p:sp>
@@ -5481,7 +5466,7 @@
           <a:noFill/>
         </p:spPr>
         <p:txBody>
-          <a:bodyPr wrap="square" lIns="0" tIns="0" rIns="0" bIns="0" anchor="t">
+          <a:bodyPr wrap="square" anchor="t" lIns="0" rIns="0" tIns="0" bIns="0">
             <a:spAutoFit/>
           </a:bodyPr>
           <a:lstStyle/>
@@ -5524,7 +5509,7 @@
           <a:noFill/>
         </p:spPr>
         <p:txBody>
-          <a:bodyPr wrap="square" lIns="0" tIns="0" rIns="0" bIns="0" anchor="t">
+          <a:bodyPr wrap="square" anchor="t" lIns="0" rIns="0" tIns="0" bIns="0">
             <a:spAutoFit/>
           </a:bodyPr>
           <a:lstStyle/>
@@ -5551,7 +5536,7 @@
 </file>
 
 <file path=ppt/slides/slide11.xml><?xml version="1.0" encoding="utf-8"?>
-<p:sld xmlns:a="http://schemas.openxmlformats.org/drawingml/2006/main" xmlns:r="http://schemas.openxmlformats.org/officeDocument/2006/relationships" xmlns:p="http://schemas.openxmlformats.org/presentationml/2006/main">
+<p:sld xmlns:a="http://schemas.openxmlformats.org/drawingml/2006/main" xmlns:p="http://schemas.openxmlformats.org/presentationml/2006/main" xmlns:r="http://schemas.openxmlformats.org/officeDocument/2006/relationships">
   <p:cSld>
     <p:bg>
       <p:bgPr>
@@ -5567,14 +5552,7 @@
         <p:cNvGrpSpPr/>
         <p:nvPr/>
       </p:nvGrpSpPr>
-      <p:grpSpPr>
-        <a:xfrm>
-          <a:off x="0" y="0"/>
-          <a:ext cx="0" cy="0"/>
-          <a:chOff x="0" y="0"/>
-          <a:chExt cx="0" cy="0"/>
-        </a:xfrm>
-      </p:grpSpPr>
+      <p:grpSpPr/>
       <p:sp>
         <p:nvSpPr>
           <p:cNvPr id="2" name="Rectangle 1"/>
@@ -5616,7 +5594,6 @@
           <a:lstStyle/>
           <a:p>
             <a:pPr algn="ctr"/>
-            <a:endParaRPr/>
           </a:p>
         </p:txBody>
       </p:sp>
@@ -5690,7 +5667,7 @@
           <a:noFill/>
         </p:spPr>
         <p:txBody>
-          <a:bodyPr wrap="square" lIns="0" tIns="0" rIns="0" bIns="0" anchor="ctr">
+          <a:bodyPr wrap="square" anchor="ctr" lIns="0" rIns="0" tIns="0" bIns="0">
             <a:spAutoFit/>
           </a:bodyPr>
           <a:lstStyle/>
@@ -5724,7 +5701,7 @@
           <a:noFill/>
         </p:spPr>
         <p:txBody>
-          <a:bodyPr wrap="square" lIns="0" tIns="0" rIns="0" bIns="0" anchor="t">
+          <a:bodyPr wrap="square" anchor="t" lIns="0" rIns="0" tIns="0" bIns="0">
             <a:spAutoFit/>
           </a:bodyPr>
           <a:lstStyle/>
@@ -5835,7 +5812,6 @@
           <a:lstStyle/>
           <a:p>
             <a:pPr algn="ctr"/>
-            <a:endParaRPr/>
           </a:p>
         </p:txBody>
       </p:sp>
@@ -5856,7 +5832,7 @@
           <a:noFill/>
         </p:spPr>
         <p:txBody>
-          <a:bodyPr wrap="square" lIns="0" tIns="0" rIns="0" bIns="0" anchor="ctr">
+          <a:bodyPr wrap="square" anchor="ctr" lIns="0" rIns="0" tIns="0" bIns="0">
             <a:spAutoFit/>
           </a:bodyPr>
           <a:lstStyle/>
@@ -5914,7 +5890,6 @@
           <a:lstStyle/>
           <a:p>
             <a:pPr algn="ctr"/>
-            <a:endParaRPr/>
           </a:p>
         </p:txBody>
       </p:sp>
@@ -5935,7 +5910,7 @@
           <a:noFill/>
         </p:spPr>
         <p:txBody>
-          <a:bodyPr wrap="square" lIns="0" tIns="0" rIns="0" bIns="0" anchor="t">
+          <a:bodyPr wrap="square" anchor="t" lIns="0" rIns="0" tIns="0" bIns="0">
             <a:spAutoFit/>
           </a:bodyPr>
           <a:lstStyle/>
@@ -5978,7 +5953,7 @@
           <a:noFill/>
         </p:spPr>
         <p:txBody>
-          <a:bodyPr wrap="square" lIns="0" tIns="0" rIns="0" bIns="0" anchor="t">
+          <a:bodyPr wrap="square" anchor="t" lIns="0" rIns="0" tIns="0" bIns="0">
             <a:spAutoFit/>
           </a:bodyPr>
           <a:lstStyle/>
@@ -6005,7 +5980,7 @@
 </file>
 
 <file path=ppt/slides/slide12.xml><?xml version="1.0" encoding="utf-8"?>
-<p:sld xmlns:a="http://schemas.openxmlformats.org/drawingml/2006/main" xmlns:r="http://schemas.openxmlformats.org/officeDocument/2006/relationships" xmlns:p="http://schemas.openxmlformats.org/presentationml/2006/main">
+<p:sld xmlns:a="http://schemas.openxmlformats.org/drawingml/2006/main" xmlns:p="http://schemas.openxmlformats.org/presentationml/2006/main" xmlns:r="http://schemas.openxmlformats.org/officeDocument/2006/relationships">
   <p:cSld>
     <p:bg>
       <p:bgPr>
@@ -6021,14 +5996,7 @@
         <p:cNvGrpSpPr/>
         <p:nvPr/>
       </p:nvGrpSpPr>
-      <p:grpSpPr>
-        <a:xfrm>
-          <a:off x="0" y="0"/>
-          <a:ext cx="0" cy="0"/>
-          <a:chOff x="0" y="0"/>
-          <a:chExt cx="0" cy="0"/>
-        </a:xfrm>
-      </p:grpSpPr>
+      <p:grpSpPr/>
       <p:sp>
         <p:nvSpPr>
           <p:cNvPr id="2" name="Rectangle 1"/>
@@ -6070,7 +6038,6 @@
           <a:lstStyle/>
           <a:p>
             <a:pPr algn="ctr"/>
-            <a:endParaRPr/>
           </a:p>
         </p:txBody>
       </p:sp>
@@ -6091,7 +6058,7 @@
           <a:noFill/>
         </p:spPr>
         <p:txBody>
-          <a:bodyPr wrap="square" lIns="0" tIns="0" rIns="0" bIns="0" anchor="t">
+          <a:bodyPr wrap="square" anchor="t" lIns="0" rIns="0" tIns="0" bIns="0">
             <a:spAutoFit/>
           </a:bodyPr>
           <a:lstStyle/>
@@ -6125,7 +6092,7 @@
           <a:noFill/>
         </p:spPr>
         <p:txBody>
-          <a:bodyPr wrap="square" lIns="0" tIns="0" rIns="0" bIns="0" anchor="t">
+          <a:bodyPr wrap="square" anchor="t" lIns="0" rIns="0" tIns="0" bIns="0">
             <a:spAutoFit/>
           </a:bodyPr>
           <a:lstStyle/>
@@ -6215,7 +6182,6 @@
           <a:lstStyle/>
           <a:p>
             <a:pPr algn="ctr"/>
-            <a:endParaRPr/>
           </a:p>
         </p:txBody>
       </p:sp>
@@ -6236,7 +6202,7 @@
           <a:noFill/>
         </p:spPr>
         <p:txBody>
-          <a:bodyPr wrap="square" lIns="0" tIns="0" rIns="0" bIns="0" anchor="t">
+          <a:bodyPr wrap="square" anchor="t" lIns="0" rIns="0" tIns="0" bIns="0">
             <a:spAutoFit/>
           </a:bodyPr>
           <a:lstStyle/>
@@ -6279,13 +6245,21 @@
           <a:noFill/>
         </p:spPr>
         <p:txBody>
-          <a:bodyPr wrap="square" lIns="0" tIns="0" rIns="0" bIns="0" anchor="t">
+          <a:bodyPr wrap="square" anchor="t" lIns="0" rIns="0" tIns="0" bIns="0">
             <a:spAutoFit/>
           </a:bodyPr>
           <a:lstStyle/>
           <a:p>
             <a:pPr algn="r"/>
-            <a:endParaRPr/>
+            <a:r>
+              <a:rPr sz="1100" b="0" i="0">
+                <a:solidFill>
+                  <a:srgbClr val="7A7A7A"/>
+                </a:solidFill>
+                <a:latin typeface="Roboto"/>
+              </a:rPr>
+              <a:t/>
+            </a:r>
           </a:p>
         </p:txBody>
       </p:sp>
@@ -6298,7 +6272,7 @@
 </file>
 
 <file path=ppt/slides/slide13.xml><?xml version="1.0" encoding="utf-8"?>
-<p:sld xmlns:a="http://schemas.openxmlformats.org/drawingml/2006/main" xmlns:r="http://schemas.openxmlformats.org/officeDocument/2006/relationships" xmlns:p="http://schemas.openxmlformats.org/presentationml/2006/main">
+<p:sld xmlns:a="http://schemas.openxmlformats.org/drawingml/2006/main" xmlns:p="http://schemas.openxmlformats.org/presentationml/2006/main" xmlns:r="http://schemas.openxmlformats.org/officeDocument/2006/relationships">
   <p:cSld>
     <p:bg>
       <p:bgPr>
@@ -6314,14 +6288,7 @@
         <p:cNvGrpSpPr/>
         <p:nvPr/>
       </p:nvGrpSpPr>
-      <p:grpSpPr>
-        <a:xfrm>
-          <a:off x="0" y="0"/>
-          <a:ext cx="0" cy="0"/>
-          <a:chOff x="0" y="0"/>
-          <a:chExt cx="0" cy="0"/>
-        </a:xfrm>
-      </p:grpSpPr>
+      <p:grpSpPr/>
       <p:sp>
         <p:nvSpPr>
           <p:cNvPr id="2" name="TextBox 1"/>
@@ -6339,7 +6306,7 @@
           <a:noFill/>
         </p:spPr>
         <p:txBody>
-          <a:bodyPr wrap="square" lIns="0" tIns="0" rIns="0" bIns="0" anchor="t">
+          <a:bodyPr wrap="square" anchor="t" lIns="0" rIns="0" tIns="0" bIns="0">
             <a:spAutoFit/>
           </a:bodyPr>
           <a:lstStyle/>
@@ -6397,7 +6364,6 @@
           <a:lstStyle/>
           <a:p>
             <a:pPr algn="ctr"/>
-            <a:endParaRPr/>
           </a:p>
         </p:txBody>
       </p:sp>
@@ -6418,7 +6384,7 @@
           <a:noFill/>
         </p:spPr>
         <p:txBody>
-          <a:bodyPr wrap="square" lIns="0" tIns="0" rIns="0" bIns="0" anchor="ctr">
+          <a:bodyPr wrap="square" anchor="ctr" lIns="0" rIns="0" tIns="0" bIns="0">
             <a:spAutoFit/>
           </a:bodyPr>
           <a:lstStyle/>
@@ -6558,7 +6524,6 @@
           <a:lstStyle/>
           <a:p>
             <a:pPr algn="ctr"/>
-            <a:endParaRPr/>
           </a:p>
         </p:txBody>
       </p:sp>
@@ -6579,7 +6544,7 @@
           <a:noFill/>
         </p:spPr>
         <p:txBody>
-          <a:bodyPr wrap="square" lIns="0" tIns="0" rIns="0" bIns="0" anchor="t">
+          <a:bodyPr wrap="square" anchor="t" lIns="0" rIns="0" tIns="0" bIns="0">
             <a:spAutoFit/>
           </a:bodyPr>
           <a:lstStyle/>
@@ -6622,7 +6587,7 @@
           <a:noFill/>
         </p:spPr>
         <p:txBody>
-          <a:bodyPr wrap="square" lIns="0" tIns="0" rIns="0" bIns="0" anchor="t">
+          <a:bodyPr wrap="square" anchor="t" lIns="0" rIns="0" tIns="0" bIns="0">
             <a:spAutoFit/>
           </a:bodyPr>
           <a:lstStyle/>
@@ -6649,7 +6614,7 @@
 </file>
 
 <file path=ppt/slides/slide14.xml><?xml version="1.0" encoding="utf-8"?>
-<p:sld xmlns:a="http://schemas.openxmlformats.org/drawingml/2006/main" xmlns:r="http://schemas.openxmlformats.org/officeDocument/2006/relationships" xmlns:p="http://schemas.openxmlformats.org/presentationml/2006/main">
+<p:sld xmlns:a="http://schemas.openxmlformats.org/drawingml/2006/main" xmlns:p="http://schemas.openxmlformats.org/presentationml/2006/main" xmlns:r="http://schemas.openxmlformats.org/officeDocument/2006/relationships">
   <p:cSld>
     <p:bg>
       <p:bgPr>
@@ -6665,14 +6630,7 @@
         <p:cNvGrpSpPr/>
         <p:nvPr/>
       </p:nvGrpSpPr>
-      <p:grpSpPr>
-        <a:xfrm>
-          <a:off x="0" y="0"/>
-          <a:ext cx="0" cy="0"/>
-          <a:chOff x="0" y="0"/>
-          <a:chExt cx="0" cy="0"/>
-        </a:xfrm>
-      </p:grpSpPr>
+      <p:grpSpPr/>
       <p:sp>
         <p:nvSpPr>
           <p:cNvPr id="2" name="TextBox 1"/>
@@ -6690,7 +6648,7 @@
           <a:noFill/>
         </p:spPr>
         <p:txBody>
-          <a:bodyPr wrap="square" lIns="0" tIns="0" rIns="0" bIns="0" anchor="t">
+          <a:bodyPr wrap="square" anchor="t" lIns="0" rIns="0" tIns="0" bIns="0">
             <a:spAutoFit/>
           </a:bodyPr>
           <a:lstStyle/>
@@ -6748,7 +6706,6 @@
           <a:lstStyle/>
           <a:p>
             <a:pPr algn="ctr"/>
-            <a:endParaRPr/>
           </a:p>
         </p:txBody>
       </p:sp>
@@ -6769,7 +6726,7 @@
           <a:noFill/>
         </p:spPr>
         <p:txBody>
-          <a:bodyPr wrap="square" lIns="0" tIns="0" rIns="0" bIns="0" anchor="ctr">
+          <a:bodyPr wrap="square" anchor="ctr" lIns="0" rIns="0" tIns="0" bIns="0">
             <a:spAutoFit/>
           </a:bodyPr>
           <a:lstStyle/>
@@ -6909,7 +6866,6 @@
           <a:lstStyle/>
           <a:p>
             <a:pPr algn="ctr"/>
-            <a:endParaRPr/>
           </a:p>
         </p:txBody>
       </p:sp>
@@ -6930,7 +6886,7 @@
           <a:noFill/>
         </p:spPr>
         <p:txBody>
-          <a:bodyPr wrap="square" lIns="0" tIns="0" rIns="0" bIns="0" anchor="t">
+          <a:bodyPr wrap="square" anchor="t" lIns="0" rIns="0" tIns="0" bIns="0">
             <a:spAutoFit/>
           </a:bodyPr>
           <a:lstStyle/>
@@ -6973,7 +6929,7 @@
           <a:noFill/>
         </p:spPr>
         <p:txBody>
-          <a:bodyPr wrap="square" lIns="0" tIns="0" rIns="0" bIns="0" anchor="t">
+          <a:bodyPr wrap="square" anchor="t" lIns="0" rIns="0" tIns="0" bIns="0">
             <a:spAutoFit/>
           </a:bodyPr>
           <a:lstStyle/>
@@ -7000,7 +6956,7 @@
 </file>
 
 <file path=ppt/slides/slide15.xml><?xml version="1.0" encoding="utf-8"?>
-<p:sld xmlns:a="http://schemas.openxmlformats.org/drawingml/2006/main" xmlns:r="http://schemas.openxmlformats.org/officeDocument/2006/relationships" xmlns:p="http://schemas.openxmlformats.org/presentationml/2006/main">
+<p:sld xmlns:a="http://schemas.openxmlformats.org/drawingml/2006/main" xmlns:p="http://schemas.openxmlformats.org/presentationml/2006/main" xmlns:r="http://schemas.openxmlformats.org/officeDocument/2006/relationships">
   <p:cSld>
     <p:bg>
       <p:bgPr>
@@ -7016,14 +6972,7 @@
         <p:cNvGrpSpPr/>
         <p:nvPr/>
       </p:nvGrpSpPr>
-      <p:grpSpPr>
-        <a:xfrm>
-          <a:off x="0" y="0"/>
-          <a:ext cx="0" cy="0"/>
-          <a:chOff x="0" y="0"/>
-          <a:chExt cx="0" cy="0"/>
-        </a:xfrm>
-      </p:grpSpPr>
+      <p:grpSpPr/>
       <p:sp>
         <p:nvSpPr>
           <p:cNvPr id="2" name="Rectangle 1"/>
@@ -7065,7 +7014,6 @@
           <a:lstStyle/>
           <a:p>
             <a:pPr algn="ctr"/>
-            <a:endParaRPr/>
           </a:p>
         </p:txBody>
       </p:sp>
@@ -7139,7 +7087,7 @@
           <a:noFill/>
         </p:spPr>
         <p:txBody>
-          <a:bodyPr wrap="square" lIns="0" tIns="0" rIns="0" bIns="0" anchor="ctr">
+          <a:bodyPr wrap="square" anchor="ctr" lIns="0" rIns="0" tIns="0" bIns="0">
             <a:spAutoFit/>
           </a:bodyPr>
           <a:lstStyle/>
@@ -7173,7 +7121,7 @@
           <a:noFill/>
         </p:spPr>
         <p:txBody>
-          <a:bodyPr wrap="square" lIns="0" tIns="0" rIns="0" bIns="0" anchor="t">
+          <a:bodyPr wrap="square" anchor="t" lIns="0" rIns="0" tIns="0" bIns="0">
             <a:spAutoFit/>
           </a:bodyPr>
           <a:lstStyle/>
@@ -7284,7 +7232,6 @@
           <a:lstStyle/>
           <a:p>
             <a:pPr algn="ctr"/>
-            <a:endParaRPr/>
           </a:p>
         </p:txBody>
       </p:sp>
@@ -7305,7 +7252,7 @@
           <a:noFill/>
         </p:spPr>
         <p:txBody>
-          <a:bodyPr wrap="square" lIns="0" tIns="0" rIns="0" bIns="0" anchor="ctr">
+          <a:bodyPr wrap="square" anchor="ctr" lIns="0" rIns="0" tIns="0" bIns="0">
             <a:spAutoFit/>
           </a:bodyPr>
           <a:lstStyle/>
@@ -7363,7 +7310,6 @@
           <a:lstStyle/>
           <a:p>
             <a:pPr algn="ctr"/>
-            <a:endParaRPr/>
           </a:p>
         </p:txBody>
       </p:sp>
@@ -7384,7 +7330,7 @@
           <a:noFill/>
         </p:spPr>
         <p:txBody>
-          <a:bodyPr wrap="square" lIns="0" tIns="0" rIns="0" bIns="0" anchor="t">
+          <a:bodyPr wrap="square" anchor="t" lIns="0" rIns="0" tIns="0" bIns="0">
             <a:spAutoFit/>
           </a:bodyPr>
           <a:lstStyle/>
@@ -7427,7 +7373,7 @@
           <a:noFill/>
         </p:spPr>
         <p:txBody>
-          <a:bodyPr wrap="square" lIns="0" tIns="0" rIns="0" bIns="0" anchor="t">
+          <a:bodyPr wrap="square" anchor="t" lIns="0" rIns="0" tIns="0" bIns="0">
             <a:spAutoFit/>
           </a:bodyPr>
           <a:lstStyle/>
@@ -7454,7 +7400,7 @@
 </file>
 
 <file path=ppt/slides/slide16.xml><?xml version="1.0" encoding="utf-8"?>
-<p:sld xmlns:a="http://schemas.openxmlformats.org/drawingml/2006/main" xmlns:r="http://schemas.openxmlformats.org/officeDocument/2006/relationships" xmlns:p="http://schemas.openxmlformats.org/presentationml/2006/main">
+<p:sld xmlns:a="http://schemas.openxmlformats.org/drawingml/2006/main" xmlns:p="http://schemas.openxmlformats.org/presentationml/2006/main" xmlns:r="http://schemas.openxmlformats.org/officeDocument/2006/relationships">
   <p:cSld>
     <p:bg>
       <p:bgPr>
@@ -7470,14 +7416,7 @@
         <p:cNvGrpSpPr/>
         <p:nvPr/>
       </p:nvGrpSpPr>
-      <p:grpSpPr>
-        <a:xfrm>
-          <a:off x="0" y="0"/>
-          <a:ext cx="0" cy="0"/>
-          <a:chOff x="0" y="0"/>
-          <a:chExt cx="0" cy="0"/>
-        </a:xfrm>
-      </p:grpSpPr>
+      <p:grpSpPr/>
       <p:sp>
         <p:nvSpPr>
           <p:cNvPr id="2" name="TextBox 1"/>
@@ -7495,7 +7434,7 @@
           <a:noFill/>
         </p:spPr>
         <p:txBody>
-          <a:bodyPr wrap="square" lIns="0" tIns="0" rIns="0" bIns="0" anchor="t">
+          <a:bodyPr wrap="square" anchor="t" lIns="0" rIns="0" tIns="0" bIns="0">
             <a:spAutoFit/>
           </a:bodyPr>
           <a:lstStyle/>
@@ -7569,7 +7508,6 @@
           <a:lstStyle/>
           <a:p>
             <a:pPr algn="ctr"/>
-            <a:endParaRPr/>
           </a:p>
         </p:txBody>
       </p:sp>
@@ -7616,7 +7554,6 @@
           <a:lstStyle/>
           <a:p>
             <a:pPr algn="ctr"/>
-            <a:endParaRPr/>
           </a:p>
         </p:txBody>
       </p:sp>
@@ -7661,7 +7598,6 @@
           <a:lstStyle/>
           <a:p>
             <a:pPr algn="ctr"/>
-            <a:endParaRPr/>
           </a:p>
         </p:txBody>
       </p:sp>
@@ -7682,7 +7618,7 @@
           <a:noFill/>
         </p:spPr>
         <p:txBody>
-          <a:bodyPr wrap="square" lIns="0" tIns="0" rIns="0" bIns="0" anchor="ctr">
+          <a:bodyPr wrap="square" anchor="ctr" lIns="0" rIns="0" tIns="0" bIns="0">
             <a:spAutoFit/>
           </a:bodyPr>
           <a:lstStyle/>
@@ -7747,7 +7683,6 @@
           <a:lstStyle/>
           <a:p>
             <a:pPr algn="ctr"/>
-            <a:endParaRPr/>
           </a:p>
         </p:txBody>
       </p:sp>
@@ -7792,7 +7727,6 @@
           <a:lstStyle/>
           <a:p>
             <a:pPr algn="ctr"/>
-            <a:endParaRPr/>
           </a:p>
         </p:txBody>
       </p:sp>
@@ -7813,7 +7747,7 @@
           <a:noFill/>
         </p:spPr>
         <p:txBody>
-          <a:bodyPr wrap="square" lIns="0" tIns="0" rIns="0" bIns="0" anchor="ctr">
+          <a:bodyPr wrap="square" anchor="ctr" lIns="0" rIns="0" tIns="0" bIns="0">
             <a:spAutoFit/>
           </a:bodyPr>
           <a:lstStyle/>
@@ -7830,7 +7764,7 @@
                 </a:solidFill>
                 <a:latin typeface="Roboto"/>
               </a:rPr>
-              <a:t>Ledgerline is single-AZ with a **vendor-certified single-instance DB that cannot go Multi-AZ** — carry that constraint into Topic 2.</a:t>
+              <a:t>Ledgerline is single-AZ with a vendor-certified single-instance DB that cannot go Multi-AZ — carry that constraint into Topic 2.</a:t>
             </a:r>
           </a:p>
         </p:txBody>
@@ -7878,7 +7812,6 @@
           <a:lstStyle/>
           <a:p>
             <a:pPr algn="ctr"/>
-            <a:endParaRPr/>
           </a:p>
         </p:txBody>
       </p:sp>
@@ -7923,7 +7856,6 @@
           <a:lstStyle/>
           <a:p>
             <a:pPr algn="ctr"/>
-            <a:endParaRPr/>
           </a:p>
         </p:txBody>
       </p:sp>
@@ -7944,7 +7876,7 @@
           <a:noFill/>
         </p:spPr>
         <p:txBody>
-          <a:bodyPr wrap="square" lIns="0" tIns="0" rIns="0" bIns="0" anchor="ctr">
+          <a:bodyPr wrap="square" anchor="ctr" lIns="0" rIns="0" tIns="0" bIns="0">
             <a:spAutoFit/>
           </a:bodyPr>
           <a:lstStyle/>
@@ -8009,7 +7941,6 @@
           <a:lstStyle/>
           <a:p>
             <a:pPr algn="ctr"/>
-            <a:endParaRPr/>
           </a:p>
         </p:txBody>
       </p:sp>
@@ -8054,7 +7985,6 @@
           <a:lstStyle/>
           <a:p>
             <a:pPr algn="ctr"/>
-            <a:endParaRPr/>
           </a:p>
         </p:txBody>
       </p:sp>
@@ -8075,7 +8005,7 @@
           <a:noFill/>
         </p:spPr>
         <p:txBody>
-          <a:bodyPr wrap="square" lIns="0" tIns="0" rIns="0" bIns="0" anchor="ctr">
+          <a:bodyPr wrap="square" anchor="ctr" lIns="0" rIns="0" tIns="0" bIns="0">
             <a:spAutoFit/>
           </a:bodyPr>
           <a:lstStyle/>
@@ -8138,7 +8068,6 @@
           <a:lstStyle/>
           <a:p>
             <a:pPr algn="ctr"/>
-            <a:endParaRPr/>
           </a:p>
         </p:txBody>
       </p:sp>
@@ -8159,7 +8088,7 @@
           <a:noFill/>
         </p:spPr>
         <p:txBody>
-          <a:bodyPr wrap="square" lIns="0" tIns="0" rIns="0" bIns="0" anchor="t">
+          <a:bodyPr wrap="square" anchor="t" lIns="0" rIns="0" tIns="0" bIns="0">
             <a:spAutoFit/>
           </a:bodyPr>
           <a:lstStyle/>
@@ -8202,7 +8131,7 @@
           <a:noFill/>
         </p:spPr>
         <p:txBody>
-          <a:bodyPr wrap="square" lIns="0" tIns="0" rIns="0" bIns="0" anchor="t">
+          <a:bodyPr wrap="square" anchor="t" lIns="0" rIns="0" tIns="0" bIns="0">
             <a:spAutoFit/>
           </a:bodyPr>
           <a:lstStyle/>
@@ -8229,7 +8158,7 @@
 </file>
 
 <file path=ppt/slides/slide17.xml><?xml version="1.0" encoding="utf-8"?>
-<p:sld xmlns:a="http://schemas.openxmlformats.org/drawingml/2006/main" xmlns:r="http://schemas.openxmlformats.org/officeDocument/2006/relationships" xmlns:p="http://schemas.openxmlformats.org/presentationml/2006/main">
+<p:sld xmlns:a="http://schemas.openxmlformats.org/drawingml/2006/main" xmlns:p="http://schemas.openxmlformats.org/presentationml/2006/main" xmlns:r="http://schemas.openxmlformats.org/officeDocument/2006/relationships">
   <p:cSld>
     <p:bg>
       <p:bgPr>
@@ -8245,14 +8174,7 @@
         <p:cNvGrpSpPr/>
         <p:nvPr/>
       </p:nvGrpSpPr>
-      <p:grpSpPr>
-        <a:xfrm>
-          <a:off x="0" y="0"/>
-          <a:ext cx="0" cy="0"/>
-          <a:chOff x="0" y="0"/>
-          <a:chExt cx="0" cy="0"/>
-        </a:xfrm>
-      </p:grpSpPr>
+      <p:grpSpPr/>
       <p:sp>
         <p:nvSpPr>
           <p:cNvPr id="2" name="Rectangle 1"/>
@@ -8294,7 +8216,6 @@
           <a:lstStyle/>
           <a:p>
             <a:pPr algn="ctr"/>
-            <a:endParaRPr/>
           </a:p>
         </p:txBody>
       </p:sp>
@@ -8315,7 +8236,7 @@
           <a:noFill/>
         </p:spPr>
         <p:txBody>
-          <a:bodyPr wrap="square" lIns="0" tIns="0" rIns="0" bIns="0" anchor="t">
+          <a:bodyPr wrap="square" anchor="t" lIns="0" rIns="0" tIns="0" bIns="0">
             <a:spAutoFit/>
           </a:bodyPr>
           <a:lstStyle/>
@@ -8379,7 +8300,7 @@
 </file>
 
 <file path=ppt/slides/slide2.xml><?xml version="1.0" encoding="utf-8"?>
-<p:sld xmlns:a="http://schemas.openxmlformats.org/drawingml/2006/main" xmlns:r="http://schemas.openxmlformats.org/officeDocument/2006/relationships" xmlns:p="http://schemas.openxmlformats.org/presentationml/2006/main">
+<p:sld xmlns:a="http://schemas.openxmlformats.org/drawingml/2006/main" xmlns:p="http://schemas.openxmlformats.org/presentationml/2006/main" xmlns:r="http://schemas.openxmlformats.org/officeDocument/2006/relationships">
   <p:cSld>
     <p:bg>
       <p:bgPr>
@@ -8395,14 +8316,7 @@
         <p:cNvGrpSpPr/>
         <p:nvPr/>
       </p:nvGrpSpPr>
-      <p:grpSpPr>
-        <a:xfrm>
-          <a:off x="0" y="0"/>
-          <a:ext cx="0" cy="0"/>
-          <a:chOff x="0" y="0"/>
-          <a:chExt cx="0" cy="0"/>
-        </a:xfrm>
-      </p:grpSpPr>
+      <p:grpSpPr/>
       <p:sp>
         <p:nvSpPr>
           <p:cNvPr id="2" name="TextBox 1"/>
@@ -8420,7 +8334,7 @@
           <a:noFill/>
         </p:spPr>
         <p:txBody>
-          <a:bodyPr wrap="square" lIns="0" tIns="0" rIns="0" bIns="0" anchor="t">
+          <a:bodyPr wrap="square" anchor="t" lIns="0" rIns="0" tIns="0" bIns="0">
             <a:spAutoFit/>
           </a:bodyPr>
           <a:lstStyle/>
@@ -8478,7 +8392,6 @@
           <a:lstStyle/>
           <a:p>
             <a:pPr algn="ctr"/>
-            <a:endParaRPr/>
           </a:p>
         </p:txBody>
       </p:sp>
@@ -8499,7 +8412,7 @@
           <a:noFill/>
         </p:spPr>
         <p:txBody>
-          <a:bodyPr wrap="square" lIns="0" tIns="0" rIns="0" bIns="0" anchor="t">
+          <a:bodyPr wrap="square" anchor="t" lIns="0" rIns="0" tIns="0" bIns="0">
             <a:spAutoFit/>
           </a:bodyPr>
           <a:lstStyle/>
@@ -8593,7 +8506,7 @@
                 </a:solidFill>
                 <a:latin typeface="Roboto"/>
               </a:rPr>
-              <a:t>Vehicle: **Ledgerline**, YAT's Accounting system, runs single-AZ in the cloud — the system you analyse and improve.</a:t>
+              <a:t>Vehicle: Ledgerline, YAT's Accounting system, runs single-AZ in the cloud — the system you analyse and improve.</a:t>
             </a:r>
           </a:p>
           <a:p>
@@ -8638,7 +8551,7 @@
           <p:nvPr/>
         </p:nvPicPr>
         <p:blipFill>
-          <a:blip r:embed="rId3"/>
+          <a:blip r:embed="rId2"/>
           <a:stretch>
             <a:fillRect/>
           </a:stretch>
@@ -8694,7 +8607,6 @@
           <a:lstStyle/>
           <a:p>
             <a:pPr algn="ctr"/>
-            <a:endParaRPr/>
           </a:p>
         </p:txBody>
       </p:sp>
@@ -8715,7 +8627,7 @@
           <a:noFill/>
         </p:spPr>
         <p:txBody>
-          <a:bodyPr wrap="square" lIns="0" tIns="0" rIns="0" bIns="0" anchor="t">
+          <a:bodyPr wrap="square" anchor="t" lIns="0" rIns="0" tIns="0" bIns="0">
             <a:spAutoFit/>
           </a:bodyPr>
           <a:lstStyle/>
@@ -8758,7 +8670,7 @@
           <a:noFill/>
         </p:spPr>
         <p:txBody>
-          <a:bodyPr wrap="square" lIns="0" tIns="0" rIns="0" bIns="0" anchor="t">
+          <a:bodyPr wrap="square" anchor="t" lIns="0" rIns="0" tIns="0" bIns="0">
             <a:spAutoFit/>
           </a:bodyPr>
           <a:lstStyle/>
@@ -8785,7 +8697,7 @@
 </file>
 
 <file path=ppt/slides/slide3.xml><?xml version="1.0" encoding="utf-8"?>
-<p:sld xmlns:a="http://schemas.openxmlformats.org/drawingml/2006/main" xmlns:r="http://schemas.openxmlformats.org/officeDocument/2006/relationships" xmlns:p="http://schemas.openxmlformats.org/presentationml/2006/main">
+<p:sld xmlns:a="http://schemas.openxmlformats.org/drawingml/2006/main" xmlns:p="http://schemas.openxmlformats.org/presentationml/2006/main" xmlns:r="http://schemas.openxmlformats.org/officeDocument/2006/relationships">
   <p:cSld>
     <p:bg>
       <p:bgPr>
@@ -8801,14 +8713,7 @@
         <p:cNvGrpSpPr/>
         <p:nvPr/>
       </p:nvGrpSpPr>
-      <p:grpSpPr>
-        <a:xfrm>
-          <a:off x="0" y="0"/>
-          <a:ext cx="0" cy="0"/>
-          <a:chOff x="0" y="0"/>
-          <a:chExt cx="0" cy="0"/>
-        </a:xfrm>
-      </p:grpSpPr>
+      <p:grpSpPr/>
       <p:sp>
         <p:nvSpPr>
           <p:cNvPr id="2" name="Rectangle 1"/>
@@ -8850,7 +8755,6 @@
           <a:lstStyle/>
           <a:p>
             <a:pPr algn="ctr"/>
-            <a:endParaRPr/>
           </a:p>
         </p:txBody>
       </p:sp>
@@ -8871,7 +8775,7 @@
           <a:noFill/>
         </p:spPr>
         <p:txBody>
-          <a:bodyPr wrap="square" lIns="0" tIns="0" rIns="0" bIns="0" anchor="t">
+          <a:bodyPr wrap="square" anchor="t" lIns="0" rIns="0" tIns="0" bIns="0">
             <a:spAutoFit/>
           </a:bodyPr>
           <a:lstStyle/>
@@ -8905,7 +8809,7 @@
           <a:noFill/>
         </p:spPr>
         <p:txBody>
-          <a:bodyPr wrap="square" lIns="0" tIns="0" rIns="0" bIns="0" anchor="t">
+          <a:bodyPr wrap="square" anchor="t" lIns="0" rIns="0" tIns="0" bIns="0">
             <a:spAutoFit/>
           </a:bodyPr>
           <a:lstStyle/>
@@ -8995,7 +8899,6 @@
           <a:lstStyle/>
           <a:p>
             <a:pPr algn="ctr"/>
-            <a:endParaRPr/>
           </a:p>
         </p:txBody>
       </p:sp>
@@ -9016,7 +8919,7 @@
           <a:noFill/>
         </p:spPr>
         <p:txBody>
-          <a:bodyPr wrap="square" lIns="0" tIns="0" rIns="0" bIns="0" anchor="t">
+          <a:bodyPr wrap="square" anchor="t" lIns="0" rIns="0" tIns="0" bIns="0">
             <a:spAutoFit/>
           </a:bodyPr>
           <a:lstStyle/>
@@ -9059,13 +8962,21 @@
           <a:noFill/>
         </p:spPr>
         <p:txBody>
-          <a:bodyPr wrap="square" lIns="0" tIns="0" rIns="0" bIns="0" anchor="t">
+          <a:bodyPr wrap="square" anchor="t" lIns="0" rIns="0" tIns="0" bIns="0">
             <a:spAutoFit/>
           </a:bodyPr>
           <a:lstStyle/>
           <a:p>
             <a:pPr algn="r"/>
-            <a:endParaRPr/>
+            <a:r>
+              <a:rPr sz="1100" b="0" i="0">
+                <a:solidFill>
+                  <a:srgbClr val="7A7A7A"/>
+                </a:solidFill>
+                <a:latin typeface="Roboto"/>
+              </a:rPr>
+              <a:t/>
+            </a:r>
           </a:p>
         </p:txBody>
       </p:sp>
@@ -9078,7 +8989,7 @@
 </file>
 
 <file path=ppt/slides/slide4.xml><?xml version="1.0" encoding="utf-8"?>
-<p:sld xmlns:a="http://schemas.openxmlformats.org/drawingml/2006/main" xmlns:r="http://schemas.openxmlformats.org/officeDocument/2006/relationships" xmlns:p="http://schemas.openxmlformats.org/presentationml/2006/main">
+<p:sld xmlns:a="http://schemas.openxmlformats.org/drawingml/2006/main" xmlns:p="http://schemas.openxmlformats.org/presentationml/2006/main" xmlns:r="http://schemas.openxmlformats.org/officeDocument/2006/relationships">
   <p:cSld>
     <p:bg>
       <p:bgPr>
@@ -9094,14 +9005,7 @@
         <p:cNvGrpSpPr/>
         <p:nvPr/>
       </p:nvGrpSpPr>
-      <p:grpSpPr>
-        <a:xfrm>
-          <a:off x="0" y="0"/>
-          <a:ext cx="0" cy="0"/>
-          <a:chOff x="0" y="0"/>
-          <a:chExt cx="0" cy="0"/>
-        </a:xfrm>
-      </p:grpSpPr>
+      <p:grpSpPr/>
       <p:sp>
         <p:nvSpPr>
           <p:cNvPr id="2" name="TextBox 1"/>
@@ -9119,7 +9023,7 @@
           <a:noFill/>
         </p:spPr>
         <p:txBody>
-          <a:bodyPr wrap="square" lIns="0" tIns="0" rIns="0" bIns="0" anchor="t">
+          <a:bodyPr wrap="square" anchor="t" lIns="0" rIns="0" tIns="0" bIns="0">
             <a:spAutoFit/>
           </a:bodyPr>
           <a:lstStyle/>
@@ -9177,7 +9081,6 @@
           <a:lstStyle/>
           <a:p>
             <a:pPr algn="ctr"/>
-            <a:endParaRPr/>
           </a:p>
         </p:txBody>
       </p:sp>
@@ -9198,7 +9101,7 @@
           <a:noFill/>
         </p:spPr>
         <p:txBody>
-          <a:bodyPr wrap="square" lIns="0" tIns="0" rIns="0" bIns="0" anchor="ctr">
+          <a:bodyPr wrap="square" anchor="ctr" lIns="0" rIns="0" tIns="0" bIns="0">
             <a:spAutoFit/>
           </a:bodyPr>
           <a:lstStyle/>
@@ -9338,7 +9241,6 @@
           <a:lstStyle/>
           <a:p>
             <a:pPr algn="ctr"/>
-            <a:endParaRPr/>
           </a:p>
         </p:txBody>
       </p:sp>
@@ -9359,7 +9261,7 @@
           <a:noFill/>
         </p:spPr>
         <p:txBody>
-          <a:bodyPr wrap="square" lIns="0" tIns="0" rIns="0" bIns="0" anchor="t">
+          <a:bodyPr wrap="square" anchor="t" lIns="0" rIns="0" tIns="0" bIns="0">
             <a:spAutoFit/>
           </a:bodyPr>
           <a:lstStyle/>
@@ -9402,7 +9304,7 @@
           <a:noFill/>
         </p:spPr>
         <p:txBody>
-          <a:bodyPr wrap="square" lIns="0" tIns="0" rIns="0" bIns="0" anchor="t">
+          <a:bodyPr wrap="square" anchor="t" lIns="0" rIns="0" tIns="0" bIns="0">
             <a:spAutoFit/>
           </a:bodyPr>
           <a:lstStyle/>
@@ -9429,7 +9331,7 @@
 </file>
 
 <file path=ppt/slides/slide5.xml><?xml version="1.0" encoding="utf-8"?>
-<p:sld xmlns:a="http://schemas.openxmlformats.org/drawingml/2006/main" xmlns:r="http://schemas.openxmlformats.org/officeDocument/2006/relationships" xmlns:p="http://schemas.openxmlformats.org/presentationml/2006/main">
+<p:sld xmlns:a="http://schemas.openxmlformats.org/drawingml/2006/main" xmlns:p="http://schemas.openxmlformats.org/presentationml/2006/main" xmlns:r="http://schemas.openxmlformats.org/officeDocument/2006/relationships">
   <p:cSld>
     <p:bg>
       <p:bgPr>
@@ -9445,38 +9347,7 @@
         <p:cNvGrpSpPr/>
         <p:nvPr/>
       </p:nvGrpSpPr>
-      <p:grpSpPr>
-        <a:xfrm>
-          <a:off x="0" y="0"/>
-          <a:ext cx="0" cy="0"/>
-          <a:chOff x="0" y="0"/>
-          <a:chExt cx="0" cy="0"/>
-        </a:xfrm>
-      </p:grpSpPr>
-      <p:pic>
-        <p:nvPicPr>
-          <p:cNvPr id="5" name="Picture 4" descr="ledgerline-baseline.png"/>
-          <p:cNvPicPr>
-            <a:picLocks noChangeAspect="1"/>
-          </p:cNvPicPr>
-          <p:nvPr/>
-        </p:nvPicPr>
-        <p:blipFill>
-          <a:blip r:embed="rId3"/>
-          <a:stretch>
-            <a:fillRect/>
-          </a:stretch>
-        </p:blipFill>
-        <p:spPr>
-          <a:xfrm>
-            <a:off x="4931229" y="1060191"/>
-            <a:ext cx="6590211" cy="4471929"/>
-          </a:xfrm>
-          <a:prstGeom prst="rect">
-            <a:avLst/>
-          </a:prstGeom>
-        </p:spPr>
-      </p:pic>
+      <p:grpSpPr/>
       <p:sp>
         <p:nvSpPr>
           <p:cNvPr id="2" name="TextBox 1"/>
@@ -9494,7 +9365,7 @@
           <a:noFill/>
         </p:spPr>
         <p:txBody>
-          <a:bodyPr wrap="square" lIns="0" tIns="0" rIns="0" bIns="0" anchor="t">
+          <a:bodyPr wrap="square" anchor="t" lIns="0" rIns="0" tIns="0" bIns="0">
             <a:spAutoFit/>
           </a:bodyPr>
           <a:lstStyle/>
@@ -9552,7 +9423,6 @@
           <a:lstStyle/>
           <a:p>
             <a:pPr algn="ctr"/>
-            <a:endParaRPr/>
           </a:p>
         </p:txBody>
       </p:sp>
@@ -9573,7 +9443,7 @@
           <a:noFill/>
         </p:spPr>
         <p:txBody>
-          <a:bodyPr wrap="square" lIns="0" tIns="0" rIns="0" bIns="0" anchor="t">
+          <a:bodyPr wrap="square" anchor="t" lIns="0" rIns="0" tIns="0" bIns="0">
             <a:spAutoFit/>
           </a:bodyPr>
           <a:lstStyle/>
@@ -9672,6 +9542,30 @@
           </a:p>
         </p:txBody>
       </p:sp>
+      <p:pic>
+        <p:nvPicPr>
+          <p:cNvPr id="5" name="Picture 4" descr="ledgerline-baseline.png"/>
+          <p:cNvPicPr>
+            <a:picLocks noChangeAspect="1"/>
+          </p:cNvPicPr>
+          <p:nvPr/>
+        </p:nvPicPr>
+        <p:blipFill>
+          <a:blip r:embed="rId2"/>
+          <a:stretch>
+            <a:fillRect/>
+          </a:stretch>
+        </p:blipFill>
+        <p:spPr>
+          <a:xfrm>
+            <a:off x="6400800" y="2057400"/>
+            <a:ext cx="5120640" cy="3474720"/>
+          </a:xfrm>
+          <a:prstGeom prst="rect">
+            <a:avLst/>
+          </a:prstGeom>
+        </p:spPr>
+      </p:pic>
       <p:sp>
         <p:nvSpPr>
           <p:cNvPr id="6" name="Rectangle 5"/>
@@ -9713,7 +9607,6 @@
           <a:lstStyle/>
           <a:p>
             <a:pPr algn="ctr"/>
-            <a:endParaRPr/>
           </a:p>
         </p:txBody>
       </p:sp>
@@ -9734,7 +9627,7 @@
           <a:noFill/>
         </p:spPr>
         <p:txBody>
-          <a:bodyPr wrap="square" lIns="0" tIns="0" rIns="0" bIns="0" anchor="t">
+          <a:bodyPr wrap="square" anchor="t" lIns="0" rIns="0" tIns="0" bIns="0">
             <a:spAutoFit/>
           </a:bodyPr>
           <a:lstStyle/>
@@ -9777,7 +9670,7 @@
           <a:noFill/>
         </p:spPr>
         <p:txBody>
-          <a:bodyPr wrap="square" lIns="0" tIns="0" rIns="0" bIns="0" anchor="t">
+          <a:bodyPr wrap="square" anchor="t" lIns="0" rIns="0" tIns="0" bIns="0">
             <a:spAutoFit/>
           </a:bodyPr>
           <a:lstStyle/>
@@ -9804,7 +9697,7 @@
 </file>
 
 <file path=ppt/slides/slide6.xml><?xml version="1.0" encoding="utf-8"?>
-<p:sld xmlns:a="http://schemas.openxmlformats.org/drawingml/2006/main" xmlns:r="http://schemas.openxmlformats.org/officeDocument/2006/relationships" xmlns:p="http://schemas.openxmlformats.org/presentationml/2006/main">
+<p:sld xmlns:a="http://schemas.openxmlformats.org/drawingml/2006/main" xmlns:p="http://schemas.openxmlformats.org/presentationml/2006/main" xmlns:r="http://schemas.openxmlformats.org/officeDocument/2006/relationships">
   <p:cSld>
     <p:bg>
       <p:bgPr>
@@ -9820,14 +9713,7 @@
         <p:cNvGrpSpPr/>
         <p:nvPr/>
       </p:nvGrpSpPr>
-      <p:grpSpPr>
-        <a:xfrm>
-          <a:off x="0" y="0"/>
-          <a:ext cx="0" cy="0"/>
-          <a:chOff x="0" y="0"/>
-          <a:chExt cx="0" cy="0"/>
-        </a:xfrm>
-      </p:grpSpPr>
+      <p:grpSpPr/>
       <p:sp>
         <p:nvSpPr>
           <p:cNvPr id="2" name="TextBox 1"/>
@@ -9845,7 +9731,7 @@
           <a:noFill/>
         </p:spPr>
         <p:txBody>
-          <a:bodyPr wrap="square" lIns="0" tIns="0" rIns="0" bIns="0" anchor="t">
+          <a:bodyPr wrap="square" anchor="t" lIns="0" rIns="0" tIns="0" bIns="0">
             <a:spAutoFit/>
           </a:bodyPr>
           <a:lstStyle/>
@@ -9903,7 +9789,6 @@
           <a:lstStyle/>
           <a:p>
             <a:pPr algn="ctr"/>
-            <a:endParaRPr/>
           </a:p>
         </p:txBody>
       </p:sp>
@@ -9924,7 +9809,7 @@
           <a:noFill/>
         </p:spPr>
         <p:txBody>
-          <a:bodyPr wrap="square" lIns="0" tIns="0" rIns="0" bIns="0" anchor="ctr">
+          <a:bodyPr wrap="square" anchor="ctr" lIns="0" rIns="0" tIns="0" bIns="0">
             <a:spAutoFit/>
           </a:bodyPr>
           <a:lstStyle/>
@@ -9987,7 +9872,7 @@
                 </a:solidFill>
                 <a:latin typeface="Roboto"/>
               </a:rPr>
-              <a:t>A seeded constraint surfaces here: the accounting product is **vendor-certified single-instance only → the database cannot go Multi-AZ**. Record it now — it is the reliability cost-benefit centrepiece in Topic 2.</a:t>
+              <a:t>A seeded constraint surfaces here: the accounting product is vendor-certified single-instance only → the database cannot go Multi-AZ. Record it now — it is the reliability cost-benefit centrepiece in Topic 2.</a:t>
             </a:r>
           </a:p>
           <a:p>
@@ -10064,7 +9949,6 @@
           <a:lstStyle/>
           <a:p>
             <a:pPr algn="ctr"/>
-            <a:endParaRPr/>
           </a:p>
         </p:txBody>
       </p:sp>
@@ -10085,7 +9969,7 @@
           <a:noFill/>
         </p:spPr>
         <p:txBody>
-          <a:bodyPr wrap="square" lIns="0" tIns="0" rIns="0" bIns="0" anchor="t">
+          <a:bodyPr wrap="square" anchor="t" lIns="0" rIns="0" tIns="0" bIns="0">
             <a:spAutoFit/>
           </a:bodyPr>
           <a:lstStyle/>
@@ -10128,7 +10012,7 @@
           <a:noFill/>
         </p:spPr>
         <p:txBody>
-          <a:bodyPr wrap="square" lIns="0" tIns="0" rIns="0" bIns="0" anchor="t">
+          <a:bodyPr wrap="square" anchor="t" lIns="0" rIns="0" tIns="0" bIns="0">
             <a:spAutoFit/>
           </a:bodyPr>
           <a:lstStyle/>
@@ -10155,7 +10039,7 @@
 </file>
 
 <file path=ppt/slides/slide7.xml><?xml version="1.0" encoding="utf-8"?>
-<p:sld xmlns:a="http://schemas.openxmlformats.org/drawingml/2006/main" xmlns:r="http://schemas.openxmlformats.org/officeDocument/2006/relationships" xmlns:p="http://schemas.openxmlformats.org/presentationml/2006/main">
+<p:sld xmlns:a="http://schemas.openxmlformats.org/drawingml/2006/main" xmlns:p="http://schemas.openxmlformats.org/presentationml/2006/main" xmlns:r="http://schemas.openxmlformats.org/officeDocument/2006/relationships">
   <p:cSld>
     <p:bg>
       <p:bgPr>
@@ -10171,14 +10055,7 @@
         <p:cNvGrpSpPr/>
         <p:nvPr/>
       </p:nvGrpSpPr>
-      <p:grpSpPr>
-        <a:xfrm>
-          <a:off x="0" y="0"/>
-          <a:ext cx="0" cy="0"/>
-          <a:chOff x="0" y="0"/>
-          <a:chExt cx="0" cy="0"/>
-        </a:xfrm>
-      </p:grpSpPr>
+      <p:grpSpPr/>
       <p:sp>
         <p:nvSpPr>
           <p:cNvPr id="2" name="Rectangle 1"/>
@@ -10220,7 +10097,6 @@
           <a:lstStyle/>
           <a:p>
             <a:pPr algn="ctr"/>
-            <a:endParaRPr/>
           </a:p>
         </p:txBody>
       </p:sp>
@@ -10294,7 +10170,7 @@
           <a:noFill/>
         </p:spPr>
         <p:txBody>
-          <a:bodyPr wrap="square" lIns="0" tIns="0" rIns="0" bIns="0" anchor="ctr">
+          <a:bodyPr wrap="square" anchor="ctr" lIns="0" rIns="0" tIns="0" bIns="0">
             <a:spAutoFit/>
           </a:bodyPr>
           <a:lstStyle/>
@@ -10328,7 +10204,7 @@
           <a:noFill/>
         </p:spPr>
         <p:txBody>
-          <a:bodyPr wrap="square" lIns="0" tIns="0" rIns="0" bIns="0" anchor="t">
+          <a:bodyPr wrap="square" anchor="t" lIns="0" rIns="0" tIns="0" bIns="0">
             <a:spAutoFit/>
           </a:bodyPr>
           <a:lstStyle/>
@@ -10360,7 +10236,7 @@
                 </a:solidFill>
                 <a:latin typeface="Roboto"/>
               </a:rPr>
-              <a:t>On the **practice engagement (the website)**, identify and review its current architecture the same way.</a:t>
+              <a:t>On the practice engagement (the website), identify and review its current architecture the same way.</a:t>
             </a:r>
           </a:p>
           <a:p>
@@ -10439,7 +10315,6 @@
           <a:lstStyle/>
           <a:p>
             <a:pPr algn="ctr"/>
-            <a:endParaRPr/>
           </a:p>
         </p:txBody>
       </p:sp>
@@ -10460,7 +10335,7 @@
           <a:noFill/>
         </p:spPr>
         <p:txBody>
-          <a:bodyPr wrap="square" lIns="0" tIns="0" rIns="0" bIns="0" anchor="ctr">
+          <a:bodyPr wrap="square" anchor="ctr" lIns="0" rIns="0" tIns="0" bIns="0">
             <a:spAutoFit/>
           </a:bodyPr>
           <a:lstStyle/>
@@ -10518,7 +10393,6 @@
           <a:lstStyle/>
           <a:p>
             <a:pPr algn="ctr"/>
-            <a:endParaRPr/>
           </a:p>
         </p:txBody>
       </p:sp>
@@ -10539,7 +10413,7 @@
           <a:noFill/>
         </p:spPr>
         <p:txBody>
-          <a:bodyPr wrap="square" lIns="0" tIns="0" rIns="0" bIns="0" anchor="t">
+          <a:bodyPr wrap="square" anchor="t" lIns="0" rIns="0" tIns="0" bIns="0">
             <a:spAutoFit/>
           </a:bodyPr>
           <a:lstStyle/>
@@ -10582,7 +10456,7 @@
           <a:noFill/>
         </p:spPr>
         <p:txBody>
-          <a:bodyPr wrap="square" lIns="0" tIns="0" rIns="0" bIns="0" anchor="t">
+          <a:bodyPr wrap="square" anchor="t" lIns="0" rIns="0" tIns="0" bIns="0">
             <a:spAutoFit/>
           </a:bodyPr>
           <a:lstStyle/>
@@ -10609,7 +10483,7 @@
 </file>
 
 <file path=ppt/slides/slide8.xml><?xml version="1.0" encoding="utf-8"?>
-<p:sld xmlns:a="http://schemas.openxmlformats.org/drawingml/2006/main" xmlns:r="http://schemas.openxmlformats.org/officeDocument/2006/relationships" xmlns:p="http://schemas.openxmlformats.org/presentationml/2006/main">
+<p:sld xmlns:a="http://schemas.openxmlformats.org/drawingml/2006/main" xmlns:p="http://schemas.openxmlformats.org/presentationml/2006/main" xmlns:r="http://schemas.openxmlformats.org/officeDocument/2006/relationships">
   <p:cSld>
     <p:bg>
       <p:bgPr>
@@ -10625,14 +10499,7 @@
         <p:cNvGrpSpPr/>
         <p:nvPr/>
       </p:nvGrpSpPr>
-      <p:grpSpPr>
-        <a:xfrm>
-          <a:off x="0" y="0"/>
-          <a:ext cx="0" cy="0"/>
-          <a:chOff x="0" y="0"/>
-          <a:chExt cx="0" cy="0"/>
-        </a:xfrm>
-      </p:grpSpPr>
+      <p:grpSpPr/>
       <p:sp>
         <p:nvSpPr>
           <p:cNvPr id="2" name="Rectangle 1"/>
@@ -10674,7 +10541,6 @@
           <a:lstStyle/>
           <a:p>
             <a:pPr algn="ctr"/>
-            <a:endParaRPr/>
           </a:p>
         </p:txBody>
       </p:sp>
@@ -10695,7 +10561,7 @@
           <a:noFill/>
         </p:spPr>
         <p:txBody>
-          <a:bodyPr wrap="square" lIns="0" tIns="0" rIns="0" bIns="0" anchor="t">
+          <a:bodyPr wrap="square" anchor="t" lIns="0" rIns="0" tIns="0" bIns="0">
             <a:spAutoFit/>
           </a:bodyPr>
           <a:lstStyle/>
@@ -10729,7 +10595,7 @@
           <a:noFill/>
         </p:spPr>
         <p:txBody>
-          <a:bodyPr wrap="square" lIns="0" tIns="0" rIns="0" bIns="0" anchor="t">
+          <a:bodyPr wrap="square" anchor="t" lIns="0" rIns="0" tIns="0" bIns="0">
             <a:spAutoFit/>
           </a:bodyPr>
           <a:lstStyle/>
@@ -10819,7 +10685,6 @@
           <a:lstStyle/>
           <a:p>
             <a:pPr algn="ctr"/>
-            <a:endParaRPr/>
           </a:p>
         </p:txBody>
       </p:sp>
@@ -10840,7 +10705,7 @@
           <a:noFill/>
         </p:spPr>
         <p:txBody>
-          <a:bodyPr wrap="square" lIns="0" tIns="0" rIns="0" bIns="0" anchor="t">
+          <a:bodyPr wrap="square" anchor="t" lIns="0" rIns="0" tIns="0" bIns="0">
             <a:spAutoFit/>
           </a:bodyPr>
           <a:lstStyle/>
@@ -10883,13 +10748,21 @@
           <a:noFill/>
         </p:spPr>
         <p:txBody>
-          <a:bodyPr wrap="square" lIns="0" tIns="0" rIns="0" bIns="0" anchor="t">
+          <a:bodyPr wrap="square" anchor="t" lIns="0" rIns="0" tIns="0" bIns="0">
             <a:spAutoFit/>
           </a:bodyPr>
           <a:lstStyle/>
           <a:p>
             <a:pPr algn="r"/>
-            <a:endParaRPr/>
+            <a:r>
+              <a:rPr sz="1100" b="0" i="0">
+                <a:solidFill>
+                  <a:srgbClr val="7A7A7A"/>
+                </a:solidFill>
+                <a:latin typeface="Roboto"/>
+              </a:rPr>
+              <a:t/>
+            </a:r>
           </a:p>
         </p:txBody>
       </p:sp>
@@ -10902,7 +10775,7 @@
 </file>
 
 <file path=ppt/slides/slide9.xml><?xml version="1.0" encoding="utf-8"?>
-<p:sld xmlns:a="http://schemas.openxmlformats.org/drawingml/2006/main" xmlns:r="http://schemas.openxmlformats.org/officeDocument/2006/relationships" xmlns:p="http://schemas.openxmlformats.org/presentationml/2006/main">
+<p:sld xmlns:a="http://schemas.openxmlformats.org/drawingml/2006/main" xmlns:p="http://schemas.openxmlformats.org/presentationml/2006/main" xmlns:r="http://schemas.openxmlformats.org/officeDocument/2006/relationships">
   <p:cSld>
     <p:bg>
       <p:bgPr>
@@ -10918,14 +10791,7 @@
         <p:cNvGrpSpPr/>
         <p:nvPr/>
       </p:nvGrpSpPr>
-      <p:grpSpPr>
-        <a:xfrm>
-          <a:off x="0" y="0"/>
-          <a:ext cx="0" cy="0"/>
-          <a:chOff x="0" y="0"/>
-          <a:chExt cx="0" cy="0"/>
-        </a:xfrm>
-      </p:grpSpPr>
+      <p:grpSpPr/>
       <p:sp>
         <p:nvSpPr>
           <p:cNvPr id="2" name="TextBox 1"/>
@@ -10943,7 +10809,7 @@
           <a:noFill/>
         </p:spPr>
         <p:txBody>
-          <a:bodyPr wrap="square" lIns="0" tIns="0" rIns="0" bIns="0" anchor="t">
+          <a:bodyPr wrap="square" anchor="t" lIns="0" rIns="0" tIns="0" bIns="0">
             <a:spAutoFit/>
           </a:bodyPr>
           <a:lstStyle/>
@@ -11001,7 +10867,6 @@
           <a:lstStyle/>
           <a:p>
             <a:pPr algn="ctr"/>
-            <a:endParaRPr/>
           </a:p>
         </p:txBody>
       </p:sp>
@@ -11022,7 +10887,7 @@
           <a:noFill/>
         </p:spPr>
         <p:txBody>
-          <a:bodyPr wrap="square" lIns="0" tIns="0" rIns="0" bIns="0" anchor="ctr">
+          <a:bodyPr wrap="square" anchor="ctr" lIns="0" rIns="0" tIns="0" bIns="0">
             <a:spAutoFit/>
           </a:bodyPr>
           <a:lstStyle/>
@@ -11162,7 +11027,6 @@
           <a:lstStyle/>
           <a:p>
             <a:pPr algn="ctr"/>
-            <a:endParaRPr/>
           </a:p>
         </p:txBody>
       </p:sp>
@@ -11183,7 +11047,7 @@
           <a:noFill/>
         </p:spPr>
         <p:txBody>
-          <a:bodyPr wrap="square" lIns="0" tIns="0" rIns="0" bIns="0" anchor="t">
+          <a:bodyPr wrap="square" anchor="t" lIns="0" rIns="0" tIns="0" bIns="0">
             <a:spAutoFit/>
           </a:bodyPr>
           <a:lstStyle/>
@@ -11226,7 +11090,7 @@
           <a:noFill/>
         </p:spPr>
         <p:txBody>
-          <a:bodyPr wrap="square" lIns="0" tIns="0" rIns="0" bIns="0" anchor="t">
+          <a:bodyPr wrap="square" anchor="t" lIns="0" rIns="0" tIns="0" bIns="0">
             <a:spAutoFit/>
           </a:bodyPr>
           <a:lstStyle/>
@@ -11583,44 +11447,44 @@
         <a:sysClr val="window" lastClr="FFFFFF"/>
       </a:lt1>
       <a:dk2>
-        <a:srgbClr val="0E2841"/>
+        <a:srgbClr val="1F497D"/>
       </a:dk2>
       <a:lt2>
-        <a:srgbClr val="E8E8E8"/>
+        <a:srgbClr val="EEECE1"/>
       </a:lt2>
       <a:accent1>
-        <a:srgbClr val="156082"/>
+        <a:srgbClr val="4F81BD"/>
       </a:accent1>
       <a:accent2>
-        <a:srgbClr val="E97132"/>
+        <a:srgbClr val="C0504D"/>
       </a:accent2>
       <a:accent3>
-        <a:srgbClr val="196B24"/>
+        <a:srgbClr val="9BBB59"/>
       </a:accent3>
       <a:accent4>
-        <a:srgbClr val="0F9ED5"/>
+        <a:srgbClr val="8064A2"/>
       </a:accent4>
       <a:accent5>
-        <a:srgbClr val="A02B93"/>
+        <a:srgbClr val="4BACC6"/>
       </a:accent5>
       <a:accent6>
-        <a:srgbClr val="4EA72E"/>
+        <a:srgbClr val="F79646"/>
       </a:accent6>
       <a:hlink>
-        <a:srgbClr val="467886"/>
+        <a:srgbClr val="0000FF"/>
       </a:hlink>
       <a:folHlink>
-        <a:srgbClr val="96607D"/>
+        <a:srgbClr val="800080"/>
       </a:folHlink>
     </a:clrScheme>
     <a:fontScheme name="Office">
       <a:majorFont>
-        <a:latin typeface="Aptos Display" panose="02110004020202020204"/>
+        <a:latin typeface="Calibri"/>
         <a:ea typeface=""/>
         <a:cs typeface=""/>
-        <a:font script="Jpan" typeface="游ゴシック Light"/>
+        <a:font script="Jpan" typeface="ＭＳ Ｐゴシック"/>
         <a:font script="Hang" typeface="맑은 고딕"/>
-        <a:font script="Hans" typeface="等线 Light"/>
+        <a:font script="Hans" typeface="宋体"/>
         <a:font script="Hant" typeface="新細明體"/>
         <a:font script="Arab" typeface="Times New Roman"/>
         <a:font script="Hebr" typeface="Times New Roman"/>
@@ -11648,31 +11512,14 @@
         <a:font script="Viet" typeface="Times New Roman"/>
         <a:font script="Uigh" typeface="Microsoft Uighur"/>
         <a:font script="Geor" typeface="Sylfaen"/>
-        <a:font script="Armn" typeface="Arial"/>
-        <a:font script="Bugi" typeface="Leelawadee UI"/>
-        <a:font script="Bopo" typeface="Microsoft JhengHei"/>
-        <a:font script="Java" typeface="Javanese Text"/>
-        <a:font script="Lisu" typeface="Segoe UI"/>
-        <a:font script="Mymr" typeface="Myanmar Text"/>
-        <a:font script="Nkoo" typeface="Ebrima"/>
-        <a:font script="Olck" typeface="Nirmala UI"/>
-        <a:font script="Osma" typeface="Ebrima"/>
-        <a:font script="Phag" typeface="Phagspa"/>
-        <a:font script="Syrn" typeface="Estrangelo Edessa"/>
-        <a:font script="Syrj" typeface="Estrangelo Edessa"/>
-        <a:font script="Syre" typeface="Estrangelo Edessa"/>
-        <a:font script="Sora" typeface="Nirmala UI"/>
-        <a:font script="Tale" typeface="Microsoft Tai Le"/>
-        <a:font script="Talu" typeface="Microsoft New Tai Lue"/>
-        <a:font script="Tfng" typeface="Ebrima"/>
       </a:majorFont>
       <a:minorFont>
-        <a:latin typeface="Aptos" panose="02110004020202020204"/>
+        <a:latin typeface="Calibri"/>
         <a:ea typeface=""/>
         <a:cs typeface=""/>
-        <a:font script="Jpan" typeface="游ゴシック"/>
+        <a:font script="Jpan" typeface="ＭＳ Ｐゴシック"/>
         <a:font script="Hang" typeface="맑은 고딕"/>
-        <a:font script="Hans" typeface="等线"/>
+        <a:font script="Hans" typeface="宋体"/>
         <a:font script="Hant" typeface="新細明體"/>
         <a:font script="Arab" typeface="Arial"/>
         <a:font script="Hebr" typeface="Arial"/>
@@ -11700,23 +11547,6 @@
         <a:font script="Viet" typeface="Arial"/>
         <a:font script="Uigh" typeface="Microsoft Uighur"/>
         <a:font script="Geor" typeface="Sylfaen"/>
-        <a:font script="Armn" typeface="Arial"/>
-        <a:font script="Bugi" typeface="Leelawadee UI"/>
-        <a:font script="Bopo" typeface="Microsoft JhengHei"/>
-        <a:font script="Java" typeface="Javanese Text"/>
-        <a:font script="Lisu" typeface="Segoe UI"/>
-        <a:font script="Mymr" typeface="Myanmar Text"/>
-        <a:font script="Nkoo" typeface="Ebrima"/>
-        <a:font script="Olck" typeface="Nirmala UI"/>
-        <a:font script="Osma" typeface="Ebrima"/>
-        <a:font script="Phag" typeface="Phagspa"/>
-        <a:font script="Syrn" typeface="Estrangelo Edessa"/>
-        <a:font script="Syrj" typeface="Estrangelo Edessa"/>
-        <a:font script="Syre" typeface="Estrangelo Edessa"/>
-        <a:font script="Sora" typeface="Nirmala UI"/>
-        <a:font script="Tale" typeface="Microsoft Tai Le"/>
-        <a:font script="Talu" typeface="Microsoft New Tai Lue"/>
-        <a:font script="Tfng" typeface="Ebrima"/>
       </a:minorFont>
     </a:fontScheme>
     <a:fmtScheme name="Office">
@@ -11728,136 +11558,180 @@
           <a:gsLst>
             <a:gs pos="0">
               <a:schemeClr val="phClr">
-                <a:lumMod val="110000"/>
-                <a:satMod val="105000"/>
-                <a:tint val="67000"/>
+                <a:tint val="50000"/>
+                <a:satMod val="300000"/>
               </a:schemeClr>
             </a:gs>
-            <a:gs pos="50000">
+            <a:gs pos="35000">
               <a:schemeClr val="phClr">
-                <a:lumMod val="105000"/>
-                <a:satMod val="103000"/>
-                <a:tint val="73000"/>
+                <a:tint val="37000"/>
+                <a:satMod val="300000"/>
               </a:schemeClr>
             </a:gs>
             <a:gs pos="100000">
               <a:schemeClr val="phClr">
-                <a:lumMod val="105000"/>
-                <a:satMod val="109000"/>
-                <a:tint val="81000"/>
+                <a:tint val="15000"/>
+                <a:satMod val="350000"/>
               </a:schemeClr>
             </a:gs>
           </a:gsLst>
-          <a:lin ang="5400000" scaled="0"/>
+          <a:lin ang="16200000" scaled="1"/>
         </a:gradFill>
         <a:gradFill rotWithShape="1">
           <a:gsLst>
             <a:gs pos="0">
               <a:schemeClr val="phClr">
-                <a:satMod val="103000"/>
-                <a:lumMod val="102000"/>
-                <a:tint val="94000"/>
-              </a:schemeClr>
-            </a:gs>
-            <a:gs pos="50000">
-              <a:schemeClr val="phClr">
-                <a:satMod val="110000"/>
-                <a:lumMod val="100000"/>
+                <a:tint val="100000"/>
                 <a:shade val="100000"/>
+                <a:satMod val="130000"/>
               </a:schemeClr>
             </a:gs>
             <a:gs pos="100000">
               <a:schemeClr val="phClr">
-                <a:lumMod val="99000"/>
-                <a:satMod val="120000"/>
-                <a:shade val="78000"/>
+                <a:tint val="50000"/>
+                <a:shade val="100000"/>
+                <a:satMod val="350000"/>
               </a:schemeClr>
             </a:gs>
           </a:gsLst>
-          <a:lin ang="5400000" scaled="0"/>
+          <a:lin ang="16200000" scaled="0"/>
         </a:gradFill>
       </a:fillStyleLst>
       <a:lnStyleLst>
-        <a:ln w="12700" cap="flat" cmpd="sng" algn="ctr">
+        <a:ln w="9525" cap="flat" cmpd="sng" algn="ctr">
           <a:solidFill>
-            <a:schemeClr val="phClr"/>
+            <a:schemeClr val="phClr">
+              <a:shade val="95000"/>
+              <a:satMod val="105000"/>
+            </a:schemeClr>
           </a:solidFill>
           <a:prstDash val="solid"/>
-          <a:miter lim="800000"/>
-        </a:ln>
-        <a:ln w="19050" cap="flat" cmpd="sng" algn="ctr">
-          <a:solidFill>
-            <a:schemeClr val="phClr"/>
-          </a:solidFill>
-          <a:prstDash val="solid"/>
-          <a:miter lim="800000"/>
         </a:ln>
         <a:ln w="25400" cap="flat" cmpd="sng" algn="ctr">
           <a:solidFill>
             <a:schemeClr val="phClr"/>
           </a:solidFill>
           <a:prstDash val="solid"/>
-          <a:miter lim="800000"/>
+        </a:ln>
+        <a:ln w="38100" cap="flat" cmpd="sng" algn="ctr">
+          <a:solidFill>
+            <a:schemeClr val="phClr"/>
+          </a:solidFill>
+          <a:prstDash val="solid"/>
         </a:ln>
       </a:lnStyleLst>
       <a:effectStyleLst>
         <a:effectStyle>
-          <a:effectLst/>
-        </a:effectStyle>
-        <a:effectStyle>
-          <a:effectLst/>
+          <a:effectLst>
+            <a:outerShdw blurRad="40000" dist="20000" dir="5400000" rotWithShape="0">
+              <a:srgbClr val="000000">
+                <a:alpha val="38000"/>
+              </a:srgbClr>
+            </a:outerShdw>
+          </a:effectLst>
         </a:effectStyle>
         <a:effectStyle>
           <a:effectLst>
-            <a:outerShdw blurRad="57150" dist="19050" dir="5400000" algn="ctr" rotWithShape="0">
+            <a:outerShdw blurRad="40000" dist="23000" dir="5400000" rotWithShape="0">
               <a:srgbClr val="000000">
-                <a:alpha val="63000"/>
+                <a:alpha val="35000"/>
               </a:srgbClr>
             </a:outerShdw>
           </a:effectLst>
+        </a:effectStyle>
+        <a:effectStyle>
+          <a:effectLst>
+            <a:outerShdw blurRad="40000" dist="23000" dir="5400000" rotWithShape="0">
+              <a:srgbClr val="000000">
+                <a:alpha val="35000"/>
+              </a:srgbClr>
+            </a:outerShdw>
+          </a:effectLst>
+          <a:scene3d>
+            <a:camera prst="orthographicFront">
+              <a:rot lat="0" lon="0" rev="0"/>
+            </a:camera>
+            <a:lightRig rig="threePt" dir="t">
+              <a:rot lat="0" lon="0" rev="1200000"/>
+            </a:lightRig>
+          </a:scene3d>
+          <a:sp3d>
+            <a:bevelT w="63500" h="25400"/>
+          </a:sp3d>
         </a:effectStyle>
       </a:effectStyleLst>
       <a:bgFillStyleLst>
         <a:solidFill>
           <a:schemeClr val="phClr"/>
         </a:solidFill>
-        <a:solidFill>
-          <a:schemeClr val="phClr">
-            <a:tint val="95000"/>
-            <a:satMod val="170000"/>
-          </a:schemeClr>
-        </a:solidFill>
         <a:gradFill rotWithShape="1">
           <a:gsLst>
             <a:gs pos="0">
               <a:schemeClr val="phClr">
-                <a:tint val="93000"/>
-                <a:satMod val="150000"/>
-                <a:shade val="98000"/>
-                <a:lumMod val="102000"/>
+                <a:tint val="40000"/>
+                <a:satMod val="350000"/>
               </a:schemeClr>
             </a:gs>
-            <a:gs pos="50000">
+            <a:gs pos="40000">
               <a:schemeClr val="phClr">
-                <a:tint val="98000"/>
-                <a:satMod val="130000"/>
-                <a:shade val="90000"/>
-                <a:lumMod val="103000"/>
+                <a:tint val="45000"/>
+                <a:shade val="99000"/>
+                <a:satMod val="350000"/>
               </a:schemeClr>
             </a:gs>
             <a:gs pos="100000">
               <a:schemeClr val="phClr">
-                <a:shade val="63000"/>
-                <a:satMod val="120000"/>
+                <a:shade val="20000"/>
+                <a:satMod val="255000"/>
               </a:schemeClr>
             </a:gs>
           </a:gsLst>
-          <a:lin ang="5400000" scaled="0"/>
+          <a:path path="circle">
+            <a:fillToRect l="50000" t="-80000" r="50000" b="180000"/>
+          </a:path>
+        </a:gradFill>
+        <a:gradFill rotWithShape="1">
+          <a:gsLst>
+            <a:gs pos="0">
+              <a:schemeClr val="phClr">
+                <a:tint val="80000"/>
+                <a:satMod val="300000"/>
+              </a:schemeClr>
+            </a:gs>
+            <a:gs pos="100000">
+              <a:schemeClr val="phClr">
+                <a:shade val="30000"/>
+                <a:satMod val="200000"/>
+              </a:schemeClr>
+            </a:gs>
+          </a:gsLst>
+          <a:path path="circle">
+            <a:fillToRect l="50000" t="50000" r="50000" b="50000"/>
+          </a:path>
         </a:gradFill>
       </a:bgFillStyleLst>
     </a:fmtScheme>
   </a:themeElements>
   <a:objectDefaults>
+    <a:spDef>
+      <a:spPr/>
+      <a:bodyPr/>
+      <a:lstStyle/>
+      <a:style>
+        <a:lnRef idx="1">
+          <a:schemeClr val="accent1"/>
+        </a:lnRef>
+        <a:fillRef idx="3">
+          <a:schemeClr val="accent1"/>
+        </a:fillRef>
+        <a:effectRef idx="2">
+          <a:schemeClr val="accent1"/>
+        </a:effectRef>
+        <a:fontRef idx="minor">
+          <a:schemeClr val="lt1"/>
+        </a:fontRef>
+      </a:style>
+    </a:spDef>
     <a:lnDef>
       <a:spPr/>
       <a:bodyPr/>
@@ -11879,10 +11753,5 @@
     </a:lnDef>
   </a:objectDefaults>
   <a:extraClrSchemeLst/>
-  <a:extLst>
-    <a:ext uri="{05A4C25C-085E-4340-85A3-A5531E510DB2}">
-      <thm15:themeFamily xmlns:thm15="http://schemas.microsoft.com/office/thememl/2012/main" name="Office Theme" id="{2E142A2C-CD16-42D6-873A-C26D2A0506FA}" vid="{1BDDFF52-6CD6-40A5-AB3C-68EB2F1E4D0A}"/>
-    </a:ext>
-  </a:extLst>
 </a:theme>
 </file>
--- a/S1-CL3-Cloud-Infrastructure-Improvement/delivery/topic_01/Topic_01_Slides.pptx
+++ b/S1-CL3-Cloud-Infrastructure-Improvement/delivery/topic_01/Topic_01_Slides.pptx
@@ -22,6 +22,13 @@
     <p:sldId id="270" r:id="rId22"/>
     <p:sldId id="271" r:id="rId23"/>
     <p:sldId id="272" r:id="rId24"/>
+    <p:sldId id="273" r:id="rId25"/>
+    <p:sldId id="274" r:id="rId26"/>
+    <p:sldId id="275" r:id="rId27"/>
+    <p:sldId id="276" r:id="rId28"/>
+    <p:sldId id="277" r:id="rId29"/>
+    <p:sldId id="278" r:id="rId30"/>
+    <p:sldId id="279" r:id="rId31"/>
   </p:sldIdLst>
   <p:sldSz cx="12191695" cy="6858000" type="screen4x3"/>
   <p:notesSz cx="6858000" cy="9144000"/>
@@ -518,82 +525,12 @@
           <a:lstStyle/>
           <a:p>
             <a:r>
-              <a:t>Frame the whole cluster's opening move — before you improve a cloud system you first understand the</a:t>
-            </a:r>
-          </a:p>
-          <a:p>
-            <a:r>
-              <a:t>one you have. This is the ANALYSIS half of AT1's Solution Design; set the posture, don't teach a</a:t>
-            </a:r>
-          </a:p>
-          <a:p>
-            <a:r>
-              <a:t>section yet.</a:t>
-            </a:r>
-          </a:p>
-          <a:p>
-            <a:r>
-              <a:t>• First two bullets: Topic 1 opens AT1 — review the baseline, evaluate it, set the goals; the design</a:t>
-            </a:r>
-          </a:p>
-          <a:p>
-            <a:r>
-              <a:t>of the fix is Topics 2–4. Diagnosis precedes design.</a:t>
-            </a:r>
-          </a:p>
-          <a:p>
-            <a:r>
-              <a:t>• Third bullet: name the vehicle — Ledgerline, YAT's Accounting system, running single-AZ in the</a:t>
-            </a:r>
-          </a:p>
-          <a:p>
-            <a:r>
-              <a:t>cloud. It is the system they analyse and improve for the assessment.</a:t>
-            </a:r>
-          </a:p>
-          <a:p>
-            <a:r>
-              <a:t>• Fourth bullet (the discipline): stay at analysis — diagnose and justify, do NOT design the changes</a:t>
-            </a:r>
-          </a:p>
-          <a:p>
-            <a:r>
-              <a:t>yet. Hold that line all Topic.</a:t>
-            </a:r>
-          </a:p>
-          <a:p>
-            <a:r>
-              <a:t>Misconception to pre-empt: "we already know the fix is Multi-AZ, let's design it." No — you must first</a:t>
-            </a:r>
-          </a:p>
-          <a:p>
-            <a:r>
-              <a:t>review, evaluate business impact and set goals; a fix proposed before the goals exist has nothing to</a:t>
-            </a:r>
-          </a:p>
-          <a:p>
-            <a:r>
-              <a:t>be measured against.</a:t>
-            </a:r>
-          </a:p>
-          <a:p>
-            <a:r>
-              <a:t>Question to pose: "Why analyse a system you're about to change — why not go straight to the</a:t>
-            </a:r>
-          </a:p>
-          <a:p>
-            <a:r>
-              <a:t>improvement?" (you can't justify or measure a change without the baseline + goals it answers).</a:t>
-            </a:r>
-          </a:p>
-          <a:p>
-            <a:r>
-              <a:t>UoC/AT1 tie: this Topic develops ICTCLD504 PC 1.1–1.6, PC 2.1 and PE 3; the output is the analysis +</a:t>
-            </a:r>
-          </a:p>
-          <a:p>
-            <a:r>
-              <a:t>goals/metrics sections of the AT1 Solution Design.</a:t>
+              <a:t>Workbook tasks 1 to 7 today, in order. Diagnosis precedes design — hold that line all Topic.</a:t>
+            </a:r>
+          </a:p>
+          <a:p>
+            <a:r>
+              <a:t>Misconception: "we already know the fix, let's design it." A fix proposed before the goals exist has nothing to be measured against.</a:t>
             </a:r>
           </a:p>
         </p:txBody>
@@ -663,77 +600,12 @@
           <a:lstStyle/>
           <a:p>
             <a:r>
-              <a:t>Apply the goal/metric discipline to Ledgerline — set concrete goals and confirm the metrics that make</a:t>
-            </a:r>
-          </a:p>
-          <a:p>
-            <a:r>
-              <a:t>them testable. This slide produces the yardstick the rest of the cluster measures against.</a:t>
-            </a:r>
-          </a:p>
-          <a:p>
-            <a:r>
-              <a:t>• First bullet: set the security / reliability / high-performance / cost goals for Ledgerline FROM its</a:t>
-            </a:r>
-          </a:p>
-          <a:p>
-            <a:r>
-              <a:t>business requirements — trace each to a stated need.</a:t>
-            </a:r>
-          </a:p>
-          <a:p>
-            <a:r>
-              <a:t>• Second bullet: evaluate and confirm the performance METRICS the improved application is measured</a:t>
-            </a:r>
-          </a:p>
-          <a:p>
-            <a:r>
-              <a:t>against — availability %, RTO/RPO, response time, cost per period (PC 2.1). A goal without a metric</a:t>
-            </a:r>
-          </a:p>
-          <a:p>
-            <a:r>
-              <a:t>can't be tested.</a:t>
-            </a:r>
-          </a:p>
-          <a:p>
-            <a:r>
-              <a:t>• Third bullet (the payoff): write them so a LATER Topic can test against them — these goals and</a:t>
-            </a:r>
-          </a:p>
-          <a:p>
-            <a:r>
-              <a:t>metrics are the yardstick for the design (Topics 2–3) and the AT3 build.</a:t>
-            </a:r>
-          </a:p>
-          <a:p>
-            <a:r>
-              <a:t>Misconception to pre-empt: "the metric is 'be reliable'." No — that's the goal restated; a metric is a</a:t>
-            </a:r>
-          </a:p>
-          <a:p>
-            <a:r>
-              <a:t>number with a target (e.g. availability ≥ 99.5%, RTO ≤ 1 business day). Push them to numbers.</a:t>
-            </a:r>
-          </a:p>
-          <a:p>
-            <a:r>
-              <a:t>Question to pose: "Reliability goal: survive an AZ failure. What metric proves it, and what's the</a:t>
-            </a:r>
-          </a:p>
-          <a:p>
-            <a:r>
-              <a:t>target?" (availability % / RTO / RPO with a number).</a:t>
-            </a:r>
-          </a:p>
-          <a:p>
-            <a:r>
-              <a:t>UoC/AT1 tie: ICTCLD504 PC 1.6 (goals) + PC 2.1 (confirm performance metrics) + PE 3 → AT1 Solution</a:t>
-            </a:r>
-          </a:p>
-          <a:p>
-            <a:r>
-              <a:t>Design goals &amp; metrics sections.</a:t>
+              <a:t>The migration principles, placed where the options are weighed — the path's cost and risk belong in the assessment.</a:t>
+            </a:r>
+          </a:p>
+          <a:p>
+            <a:r>
+              <a:t>Question to pose: two options with the same end state, one reachable incrementally and one only by big-bang — which wins, and why?</a:t>
             </a:r>
           </a:p>
         </p:txBody>
@@ -803,87 +675,227 @@
           <a:lstStyle/>
           <a:p>
             <a:r>
-              <a:t>Facilitation — the Section 3 practice; students set goals + metrics for the practice engagement, the</a:t>
-            </a:r>
-          </a:p>
-          <a:p>
-            <a:r>
-              <a:t>yardstick they'll design against in the practice work that mirrors Topics 2–3.</a:t>
-            </a:r>
-          </a:p>
-          <a:p>
-            <a:r>
-              <a:t>Tell students: "For the practice engagement, set goals across security, reliability, performance and</a:t>
-            </a:r>
-          </a:p>
-          <a:p>
-            <a:r>
-              <a:t>cost. Then confirm the metric each goal is measured by — a number with a target."</a:t>
-            </a:r>
-          </a:p>
-          <a:p>
-            <a:r>
-              <a:t>Steps (put on the board):</a:t>
-            </a:r>
-          </a:p>
-          <a:p>
-            <a:r>
-              <a:t>1. Write one goal per concern — security, reliability, performance, cost — each traced to a business</a:t>
-            </a:r>
-          </a:p>
-          <a:p>
-            <a:r>
-              <a:t>need.</a:t>
-            </a:r>
-          </a:p>
-          <a:p>
-            <a:r>
-              <a:t>2. For each goal, confirm the metric that proves it and set a target (availability %, RTO/RPO, response</a:t>
-            </a:r>
-          </a:p>
-          <a:p>
-            <a:r>
-              <a:t>time, cost per period).</a:t>
-            </a:r>
-          </a:p>
-          <a:p>
-            <a:r>
-              <a:t>3. Sanity-check: could a later Topic TEST against these? If not, tighten them.</a:t>
-            </a:r>
-          </a:p>
-          <a:p>
-            <a:r>
-              <a:t>Must produce: four goals, each with a named metric and a target value.</a:t>
-            </a:r>
-          </a:p>
-          <a:p>
-            <a:r>
-              <a:t>Timing: ~25 min then discuss. Where they get stuck: goals that are really solutions ("use auto</a:t>
-            </a:r>
-          </a:p>
-          <a:p>
-            <a:r>
-              <a:t>scaling"), and metrics with no number — circulate and push outcome-goals + numeric targets.</a:t>
-            </a:r>
-          </a:p>
-          <a:p>
-            <a:r>
-              <a:t>Share-back prompt: take one goal/metric pair and ask the room whether the metric actually proves the</a:t>
-            </a:r>
-          </a:p>
-          <a:p>
-            <a:r>
-              <a:t>goal.</a:t>
-            </a:r>
-          </a:p>
-          <a:p>
-            <a:r>
-              <a:t>No-leakage note: the website is the practice vehicle; AT1 assesses goal/metric setting on Ledgerline —</a:t>
-            </a:r>
-          </a:p>
-          <a:p>
-            <a:r>
-              <a:t>comparable, not identical.</a:t>
+              <a:t>Activity = practice workbook tasks 4–5.</a:t>
+            </a:r>
+          </a:p>
+          <a:p>
+            <a:r>
+              <a:t>Push them to judge each option, and to record what they rule out and why — the rejection reasoning is marked skill.</a:t>
+            </a:r>
+          </a:p>
+        </p:txBody>
+      </p:sp>
+      <p:sp>
+        <p:nvSpPr>
+          <p:cNvPr id="4" name="Slide Number Placeholder 3"/>
+          <p:cNvSpPr>
+            <a:spLocks noGrp="1"/>
+          </p:cNvSpPr>
+          <p:nvPr>
+            <p:ph type="sldNum" idx="5" sz="quarter"/>
+          </p:nvPr>
+        </p:nvSpPr>
+        <p:spPr/>
+      </p:sp>
+    </p:spTree>
+  </p:cSld>
+  <p:clrMapOvr>
+    <a:masterClrMapping/>
+  </p:clrMapOvr>
+</p:notes>
+</file>
+
+<file path=ppt/notesSlides/notesSlide12.xml><?xml version="1.0" encoding="utf-8"?>
+<p:notes xmlns:a="http://schemas.openxmlformats.org/drawingml/2006/main" xmlns:p="http://schemas.openxmlformats.org/presentationml/2006/main" xmlns:r="http://schemas.openxmlformats.org/officeDocument/2006/relationships">
+  <p:cSld>
+    <p:spTree>
+      <p:nvGrpSpPr>
+        <p:cNvPr id="1" name=""/>
+        <p:cNvGrpSpPr/>
+        <p:nvPr/>
+      </p:nvGrpSpPr>
+      <p:grpSpPr>
+        <a:xfrm>
+          <a:off x="0" y="0"/>
+          <a:ext cx="0" cy="0"/>
+          <a:chOff x="0" y="0"/>
+          <a:chExt cx="0" cy="0"/>
+        </a:xfrm>
+      </p:grpSpPr>
+      <p:sp>
+        <p:nvSpPr>
+          <p:cNvPr id="2" name="Slide Image Placeholder 1"/>
+          <p:cNvSpPr>
+            <a:spLocks noGrp="1"/>
+          </p:cNvSpPr>
+          <p:nvPr>
+            <p:ph type="sldImg" idx="2"/>
+          </p:nvPr>
+        </p:nvSpPr>
+        <p:spPr/>
+      </p:sp>
+      <p:sp>
+        <p:nvSpPr>
+          <p:cNvPr id="3" name="Notes Placeholder 2"/>
+          <p:cNvSpPr>
+            <a:spLocks noGrp="1"/>
+          </p:cNvSpPr>
+          <p:nvPr>
+            <p:ph type="body" idx="3" sz="quarter"/>
+          </p:nvPr>
+        </p:nvSpPr>
+        <p:spPr/>
+        <p:txBody>
+          <a:bodyPr/>
+          <a:lstStyle/>
+          <a:p>
+            <a:r>
+              <a:t>Workbook task 6. The goal-versus-solution confusion is the one to press — have them find the outcome under a technology statement.</a:t>
+            </a:r>
+          </a:p>
+        </p:txBody>
+      </p:sp>
+      <p:sp>
+        <p:nvSpPr>
+          <p:cNvPr id="4" name="Slide Number Placeholder 3"/>
+          <p:cNvSpPr>
+            <a:spLocks noGrp="1"/>
+          </p:cNvSpPr>
+          <p:nvPr>
+            <p:ph type="sldNum" idx="5" sz="quarter"/>
+          </p:nvPr>
+        </p:nvSpPr>
+        <p:spPr/>
+      </p:sp>
+    </p:spTree>
+  </p:cSld>
+  <p:clrMapOvr>
+    <a:masterClrMapping/>
+  </p:clrMapOvr>
+</p:notes>
+</file>
+
+<file path=ppt/notesSlides/notesSlide13.xml><?xml version="1.0" encoding="utf-8"?>
+<p:notes xmlns:a="http://schemas.openxmlformats.org/drawingml/2006/main" xmlns:p="http://schemas.openxmlformats.org/presentationml/2006/main" xmlns:r="http://schemas.openxmlformats.org/officeDocument/2006/relationships">
+  <p:cSld>
+    <p:spTree>
+      <p:nvGrpSpPr>
+        <p:cNvPr id="1" name=""/>
+        <p:cNvGrpSpPr/>
+        <p:nvPr/>
+      </p:nvGrpSpPr>
+      <p:grpSpPr>
+        <a:xfrm>
+          <a:off x="0" y="0"/>
+          <a:ext cx="0" cy="0"/>
+          <a:chOff x="0" y="0"/>
+          <a:chExt cx="0" cy="0"/>
+        </a:xfrm>
+      </p:grpSpPr>
+      <p:sp>
+        <p:nvSpPr>
+          <p:cNvPr id="2" name="Slide Image Placeholder 1"/>
+          <p:cNvSpPr>
+            <a:spLocks noGrp="1"/>
+          </p:cNvSpPr>
+          <p:nvPr>
+            <p:ph type="sldImg" idx="2"/>
+          </p:nvPr>
+        </p:nvSpPr>
+        <p:spPr/>
+      </p:sp>
+      <p:sp>
+        <p:nvSpPr>
+          <p:cNvPr id="3" name="Notes Placeholder 2"/>
+          <p:cNvSpPr>
+            <a:spLocks noGrp="1"/>
+          </p:cNvSpPr>
+          <p:nvPr>
+            <p:ph type="body" idx="3" sz="quarter"/>
+          </p:nvPr>
+        </p:nvSpPr>
+        <p:spPr/>
+        <p:txBody>
+          <a:bodyPr/>
+          <a:lstStyle/>
+          <a:p>
+            <a:r>
+              <a:t>Workbook task 7 closes the analysis. The workbook order is deliberate: goals first, then decisions confirmed against them.</a:t>
+            </a:r>
+          </a:p>
+        </p:txBody>
+      </p:sp>
+      <p:sp>
+        <p:nvSpPr>
+          <p:cNvPr id="4" name="Slide Number Placeholder 3"/>
+          <p:cNvSpPr>
+            <a:spLocks noGrp="1"/>
+          </p:cNvSpPr>
+          <p:nvPr>
+            <p:ph type="sldNum" idx="5" sz="quarter"/>
+          </p:nvPr>
+        </p:nvSpPr>
+        <p:spPr/>
+      </p:sp>
+    </p:spTree>
+  </p:cSld>
+  <p:clrMapOvr>
+    <a:masterClrMapping/>
+  </p:clrMapOvr>
+</p:notes>
+</file>
+
+<file path=ppt/notesSlides/notesSlide14.xml><?xml version="1.0" encoding="utf-8"?>
+<p:notes xmlns:a="http://schemas.openxmlformats.org/drawingml/2006/main" xmlns:p="http://schemas.openxmlformats.org/presentationml/2006/main" xmlns:r="http://schemas.openxmlformats.org/officeDocument/2006/relationships">
+  <p:cSld>
+    <p:spTree>
+      <p:nvGrpSpPr>
+        <p:cNvPr id="1" name=""/>
+        <p:cNvGrpSpPr/>
+        <p:nvPr/>
+      </p:nvGrpSpPr>
+      <p:grpSpPr>
+        <a:xfrm>
+          <a:off x="0" y="0"/>
+          <a:ext cx="0" cy="0"/>
+          <a:chOff x="0" y="0"/>
+          <a:chExt cx="0" cy="0"/>
+        </a:xfrm>
+      </p:grpSpPr>
+      <p:sp>
+        <p:nvSpPr>
+          <p:cNvPr id="2" name="Slide Image Placeholder 1"/>
+          <p:cNvSpPr>
+            <a:spLocks noGrp="1"/>
+          </p:cNvSpPr>
+          <p:nvPr>
+            <p:ph type="sldImg" idx="2"/>
+          </p:nvPr>
+        </p:nvSpPr>
+        <p:spPr/>
+      </p:sp>
+      <p:sp>
+        <p:nvSpPr>
+          <p:cNvPr id="3" name="Notes Placeholder 2"/>
+          <p:cNvSpPr>
+            <a:spLocks noGrp="1"/>
+          </p:cNvSpPr>
+          <p:nvPr>
+            <p:ph type="body" idx="3" sz="quarter"/>
+          </p:nvPr>
+        </p:nvSpPr>
+        <p:spPr/>
+        <p:txBody>
+          <a:bodyPr/>
+          <a:lstStyle/>
+          <a:p>
+            <a:r>
+              <a:t>Activity = practice workbook tasks 6–7.</a:t>
+            </a:r>
+          </a:p>
+          <a:p>
+            <a:r>
+              <a:t>Watch for goals that are really solutions, and confirmations with no trace to a need.</a:t>
             </a:r>
           </a:p>
         </p:txBody>
@@ -953,77 +965,12 @@
           <a:lstStyle/>
           <a:p>
             <a:r>
-              <a:t>Open Section 1 with the vendor-neutral METHOD — how you read any cloud architecture — before applying</a:t>
-            </a:r>
-          </a:p>
-          <a:p>
-            <a:r>
-              <a:t>it to Ledgerline. This is a technique slide; teach the frame, not the system yet.</a:t>
-            </a:r>
-          </a:p>
-          <a:p>
-            <a:r>
-              <a:t>• First bullet: a structured review reads an architecture against pillars — security, reliability,</a:t>
-            </a:r>
-          </a:p>
-          <a:p>
-            <a:r>
-              <a:t>performance, cost. Name the four; they recur all cluster.</a:t>
-            </a:r>
-          </a:p>
-          <a:p>
-            <a:r>
-              <a:t>• Second bullet: frame the review with the industry technology standards used in cloud solutions</a:t>
-            </a:r>
-          </a:p>
-          <a:p>
-            <a:r>
-              <a:t>(KE 1) and the standard hardware/software products the platform is built on — compute families,</a:t>
-            </a:r>
-          </a:p>
-          <a:p>
-            <a:r>
-              <a:t>managed databases, object/block storage (KE 2). This is the vocabulary the review is written in.</a:t>
-            </a:r>
-          </a:p>
-          <a:p>
-            <a:r>
-              <a:t>• Third bullet: keep it vendor-neutral HERE; they apply it to Ledgerline, a real AWS baseline, on the</a:t>
-            </a:r>
-          </a:p>
-          <a:p>
-            <a:r>
-              <a:t>next slide.</a:t>
-            </a:r>
-          </a:p>
-          <a:p>
-            <a:r>
-              <a:t>Misconception to pre-empt: "reviewing = listing what's there." No — a review EVALUATES against the</a:t>
-            </a:r>
-          </a:p>
-          <a:p>
-            <a:r>
-              <a:t>pillars; an inventory with no judgement isn't a review.</a:t>
-            </a:r>
-          </a:p>
-          <a:p>
-            <a:r>
-              <a:t>Question to pose: "Name the four pillars you read an architecture against — and which one a single-AZ</a:t>
-            </a:r>
-          </a:p>
-          <a:p>
-            <a:r>
-              <a:t>design most obviously fails." (reliability — sets up the Ledgerline slide).</a:t>
-            </a:r>
-          </a:p>
-          <a:p>
-            <a:r>
-              <a:t>UoC/AT1 tie: ICTCLD504 KE 1 / KE 2 (the standards + standard products the review draws on) → AT1</a:t>
-            </a:r>
-          </a:p>
-          <a:p>
-            <a:r>
-              <a:t>Solution Design baseline analysis + the Part A KE appendix.</a:t>
+              <a:t>The four pillars recur all cluster. A review evaluates against them — an inventory with no judgement isn't a review.</a:t>
+            </a:r>
+          </a:p>
+          <a:p>
+            <a:r>
+              <a:t>Question to pose: which pillar does a single-AZ design most obviously fail?</a:t>
             </a:r>
           </a:p>
         </p:txBody>
@@ -1093,77 +1040,12 @@
           <a:lstStyle/>
           <a:p>
             <a:r>
-              <a:t>Apply the method to the actual system — walk the Ledgerline baseline off the diagram so students can</a:t>
-            </a:r>
-          </a:p>
-          <a:p>
-            <a:r>
-              <a:t>SEE the single-AZ topology they'll evaluate next.</a:t>
-            </a:r>
-          </a:p>
-          <a:p>
-            <a:r>
-              <a:t>• First bullet: identify and review the current architecture — a VPC, ONE Availability Zone, an app</a:t>
-            </a:r>
-          </a:p>
-          <a:p>
-            <a:r>
-              <a:t>tier and a single RDS database. Point to each on the diagram.</a:t>
-            </a:r>
-          </a:p>
-          <a:p>
-            <a:r>
-              <a:t>• Second bullet: read the topology top-down — network → compute → database → storage — noting how each</a:t>
-            </a:r>
-          </a:p>
-          <a:p>
-            <a:r>
-              <a:t>resource is deployed today. Model the reading order; it's the same order they'll design in.</a:t>
-            </a:r>
-          </a:p>
-          <a:p>
-            <a:r>
-              <a:t>• Third bullet: cloud adoption reshapes the IT system — managed services, elasticity and shared</a:t>
-            </a:r>
-          </a:p>
-          <a:p>
-            <a:r>
-              <a:t>responsibility change how you run and improve it (KE 3). This is why "review" here isn't the same as</a:t>
-            </a:r>
-          </a:p>
-          <a:p>
-            <a:r>
-              <a:t>reviewing an on-prem box.</a:t>
-            </a:r>
-          </a:p>
-          <a:p>
-            <a:r>
-              <a:t>Misconception to pre-empt: "single-AZ just means one server." No — it means every tier shares one</a:t>
-            </a:r>
-          </a:p>
-          <a:p>
-            <a:r>
-              <a:t>failure domain; the whole VPC's resources sit in one AZ, so one AZ outage takes it all down.</a:t>
-            </a:r>
-          </a:p>
-          <a:p>
-            <a:r>
-              <a:t>Question to pose: "Trace the request path on the diagram — where is the single point of failure?"</a:t>
-            </a:r>
-          </a:p>
-          <a:p>
-            <a:r>
-              <a:t>(the one AZ; every tier lives in it).</a:t>
-            </a:r>
-          </a:p>
-          <a:p>
-            <a:r>
-              <a:t>UoC/AT1 tie: ICTCLD504 PC 1.1 (identify &amp; review the architecture) + KE 3 → AT1 Solution Design</a:t>
-            </a:r>
-          </a:p>
-          <a:p>
-            <a:r>
-              <a:t>baseline section.</a:t>
+              <a:t>Walk the diagram; trace the request path and have them find the shared failure domain.</a:t>
+            </a:r>
+          </a:p>
+          <a:p>
+            <a:r>
+              <a:t>The workbook's task 1 runs the same reading on the practice engagement.</a:t>
             </a:r>
           </a:p>
         </p:txBody>
@@ -1233,77 +1115,12 @@
           <a:lstStyle/>
           <a:p>
             <a:r>
-              <a:t>The evaluation slide — teach students to state impact in BUSINESS terms, and plant the constraint that</a:t>
-            </a:r>
-          </a:p>
-          <a:p>
-            <a:r>
-              <a:t>drives the whole cluster. This is the analytical heart of Section 1.</a:t>
-            </a:r>
-          </a:p>
-          <a:p>
-            <a:r>
-              <a:t>• First bullet: evaluate the baseline and name the business impact of its design decisions — single-AZ</a:t>
-            </a:r>
-          </a:p>
-          <a:p>
-            <a:r>
-              <a:t>means single points of failure; one AZ outage takes Accounting down.</a:t>
-            </a:r>
-          </a:p>
-          <a:p>
-            <a:r>
-              <a:t>• Second bullet (plant it deliberately): the accounting product is vendor-certified single-instance</a:t>
-            </a:r>
-          </a:p>
-          <a:p>
-            <a:r>
-              <a:t>only, so the database CANNOT go Multi-AZ. Have them write it down now — it is the reliability</a:t>
-            </a:r>
-          </a:p>
-          <a:p>
-            <a:r>
-              <a:t>cost-benefit centrepiece in Topic 2.</a:t>
-            </a:r>
-          </a:p>
-          <a:p>
-            <a:r>
-              <a:t>• Third bullet: impact is a BUSINESS statement, not a technical one — downtime, lost billing, risk to</a:t>
-            </a:r>
-          </a:p>
-          <a:p>
-            <a:r>
-              <a:t>close-of-month. That's the language the goals in C3 will answer.</a:t>
-            </a:r>
-          </a:p>
-          <a:p>
-            <a:r>
-              <a:t>Misconception to pre-empt: "the impact is 'the server goes down'." No — that's the technical event; the</a:t>
-            </a:r>
-          </a:p>
-          <a:p>
-            <a:r>
-              <a:t>business impact is what it COSTS (billing halts, month-end close at risk). Push them from event to cost.</a:t>
-            </a:r>
-          </a:p>
-          <a:p>
-            <a:r>
-              <a:t>Question to pose: "If the single AZ fails during end-of-month close, what does that cost YAT — in</a:t>
-            </a:r>
-          </a:p>
-          <a:p>
-            <a:r>
-              <a:t>business terms?" (draws out the impact language the goals answer).</a:t>
-            </a:r>
-          </a:p>
-          <a:p>
-            <a:r>
-              <a:t>UoC/AT1 tie: ICTCLD504 PC 1.2 (evaluate architecture &amp; identify business impact of design decisions) →</a:t>
-            </a:r>
-          </a:p>
-          <a:p>
-            <a:r>
-              <a:t>AT1 Solution Design baseline analysis.</a:t>
+              <a:t>Push from event to cost: "the server goes down" is technical; "billing halts at month-end" is impact.</a:t>
+            </a:r>
+          </a:p>
+          <a:p>
+            <a:r>
+              <a:t>Plant the constraint deliberately — it is the cost-benefit centrepiece of Topic 3.</a:t>
             </a:r>
           </a:p>
         </p:txBody>
@@ -1373,92 +1190,12 @@
           <a:lstStyle/>
           <a:p>
             <a:r>
-              <a:t>Facilitation — the Section 1 practice; students run the SAME baseline review on the practice</a:t>
-            </a:r>
-          </a:p>
-          <a:p>
-            <a:r>
-              <a:t>engagement (the website) before doing it on Ledgerline for the assessment.</a:t>
-            </a:r>
-          </a:p>
-          <a:p>
-            <a:r>
-              <a:t>Tell students: "On the practice engagement — the website — identify and review its current</a:t>
-            </a:r>
-          </a:p>
-          <a:p>
-            <a:r>
-              <a:t>architecture the same way we just read Ledgerline. Evaluate it and name the business impact of its</a:t>
-            </a:r>
-          </a:p>
-          <a:p>
-            <a:r>
-              <a:t>design decisions."</a:t>
-            </a:r>
-          </a:p>
-          <a:p>
-            <a:r>
-              <a:t>Steps (put on the board):</a:t>
-            </a:r>
-          </a:p>
-          <a:p>
-            <a:r>
-              <a:t>1. Read the practice architecture top-down — network, compute, database, storage.</a:t>
-            </a:r>
-          </a:p>
-          <a:p>
-            <a:r>
-              <a:t>2. Note how each tier is deployed today and where a single failure or bottleneck sits.</a:t>
-            </a:r>
-          </a:p>
-          <a:p>
-            <a:r>
-              <a:t>3. For each weak point, write the BUSINESS impact — where would an outage or a bottleneck hurt the</a:t>
-            </a:r>
-          </a:p>
-          <a:p>
-            <a:r>
-              <a:t>business?</a:t>
-            </a:r>
-          </a:p>
-          <a:p>
-            <a:r>
-              <a:t>Must produce: a short written review of the practice baseline with at least two business-impact</a:t>
-            </a:r>
-          </a:p>
-          <a:p>
-            <a:r>
-              <a:t>statements (not technical events).</a:t>
-            </a:r>
-          </a:p>
-          <a:p>
-            <a:r>
-              <a:t>Timing: ~25 min then discuss. Where they get stuck: they list resources without evaluating them —</a:t>
-            </a:r>
-          </a:p>
-          <a:p>
-            <a:r>
-              <a:t>circulate and push "so what does that cost the business?"; also watch for technical-only impacts.</a:t>
-            </a:r>
-          </a:p>
-          <a:p>
-            <a:r>
-              <a:t>Share-back prompt: take one student's biggest business impact and ask the room whether it's stated in</a:t>
-            </a:r>
-          </a:p>
-          <a:p>
-            <a:r>
-              <a:t>business or technical language.</a:t>
-            </a:r>
-          </a:p>
-          <a:p>
-            <a:r>
-              <a:t>No-leakage note: the website is the PRACTICE vehicle — AT1 assesses this same review skill on</a:t>
-            </a:r>
-          </a:p>
-          <a:p>
-            <a:r>
-              <a:t>Ledgerline (comparable, not identical); keep them on the practice engagement here.</a:t>
+              <a:t>Activity = practice workbook tasks 1–2, on the website engagement.</a:t>
+            </a:r>
+          </a:p>
+          <a:p>
+            <a:r>
+              <a:t>Watch for resource lists with no judgement, and technical-only impacts.</a:t>
             </a:r>
           </a:p>
         </p:txBody>
@@ -1528,72 +1265,12 @@
           <a:lstStyle/>
           <a:p>
             <a:r>
-              <a:t>Open Section 2 with the OPTION SPACE — the patterns a cloud architecture can use — kept deliberately</a:t>
-            </a:r>
-          </a:p>
-          <a:p>
-            <a:r>
-              <a:t>abstract so the next slide can narrow them to Ledgerline. A menu, not a decision.</a:t>
-            </a:r>
-          </a:p>
-          <a:p>
-            <a:r>
-              <a:t>• First bullet: name the options — Multi-AZ redundancy, horizontal scaling + load balancing, managed</a:t>
-            </a:r>
-          </a:p>
-          <a:p>
-            <a:r>
-              <a:t>vs self-run data tiers, caching, decoupling. Give each a one-line "what it buys."</a:t>
-            </a:r>
-          </a:p>
-          <a:p>
-            <a:r>
-              <a:t>• Second bullet (the framing): each option is a pattern with a COST and a BENEFIT — there is no single</a:t>
-            </a:r>
-          </a:p>
-          <a:p>
-            <a:r>
-              <a:t>right answer, only a fit to the business. This is the mindset the whole cluster runs on.</a:t>
-            </a:r>
-          </a:p>
-          <a:p>
-            <a:r>
-              <a:t>• Third bullet: the four improvement concerns you weigh options against — security, reliability,</a:t>
-            </a:r>
-          </a:p>
-          <a:p>
-            <a:r>
-              <a:t>scalability, cost.</a:t>
-            </a:r>
-          </a:p>
-          <a:p>
-            <a:r>
-              <a:t>Misconception to pre-empt: "more redundancy / more scaling is always better." No — every option costs;</a:t>
-            </a:r>
-          </a:p>
-          <a:p>
-            <a:r>
-              <a:t>the skill is fit, not maximising. Gold-plating loses marks.</a:t>
-            </a:r>
-          </a:p>
-          <a:p>
-            <a:r>
-              <a:t>Question to pose: "Multi-AZ improves reliability — so should every system have it?" (No — only where the</a:t>
-            </a:r>
-          </a:p>
-          <a:p>
-            <a:r>
-              <a:t>reliability benefit justifies the cost; sets up the Ledgerline DB call in Topic 2).</a:t>
-            </a:r>
-          </a:p>
-          <a:p>
-            <a:r>
-              <a:t>UoC/AT1 tie: ICTCLD504 PC 1.3 (identify design patterns &amp; architectural options) → AT1 Solution Design</a:t>
-            </a:r>
-          </a:p>
-          <a:p>
-            <a:r>
-              <a:t>options analysis.</a:t>
+              <a:t>Workbook task 3 — the regulatory requirements document is on the intranet; the task is careful reading plus an honest assessment.</a:t>
+            </a:r>
+          </a:p>
+          <a:p>
+            <a:r>
+              <a:t>The over-read is the common failure; the instruments say precisely what is in scope.</a:t>
             </a:r>
           </a:p>
         </p:txBody>
@@ -1663,77 +1340,12 @@
           <a:lstStyle/>
           <a:p>
             <a:r>
-              <a:t>Narrow the menu to Ledgerline — teach students to assess options AGAINST a specific business model,</a:t>
-            </a:r>
-          </a:p>
-          <a:p>
-            <a:r>
-              <a:t>then commit to a shortlist. This is where analysis becomes decisions.</a:t>
-            </a:r>
-          </a:p>
-          <a:p>
-            <a:r>
-              <a:t>• First bullet: determine and assess the benefits and differences of the options against Ledgerline's</a:t>
-            </a:r>
-          </a:p>
-          <a:p>
-            <a:r>
-              <a:t>CURRENT business model and needs — not in the abstract. The same option can be right for one business</a:t>
-            </a:r>
-          </a:p>
-          <a:p>
-            <a:r>
-              <a:t>and wrong for another.</a:t>
-            </a:r>
-          </a:p>
-          <a:p>
-            <a:r>
-              <a:t>• Second bullet: the single-instance-DB constraint (from C1) rules some reliability options out — which</a:t>
-            </a:r>
-          </a:p>
-          <a:p>
-            <a:r>
-              <a:t>actually SHARPENS the ones that remain. A constraint is analytical signal, not just a limitation.</a:t>
-            </a:r>
-          </a:p>
-          <a:p>
-            <a:r>
-              <a:t>• Third bullet: confirm the system design decisions to carry forward according to business needs — the</a:t>
-            </a:r>
-          </a:p>
-          <a:p>
-            <a:r>
-              <a:t>shortlist Topics 2–3 will actually design.</a:t>
-            </a:r>
-          </a:p>
-          <a:p>
-            <a:r>
-              <a:t>Misconception to pre-empt: "assess = describe each option." No — assess means judge FIT and pick; they</a:t>
-            </a:r>
-          </a:p>
-          <a:p>
-            <a:r>
-              <a:t>must end with confirmed decisions, not a balanced-sounding list.</a:t>
-            </a:r>
-          </a:p>
-          <a:p>
-            <a:r>
-              <a:t>Question to pose: "The single-instance DB rules out a Multi-AZ database — does that make the analysis</a:t>
-            </a:r>
-          </a:p>
-          <a:p>
-            <a:r>
-              <a:t>harder or easier?" (easier — it removes an option, so you argue the remaining ones).</a:t>
-            </a:r>
-          </a:p>
-          <a:p>
-            <a:r>
-              <a:t>UoC/AT1 tie: ICTCLD504 PC 1.4 (assess options against the business model) + PC 1.5 (confirm design</a:t>
-            </a:r>
-          </a:p>
-          <a:p>
-            <a:r>
-              <a:t>decisions) → AT1 Solution Design options + decisions.</a:t>
+              <a:t>Activity = practice workbook task 3.</a:t>
+            </a:r>
+          </a:p>
+          <a:p>
+            <a:r>
+              <a:t>Press for evidence on every row — "compliant" with nothing behind it is a guess.</a:t>
             </a:r>
           </a:p>
         </p:txBody>
@@ -1803,87 +1415,12 @@
           <a:lstStyle/>
           <a:p>
             <a:r>
-              <a:t>Facilitation — the Section 2 practice; students list and assess options for the practice engagement,</a:t>
-            </a:r>
-          </a:p>
-          <a:p>
-            <a:r>
-              <a:t>then commit to decisions — mirroring the Ledgerline options work.</a:t>
-            </a:r>
-          </a:p>
-          <a:p>
-            <a:r>
-              <a:t>Tell students: "For the practice engagement, list the architectural options open to it and assess each</a:t>
-            </a:r>
-          </a:p>
-          <a:p>
-            <a:r>
-              <a:t>against its business model and needs. Then confirm which decisions you'd carry forward — and note what</a:t>
-            </a:r>
-          </a:p>
-          <a:p>
-            <a:r>
-              <a:t>you rule out, and why."</a:t>
-            </a:r>
-          </a:p>
-          <a:p>
-            <a:r>
-              <a:t>Steps (put on the board):</a:t>
-            </a:r>
-          </a:p>
-          <a:p>
-            <a:r>
-              <a:t>1. List the options open to the practice architecture (redundancy, scaling, managed vs self-run,</a:t>
-            </a:r>
-          </a:p>
-          <a:p>
-            <a:r>
-              <a:t>caching, decoupling).</a:t>
-            </a:r>
-          </a:p>
-          <a:p>
-            <a:r>
-              <a:t>2. Assess each against the practice engagement's business model and needs — cost vs benefit, fit not</a:t>
-            </a:r>
-          </a:p>
-          <a:p>
-            <a:r>
-              <a:t>maximum.</a:t>
-            </a:r>
-          </a:p>
-          <a:p>
-            <a:r>
-              <a:t>3. Confirm the decisions worth carrying forward; record the ones you RULE OUT and the reason.</a:t>
-            </a:r>
-          </a:p>
-          <a:p>
-            <a:r>
-              <a:t>Must produce: a shortlist of confirmed design decisions plus a short "ruled out, because…" list.</a:t>
-            </a:r>
-          </a:p>
-          <a:p>
-            <a:r>
-              <a:t>Timing: ~25 min then discuss. Where they get stuck: they keep every option "just in case" — push them</a:t>
-            </a:r>
-          </a:p>
-          <a:p>
-            <a:r>
-              <a:t>to commit and to justify a rejection (rejecting an option with a reason is a marked skill).</a:t>
-            </a:r>
-          </a:p>
-          <a:p>
-            <a:r>
-              <a:t>Share-back prompt: ask one student for an option they RULED OUT and why — the reasoning is the skill.</a:t>
-            </a:r>
-          </a:p>
-          <a:p>
-            <a:r>
-              <a:t>No-leakage note: the website is the practice vehicle; AT1 assesses the same options-and-decisions skill</a:t>
-            </a:r>
-          </a:p>
-          <a:p>
-            <a:r>
-              <a:t>on Ledgerline — comparable, not identical.</a:t>
+              <a:t>A menu, not a decision — the next slide narrows it. Give each option a one-line "what it buys".</a:t>
+            </a:r>
+          </a:p>
+          <a:p>
+            <a:r>
+              <a:t>Misconception: more redundancy is always better. Every option costs; the skill is fit.</a:t>
             </a:r>
           </a:p>
         </p:txBody>
@@ -1953,72 +1490,12 @@
           <a:lstStyle/>
           <a:p>
             <a:r>
-              <a:t>Open Section 3 by teaching what a GOAL is versus a METRIC — the yardstick discipline the whole</a:t>
-            </a:r>
-          </a:p>
-          <a:p>
-            <a:r>
-              <a:t>improvement is later measured against.</a:t>
-            </a:r>
-          </a:p>
-          <a:p>
-            <a:r>
-              <a:t>• First bullet: set business goals across the four well-architected concerns — security, reliability,</a:t>
-            </a:r>
-          </a:p>
-          <a:p>
-            <a:r>
-              <a:t>high-performance and cost efficiency (PC 1.6, PE 3).</a:t>
-            </a:r>
-          </a:p>
-          <a:p>
-            <a:r>
-              <a:t>• Second bullet: a goal is directional and business-owned ("survive an AZ failure without data loss");</a:t>
-            </a:r>
-          </a:p>
-          <a:p>
-            <a:r>
-              <a:t>a METRIC makes it measurable (availability %, RTO/RPO). Say both words; students blur them.</a:t>
-            </a:r>
-          </a:p>
-          <a:p>
-            <a:r>
-              <a:t>• Third bullet: goals come from business REQUIREMENTS and needs — not from the technology you happen to</a:t>
-            </a:r>
-          </a:p>
-          <a:p>
-            <a:r>
-              <a:t>like. Technology-led goals are the classic trap.</a:t>
-            </a:r>
-          </a:p>
-          <a:p>
-            <a:r>
-              <a:t>Misconception to pre-empt: "the goal is 'use Multi-AZ'." No — that's a solution masquerading as a goal;</a:t>
-            </a:r>
-          </a:p>
-          <a:p>
-            <a:r>
-              <a:t>the goal is the business outcome ("survive an AZ failure"), and the solution is chosen to meet it.</a:t>
-            </a:r>
-          </a:p>
-          <a:p>
-            <a:r>
-              <a:t>Question to pose: "'Go Multi-AZ' — is that a goal or a solution? What's the goal underneath it?"</a:t>
-            </a:r>
-          </a:p>
-          <a:p>
-            <a:r>
-              <a:t>(survive an AZ failure without data loss — the outcome the solution serves).</a:t>
-            </a:r>
-          </a:p>
-          <a:p>
-            <a:r>
-              <a:t>UoC/AT1 tie: ICTCLD504 PC 1.6 + PE 3 (set business goals across the four concerns) → AT1 Solution</a:t>
-            </a:r>
-          </a:p>
-          <a:p>
-            <a:r>
-              <a:t>Design goals section.</a:t>
+              <a:t>Workbook tasks 4 and 5 — the option list, then the assessment against the business.</a:t>
+            </a:r>
+          </a:p>
+          <a:p>
+            <a:r>
+              <a:t>The single-instance-DB constraint from C1 is the worked example of a constraint doing analytical work.</a:t>
             </a:r>
           </a:p>
         </p:txBody>
@@ -5137,7 +4614,7 @@
                 </a:solidFill>
                 <a:latin typeface="Roboto Light"/>
               </a:rPr>
-              <a:t>Review and evaluate the existing Ledgerline cloud architecture, then set the improvement goals and metrics</a:t>
+              <a:t>Review the baseline, check compliance, weigh the options, set the goals</a:t>
             </a:r>
           </a:p>
         </p:txBody>
@@ -5240,7 +4717,7 @@
                 </a:solidFill>
                 <a:latin typeface="Roboto"/>
               </a:rPr>
-              <a:t>Assess the options against Ledgerline &amp; confirm decisions</a:t>
+              <a:t>Assess compliance against the regulatory requirements</a:t>
             </a:r>
           </a:p>
         </p:txBody>
@@ -5338,7 +4815,7 @@
                 </a:solidFill>
                 <a:latin typeface="Roboto"/>
               </a:rPr>
-              <a:t>Determine and assess the benefits and differences of cloud/architectural options against Ledgerline's current business model and needs — not in the abstract.</a:t>
+              <a:t>Read the applicable regulatory instruments and record what each actually obliges — no more, no less.</a:t>
             </a:r>
           </a:p>
           <a:p>
@@ -5369,7 +4846,7 @@
                 </a:solidFill>
                 <a:latin typeface="Roboto"/>
               </a:rPr>
-              <a:t>Weigh what fits: the single-instance DB constraint rules some reliability options out, which sharpens the ones that remain.</a:t>
+              <a:t>Assess the current architecture against each obligation: compliant, non-compliant, or not applicable — with the evidence.</a:t>
             </a:r>
           </a:p>
           <a:p>
@@ -5400,7 +4877,7 @@
                 </a:solidFill>
                 <a:latin typeface="Roboto"/>
               </a:rPr>
-              <a:t>Confirm the system design decisions to carry forward according to business needs — the shortlist Topics 2–3 will actually design.</a:t>
+              <a:t>An obligation read too broadly costs as much as one ignored; the precise reading is the skill.</a:t>
             </a:r>
           </a:p>
         </p:txBody>
@@ -5679,7 +5156,7 @@
                 </a:solidFill>
                 <a:latin typeface="Roboto"/>
               </a:rPr>
-              <a:t>Weigh options on the practice engagement</a:t>
+              <a:t>Assess compliance</a:t>
             </a:r>
           </a:p>
         </p:txBody>
@@ -5733,7 +5210,7 @@
                 </a:solidFill>
                 <a:latin typeface="Roboto"/>
               </a:rPr>
-              <a:t>For the practice engagement, list the architectural options open to it and assess each against its business model and needs.</a:t>
+              <a:t>Workbook — task 3.</a:t>
             </a:r>
           </a:p>
           <a:p>
@@ -5764,7 +5241,7 @@
                 </a:solidFill>
                 <a:latin typeface="Roboto"/>
               </a:rPr>
-              <a:t>Confirm the design decisions worth carrying forward — and note the ones you rule out and why.</a:t>
+              <a:t>Assess the practice engagement's compliance against the applicable regulatory requirements, obligation by obligation.</a:t>
             </a:r>
           </a:p>
         </p:txBody>
@@ -5844,7 +5321,7 @@
                 </a:solidFill>
                 <a:latin typeface="Roboto"/>
               </a:rPr>
-              <a:t>⏱  ~25 min</a:t>
+              <a:t>⏱  ~20 min</a:t>
             </a:r>
           </a:p>
         </p:txBody>
@@ -5985,7 +5462,7 @@
     <p:bg>
       <p:bgPr>
         <a:solidFill>
-          <a:srgbClr val="FFFFFF"/>
+          <a:srgbClr val="F9F9F9"/>
         </a:solidFill>
         <a:effectLst/>
       </p:bgPr>
@@ -5999,20 +5476,70 @@
       <p:grpSpPr/>
       <p:sp>
         <p:nvSpPr>
-          <p:cNvPr id="2" name="Rectangle 1"/>
+          <p:cNvPr id="2" name="TextBox 1"/>
+          <p:cNvSpPr txBox="1"/>
+          <p:nvPr/>
+        </p:nvSpPr>
+        <p:spPr>
+          <a:xfrm>
+            <a:off x="640080" y="548640"/>
+            <a:ext cx="10881360" cy="1097280"/>
+          </a:xfrm>
+          <a:prstGeom prst="rect">
+            <a:avLst/>
+          </a:prstGeom>
+          <a:noFill/>
+        </p:spPr>
+        <p:txBody>
+          <a:bodyPr wrap="square" anchor="t" lIns="0" rIns="0" tIns="0" bIns="0">
+            <a:spAutoFit/>
+          </a:bodyPr>
+          <a:lstStyle/>
+          <a:p>
+            <a:r>
+              <a:rPr sz="3200" b="1" i="0">
+                <a:solidFill>
+                  <a:srgbClr val="2A2929"/>
+                </a:solidFill>
+                <a:latin typeface="Roboto"/>
+              </a:rPr>
+              <a:t>Key takeaways</a:t>
+            </a:r>
+          </a:p>
+          <a:p>
+            <a:pPr>
+              <a:spcBef>
+                <a:spcPts val="200"/>
+              </a:spcBef>
+            </a:pPr>
+            <a:r>
+              <a:rPr sz="1800" b="1" i="0">
+                <a:solidFill>
+                  <a:srgbClr val="27B5CE"/>
+                </a:solidFill>
+                <a:latin typeface="Roboto"/>
+              </a:rPr>
+              <a:t>Section 2 · Compliance</a:t>
+            </a:r>
+          </a:p>
+        </p:txBody>
+      </p:sp>
+      <p:sp>
+        <p:nvSpPr>
+          <p:cNvPr id="3" name="Rectangle 2"/>
           <p:cNvSpPr/>
           <p:nvPr/>
         </p:nvSpPr>
         <p:spPr>
           <a:xfrm>
-            <a:off x="0" y="0"/>
-            <a:ext cx="3931920" cy="6858000"/>
+            <a:off x="658368" y="1600200"/>
+            <a:ext cx="1463040" cy="50800"/>
           </a:xfrm>
           <a:prstGeom prst="rect">
             <a:avLst/>
           </a:prstGeom>
           <a:solidFill>
-            <a:srgbClr val="205F61"/>
+            <a:srgbClr val="27B5CE"/>
           </a:solidFill>
           <a:ln>
             <a:noFill/>
@@ -6043,101 +5570,47 @@
       </p:sp>
       <p:sp>
         <p:nvSpPr>
-          <p:cNvPr id="3" name="TextBox 2"/>
-          <p:cNvSpPr txBox="1"/>
-          <p:nvPr/>
-        </p:nvSpPr>
-        <p:spPr>
-          <a:xfrm>
-            <a:off x="365760" y="2103120"/>
-            <a:ext cx="3291840" cy="2194560"/>
-          </a:xfrm>
-          <a:prstGeom prst="rect">
-            <a:avLst/>
-          </a:prstGeom>
-          <a:noFill/>
-        </p:spPr>
-        <p:txBody>
-          <a:bodyPr wrap="square" anchor="t" lIns="0" rIns="0" tIns="0" bIns="0">
-            <a:spAutoFit/>
-          </a:bodyPr>
-          <a:lstStyle/>
-          <a:p>
-            <a:r>
-              <a:rPr sz="13000" b="1" i="0">
-                <a:solidFill>
-                  <a:srgbClr val="FFFFFF"/>
-                </a:solidFill>
-                <a:latin typeface="Roboto"/>
-              </a:rPr>
-              <a:t>03</a:t>
-            </a:r>
-          </a:p>
-        </p:txBody>
-      </p:sp>
-      <p:sp>
-        <p:nvSpPr>
-          <p:cNvPr id="4" name="TextBox 3"/>
-          <p:cNvSpPr txBox="1"/>
-          <p:nvPr/>
-        </p:nvSpPr>
-        <p:spPr>
-          <a:xfrm>
-            <a:off x="4480560" y="2468880"/>
-            <a:ext cx="7132320" cy="2194560"/>
-          </a:xfrm>
-          <a:prstGeom prst="rect">
-            <a:avLst/>
-          </a:prstGeom>
-          <a:noFill/>
-        </p:spPr>
-        <p:txBody>
-          <a:bodyPr wrap="square" anchor="t" lIns="0" rIns="0" tIns="0" bIns="0">
-            <a:spAutoFit/>
-          </a:bodyPr>
-          <a:lstStyle/>
-          <a:p>
-            <a:r>
-              <a:rPr sz="1600" b="1" i="0">
-                <a:solidFill>
-                  <a:srgbClr val="205F61"/>
-                </a:solidFill>
-                <a:latin typeface="Roboto"/>
-              </a:rPr>
-              <a:t>SECTION</a:t>
-            </a:r>
-          </a:p>
-          <a:p>
-            <a:pPr>
-              <a:spcBef>
-                <a:spcPts val="600"/>
-              </a:spcBef>
-            </a:pPr>
-            <a:r>
-              <a:rPr sz="3800" b="1" i="0">
-                <a:solidFill>
-                  <a:srgbClr val="2A2929"/>
-                </a:solidFill>
-                <a:latin typeface="Roboto"/>
-              </a:rPr>
-              <a:t>Goals &amp; metrics</a:t>
-            </a:r>
-          </a:p>
-          <a:p>
-            <a:pPr>
-              <a:spcBef>
-                <a:spcPts val="1000"/>
-              </a:spcBef>
-            </a:pPr>
-            <a:r>
-              <a:rPr sz="2000" b="0" i="1">
-                <a:solidFill>
-                  <a:srgbClr val="484848"/>
-                </a:solidFill>
-                <a:latin typeface="Roboto Light"/>
-              </a:rPr>
-              <a:t>set the target the improvement is measured against</a:t>
-            </a:r>
+          <p:cNvPr id="4" name="Rectangle 3"/>
+          <p:cNvSpPr/>
+          <p:nvPr/>
+        </p:nvSpPr>
+        <p:spPr>
+          <a:xfrm>
+            <a:off x="640080" y="1965960"/>
+            <a:ext cx="10927080" cy="841248"/>
+          </a:xfrm>
+          <a:prstGeom prst="rect">
+            <a:avLst/>
+          </a:prstGeom>
+          <a:solidFill>
+            <a:srgbClr val="FFFFFF"/>
+          </a:solidFill>
+          <a:ln w="12700">
+            <a:solidFill>
+              <a:srgbClr val="CCCCCC"/>
+            </a:solidFill>
+          </a:ln>
+          <a:effectLst/>
+        </p:spPr>
+        <p:style>
+          <a:lnRef idx="1">
+            <a:schemeClr val="accent1"/>
+          </a:lnRef>
+          <a:fillRef idx="3">
+            <a:schemeClr val="accent1"/>
+          </a:fillRef>
+          <a:effectRef idx="2">
+            <a:schemeClr val="accent1"/>
+          </a:effectRef>
+          <a:fontRef idx="minor">
+            <a:schemeClr val="lt1"/>
+          </a:fontRef>
+        </p:style>
+        <p:txBody>
+          <a:bodyPr rtlCol="0" anchor="ctr"/>
+          <a:lstStyle/>
+          <a:p>
+            <a:pPr algn="ctr"/>
           </a:p>
         </p:txBody>
       </p:sp>
@@ -6149,14 +5622,14 @@
         </p:nvSpPr>
         <p:spPr>
           <a:xfrm>
-            <a:off x="0" y="6565392"/>
-            <a:ext cx="12191695" cy="38100"/>
+            <a:off x="640080" y="1965960"/>
+            <a:ext cx="109728" cy="841248"/>
           </a:xfrm>
           <a:prstGeom prst="rect">
             <a:avLst/>
           </a:prstGeom>
           <a:solidFill>
-            <a:srgbClr val="205F61"/>
+            <a:srgbClr val="27B5CE"/>
           </a:solidFill>
           <a:ln>
             <a:noFill/>
@@ -6193,6 +5666,218 @@
         </p:nvSpPr>
         <p:spPr>
           <a:xfrm>
+            <a:off x="960120" y="1965960"/>
+            <a:ext cx="10424160" cy="841248"/>
+          </a:xfrm>
+          <a:prstGeom prst="rect">
+            <a:avLst/>
+          </a:prstGeom>
+          <a:noFill/>
+        </p:spPr>
+        <p:txBody>
+          <a:bodyPr wrap="square" anchor="ctr" lIns="0" rIns="0" tIns="0" bIns="0">
+            <a:spAutoFit/>
+          </a:bodyPr>
+          <a:lstStyle/>
+          <a:p>
+            <a:pPr>
+              <a:lnSpc>
+                <a:spcPct val="100000"/>
+              </a:lnSpc>
+            </a:pPr>
+            <a:r>
+              <a:rPr sz="1700" b="0" i="0">
+                <a:solidFill>
+                  <a:srgbClr val="2A2929"/>
+                </a:solidFill>
+                <a:latin typeface="Roboto"/>
+              </a:rPr>
+              <a:t>Record what each instrument obliges, precisely.</a:t>
+            </a:r>
+          </a:p>
+        </p:txBody>
+      </p:sp>
+      <p:sp>
+        <p:nvSpPr>
+          <p:cNvPr id="7" name="Rectangle 6"/>
+          <p:cNvSpPr/>
+          <p:nvPr/>
+        </p:nvSpPr>
+        <p:spPr>
+          <a:xfrm>
+            <a:off x="640080" y="2916936"/>
+            <a:ext cx="10927080" cy="841248"/>
+          </a:xfrm>
+          <a:prstGeom prst="rect">
+            <a:avLst/>
+          </a:prstGeom>
+          <a:solidFill>
+            <a:srgbClr val="FFFFFF"/>
+          </a:solidFill>
+          <a:ln w="12700">
+            <a:solidFill>
+              <a:srgbClr val="CCCCCC"/>
+            </a:solidFill>
+          </a:ln>
+          <a:effectLst/>
+        </p:spPr>
+        <p:style>
+          <a:lnRef idx="1">
+            <a:schemeClr val="accent1"/>
+          </a:lnRef>
+          <a:fillRef idx="3">
+            <a:schemeClr val="accent1"/>
+          </a:fillRef>
+          <a:effectRef idx="2">
+            <a:schemeClr val="accent1"/>
+          </a:effectRef>
+          <a:fontRef idx="minor">
+            <a:schemeClr val="lt1"/>
+          </a:fontRef>
+        </p:style>
+        <p:txBody>
+          <a:bodyPr rtlCol="0" anchor="ctr"/>
+          <a:lstStyle/>
+          <a:p>
+            <a:pPr algn="ctr"/>
+          </a:p>
+        </p:txBody>
+      </p:sp>
+      <p:sp>
+        <p:nvSpPr>
+          <p:cNvPr id="8" name="Rectangle 7"/>
+          <p:cNvSpPr/>
+          <p:nvPr/>
+        </p:nvSpPr>
+        <p:spPr>
+          <a:xfrm>
+            <a:off x="640080" y="2916936"/>
+            <a:ext cx="109728" cy="841248"/>
+          </a:xfrm>
+          <a:prstGeom prst="rect">
+            <a:avLst/>
+          </a:prstGeom>
+          <a:solidFill>
+            <a:srgbClr val="27B5CE"/>
+          </a:solidFill>
+          <a:ln>
+            <a:noFill/>
+          </a:ln>
+          <a:effectLst/>
+        </p:spPr>
+        <p:style>
+          <a:lnRef idx="1">
+            <a:schemeClr val="accent1"/>
+          </a:lnRef>
+          <a:fillRef idx="3">
+            <a:schemeClr val="accent1"/>
+          </a:fillRef>
+          <a:effectRef idx="2">
+            <a:schemeClr val="accent1"/>
+          </a:effectRef>
+          <a:fontRef idx="minor">
+            <a:schemeClr val="lt1"/>
+          </a:fontRef>
+        </p:style>
+        <p:txBody>
+          <a:bodyPr rtlCol="0" anchor="ctr"/>
+          <a:lstStyle/>
+          <a:p>
+            <a:pPr algn="ctr"/>
+          </a:p>
+        </p:txBody>
+      </p:sp>
+      <p:sp>
+        <p:nvSpPr>
+          <p:cNvPr id="9" name="TextBox 8"/>
+          <p:cNvSpPr txBox="1"/>
+          <p:nvPr/>
+        </p:nvSpPr>
+        <p:spPr>
+          <a:xfrm>
+            <a:off x="960120" y="2916936"/>
+            <a:ext cx="10424160" cy="841248"/>
+          </a:xfrm>
+          <a:prstGeom prst="rect">
+            <a:avLst/>
+          </a:prstGeom>
+          <a:noFill/>
+        </p:spPr>
+        <p:txBody>
+          <a:bodyPr wrap="square" anchor="ctr" lIns="0" rIns="0" tIns="0" bIns="0">
+            <a:spAutoFit/>
+          </a:bodyPr>
+          <a:lstStyle/>
+          <a:p>
+            <a:pPr>
+              <a:lnSpc>
+                <a:spcPct val="100000"/>
+              </a:lnSpc>
+            </a:pPr>
+            <a:r>
+              <a:rPr sz="1700" b="0" i="0">
+                <a:solidFill>
+                  <a:srgbClr val="2A2929"/>
+                </a:solidFill>
+                <a:latin typeface="Roboto"/>
+              </a:rPr>
+              <a:t>Assess against each obligation with evidence.</a:t>
+            </a:r>
+          </a:p>
+        </p:txBody>
+      </p:sp>
+      <p:sp>
+        <p:nvSpPr>
+          <p:cNvPr id="10" name="Rectangle 9"/>
+          <p:cNvSpPr/>
+          <p:nvPr/>
+        </p:nvSpPr>
+        <p:spPr>
+          <a:xfrm>
+            <a:off x="0" y="6565392"/>
+            <a:ext cx="12191695" cy="38100"/>
+          </a:xfrm>
+          <a:prstGeom prst="rect">
+            <a:avLst/>
+          </a:prstGeom>
+          <a:solidFill>
+            <a:srgbClr val="27B5CE"/>
+          </a:solidFill>
+          <a:ln>
+            <a:noFill/>
+          </a:ln>
+          <a:effectLst/>
+        </p:spPr>
+        <p:style>
+          <a:lnRef idx="1">
+            <a:schemeClr val="accent1"/>
+          </a:lnRef>
+          <a:fillRef idx="3">
+            <a:schemeClr val="accent1"/>
+          </a:fillRef>
+          <a:effectRef idx="2">
+            <a:schemeClr val="accent1"/>
+          </a:effectRef>
+          <a:fontRef idx="minor">
+            <a:schemeClr val="lt1"/>
+          </a:fontRef>
+        </p:style>
+        <p:txBody>
+          <a:bodyPr rtlCol="0" anchor="ctr"/>
+          <a:lstStyle/>
+          <a:p>
+            <a:pPr algn="ctr"/>
+          </a:p>
+        </p:txBody>
+      </p:sp>
+      <p:sp>
+        <p:nvSpPr>
+          <p:cNvPr id="11" name="TextBox 10"/>
+          <p:cNvSpPr txBox="1"/>
+          <p:nvPr/>
+        </p:nvSpPr>
+        <p:spPr>
+          <a:xfrm>
             <a:off x="502920" y="6400800"/>
             <a:ext cx="5486400" cy="320040"/>
           </a:xfrm>
@@ -6230,7 +5915,7 @@
       </p:sp>
       <p:sp>
         <p:nvSpPr>
-          <p:cNvPr id="7" name="TextBox 6"/>
+          <p:cNvPr id="12" name="TextBox 11"/>
           <p:cNvSpPr txBox="1"/>
           <p:nvPr/>
         </p:nvSpPr>
@@ -6258,7 +5943,7 @@
                 </a:solidFill>
                 <a:latin typeface="Roboto"/>
               </a:rPr>
-              <a:t/>
+              <a:t>9</a:t>
             </a:r>
           </a:p>
         </p:txBody>
@@ -6291,48 +5976,14 @@
       <p:grpSpPr/>
       <p:sp>
         <p:nvSpPr>
-          <p:cNvPr id="2" name="TextBox 1"/>
-          <p:cNvSpPr txBox="1"/>
-          <p:nvPr/>
-        </p:nvSpPr>
-        <p:spPr>
-          <a:xfrm>
-            <a:off x="640080" y="457200"/>
-            <a:ext cx="10881360" cy="960120"/>
-          </a:xfrm>
-          <a:prstGeom prst="rect">
-            <a:avLst/>
-          </a:prstGeom>
-          <a:noFill/>
-        </p:spPr>
-        <p:txBody>
-          <a:bodyPr wrap="square" anchor="t" lIns="0" rIns="0" tIns="0" bIns="0">
-            <a:spAutoFit/>
-          </a:bodyPr>
-          <a:lstStyle/>
-          <a:p>
-            <a:r>
-              <a:rPr sz="2800" b="1" i="0">
-                <a:solidFill>
-                  <a:srgbClr val="2A2929"/>
-                </a:solidFill>
-                <a:latin typeface="Roboto"/>
-              </a:rPr>
-              <a:t>Goals across the four concerns</a:t>
-            </a:r>
-          </a:p>
-        </p:txBody>
-      </p:sp>
-      <p:sp>
-        <p:nvSpPr>
-          <p:cNvPr id="3" name="Rectangle 2"/>
+          <p:cNvPr id="2" name="Rectangle 1"/>
           <p:cNvSpPr/>
           <p:nvPr/>
         </p:nvSpPr>
         <p:spPr>
           <a:xfrm>
-            <a:off x="658368" y="1371600"/>
-            <a:ext cx="1463040" cy="50800"/>
+            <a:off x="0" y="0"/>
+            <a:ext cx="3931920" cy="6858000"/>
           </a:xfrm>
           <a:prstGeom prst="rect">
             <a:avLst/>
@@ -6369,14 +6020,48 @@
       </p:sp>
       <p:sp>
         <p:nvSpPr>
+          <p:cNvPr id="3" name="TextBox 2"/>
+          <p:cNvSpPr txBox="1"/>
+          <p:nvPr/>
+        </p:nvSpPr>
+        <p:spPr>
+          <a:xfrm>
+            <a:off x="365760" y="2103120"/>
+            <a:ext cx="3291840" cy="2194560"/>
+          </a:xfrm>
+          <a:prstGeom prst="rect">
+            <a:avLst/>
+          </a:prstGeom>
+          <a:noFill/>
+        </p:spPr>
+        <p:txBody>
+          <a:bodyPr wrap="square" anchor="t" lIns="0" rIns="0" tIns="0" bIns="0">
+            <a:spAutoFit/>
+          </a:bodyPr>
+          <a:lstStyle/>
+          <a:p>
+            <a:r>
+              <a:rPr sz="13000" b="1" i="0">
+                <a:solidFill>
+                  <a:srgbClr val="FFFFFF"/>
+                </a:solidFill>
+                <a:latin typeface="Roboto"/>
+              </a:rPr>
+              <a:t>03</a:t>
+            </a:r>
+          </a:p>
+        </p:txBody>
+      </p:sp>
+      <p:sp>
+        <p:nvSpPr>
           <p:cNvPr id="4" name="TextBox 3"/>
           <p:cNvSpPr txBox="1"/>
           <p:nvPr/>
         </p:nvSpPr>
         <p:spPr>
           <a:xfrm>
-            <a:off x="658368" y="1691640"/>
-            <a:ext cx="10881360" cy="4480560"/>
+            <a:off x="4480560" y="2468880"/>
+            <a:ext cx="7132320" cy="2194560"/>
           </a:xfrm>
           <a:prstGeom prst="rect">
             <a:avLst/>
@@ -6384,101 +6069,51 @@
           <a:noFill/>
         </p:spPr>
         <p:txBody>
-          <a:bodyPr wrap="square" anchor="ctr" lIns="0" rIns="0" tIns="0" bIns="0">
+          <a:bodyPr wrap="square" anchor="t" lIns="0" rIns="0" tIns="0" bIns="0">
             <a:spAutoFit/>
           </a:bodyPr>
           <a:lstStyle/>
           <a:p>
-            <a:pPr marL="0" indent="0">
-              <a:lnSpc>
-                <a:spcPct val="105000"/>
-              </a:lnSpc>
+            <a:r>
+              <a:rPr sz="1600" b="1" i="0">
+                <a:solidFill>
+                  <a:srgbClr val="205F61"/>
+                </a:solidFill>
+                <a:latin typeface="Roboto"/>
+              </a:rPr>
+              <a:t>SECTION</a:t>
+            </a:r>
+          </a:p>
+          <a:p>
+            <a:pPr>
               <a:spcBef>
-                <a:spcPts val="0"/>
+                <a:spcPts val="600"/>
               </a:spcBef>
-              <a:spcAft>
+            </a:pPr>
+            <a:r>
+              <a:rPr sz="3800" b="1" i="0">
+                <a:solidFill>
+                  <a:srgbClr val="2A2929"/>
+                </a:solidFill>
+                <a:latin typeface="Roboto"/>
+              </a:rPr>
+              <a:t>The options, and their fit</a:t>
+            </a:r>
+          </a:p>
+          <a:p>
+            <a:pPr>
+              <a:spcBef>
                 <a:spcPts val="1000"/>
-              </a:spcAft>
+              </a:spcBef>
             </a:pPr>
             <a:r>
-              <a:rPr sz="2400" b="1" i="0">
-                <a:solidFill>
-                  <a:srgbClr val="EDAB0C"/>
-                </a:solidFill>
-                <a:latin typeface="Roboto"/>
-              </a:rPr>
-              <a:t>■  </a:t>
-            </a:r>
-            <a:r>
-              <a:rPr sz="2400" b="0" i="0">
-                <a:solidFill>
-                  <a:srgbClr val="2A2929"/>
-                </a:solidFill>
-                <a:latin typeface="Roboto"/>
-              </a:rPr>
-              <a:t>Set business goals across the four well-architected concerns: security, reliability, high-performance and cost efficiency (PC 1.6, PE 3).</a:t>
-            </a:r>
-          </a:p>
-          <a:p>
-            <a:pPr marL="0" indent="0">
-              <a:lnSpc>
-                <a:spcPct val="105000"/>
-              </a:lnSpc>
-              <a:spcBef>
-                <a:spcPts val="0"/>
-              </a:spcBef>
-              <a:spcAft>
-                <a:spcPts val="1000"/>
-              </a:spcAft>
-            </a:pPr>
-            <a:r>
-              <a:rPr sz="2400" b="1" i="0">
-                <a:solidFill>
-                  <a:srgbClr val="EDAB0C"/>
-                </a:solidFill>
-                <a:latin typeface="Roboto"/>
-              </a:rPr>
-              <a:t>■  </a:t>
-            </a:r>
-            <a:r>
-              <a:rPr sz="2400" b="0" i="0">
-                <a:solidFill>
-                  <a:srgbClr val="2A2929"/>
-                </a:solidFill>
-                <a:latin typeface="Roboto"/>
-              </a:rPr>
-              <a:t>A goal is directional and business-owned ("survive an AZ failure without data loss"); a metric makes it measurable.</a:t>
-            </a:r>
-          </a:p>
-          <a:p>
-            <a:pPr marL="0" indent="0">
-              <a:lnSpc>
-                <a:spcPct val="105000"/>
-              </a:lnSpc>
-              <a:spcBef>
-                <a:spcPts val="0"/>
-              </a:spcBef>
-              <a:spcAft>
-                <a:spcPts val="1000"/>
-              </a:spcAft>
-            </a:pPr>
-            <a:r>
-              <a:rPr sz="2400" b="1" i="0">
-                <a:solidFill>
-                  <a:srgbClr val="EDAB0C"/>
-                </a:solidFill>
-                <a:latin typeface="Roboto"/>
-              </a:rPr>
-              <a:t>■  </a:t>
-            </a:r>
-            <a:r>
-              <a:rPr sz="2400" b="0" i="0">
-                <a:solidFill>
-                  <a:srgbClr val="2A2929"/>
-                </a:solidFill>
-                <a:latin typeface="Roboto"/>
-              </a:rPr>
-              <a:t>Goals come from business requirements and needs, not from the technology you happen to like.</a:t>
+              <a:rPr sz="2000" b="0" i="1">
+                <a:solidFill>
+                  <a:srgbClr val="484848"/>
+                </a:solidFill>
+                <a:latin typeface="Roboto Light"/>
+              </a:rPr>
+              <a:t>what could change, and what fits the business</a:t>
             </a:r>
           </a:p>
         </p:txBody>
@@ -6600,7 +6235,7 @@
                 </a:solidFill>
                 <a:latin typeface="Roboto"/>
               </a:rPr>
-              <a:t>9</a:t>
+              <a:t/>
             </a:r>
           </a:p>
         </p:txBody>
@@ -6660,7 +6295,7 @@
                 </a:solidFill>
                 <a:latin typeface="Roboto"/>
               </a:rPr>
-              <a:t>Set Ledgerline's goals &amp; confirm the metrics</a:t>
+              <a:t>Design patterns and architectural options</a:t>
             </a:r>
           </a:p>
         </p:txBody>
@@ -6758,7 +6393,7 @@
                 </a:solidFill>
                 <a:latin typeface="Roboto"/>
               </a:rPr>
-              <a:t>Set the security / reliability / high-performance / cost goals for Ledgerline from its business requirements.</a:t>
+              <a:t>The option space: multi-zone redundancy, horizontal scaling and load balancing, managed versus self-run data tiers, caching, decoupling.</a:t>
             </a:r>
           </a:p>
           <a:p>
@@ -6789,7 +6424,7 @@
                 </a:solidFill>
                 <a:latin typeface="Roboto"/>
               </a:rPr>
-              <a:t>Evaluate and confirm the performance metrics the improved application is measured against — availability %, RTO/RPO, response time, cost per period (PC 2.1).</a:t>
+              <a:t>Each option is a pattern with a cost and a benefit — there is no single right answer, only a fit.</a:t>
             </a:r>
           </a:p>
           <a:p>
@@ -6820,7 +6455,7 @@
                 </a:solidFill>
                 <a:latin typeface="Roboto"/>
               </a:rPr>
-              <a:t>These goals and metrics are the yardstick for the design (Topics 2–3) and the AT3 build — write them so a later Topic can test against them.</a:t>
+              <a:t>Cloud adoption itself changed the option space: managed services, elasticity and shared responsibility reshape what an improvement can be.</a:t>
             </a:r>
           </a:p>
         </p:txBody>
@@ -6975,14 +6610,48 @@
       <p:grpSpPr/>
       <p:sp>
         <p:nvSpPr>
-          <p:cNvPr id="2" name="Rectangle 1"/>
+          <p:cNvPr id="2" name="TextBox 1"/>
+          <p:cNvSpPr txBox="1"/>
+          <p:nvPr/>
+        </p:nvSpPr>
+        <p:spPr>
+          <a:xfrm>
+            <a:off x="640080" y="457200"/>
+            <a:ext cx="10881360" cy="960120"/>
+          </a:xfrm>
+          <a:prstGeom prst="rect">
+            <a:avLst/>
+          </a:prstGeom>
+          <a:noFill/>
+        </p:spPr>
+        <p:txBody>
+          <a:bodyPr wrap="square" anchor="t" lIns="0" rIns="0" tIns="0" bIns="0">
+            <a:spAutoFit/>
+          </a:bodyPr>
+          <a:lstStyle/>
+          <a:p>
+            <a:r>
+              <a:rPr sz="2800" b="1" i="0">
+                <a:solidFill>
+                  <a:srgbClr val="2A2929"/>
+                </a:solidFill>
+                <a:latin typeface="Roboto"/>
+              </a:rPr>
+              <a:t>Assess the options against the business model</a:t>
+            </a:r>
+          </a:p>
+        </p:txBody>
+      </p:sp>
+      <p:sp>
+        <p:nvSpPr>
+          <p:cNvPr id="3" name="Rectangle 2"/>
           <p:cNvSpPr/>
           <p:nvPr/>
         </p:nvSpPr>
         <p:spPr>
           <a:xfrm>
-            <a:off x="0" y="0"/>
-            <a:ext cx="12191695" cy="1234440"/>
+            <a:off x="658368" y="1371600"/>
+            <a:ext cx="1463040" cy="50800"/>
           </a:xfrm>
           <a:prstGeom prst="rect">
             <a:avLst/>
@@ -7019,67 +6688,14 @@
       </p:sp>
       <p:sp>
         <p:nvSpPr>
-          <p:cNvPr id="3" name="Rounded Rectangle 2"/>
-          <p:cNvSpPr/>
-          <p:nvPr/>
-        </p:nvSpPr>
-        <p:spPr>
-          <a:xfrm>
-            <a:off x="640080" y="384048"/>
-            <a:ext cx="1691640" cy="457200"/>
-          </a:xfrm>
-          <a:prstGeom prst="roundRect">
-            <a:avLst/>
-          </a:prstGeom>
-          <a:solidFill>
-            <a:srgbClr val="2A2929"/>
-          </a:solidFill>
-          <a:ln>
-            <a:noFill/>
-          </a:ln>
-          <a:effectLst/>
-        </p:spPr>
-        <p:style>
-          <a:lnRef idx="1">
-            <a:schemeClr val="accent1"/>
-          </a:lnRef>
-          <a:fillRef idx="3">
-            <a:schemeClr val="accent1"/>
-          </a:fillRef>
-          <a:effectRef idx="2">
-            <a:schemeClr val="accent1"/>
-          </a:effectRef>
-          <a:fontRef idx="minor">
-            <a:schemeClr val="lt1"/>
-          </a:fontRef>
-        </p:style>
-        <p:txBody>
-          <a:bodyPr rtlCol="0" anchor="ctr"/>
-          <a:lstStyle/>
-          <a:p>
-            <a:pPr algn="ctr"/>
-            <a:r>
-              <a:rPr sz="1400" b="1" i="0">
-                <a:solidFill>
-                  <a:srgbClr val="FBB900"/>
-                </a:solidFill>
-                <a:latin typeface="Roboto"/>
-              </a:rPr>
-              <a:t>ACTIVITY</a:t>
-            </a:r>
-          </a:p>
-        </p:txBody>
-      </p:sp>
-      <p:sp>
-        <p:nvSpPr>
           <p:cNvPr id="4" name="TextBox 3"/>
           <p:cNvSpPr txBox="1"/>
           <p:nvPr/>
         </p:nvSpPr>
         <p:spPr>
           <a:xfrm>
-            <a:off x="2560320" y="310896"/>
-            <a:ext cx="8961120" cy="685800"/>
+            <a:off x="658368" y="1691640"/>
+            <a:ext cx="10881360" cy="4480560"/>
           </a:xfrm>
           <a:prstGeom prst="rect">
             <a:avLst/>
@@ -7088,40 +6704,6 @@
         </p:spPr>
         <p:txBody>
           <a:bodyPr wrap="square" anchor="ctr" lIns="0" rIns="0" tIns="0" bIns="0">
-            <a:spAutoFit/>
-          </a:bodyPr>
-          <a:lstStyle/>
-          <a:p>
-            <a:r>
-              <a:rPr sz="2600" b="1" i="0">
-                <a:solidFill>
-                  <a:srgbClr val="FFFFFF"/>
-                </a:solidFill>
-                <a:latin typeface="Roboto"/>
-              </a:rPr>
-              <a:t>Draft goals &amp; metrics for the practice engagement</a:t>
-            </a:r>
-          </a:p>
-        </p:txBody>
-      </p:sp>
-      <p:sp>
-        <p:nvSpPr>
-          <p:cNvPr id="5" name="TextBox 4"/>
-          <p:cNvSpPr txBox="1"/>
-          <p:nvPr/>
-        </p:nvSpPr>
-        <p:spPr>
-          <a:xfrm>
-            <a:off x="658368" y="1554480"/>
-            <a:ext cx="10881360" cy="4297680"/>
-          </a:xfrm>
-          <a:prstGeom prst="rect">
-            <a:avLst/>
-          </a:prstGeom>
-          <a:noFill/>
-        </p:spPr>
-        <p:txBody>
-          <a:bodyPr wrap="square" anchor="t" lIns="0" rIns="0" tIns="0" bIns="0">
             <a:spAutoFit/>
           </a:bodyPr>
           <a:lstStyle/>
@@ -7138,7 +6720,7 @@
               </a:spcAft>
             </a:pPr>
             <a:r>
-              <a:rPr sz="1700" b="1" i="0">
+              <a:rPr sz="2400" b="1" i="0">
                 <a:solidFill>
                   <a:srgbClr val="EDAB0C"/>
                 </a:solidFill>
@@ -7147,13 +6729,13 @@
               <a:t>■  </a:t>
             </a:r>
             <a:r>
-              <a:rPr sz="1700" b="0" i="0">
+              <a:rPr sz="2400" b="0" i="0">
                 <a:solidFill>
                   <a:srgbClr val="2A2929"/>
                 </a:solidFill>
                 <a:latin typeface="Roboto"/>
               </a:rPr>
-              <a:t>For the practice engagement, set the goals across security, reliability, performance and cost.</a:t>
+              <a:t>Determine and assess the benefits of each option against the current business model and needs — not in the abstract.</a:t>
             </a:r>
           </a:p>
           <a:p>
@@ -7169,6 +6751,712 @@
               </a:spcAft>
             </a:pPr>
             <a:r>
+              <a:rPr sz="2400" b="1" i="0">
+                <a:solidFill>
+                  <a:srgbClr val="EDAB0C"/>
+                </a:solidFill>
+                <a:latin typeface="Roboto"/>
+              </a:rPr>
+              <a:t>■  </a:t>
+            </a:r>
+            <a:r>
+              <a:rPr sz="2400" b="0" i="0">
+                <a:solidFill>
+                  <a:srgbClr val="2A2929"/>
+                </a:solidFill>
+                <a:latin typeface="Roboto"/>
+              </a:rPr>
+              <a:t>Constraints sharpen the choice: an option a constraint rules out narrows the argument to the ones that remain.</a:t>
+            </a:r>
+          </a:p>
+          <a:p>
+            <a:pPr marL="0" indent="0">
+              <a:lnSpc>
+                <a:spcPct val="105000"/>
+              </a:lnSpc>
+              <a:spcBef>
+                <a:spcPts val="0"/>
+              </a:spcBef>
+              <a:spcAft>
+                <a:spcPts val="1000"/>
+              </a:spcAft>
+            </a:pPr>
+            <a:r>
+              <a:rPr sz="2400" b="1" i="0">
+                <a:solidFill>
+                  <a:srgbClr val="EDAB0C"/>
+                </a:solidFill>
+                <a:latin typeface="Roboto"/>
+              </a:rPr>
+              <a:t>■  </a:t>
+            </a:r>
+            <a:r>
+              <a:rPr sz="2400" b="0" i="0">
+                <a:solidFill>
+                  <a:srgbClr val="2A2929"/>
+                </a:solidFill>
+                <a:latin typeface="Roboto"/>
+              </a:rPr>
+              <a:t>End with a judgement per option, not a balanced-sounding list.</a:t>
+            </a:r>
+          </a:p>
+        </p:txBody>
+      </p:sp>
+      <p:sp>
+        <p:nvSpPr>
+          <p:cNvPr id="5" name="Rectangle 4"/>
+          <p:cNvSpPr/>
+          <p:nvPr/>
+        </p:nvSpPr>
+        <p:spPr>
+          <a:xfrm>
+            <a:off x="0" y="6565392"/>
+            <a:ext cx="12191695" cy="38100"/>
+          </a:xfrm>
+          <a:prstGeom prst="rect">
+            <a:avLst/>
+          </a:prstGeom>
+          <a:solidFill>
+            <a:srgbClr val="205F61"/>
+          </a:solidFill>
+          <a:ln>
+            <a:noFill/>
+          </a:ln>
+          <a:effectLst/>
+        </p:spPr>
+        <p:style>
+          <a:lnRef idx="1">
+            <a:schemeClr val="accent1"/>
+          </a:lnRef>
+          <a:fillRef idx="3">
+            <a:schemeClr val="accent1"/>
+          </a:fillRef>
+          <a:effectRef idx="2">
+            <a:schemeClr val="accent1"/>
+          </a:effectRef>
+          <a:fontRef idx="minor">
+            <a:schemeClr val="lt1"/>
+          </a:fontRef>
+        </p:style>
+        <p:txBody>
+          <a:bodyPr rtlCol="0" anchor="ctr"/>
+          <a:lstStyle/>
+          <a:p>
+            <a:pPr algn="ctr"/>
+          </a:p>
+        </p:txBody>
+      </p:sp>
+      <p:sp>
+        <p:nvSpPr>
+          <p:cNvPr id="6" name="TextBox 5"/>
+          <p:cNvSpPr txBox="1"/>
+          <p:nvPr/>
+        </p:nvSpPr>
+        <p:spPr>
+          <a:xfrm>
+            <a:off x="502920" y="6400800"/>
+            <a:ext cx="5486400" cy="320040"/>
+          </a:xfrm>
+          <a:prstGeom prst="rect">
+            <a:avLst/>
+          </a:prstGeom>
+          <a:noFill/>
+        </p:spPr>
+        <p:txBody>
+          <a:bodyPr wrap="square" anchor="t" lIns="0" rIns="0" tIns="0" bIns="0">
+            <a:spAutoFit/>
+          </a:bodyPr>
+          <a:lstStyle/>
+          <a:p>
+            <a:r>
+              <a:rPr sz="1100" b="1" i="0">
+                <a:solidFill>
+                  <a:srgbClr val="2A2929"/>
+                </a:solidFill>
+                <a:latin typeface="Roboto"/>
+              </a:rPr>
+              <a:t>Kangan </a:t>
+            </a:r>
+            <a:r>
+              <a:rPr sz="1100" b="1" i="0">
+                <a:solidFill>
+                  <a:srgbClr val="D68E10"/>
+                </a:solidFill>
+                <a:latin typeface="Roboto"/>
+              </a:rPr>
+              <a:t>Institute</a:t>
+            </a:r>
+          </a:p>
+        </p:txBody>
+      </p:sp>
+      <p:sp>
+        <p:nvSpPr>
+          <p:cNvPr id="7" name="TextBox 6"/>
+          <p:cNvSpPr txBox="1"/>
+          <p:nvPr/>
+        </p:nvSpPr>
+        <p:spPr>
+          <a:xfrm>
+            <a:off x="10515600" y="6400800"/>
+            <a:ext cx="1188720" cy="320040"/>
+          </a:xfrm>
+          <a:prstGeom prst="rect">
+            <a:avLst/>
+          </a:prstGeom>
+          <a:noFill/>
+        </p:spPr>
+        <p:txBody>
+          <a:bodyPr wrap="square" anchor="t" lIns="0" rIns="0" tIns="0" bIns="0">
+            <a:spAutoFit/>
+          </a:bodyPr>
+          <a:lstStyle/>
+          <a:p>
+            <a:pPr algn="r"/>
+            <a:r>
+              <a:rPr sz="1100" b="0" i="0">
+                <a:solidFill>
+                  <a:srgbClr val="7A7A7A"/>
+                </a:solidFill>
+                <a:latin typeface="Roboto"/>
+              </a:rPr>
+              <a:t>11</a:t>
+            </a:r>
+          </a:p>
+        </p:txBody>
+      </p:sp>
+    </p:spTree>
+  </p:cSld>
+  <p:clrMapOvr>
+    <a:masterClrMapping/>
+  </p:clrMapOvr>
+</p:sld>
+</file>
+
+<file path=ppt/slides/slide16.xml><?xml version="1.0" encoding="utf-8"?>
+<p:sld xmlns:a="http://schemas.openxmlformats.org/drawingml/2006/main" xmlns:p="http://schemas.openxmlformats.org/presentationml/2006/main" xmlns:r="http://schemas.openxmlformats.org/officeDocument/2006/relationships">
+  <p:cSld>
+    <p:bg>
+      <p:bgPr>
+        <a:solidFill>
+          <a:srgbClr val="FFFFFF"/>
+        </a:solidFill>
+        <a:effectLst/>
+      </p:bgPr>
+    </p:bg>
+    <p:spTree>
+      <p:nvGrpSpPr>
+        <p:cNvPr id="1" name=""/>
+        <p:cNvGrpSpPr/>
+        <p:nvPr/>
+      </p:nvGrpSpPr>
+      <p:grpSpPr/>
+      <p:sp>
+        <p:nvSpPr>
+          <p:cNvPr id="2" name="TextBox 1"/>
+          <p:cNvSpPr txBox="1"/>
+          <p:nvPr/>
+        </p:nvSpPr>
+        <p:spPr>
+          <a:xfrm>
+            <a:off x="640080" y="457200"/>
+            <a:ext cx="10881360" cy="960120"/>
+          </a:xfrm>
+          <a:prstGeom prst="rect">
+            <a:avLst/>
+          </a:prstGeom>
+          <a:noFill/>
+        </p:spPr>
+        <p:txBody>
+          <a:bodyPr wrap="square" anchor="t" lIns="0" rIns="0" tIns="0" bIns="0">
+            <a:spAutoFit/>
+          </a:bodyPr>
+          <a:lstStyle/>
+          <a:p>
+            <a:r>
+              <a:rPr sz="2800" b="1" i="0">
+                <a:solidFill>
+                  <a:srgbClr val="2A2929"/>
+                </a:solidFill>
+                <a:latin typeface="Roboto"/>
+              </a:rPr>
+              <a:t>Reaching an improvement is a migration</a:t>
+            </a:r>
+          </a:p>
+        </p:txBody>
+      </p:sp>
+      <p:sp>
+        <p:nvSpPr>
+          <p:cNvPr id="3" name="Rectangle 2"/>
+          <p:cNvSpPr/>
+          <p:nvPr/>
+        </p:nvSpPr>
+        <p:spPr>
+          <a:xfrm>
+            <a:off x="658368" y="1371600"/>
+            <a:ext cx="1463040" cy="50800"/>
+          </a:xfrm>
+          <a:prstGeom prst="rect">
+            <a:avLst/>
+          </a:prstGeom>
+          <a:solidFill>
+            <a:srgbClr val="205F61"/>
+          </a:solidFill>
+          <a:ln>
+            <a:noFill/>
+          </a:ln>
+          <a:effectLst/>
+        </p:spPr>
+        <p:style>
+          <a:lnRef idx="1">
+            <a:schemeClr val="accent1"/>
+          </a:lnRef>
+          <a:fillRef idx="3">
+            <a:schemeClr val="accent1"/>
+          </a:fillRef>
+          <a:effectRef idx="2">
+            <a:schemeClr val="accent1"/>
+          </a:effectRef>
+          <a:fontRef idx="minor">
+            <a:schemeClr val="lt1"/>
+          </a:fontRef>
+        </p:style>
+        <p:txBody>
+          <a:bodyPr rtlCol="0" anchor="ctr"/>
+          <a:lstStyle/>
+          <a:p>
+            <a:pPr algn="ctr"/>
+          </a:p>
+        </p:txBody>
+      </p:sp>
+      <p:sp>
+        <p:nvSpPr>
+          <p:cNvPr id="4" name="TextBox 3"/>
+          <p:cNvSpPr txBox="1"/>
+          <p:nvPr/>
+        </p:nvSpPr>
+        <p:spPr>
+          <a:xfrm>
+            <a:off x="658368" y="1691640"/>
+            <a:ext cx="10881360" cy="4480560"/>
+          </a:xfrm>
+          <a:prstGeom prst="rect">
+            <a:avLst/>
+          </a:prstGeom>
+          <a:noFill/>
+        </p:spPr>
+        <p:txBody>
+          <a:bodyPr wrap="square" anchor="ctr" lIns="0" rIns="0" tIns="0" bIns="0">
+            <a:spAutoFit/>
+          </a:bodyPr>
+          <a:lstStyle/>
+          <a:p>
+            <a:pPr marL="0" indent="0">
+              <a:lnSpc>
+                <a:spcPct val="105000"/>
+              </a:lnSpc>
+              <a:spcBef>
+                <a:spcPts val="0"/>
+              </a:spcBef>
+              <a:spcAft>
+                <a:spcPts val="1000"/>
+              </a:spcAft>
+            </a:pPr>
+            <a:r>
+              <a:rPr sz="2400" b="1" i="0">
+                <a:solidFill>
+                  <a:srgbClr val="EDAB0C"/>
+                </a:solidFill>
+                <a:latin typeface="Roboto"/>
+              </a:rPr>
+              <a:t>■  </a:t>
+            </a:r>
+            <a:r>
+              <a:rPr sz="2400" b="0" i="0">
+                <a:solidFill>
+                  <a:srgbClr val="2A2929"/>
+                </a:solidFill>
+                <a:latin typeface="Roboto"/>
+              </a:rPr>
+              <a:t>Any option you pick has to be reached from the running baseline: move incrementally, keep the system serving, evidence each step, be able to roll back.</a:t>
+            </a:r>
+          </a:p>
+          <a:p>
+            <a:pPr marL="0" indent="0">
+              <a:lnSpc>
+                <a:spcPct val="105000"/>
+              </a:lnSpc>
+              <a:spcBef>
+                <a:spcPts val="0"/>
+              </a:spcBef>
+              <a:spcAft>
+                <a:spcPts val="1000"/>
+              </a:spcAft>
+            </a:pPr>
+            <a:r>
+              <a:rPr sz="2400" b="1" i="0">
+                <a:solidFill>
+                  <a:srgbClr val="EDAB0C"/>
+                </a:solidFill>
+                <a:latin typeface="Roboto"/>
+              </a:rPr>
+              <a:t>■  </a:t>
+            </a:r>
+            <a:r>
+              <a:rPr sz="2400" b="0" i="0">
+                <a:solidFill>
+                  <a:srgbClr val="2A2929"/>
+                </a:solidFill>
+                <a:latin typeface="Roboto"/>
+              </a:rPr>
+              <a:t>The cost of the path is part of the option's cost — a benefit you can only reach through a risky cutover is worth less than it looks.</a:t>
+            </a:r>
+          </a:p>
+          <a:p>
+            <a:pPr marL="0" indent="0">
+              <a:lnSpc>
+                <a:spcPct val="105000"/>
+              </a:lnSpc>
+              <a:spcBef>
+                <a:spcPts val="0"/>
+              </a:spcBef>
+              <a:spcAft>
+                <a:spcPts val="1000"/>
+              </a:spcAft>
+            </a:pPr>
+            <a:r>
+              <a:rPr sz="2400" b="1" i="0">
+                <a:solidFill>
+                  <a:srgbClr val="EDAB0C"/>
+                </a:solidFill>
+                <a:latin typeface="Roboto"/>
+              </a:rPr>
+              <a:t>■  </a:t>
+            </a:r>
+            <a:r>
+              <a:rPr sz="2400" b="0" i="0">
+                <a:solidFill>
+                  <a:srgbClr val="2A2929"/>
+                </a:solidFill>
+                <a:latin typeface="Roboto"/>
+              </a:rPr>
+              <a:t>Weigh the journey with the destination when you assess each option.</a:t>
+            </a:r>
+          </a:p>
+        </p:txBody>
+      </p:sp>
+      <p:sp>
+        <p:nvSpPr>
+          <p:cNvPr id="5" name="Rectangle 4"/>
+          <p:cNvSpPr/>
+          <p:nvPr/>
+        </p:nvSpPr>
+        <p:spPr>
+          <a:xfrm>
+            <a:off x="0" y="6565392"/>
+            <a:ext cx="12191695" cy="38100"/>
+          </a:xfrm>
+          <a:prstGeom prst="rect">
+            <a:avLst/>
+          </a:prstGeom>
+          <a:solidFill>
+            <a:srgbClr val="205F61"/>
+          </a:solidFill>
+          <a:ln>
+            <a:noFill/>
+          </a:ln>
+          <a:effectLst/>
+        </p:spPr>
+        <p:style>
+          <a:lnRef idx="1">
+            <a:schemeClr val="accent1"/>
+          </a:lnRef>
+          <a:fillRef idx="3">
+            <a:schemeClr val="accent1"/>
+          </a:fillRef>
+          <a:effectRef idx="2">
+            <a:schemeClr val="accent1"/>
+          </a:effectRef>
+          <a:fontRef idx="minor">
+            <a:schemeClr val="lt1"/>
+          </a:fontRef>
+        </p:style>
+        <p:txBody>
+          <a:bodyPr rtlCol="0" anchor="ctr"/>
+          <a:lstStyle/>
+          <a:p>
+            <a:pPr algn="ctr"/>
+          </a:p>
+        </p:txBody>
+      </p:sp>
+      <p:sp>
+        <p:nvSpPr>
+          <p:cNvPr id="6" name="TextBox 5"/>
+          <p:cNvSpPr txBox="1"/>
+          <p:nvPr/>
+        </p:nvSpPr>
+        <p:spPr>
+          <a:xfrm>
+            <a:off x="502920" y="6400800"/>
+            <a:ext cx="5486400" cy="320040"/>
+          </a:xfrm>
+          <a:prstGeom prst="rect">
+            <a:avLst/>
+          </a:prstGeom>
+          <a:noFill/>
+        </p:spPr>
+        <p:txBody>
+          <a:bodyPr wrap="square" anchor="t" lIns="0" rIns="0" tIns="0" bIns="0">
+            <a:spAutoFit/>
+          </a:bodyPr>
+          <a:lstStyle/>
+          <a:p>
+            <a:r>
+              <a:rPr sz="1100" b="1" i="0">
+                <a:solidFill>
+                  <a:srgbClr val="2A2929"/>
+                </a:solidFill>
+                <a:latin typeface="Roboto"/>
+              </a:rPr>
+              <a:t>Kangan </a:t>
+            </a:r>
+            <a:r>
+              <a:rPr sz="1100" b="1" i="0">
+                <a:solidFill>
+                  <a:srgbClr val="D68E10"/>
+                </a:solidFill>
+                <a:latin typeface="Roboto"/>
+              </a:rPr>
+              <a:t>Institute</a:t>
+            </a:r>
+          </a:p>
+        </p:txBody>
+      </p:sp>
+      <p:sp>
+        <p:nvSpPr>
+          <p:cNvPr id="7" name="TextBox 6"/>
+          <p:cNvSpPr txBox="1"/>
+          <p:nvPr/>
+        </p:nvSpPr>
+        <p:spPr>
+          <a:xfrm>
+            <a:off x="10515600" y="6400800"/>
+            <a:ext cx="1188720" cy="320040"/>
+          </a:xfrm>
+          <a:prstGeom prst="rect">
+            <a:avLst/>
+          </a:prstGeom>
+          <a:noFill/>
+        </p:spPr>
+        <p:txBody>
+          <a:bodyPr wrap="square" anchor="t" lIns="0" rIns="0" tIns="0" bIns="0">
+            <a:spAutoFit/>
+          </a:bodyPr>
+          <a:lstStyle/>
+          <a:p>
+            <a:pPr algn="r"/>
+            <a:r>
+              <a:rPr sz="1100" b="0" i="0">
+                <a:solidFill>
+                  <a:srgbClr val="7A7A7A"/>
+                </a:solidFill>
+                <a:latin typeface="Roboto"/>
+              </a:rPr>
+              <a:t>12</a:t>
+            </a:r>
+          </a:p>
+        </p:txBody>
+      </p:sp>
+    </p:spTree>
+  </p:cSld>
+  <p:clrMapOvr>
+    <a:masterClrMapping/>
+  </p:clrMapOvr>
+</p:sld>
+</file>
+
+<file path=ppt/slides/slide17.xml><?xml version="1.0" encoding="utf-8"?>
+<p:sld xmlns:a="http://schemas.openxmlformats.org/drawingml/2006/main" xmlns:p="http://schemas.openxmlformats.org/presentationml/2006/main" xmlns:r="http://schemas.openxmlformats.org/officeDocument/2006/relationships">
+  <p:cSld>
+    <p:bg>
+      <p:bgPr>
+        <a:solidFill>
+          <a:srgbClr val="FFFFFF"/>
+        </a:solidFill>
+        <a:effectLst/>
+      </p:bgPr>
+    </p:bg>
+    <p:spTree>
+      <p:nvGrpSpPr>
+        <p:cNvPr id="1" name=""/>
+        <p:cNvGrpSpPr/>
+        <p:nvPr/>
+      </p:nvGrpSpPr>
+      <p:grpSpPr/>
+      <p:sp>
+        <p:nvSpPr>
+          <p:cNvPr id="2" name="Rectangle 1"/>
+          <p:cNvSpPr/>
+          <p:nvPr/>
+        </p:nvSpPr>
+        <p:spPr>
+          <a:xfrm>
+            <a:off x="0" y="0"/>
+            <a:ext cx="12191695" cy="1234440"/>
+          </a:xfrm>
+          <a:prstGeom prst="rect">
+            <a:avLst/>
+          </a:prstGeom>
+          <a:solidFill>
+            <a:srgbClr val="205F61"/>
+          </a:solidFill>
+          <a:ln>
+            <a:noFill/>
+          </a:ln>
+          <a:effectLst/>
+        </p:spPr>
+        <p:style>
+          <a:lnRef idx="1">
+            <a:schemeClr val="accent1"/>
+          </a:lnRef>
+          <a:fillRef idx="3">
+            <a:schemeClr val="accent1"/>
+          </a:fillRef>
+          <a:effectRef idx="2">
+            <a:schemeClr val="accent1"/>
+          </a:effectRef>
+          <a:fontRef idx="minor">
+            <a:schemeClr val="lt1"/>
+          </a:fontRef>
+        </p:style>
+        <p:txBody>
+          <a:bodyPr rtlCol="0" anchor="ctr"/>
+          <a:lstStyle/>
+          <a:p>
+            <a:pPr algn="ctr"/>
+          </a:p>
+        </p:txBody>
+      </p:sp>
+      <p:sp>
+        <p:nvSpPr>
+          <p:cNvPr id="3" name="Rounded Rectangle 2"/>
+          <p:cNvSpPr/>
+          <p:nvPr/>
+        </p:nvSpPr>
+        <p:spPr>
+          <a:xfrm>
+            <a:off x="640080" y="384048"/>
+            <a:ext cx="1691640" cy="457200"/>
+          </a:xfrm>
+          <a:prstGeom prst="roundRect">
+            <a:avLst/>
+          </a:prstGeom>
+          <a:solidFill>
+            <a:srgbClr val="2A2929"/>
+          </a:solidFill>
+          <a:ln>
+            <a:noFill/>
+          </a:ln>
+          <a:effectLst/>
+        </p:spPr>
+        <p:style>
+          <a:lnRef idx="1">
+            <a:schemeClr val="accent1"/>
+          </a:lnRef>
+          <a:fillRef idx="3">
+            <a:schemeClr val="accent1"/>
+          </a:fillRef>
+          <a:effectRef idx="2">
+            <a:schemeClr val="accent1"/>
+          </a:effectRef>
+          <a:fontRef idx="minor">
+            <a:schemeClr val="lt1"/>
+          </a:fontRef>
+        </p:style>
+        <p:txBody>
+          <a:bodyPr rtlCol="0" anchor="ctr"/>
+          <a:lstStyle/>
+          <a:p>
+            <a:pPr algn="ctr"/>
+            <a:r>
+              <a:rPr sz="1400" b="1" i="0">
+                <a:solidFill>
+                  <a:srgbClr val="FBB900"/>
+                </a:solidFill>
+                <a:latin typeface="Roboto"/>
+              </a:rPr>
+              <a:t>ACTIVITY</a:t>
+            </a:r>
+          </a:p>
+        </p:txBody>
+      </p:sp>
+      <p:sp>
+        <p:nvSpPr>
+          <p:cNvPr id="4" name="TextBox 3"/>
+          <p:cNvSpPr txBox="1"/>
+          <p:nvPr/>
+        </p:nvSpPr>
+        <p:spPr>
+          <a:xfrm>
+            <a:off x="2560320" y="310896"/>
+            <a:ext cx="8961120" cy="685800"/>
+          </a:xfrm>
+          <a:prstGeom prst="rect">
+            <a:avLst/>
+          </a:prstGeom>
+          <a:noFill/>
+        </p:spPr>
+        <p:txBody>
+          <a:bodyPr wrap="square" anchor="ctr" lIns="0" rIns="0" tIns="0" bIns="0">
+            <a:spAutoFit/>
+          </a:bodyPr>
+          <a:lstStyle/>
+          <a:p>
+            <a:r>
+              <a:rPr sz="2600" b="1" i="0">
+                <a:solidFill>
+                  <a:srgbClr val="FFFFFF"/>
+                </a:solidFill>
+                <a:latin typeface="Roboto"/>
+              </a:rPr>
+              <a:t>Options and fit</a:t>
+            </a:r>
+          </a:p>
+        </p:txBody>
+      </p:sp>
+      <p:sp>
+        <p:nvSpPr>
+          <p:cNvPr id="5" name="TextBox 4"/>
+          <p:cNvSpPr txBox="1"/>
+          <p:nvPr/>
+        </p:nvSpPr>
+        <p:spPr>
+          <a:xfrm>
+            <a:off x="658368" y="1554480"/>
+            <a:ext cx="10881360" cy="4297680"/>
+          </a:xfrm>
+          <a:prstGeom prst="rect">
+            <a:avLst/>
+          </a:prstGeom>
+          <a:noFill/>
+        </p:spPr>
+        <p:txBody>
+          <a:bodyPr wrap="square" anchor="t" lIns="0" rIns="0" tIns="0" bIns="0">
+            <a:spAutoFit/>
+          </a:bodyPr>
+          <a:lstStyle/>
+          <a:p>
+            <a:pPr marL="0" indent="0">
+              <a:lnSpc>
+                <a:spcPct val="105000"/>
+              </a:lnSpc>
+              <a:spcBef>
+                <a:spcPts val="0"/>
+              </a:spcBef>
+              <a:spcAft>
+                <a:spcPts val="1000"/>
+              </a:spcAft>
+            </a:pPr>
+            <a:r>
               <a:rPr sz="1700" b="1" i="0">
                 <a:solidFill>
                   <a:srgbClr val="EDAB0C"/>
@@ -7184,7 +7472,38 @@
                 </a:solidFill>
                 <a:latin typeface="Roboto"/>
               </a:rPr>
-              <a:t>Confirm the metrics each goal is measured by — you will design against them in the practice work that mirrors Topics 2–3.</a:t>
+              <a:t>Workbook — tasks 4 and 5.</a:t>
+            </a:r>
+          </a:p>
+          <a:p>
+            <a:pPr marL="0" indent="0">
+              <a:lnSpc>
+                <a:spcPct val="105000"/>
+              </a:lnSpc>
+              <a:spcBef>
+                <a:spcPts val="0"/>
+              </a:spcBef>
+              <a:spcAft>
+                <a:spcPts val="1000"/>
+              </a:spcAft>
+            </a:pPr>
+            <a:r>
+              <a:rPr sz="1700" b="1" i="0">
+                <a:solidFill>
+                  <a:srgbClr val="EDAB0C"/>
+                </a:solidFill>
+                <a:latin typeface="Roboto"/>
+              </a:rPr>
+              <a:t>■  </a:t>
+            </a:r>
+            <a:r>
+              <a:rPr sz="1700" b="0" i="0">
+                <a:solidFill>
+                  <a:srgbClr val="2A2929"/>
+                </a:solidFill>
+                <a:latin typeface="Roboto"/>
+              </a:rPr>
+              <a:t>Identify the design patterns and options open to the practice engagement, then assess their benefits against its business model and needs.</a:t>
             </a:r>
           </a:p>
         </p:txBody>
@@ -7264,7 +7583,7 @@
                 </a:solidFill>
                 <a:latin typeface="Roboto"/>
               </a:rPr>
-              <a:t>⏱  ~25 min</a:t>
+              <a:t>⏱  ~30 min</a:t>
             </a:r>
           </a:p>
         </p:txBody>
@@ -7386,7 +7705,7 @@
                 </a:solidFill>
                 <a:latin typeface="Roboto"/>
               </a:rPr>
-              <a:t>11</a:t>
+              <a:t>13</a:t>
             </a:r>
           </a:p>
         </p:txBody>
@@ -7399,7 +7718,7 @@
 </p:sld>
 </file>
 
-<file path=ppt/slides/slide16.xml><?xml version="1.0" encoding="utf-8"?>
+<file path=ppt/slides/slide18.xml><?xml version="1.0" encoding="utf-8"?>
 <p:sld xmlns:a="http://schemas.openxmlformats.org/drawingml/2006/main" xmlns:p="http://schemas.openxmlformats.org/presentationml/2006/main" xmlns:r="http://schemas.openxmlformats.org/officeDocument/2006/relationships">
   <p:cSld>
     <p:bg>
@@ -7462,7 +7781,7 @@
                 </a:solidFill>
                 <a:latin typeface="Roboto"/>
               </a:rPr>
-              <a:t>Topic 1 · Key takeaways</a:t>
+              <a:t>Section 3 · The options</a:t>
             </a:r>
           </a:p>
         </p:txBody>
@@ -7635,7 +7954,7 @@
                 </a:solidFill>
                 <a:latin typeface="Roboto"/>
               </a:rPr>
-              <a:t>Review the baseline against the four pillars before changing anything; name the business impact of each design decision.</a:t>
+              <a:t>Patterns with costs and benefits; fit over maximum.</a:t>
             </a:r>
           </a:p>
         </p:txBody>
@@ -7764,7 +8083,7 @@
                 </a:solidFill>
                 <a:latin typeface="Roboto"/>
               </a:rPr>
-              <a:t>Ledgerline is single-AZ with a vendor-certified single-instance DB that cannot go Multi-AZ — carry that constraint into Topic 2.</a:t>
+              <a:t>Assess against this business, not in the abstract.</a:t>
             </a:r>
           </a:p>
         </p:txBody>
@@ -7893,7 +8212,7 @@
                 </a:solidFill>
                 <a:latin typeface="Roboto"/>
               </a:rPr>
-              <a:t>Assess options against the business model, then confirm the decisions to carry forward.</a:t>
+              <a:t>A ruled-out option with a reason is analysis, not failure.</a:t>
             </a:r>
           </a:p>
         </p:txBody>
@@ -7906,54 +8225,8 @@
         </p:nvSpPr>
         <p:spPr>
           <a:xfrm>
-            <a:off x="640080" y="4818888"/>
-            <a:ext cx="10927080" cy="841248"/>
-          </a:xfrm>
-          <a:prstGeom prst="rect">
-            <a:avLst/>
-          </a:prstGeom>
-          <a:solidFill>
-            <a:srgbClr val="FFFFFF"/>
-          </a:solidFill>
-          <a:ln w="12700">
-            <a:solidFill>
-              <a:srgbClr val="CCCCCC"/>
-            </a:solidFill>
-          </a:ln>
-          <a:effectLst/>
-        </p:spPr>
-        <p:style>
-          <a:lnRef idx="1">
-            <a:schemeClr val="accent1"/>
-          </a:lnRef>
-          <a:fillRef idx="3">
-            <a:schemeClr val="accent1"/>
-          </a:fillRef>
-          <a:effectRef idx="2">
-            <a:schemeClr val="accent1"/>
-          </a:effectRef>
-          <a:fontRef idx="minor">
-            <a:schemeClr val="lt1"/>
-          </a:fontRef>
-        </p:style>
-        <p:txBody>
-          <a:bodyPr rtlCol="0" anchor="ctr"/>
-          <a:lstStyle/>
-          <a:p>
-            <a:pPr algn="ctr"/>
-          </a:p>
-        </p:txBody>
-      </p:sp>
-      <p:sp>
-        <p:nvSpPr>
-          <p:cNvPr id="14" name="Rectangle 13"/>
-          <p:cNvSpPr/>
-          <p:nvPr/>
-        </p:nvSpPr>
-        <p:spPr>
-          <a:xfrm>
-            <a:off x="640080" y="4818888"/>
-            <a:ext cx="109728" cy="841248"/>
+            <a:off x="0" y="6565392"/>
+            <a:ext cx="12191695" cy="38100"/>
           </a:xfrm>
           <a:prstGeom prst="rect">
             <a:avLst/>
@@ -7990,90 +8263,7 @@
       </p:sp>
       <p:sp>
         <p:nvSpPr>
-          <p:cNvPr id="15" name="TextBox 14"/>
-          <p:cNvSpPr txBox="1"/>
-          <p:nvPr/>
-        </p:nvSpPr>
-        <p:spPr>
-          <a:xfrm>
-            <a:off x="960120" y="4818888"/>
-            <a:ext cx="10424160" cy="841248"/>
-          </a:xfrm>
-          <a:prstGeom prst="rect">
-            <a:avLst/>
-          </a:prstGeom>
-          <a:noFill/>
-        </p:spPr>
-        <p:txBody>
-          <a:bodyPr wrap="square" anchor="ctr" lIns="0" rIns="0" tIns="0" bIns="0">
-            <a:spAutoFit/>
-          </a:bodyPr>
-          <a:lstStyle/>
-          <a:p>
-            <a:pPr>
-              <a:lnSpc>
-                <a:spcPct val="100000"/>
-              </a:lnSpc>
-            </a:pPr>
-            <a:r>
-              <a:rPr sz="1700" b="0" i="0">
-                <a:solidFill>
-                  <a:srgbClr val="2A2929"/>
-                </a:solidFill>
-                <a:latin typeface="Roboto"/>
-              </a:rPr>
-              <a:t>Set goals across security, reliability, performance and cost, and confirm the metrics — that is the yardstick for the whole improvement.</a:t>
-            </a:r>
-          </a:p>
-        </p:txBody>
-      </p:sp>
-      <p:sp>
-        <p:nvSpPr>
-          <p:cNvPr id="16" name="Rectangle 15"/>
-          <p:cNvSpPr/>
-          <p:nvPr/>
-        </p:nvSpPr>
-        <p:spPr>
-          <a:xfrm>
-            <a:off x="0" y="6565392"/>
-            <a:ext cx="12191695" cy="38100"/>
-          </a:xfrm>
-          <a:prstGeom prst="rect">
-            <a:avLst/>
-          </a:prstGeom>
-          <a:solidFill>
-            <a:srgbClr val="205F61"/>
-          </a:solidFill>
-          <a:ln>
-            <a:noFill/>
-          </a:ln>
-          <a:effectLst/>
-        </p:spPr>
-        <p:style>
-          <a:lnRef idx="1">
-            <a:schemeClr val="accent1"/>
-          </a:lnRef>
-          <a:fillRef idx="3">
-            <a:schemeClr val="accent1"/>
-          </a:fillRef>
-          <a:effectRef idx="2">
-            <a:schemeClr val="accent1"/>
-          </a:effectRef>
-          <a:fontRef idx="minor">
-            <a:schemeClr val="lt1"/>
-          </a:fontRef>
-        </p:style>
-        <p:txBody>
-          <a:bodyPr rtlCol="0" anchor="ctr"/>
-          <a:lstStyle/>
-          <a:p>
-            <a:pPr algn="ctr"/>
-          </a:p>
-        </p:txBody>
-      </p:sp>
-      <p:sp>
-        <p:nvSpPr>
-          <p:cNvPr id="17" name="TextBox 16"/>
+          <p:cNvPr id="14" name="TextBox 13"/>
           <p:cNvSpPr txBox="1"/>
           <p:nvPr/>
         </p:nvSpPr>
@@ -8116,7 +8306,7 @@
       </p:sp>
       <p:sp>
         <p:nvSpPr>
-          <p:cNvPr id="18" name="TextBox 17"/>
+          <p:cNvPr id="15" name="TextBox 14"/>
           <p:cNvSpPr txBox="1"/>
           <p:nvPr/>
         </p:nvSpPr>
@@ -8144,7 +8334,7 @@
                 </a:solidFill>
                 <a:latin typeface="Roboto"/>
               </a:rPr>
-              <a:t>12</a:t>
+              <a:t>14</a:t>
             </a:r>
           </a:p>
         </p:txBody>
@@ -8157,13 +8347,13 @@
 </p:sld>
 </file>
 
-<file path=ppt/slides/slide17.xml><?xml version="1.0" encoding="utf-8"?>
+<file path=ppt/slides/slide19.xml><?xml version="1.0" encoding="utf-8"?>
 <p:sld xmlns:a="http://schemas.openxmlformats.org/drawingml/2006/main" xmlns:p="http://schemas.openxmlformats.org/presentationml/2006/main" xmlns:r="http://schemas.openxmlformats.org/officeDocument/2006/relationships">
   <p:cSld>
     <p:bg>
       <p:bgPr>
         <a:solidFill>
-          <a:srgbClr val="2A2929"/>
+          <a:srgbClr val="FFFFFF"/>
         </a:solidFill>
         <a:effectLst/>
       </p:bgPr>
@@ -8184,13 +8374,13 @@
         <p:spPr>
           <a:xfrm>
             <a:off x="0" y="0"/>
-            <a:ext cx="411480" cy="6858000"/>
+            <a:ext cx="3931920" cy="6858000"/>
           </a:xfrm>
           <a:prstGeom prst="rect">
             <a:avLst/>
           </a:prstGeom>
           <a:solidFill>
-            <a:srgbClr val="EDAB0C"/>
+            <a:srgbClr val="004488"/>
           </a:solidFill>
           <a:ln>
             <a:noFill/>
@@ -8227,8 +8417,8 @@
         </p:nvSpPr>
         <p:spPr>
           <a:xfrm>
-            <a:off x="914400" y="1463040"/>
-            <a:ext cx="10515600" cy="4023360"/>
+            <a:off x="365760" y="2103120"/>
+            <a:ext cx="3291840" cy="2194560"/>
           </a:xfrm>
           <a:prstGeom prst="rect">
             <a:avLst/>
@@ -8242,51 +8432,201 @@
           <a:lstStyle/>
           <a:p>
             <a:r>
-              <a:rPr sz="4000" b="1" i="0">
+              <a:rPr sz="13000" b="1" i="0">
                 <a:solidFill>
                   <a:srgbClr val="FFFFFF"/>
                 </a:solidFill>
                 <a:latin typeface="Roboto"/>
               </a:rPr>
-              <a:t>Next: Topic 2 — designing the reliability improvements</a:t>
+              <a:t>04</a:t>
+            </a:r>
+          </a:p>
+        </p:txBody>
+      </p:sp>
+      <p:sp>
+        <p:nvSpPr>
+          <p:cNvPr id="4" name="TextBox 3"/>
+          <p:cNvSpPr txBox="1"/>
+          <p:nvPr/>
+        </p:nvSpPr>
+        <p:spPr>
+          <a:xfrm>
+            <a:off x="4480560" y="2468880"/>
+            <a:ext cx="7132320" cy="2194560"/>
+          </a:xfrm>
+          <a:prstGeom prst="rect">
+            <a:avLst/>
+          </a:prstGeom>
+          <a:noFill/>
+        </p:spPr>
+        <p:txBody>
+          <a:bodyPr wrap="square" anchor="t" lIns="0" rIns="0" tIns="0" bIns="0">
+            <a:spAutoFit/>
+          </a:bodyPr>
+          <a:lstStyle/>
+          <a:p>
+            <a:r>
+              <a:rPr sz="1600" b="1" i="0">
+                <a:solidFill>
+                  <a:srgbClr val="004488"/>
+                </a:solidFill>
+                <a:latin typeface="Roboto"/>
+              </a:rPr>
+              <a:t>SECTION</a:t>
             </a:r>
           </a:p>
           <a:p>
             <a:pPr>
-              <a:lnSpc>
-                <a:spcPct val="105000"/>
-              </a:lnSpc>
               <a:spcBef>
-                <a:spcPts val="1200"/>
+                <a:spcPts val="600"/>
               </a:spcBef>
             </a:pPr>
             <a:r>
-              <a:rPr sz="1900" b="0" i="0">
-                <a:solidFill>
-                  <a:srgbClr val="E8E8E8"/>
-                </a:solidFill>
-                <a:latin typeface="Roboto Light"/>
-              </a:rPr>
-              <a:t>You've reviewed the baseline, weighed the options and set the goals; next you design the reliability changes.</a:t>
+              <a:rPr sz="3800" b="1" i="0">
+                <a:solidFill>
+                  <a:srgbClr val="2A2929"/>
+                </a:solidFill>
+                <a:latin typeface="Roboto"/>
+              </a:rPr>
+              <a:t>Goals set, decisions confirmed</a:t>
             </a:r>
           </a:p>
           <a:p>
             <a:pPr>
-              <a:lnSpc>
-                <a:spcPct val="105000"/>
-              </a:lnSpc>
               <a:spcBef>
-                <a:spcPts val="1200"/>
+                <a:spcPts val="1000"/>
               </a:spcBef>
             </a:pPr>
             <a:r>
-              <a:rPr sz="1900" b="0" i="0">
-                <a:solidFill>
-                  <a:srgbClr val="E8E8E8"/>
+              <a:rPr sz="2000" b="0" i="1">
+                <a:solidFill>
+                  <a:srgbClr val="484848"/>
                 </a:solidFill>
                 <a:latin typeface="Roboto Light"/>
               </a:rPr>
-              <a:t>Bring the single-instance-DB constraint — it is the reliability cost-benefit centrepiece Topic 2 opens on.</a:t>
+              <a:t>the target the improvement is measured against</a:t>
+            </a:r>
+          </a:p>
+        </p:txBody>
+      </p:sp>
+      <p:sp>
+        <p:nvSpPr>
+          <p:cNvPr id="5" name="Rectangle 4"/>
+          <p:cNvSpPr/>
+          <p:nvPr/>
+        </p:nvSpPr>
+        <p:spPr>
+          <a:xfrm>
+            <a:off x="0" y="6565392"/>
+            <a:ext cx="12191695" cy="38100"/>
+          </a:xfrm>
+          <a:prstGeom prst="rect">
+            <a:avLst/>
+          </a:prstGeom>
+          <a:solidFill>
+            <a:srgbClr val="004488"/>
+          </a:solidFill>
+          <a:ln>
+            <a:noFill/>
+          </a:ln>
+          <a:effectLst/>
+        </p:spPr>
+        <p:style>
+          <a:lnRef idx="1">
+            <a:schemeClr val="accent1"/>
+          </a:lnRef>
+          <a:fillRef idx="3">
+            <a:schemeClr val="accent1"/>
+          </a:fillRef>
+          <a:effectRef idx="2">
+            <a:schemeClr val="accent1"/>
+          </a:effectRef>
+          <a:fontRef idx="minor">
+            <a:schemeClr val="lt1"/>
+          </a:fontRef>
+        </p:style>
+        <p:txBody>
+          <a:bodyPr rtlCol="0" anchor="ctr"/>
+          <a:lstStyle/>
+          <a:p>
+            <a:pPr algn="ctr"/>
+          </a:p>
+        </p:txBody>
+      </p:sp>
+      <p:sp>
+        <p:nvSpPr>
+          <p:cNvPr id="6" name="TextBox 5"/>
+          <p:cNvSpPr txBox="1"/>
+          <p:nvPr/>
+        </p:nvSpPr>
+        <p:spPr>
+          <a:xfrm>
+            <a:off x="502920" y="6400800"/>
+            <a:ext cx="5486400" cy="320040"/>
+          </a:xfrm>
+          <a:prstGeom prst="rect">
+            <a:avLst/>
+          </a:prstGeom>
+          <a:noFill/>
+        </p:spPr>
+        <p:txBody>
+          <a:bodyPr wrap="square" anchor="t" lIns="0" rIns="0" tIns="0" bIns="0">
+            <a:spAutoFit/>
+          </a:bodyPr>
+          <a:lstStyle/>
+          <a:p>
+            <a:r>
+              <a:rPr sz="1100" b="1" i="0">
+                <a:solidFill>
+                  <a:srgbClr val="2A2929"/>
+                </a:solidFill>
+                <a:latin typeface="Roboto"/>
+              </a:rPr>
+              <a:t>Kangan </a:t>
+            </a:r>
+            <a:r>
+              <a:rPr sz="1100" b="1" i="0">
+                <a:solidFill>
+                  <a:srgbClr val="D68E10"/>
+                </a:solidFill>
+                <a:latin typeface="Roboto"/>
+              </a:rPr>
+              <a:t>Institute</a:t>
+            </a:r>
+          </a:p>
+        </p:txBody>
+      </p:sp>
+      <p:sp>
+        <p:nvSpPr>
+          <p:cNvPr id="7" name="TextBox 6"/>
+          <p:cNvSpPr txBox="1"/>
+          <p:nvPr/>
+        </p:nvSpPr>
+        <p:spPr>
+          <a:xfrm>
+            <a:off x="10515600" y="6400800"/>
+            <a:ext cx="1188720" cy="320040"/>
+          </a:xfrm>
+          <a:prstGeom prst="rect">
+            <a:avLst/>
+          </a:prstGeom>
+          <a:noFill/>
+        </p:spPr>
+        <p:txBody>
+          <a:bodyPr wrap="square" anchor="t" lIns="0" rIns="0" tIns="0" bIns="0">
+            <a:spAutoFit/>
+          </a:bodyPr>
+          <a:lstStyle/>
+          <a:p>
+            <a:pPr algn="r"/>
+            <a:r>
+              <a:rPr sz="1100" b="0" i="0">
+                <a:solidFill>
+                  <a:srgbClr val="7A7A7A"/>
+                </a:solidFill>
+                <a:latin typeface="Roboto"/>
+              </a:rPr>
+              <a:t/>
             </a:r>
           </a:p>
         </p:txBody>
@@ -8475,7 +8815,7 @@
                 </a:solidFill>
                 <a:latin typeface="Roboto"/>
               </a:rPr>
-              <a:t>This Topic is the analysis half of the Solution Design — review the baseline, evaluate it, set the goals. The design of the fix is Topics 2–4.</a:t>
+              <a:t>Today runs the analysis half of the design: review the baseline, check compliance, weigh the options, set the goals.</a:t>
             </a:r>
           </a:p>
           <a:p>
@@ -8684,6 +9024,1905 @@
                 <a:latin typeface="Roboto"/>
               </a:rPr>
               <a:t>1</a:t>
+            </a:r>
+          </a:p>
+        </p:txBody>
+      </p:sp>
+    </p:spTree>
+  </p:cSld>
+  <p:clrMapOvr>
+    <a:masterClrMapping/>
+  </p:clrMapOvr>
+</p:sld>
+</file>
+
+<file path=ppt/slides/slide20.xml><?xml version="1.0" encoding="utf-8"?>
+<p:sld xmlns:a="http://schemas.openxmlformats.org/drawingml/2006/main" xmlns:p="http://schemas.openxmlformats.org/presentationml/2006/main" xmlns:r="http://schemas.openxmlformats.org/officeDocument/2006/relationships">
+  <p:cSld>
+    <p:bg>
+      <p:bgPr>
+        <a:solidFill>
+          <a:srgbClr val="FFFFFF"/>
+        </a:solidFill>
+        <a:effectLst/>
+      </p:bgPr>
+    </p:bg>
+    <p:spTree>
+      <p:nvGrpSpPr>
+        <p:cNvPr id="1" name=""/>
+        <p:cNvGrpSpPr/>
+        <p:nvPr/>
+      </p:nvGrpSpPr>
+      <p:grpSpPr/>
+      <p:sp>
+        <p:nvSpPr>
+          <p:cNvPr id="2" name="TextBox 1"/>
+          <p:cNvSpPr txBox="1"/>
+          <p:nvPr/>
+        </p:nvSpPr>
+        <p:spPr>
+          <a:xfrm>
+            <a:off x="640080" y="457200"/>
+            <a:ext cx="10881360" cy="960120"/>
+          </a:xfrm>
+          <a:prstGeom prst="rect">
+            <a:avLst/>
+          </a:prstGeom>
+          <a:noFill/>
+        </p:spPr>
+        <p:txBody>
+          <a:bodyPr wrap="square" anchor="t" lIns="0" rIns="0" tIns="0" bIns="0">
+            <a:spAutoFit/>
+          </a:bodyPr>
+          <a:lstStyle/>
+          <a:p>
+            <a:r>
+              <a:rPr sz="2800" b="1" i="0">
+                <a:solidFill>
+                  <a:srgbClr val="2A2929"/>
+                </a:solidFill>
+                <a:latin typeface="Roboto"/>
+              </a:rPr>
+              <a:t>Goals across the four concerns</a:t>
+            </a:r>
+          </a:p>
+        </p:txBody>
+      </p:sp>
+      <p:sp>
+        <p:nvSpPr>
+          <p:cNvPr id="3" name="Rectangle 2"/>
+          <p:cNvSpPr/>
+          <p:nvPr/>
+        </p:nvSpPr>
+        <p:spPr>
+          <a:xfrm>
+            <a:off x="658368" y="1371600"/>
+            <a:ext cx="1463040" cy="50800"/>
+          </a:xfrm>
+          <a:prstGeom prst="rect">
+            <a:avLst/>
+          </a:prstGeom>
+          <a:solidFill>
+            <a:srgbClr val="004488"/>
+          </a:solidFill>
+          <a:ln>
+            <a:noFill/>
+          </a:ln>
+          <a:effectLst/>
+        </p:spPr>
+        <p:style>
+          <a:lnRef idx="1">
+            <a:schemeClr val="accent1"/>
+          </a:lnRef>
+          <a:fillRef idx="3">
+            <a:schemeClr val="accent1"/>
+          </a:fillRef>
+          <a:effectRef idx="2">
+            <a:schemeClr val="accent1"/>
+          </a:effectRef>
+          <a:fontRef idx="minor">
+            <a:schemeClr val="lt1"/>
+          </a:fontRef>
+        </p:style>
+        <p:txBody>
+          <a:bodyPr rtlCol="0" anchor="ctr"/>
+          <a:lstStyle/>
+          <a:p>
+            <a:pPr algn="ctr"/>
+          </a:p>
+        </p:txBody>
+      </p:sp>
+      <p:sp>
+        <p:nvSpPr>
+          <p:cNvPr id="4" name="TextBox 3"/>
+          <p:cNvSpPr txBox="1"/>
+          <p:nvPr/>
+        </p:nvSpPr>
+        <p:spPr>
+          <a:xfrm>
+            <a:off x="658368" y="1691640"/>
+            <a:ext cx="10881360" cy="4480560"/>
+          </a:xfrm>
+          <a:prstGeom prst="rect">
+            <a:avLst/>
+          </a:prstGeom>
+          <a:noFill/>
+        </p:spPr>
+        <p:txBody>
+          <a:bodyPr wrap="square" anchor="ctr" lIns="0" rIns="0" tIns="0" bIns="0">
+            <a:spAutoFit/>
+          </a:bodyPr>
+          <a:lstStyle/>
+          <a:p>
+            <a:pPr marL="0" indent="0">
+              <a:lnSpc>
+                <a:spcPct val="105000"/>
+              </a:lnSpc>
+              <a:spcBef>
+                <a:spcPts val="0"/>
+              </a:spcBef>
+              <a:spcAft>
+                <a:spcPts val="1000"/>
+              </a:spcAft>
+            </a:pPr>
+            <a:r>
+              <a:rPr sz="2400" b="1" i="0">
+                <a:solidFill>
+                  <a:srgbClr val="EDAB0C"/>
+                </a:solidFill>
+                <a:latin typeface="Roboto"/>
+              </a:rPr>
+              <a:t>■  </a:t>
+            </a:r>
+            <a:r>
+              <a:rPr sz="2400" b="0" i="0">
+                <a:solidFill>
+                  <a:srgbClr val="2A2929"/>
+                </a:solidFill>
+                <a:latin typeface="Roboto"/>
+              </a:rPr>
+              <a:t>Set business goals across security, reliability, high performance and cost efficiency.</a:t>
+            </a:r>
+          </a:p>
+          <a:p>
+            <a:pPr marL="0" indent="0">
+              <a:lnSpc>
+                <a:spcPct val="105000"/>
+              </a:lnSpc>
+              <a:spcBef>
+                <a:spcPts val="0"/>
+              </a:spcBef>
+              <a:spcAft>
+                <a:spcPts val="1000"/>
+              </a:spcAft>
+            </a:pPr>
+            <a:r>
+              <a:rPr sz="2400" b="1" i="0">
+                <a:solidFill>
+                  <a:srgbClr val="EDAB0C"/>
+                </a:solidFill>
+                <a:latin typeface="Roboto"/>
+              </a:rPr>
+              <a:t>■  </a:t>
+            </a:r>
+            <a:r>
+              <a:rPr sz="2400" b="0" i="0">
+                <a:solidFill>
+                  <a:srgbClr val="2A2929"/>
+                </a:solidFill>
+                <a:latin typeface="Roboto"/>
+              </a:rPr>
+              <a:t>A goal is directional and business-owned — "survive a zone failure without data loss" — and it comes from the business requirements, not from the technology you like.</a:t>
+            </a:r>
+          </a:p>
+          <a:p>
+            <a:pPr marL="0" indent="0">
+              <a:lnSpc>
+                <a:spcPct val="105000"/>
+              </a:lnSpc>
+              <a:spcBef>
+                <a:spcPts val="0"/>
+              </a:spcBef>
+              <a:spcAft>
+                <a:spcPts val="1000"/>
+              </a:spcAft>
+            </a:pPr>
+            <a:r>
+              <a:rPr sz="2400" b="1" i="0">
+                <a:solidFill>
+                  <a:srgbClr val="EDAB0C"/>
+                </a:solidFill>
+                <a:latin typeface="Roboto"/>
+              </a:rPr>
+              <a:t>■  </a:t>
+            </a:r>
+            <a:r>
+              <a:rPr sz="2400" b="0" i="0">
+                <a:solidFill>
+                  <a:srgbClr val="2A2929"/>
+                </a:solidFill>
+                <a:latin typeface="Roboto"/>
+              </a:rPr>
+              <a:t>"Use Multi-AZ" is a solution masquerading as a goal; the goal is the outcome underneath it.</a:t>
+            </a:r>
+          </a:p>
+        </p:txBody>
+      </p:sp>
+      <p:sp>
+        <p:nvSpPr>
+          <p:cNvPr id="5" name="Rectangle 4"/>
+          <p:cNvSpPr/>
+          <p:nvPr/>
+        </p:nvSpPr>
+        <p:spPr>
+          <a:xfrm>
+            <a:off x="0" y="6565392"/>
+            <a:ext cx="12191695" cy="38100"/>
+          </a:xfrm>
+          <a:prstGeom prst="rect">
+            <a:avLst/>
+          </a:prstGeom>
+          <a:solidFill>
+            <a:srgbClr val="004488"/>
+          </a:solidFill>
+          <a:ln>
+            <a:noFill/>
+          </a:ln>
+          <a:effectLst/>
+        </p:spPr>
+        <p:style>
+          <a:lnRef idx="1">
+            <a:schemeClr val="accent1"/>
+          </a:lnRef>
+          <a:fillRef idx="3">
+            <a:schemeClr val="accent1"/>
+          </a:fillRef>
+          <a:effectRef idx="2">
+            <a:schemeClr val="accent1"/>
+          </a:effectRef>
+          <a:fontRef idx="minor">
+            <a:schemeClr val="lt1"/>
+          </a:fontRef>
+        </p:style>
+        <p:txBody>
+          <a:bodyPr rtlCol="0" anchor="ctr"/>
+          <a:lstStyle/>
+          <a:p>
+            <a:pPr algn="ctr"/>
+          </a:p>
+        </p:txBody>
+      </p:sp>
+      <p:sp>
+        <p:nvSpPr>
+          <p:cNvPr id="6" name="TextBox 5"/>
+          <p:cNvSpPr txBox="1"/>
+          <p:nvPr/>
+        </p:nvSpPr>
+        <p:spPr>
+          <a:xfrm>
+            <a:off x="502920" y="6400800"/>
+            <a:ext cx="5486400" cy="320040"/>
+          </a:xfrm>
+          <a:prstGeom prst="rect">
+            <a:avLst/>
+          </a:prstGeom>
+          <a:noFill/>
+        </p:spPr>
+        <p:txBody>
+          <a:bodyPr wrap="square" anchor="t" lIns="0" rIns="0" tIns="0" bIns="0">
+            <a:spAutoFit/>
+          </a:bodyPr>
+          <a:lstStyle/>
+          <a:p>
+            <a:r>
+              <a:rPr sz="1100" b="1" i="0">
+                <a:solidFill>
+                  <a:srgbClr val="2A2929"/>
+                </a:solidFill>
+                <a:latin typeface="Roboto"/>
+              </a:rPr>
+              <a:t>Kangan </a:t>
+            </a:r>
+            <a:r>
+              <a:rPr sz="1100" b="1" i="0">
+                <a:solidFill>
+                  <a:srgbClr val="D68E10"/>
+                </a:solidFill>
+                <a:latin typeface="Roboto"/>
+              </a:rPr>
+              <a:t>Institute</a:t>
+            </a:r>
+          </a:p>
+        </p:txBody>
+      </p:sp>
+      <p:sp>
+        <p:nvSpPr>
+          <p:cNvPr id="7" name="TextBox 6"/>
+          <p:cNvSpPr txBox="1"/>
+          <p:nvPr/>
+        </p:nvSpPr>
+        <p:spPr>
+          <a:xfrm>
+            <a:off x="10515600" y="6400800"/>
+            <a:ext cx="1188720" cy="320040"/>
+          </a:xfrm>
+          <a:prstGeom prst="rect">
+            <a:avLst/>
+          </a:prstGeom>
+          <a:noFill/>
+        </p:spPr>
+        <p:txBody>
+          <a:bodyPr wrap="square" anchor="t" lIns="0" rIns="0" tIns="0" bIns="0">
+            <a:spAutoFit/>
+          </a:bodyPr>
+          <a:lstStyle/>
+          <a:p>
+            <a:pPr algn="r"/>
+            <a:r>
+              <a:rPr sz="1100" b="0" i="0">
+                <a:solidFill>
+                  <a:srgbClr val="7A7A7A"/>
+                </a:solidFill>
+                <a:latin typeface="Roboto"/>
+              </a:rPr>
+              <a:t>15</a:t>
+            </a:r>
+          </a:p>
+        </p:txBody>
+      </p:sp>
+    </p:spTree>
+  </p:cSld>
+  <p:clrMapOvr>
+    <a:masterClrMapping/>
+  </p:clrMapOvr>
+</p:sld>
+</file>
+
+<file path=ppt/slides/slide21.xml><?xml version="1.0" encoding="utf-8"?>
+<p:sld xmlns:a="http://schemas.openxmlformats.org/drawingml/2006/main" xmlns:p="http://schemas.openxmlformats.org/presentationml/2006/main" xmlns:r="http://schemas.openxmlformats.org/officeDocument/2006/relationships">
+  <p:cSld>
+    <p:bg>
+      <p:bgPr>
+        <a:solidFill>
+          <a:srgbClr val="FFFFFF"/>
+        </a:solidFill>
+        <a:effectLst/>
+      </p:bgPr>
+    </p:bg>
+    <p:spTree>
+      <p:nvGrpSpPr>
+        <p:cNvPr id="1" name=""/>
+        <p:cNvGrpSpPr/>
+        <p:nvPr/>
+      </p:nvGrpSpPr>
+      <p:grpSpPr/>
+      <p:sp>
+        <p:nvSpPr>
+          <p:cNvPr id="2" name="TextBox 1"/>
+          <p:cNvSpPr txBox="1"/>
+          <p:nvPr/>
+        </p:nvSpPr>
+        <p:spPr>
+          <a:xfrm>
+            <a:off x="640080" y="457200"/>
+            <a:ext cx="10881360" cy="960120"/>
+          </a:xfrm>
+          <a:prstGeom prst="rect">
+            <a:avLst/>
+          </a:prstGeom>
+          <a:noFill/>
+        </p:spPr>
+        <p:txBody>
+          <a:bodyPr wrap="square" anchor="t" lIns="0" rIns="0" tIns="0" bIns="0">
+            <a:spAutoFit/>
+          </a:bodyPr>
+          <a:lstStyle/>
+          <a:p>
+            <a:r>
+              <a:rPr sz="2800" b="1" i="0">
+                <a:solidFill>
+                  <a:srgbClr val="2A2929"/>
+                </a:solidFill>
+                <a:latin typeface="Roboto"/>
+              </a:rPr>
+              <a:t>Confirm the design decisions</a:t>
+            </a:r>
+          </a:p>
+        </p:txBody>
+      </p:sp>
+      <p:sp>
+        <p:nvSpPr>
+          <p:cNvPr id="3" name="Rectangle 2"/>
+          <p:cNvSpPr/>
+          <p:nvPr/>
+        </p:nvSpPr>
+        <p:spPr>
+          <a:xfrm>
+            <a:off x="658368" y="1371600"/>
+            <a:ext cx="1463040" cy="50800"/>
+          </a:xfrm>
+          <a:prstGeom prst="rect">
+            <a:avLst/>
+          </a:prstGeom>
+          <a:solidFill>
+            <a:srgbClr val="004488"/>
+          </a:solidFill>
+          <a:ln>
+            <a:noFill/>
+          </a:ln>
+          <a:effectLst/>
+        </p:spPr>
+        <p:style>
+          <a:lnRef idx="1">
+            <a:schemeClr val="accent1"/>
+          </a:lnRef>
+          <a:fillRef idx="3">
+            <a:schemeClr val="accent1"/>
+          </a:fillRef>
+          <a:effectRef idx="2">
+            <a:schemeClr val="accent1"/>
+          </a:effectRef>
+          <a:fontRef idx="minor">
+            <a:schemeClr val="lt1"/>
+          </a:fontRef>
+        </p:style>
+        <p:txBody>
+          <a:bodyPr rtlCol="0" anchor="ctr"/>
+          <a:lstStyle/>
+          <a:p>
+            <a:pPr algn="ctr"/>
+          </a:p>
+        </p:txBody>
+      </p:sp>
+      <p:sp>
+        <p:nvSpPr>
+          <p:cNvPr id="4" name="TextBox 3"/>
+          <p:cNvSpPr txBox="1"/>
+          <p:nvPr/>
+        </p:nvSpPr>
+        <p:spPr>
+          <a:xfrm>
+            <a:off x="658368" y="1691640"/>
+            <a:ext cx="10881360" cy="4480560"/>
+          </a:xfrm>
+          <a:prstGeom prst="rect">
+            <a:avLst/>
+          </a:prstGeom>
+          <a:noFill/>
+        </p:spPr>
+        <p:txBody>
+          <a:bodyPr wrap="square" anchor="ctr" lIns="0" rIns="0" tIns="0" bIns="0">
+            <a:spAutoFit/>
+          </a:bodyPr>
+          <a:lstStyle/>
+          <a:p>
+            <a:pPr marL="0" indent="0">
+              <a:lnSpc>
+                <a:spcPct val="105000"/>
+              </a:lnSpc>
+              <a:spcBef>
+                <a:spcPts val="0"/>
+              </a:spcBef>
+              <a:spcAft>
+                <a:spcPts val="1000"/>
+              </a:spcAft>
+            </a:pPr>
+            <a:r>
+              <a:rPr sz="2400" b="1" i="0">
+                <a:solidFill>
+                  <a:srgbClr val="EDAB0C"/>
+                </a:solidFill>
+                <a:latin typeface="Roboto"/>
+              </a:rPr>
+              <a:t>■  </a:t>
+            </a:r>
+            <a:r>
+              <a:rPr sz="2400" b="0" i="0">
+                <a:solidFill>
+                  <a:srgbClr val="2A2929"/>
+                </a:solidFill>
+                <a:latin typeface="Roboto"/>
+              </a:rPr>
+              <a:t>Confirm the decisions to carry forward, each one traced to a business need and consistent with the goals just set.</a:t>
+            </a:r>
+          </a:p>
+          <a:p>
+            <a:pPr marL="0" indent="0">
+              <a:lnSpc>
+                <a:spcPct val="105000"/>
+              </a:lnSpc>
+              <a:spcBef>
+                <a:spcPts val="0"/>
+              </a:spcBef>
+              <a:spcAft>
+                <a:spcPts val="1000"/>
+              </a:spcAft>
+            </a:pPr>
+            <a:r>
+              <a:rPr sz="2400" b="1" i="0">
+                <a:solidFill>
+                  <a:srgbClr val="EDAB0C"/>
+                </a:solidFill>
+                <a:latin typeface="Roboto"/>
+              </a:rPr>
+              <a:t>■  </a:t>
+            </a:r>
+            <a:r>
+              <a:rPr sz="2400" b="0" i="0">
+                <a:solidFill>
+                  <a:srgbClr val="2A2929"/>
+                </a:solidFill>
+                <a:latin typeface="Roboto"/>
+              </a:rPr>
+              <a:t>This shortlist is what Topics 2 and 3 design in detail — nothing enters the design that wasn't confirmed here.</a:t>
+            </a:r>
+          </a:p>
+          <a:p>
+            <a:pPr marL="0" indent="0">
+              <a:lnSpc>
+                <a:spcPct val="105000"/>
+              </a:lnSpc>
+              <a:spcBef>
+                <a:spcPts val="0"/>
+              </a:spcBef>
+              <a:spcAft>
+                <a:spcPts val="1000"/>
+              </a:spcAft>
+            </a:pPr>
+            <a:r>
+              <a:rPr sz="2400" b="1" i="0">
+                <a:solidFill>
+                  <a:srgbClr val="EDAB0C"/>
+                </a:solidFill>
+                <a:latin typeface="Roboto"/>
+              </a:rPr>
+              <a:t>■  </a:t>
+            </a:r>
+            <a:r>
+              <a:rPr sz="2400" b="0" i="0">
+                <a:solidFill>
+                  <a:srgbClr val="2A2929"/>
+                </a:solidFill>
+                <a:latin typeface="Roboto"/>
+              </a:rPr>
+              <a:t>Record what you confirmed and what you deferred; both are decisions.</a:t>
+            </a:r>
+          </a:p>
+        </p:txBody>
+      </p:sp>
+      <p:sp>
+        <p:nvSpPr>
+          <p:cNvPr id="5" name="Rectangle 4"/>
+          <p:cNvSpPr/>
+          <p:nvPr/>
+        </p:nvSpPr>
+        <p:spPr>
+          <a:xfrm>
+            <a:off x="0" y="6565392"/>
+            <a:ext cx="12191695" cy="38100"/>
+          </a:xfrm>
+          <a:prstGeom prst="rect">
+            <a:avLst/>
+          </a:prstGeom>
+          <a:solidFill>
+            <a:srgbClr val="004488"/>
+          </a:solidFill>
+          <a:ln>
+            <a:noFill/>
+          </a:ln>
+          <a:effectLst/>
+        </p:spPr>
+        <p:style>
+          <a:lnRef idx="1">
+            <a:schemeClr val="accent1"/>
+          </a:lnRef>
+          <a:fillRef idx="3">
+            <a:schemeClr val="accent1"/>
+          </a:fillRef>
+          <a:effectRef idx="2">
+            <a:schemeClr val="accent1"/>
+          </a:effectRef>
+          <a:fontRef idx="minor">
+            <a:schemeClr val="lt1"/>
+          </a:fontRef>
+        </p:style>
+        <p:txBody>
+          <a:bodyPr rtlCol="0" anchor="ctr"/>
+          <a:lstStyle/>
+          <a:p>
+            <a:pPr algn="ctr"/>
+          </a:p>
+        </p:txBody>
+      </p:sp>
+      <p:sp>
+        <p:nvSpPr>
+          <p:cNvPr id="6" name="TextBox 5"/>
+          <p:cNvSpPr txBox="1"/>
+          <p:nvPr/>
+        </p:nvSpPr>
+        <p:spPr>
+          <a:xfrm>
+            <a:off x="502920" y="6400800"/>
+            <a:ext cx="5486400" cy="320040"/>
+          </a:xfrm>
+          <a:prstGeom prst="rect">
+            <a:avLst/>
+          </a:prstGeom>
+          <a:noFill/>
+        </p:spPr>
+        <p:txBody>
+          <a:bodyPr wrap="square" anchor="t" lIns="0" rIns="0" tIns="0" bIns="0">
+            <a:spAutoFit/>
+          </a:bodyPr>
+          <a:lstStyle/>
+          <a:p>
+            <a:r>
+              <a:rPr sz="1100" b="1" i="0">
+                <a:solidFill>
+                  <a:srgbClr val="2A2929"/>
+                </a:solidFill>
+                <a:latin typeface="Roboto"/>
+              </a:rPr>
+              <a:t>Kangan </a:t>
+            </a:r>
+            <a:r>
+              <a:rPr sz="1100" b="1" i="0">
+                <a:solidFill>
+                  <a:srgbClr val="D68E10"/>
+                </a:solidFill>
+                <a:latin typeface="Roboto"/>
+              </a:rPr>
+              <a:t>Institute</a:t>
+            </a:r>
+          </a:p>
+        </p:txBody>
+      </p:sp>
+      <p:sp>
+        <p:nvSpPr>
+          <p:cNvPr id="7" name="TextBox 6"/>
+          <p:cNvSpPr txBox="1"/>
+          <p:nvPr/>
+        </p:nvSpPr>
+        <p:spPr>
+          <a:xfrm>
+            <a:off x="10515600" y="6400800"/>
+            <a:ext cx="1188720" cy="320040"/>
+          </a:xfrm>
+          <a:prstGeom prst="rect">
+            <a:avLst/>
+          </a:prstGeom>
+          <a:noFill/>
+        </p:spPr>
+        <p:txBody>
+          <a:bodyPr wrap="square" anchor="t" lIns="0" rIns="0" tIns="0" bIns="0">
+            <a:spAutoFit/>
+          </a:bodyPr>
+          <a:lstStyle/>
+          <a:p>
+            <a:pPr algn="r"/>
+            <a:r>
+              <a:rPr sz="1100" b="0" i="0">
+                <a:solidFill>
+                  <a:srgbClr val="7A7A7A"/>
+                </a:solidFill>
+                <a:latin typeface="Roboto"/>
+              </a:rPr>
+              <a:t>16</a:t>
+            </a:r>
+          </a:p>
+        </p:txBody>
+      </p:sp>
+    </p:spTree>
+  </p:cSld>
+  <p:clrMapOvr>
+    <a:masterClrMapping/>
+  </p:clrMapOvr>
+</p:sld>
+</file>
+
+<file path=ppt/slides/slide22.xml><?xml version="1.0" encoding="utf-8"?>
+<p:sld xmlns:a="http://schemas.openxmlformats.org/drawingml/2006/main" xmlns:p="http://schemas.openxmlformats.org/presentationml/2006/main" xmlns:r="http://schemas.openxmlformats.org/officeDocument/2006/relationships">
+  <p:cSld>
+    <p:bg>
+      <p:bgPr>
+        <a:solidFill>
+          <a:srgbClr val="FFFFFF"/>
+        </a:solidFill>
+        <a:effectLst/>
+      </p:bgPr>
+    </p:bg>
+    <p:spTree>
+      <p:nvGrpSpPr>
+        <p:cNvPr id="1" name=""/>
+        <p:cNvGrpSpPr/>
+        <p:nvPr/>
+      </p:nvGrpSpPr>
+      <p:grpSpPr/>
+      <p:sp>
+        <p:nvSpPr>
+          <p:cNvPr id="2" name="Rectangle 1"/>
+          <p:cNvSpPr/>
+          <p:nvPr/>
+        </p:nvSpPr>
+        <p:spPr>
+          <a:xfrm>
+            <a:off x="0" y="0"/>
+            <a:ext cx="12191695" cy="1234440"/>
+          </a:xfrm>
+          <a:prstGeom prst="rect">
+            <a:avLst/>
+          </a:prstGeom>
+          <a:solidFill>
+            <a:srgbClr val="004488"/>
+          </a:solidFill>
+          <a:ln>
+            <a:noFill/>
+          </a:ln>
+          <a:effectLst/>
+        </p:spPr>
+        <p:style>
+          <a:lnRef idx="1">
+            <a:schemeClr val="accent1"/>
+          </a:lnRef>
+          <a:fillRef idx="3">
+            <a:schemeClr val="accent1"/>
+          </a:fillRef>
+          <a:effectRef idx="2">
+            <a:schemeClr val="accent1"/>
+          </a:effectRef>
+          <a:fontRef idx="minor">
+            <a:schemeClr val="lt1"/>
+          </a:fontRef>
+        </p:style>
+        <p:txBody>
+          <a:bodyPr rtlCol="0" anchor="ctr"/>
+          <a:lstStyle/>
+          <a:p>
+            <a:pPr algn="ctr"/>
+          </a:p>
+        </p:txBody>
+      </p:sp>
+      <p:sp>
+        <p:nvSpPr>
+          <p:cNvPr id="3" name="Rounded Rectangle 2"/>
+          <p:cNvSpPr/>
+          <p:nvPr/>
+        </p:nvSpPr>
+        <p:spPr>
+          <a:xfrm>
+            <a:off x="640080" y="384048"/>
+            <a:ext cx="1691640" cy="457200"/>
+          </a:xfrm>
+          <a:prstGeom prst="roundRect">
+            <a:avLst/>
+          </a:prstGeom>
+          <a:solidFill>
+            <a:srgbClr val="2A2929"/>
+          </a:solidFill>
+          <a:ln>
+            <a:noFill/>
+          </a:ln>
+          <a:effectLst/>
+        </p:spPr>
+        <p:style>
+          <a:lnRef idx="1">
+            <a:schemeClr val="accent1"/>
+          </a:lnRef>
+          <a:fillRef idx="3">
+            <a:schemeClr val="accent1"/>
+          </a:fillRef>
+          <a:effectRef idx="2">
+            <a:schemeClr val="accent1"/>
+          </a:effectRef>
+          <a:fontRef idx="minor">
+            <a:schemeClr val="lt1"/>
+          </a:fontRef>
+        </p:style>
+        <p:txBody>
+          <a:bodyPr rtlCol="0" anchor="ctr"/>
+          <a:lstStyle/>
+          <a:p>
+            <a:pPr algn="ctr"/>
+            <a:r>
+              <a:rPr sz="1400" b="1" i="0">
+                <a:solidFill>
+                  <a:srgbClr val="FBB900"/>
+                </a:solidFill>
+                <a:latin typeface="Roboto"/>
+              </a:rPr>
+              <a:t>ACTIVITY</a:t>
+            </a:r>
+          </a:p>
+        </p:txBody>
+      </p:sp>
+      <p:sp>
+        <p:nvSpPr>
+          <p:cNvPr id="4" name="TextBox 3"/>
+          <p:cNvSpPr txBox="1"/>
+          <p:nvPr/>
+        </p:nvSpPr>
+        <p:spPr>
+          <a:xfrm>
+            <a:off x="2560320" y="310896"/>
+            <a:ext cx="8961120" cy="685800"/>
+          </a:xfrm>
+          <a:prstGeom prst="rect">
+            <a:avLst/>
+          </a:prstGeom>
+          <a:noFill/>
+        </p:spPr>
+        <p:txBody>
+          <a:bodyPr wrap="square" anchor="ctr" lIns="0" rIns="0" tIns="0" bIns="0">
+            <a:spAutoFit/>
+          </a:bodyPr>
+          <a:lstStyle/>
+          <a:p>
+            <a:r>
+              <a:rPr sz="2600" b="1" i="0">
+                <a:solidFill>
+                  <a:srgbClr val="FFFFFF"/>
+                </a:solidFill>
+                <a:latin typeface="Roboto"/>
+              </a:rPr>
+              <a:t>Goals and decisions</a:t>
+            </a:r>
+          </a:p>
+        </p:txBody>
+      </p:sp>
+      <p:sp>
+        <p:nvSpPr>
+          <p:cNvPr id="5" name="TextBox 4"/>
+          <p:cNvSpPr txBox="1"/>
+          <p:nvPr/>
+        </p:nvSpPr>
+        <p:spPr>
+          <a:xfrm>
+            <a:off x="658368" y="1554480"/>
+            <a:ext cx="10881360" cy="4297680"/>
+          </a:xfrm>
+          <a:prstGeom prst="rect">
+            <a:avLst/>
+          </a:prstGeom>
+          <a:noFill/>
+        </p:spPr>
+        <p:txBody>
+          <a:bodyPr wrap="square" anchor="t" lIns="0" rIns="0" tIns="0" bIns="0">
+            <a:spAutoFit/>
+          </a:bodyPr>
+          <a:lstStyle/>
+          <a:p>
+            <a:pPr marL="0" indent="0">
+              <a:lnSpc>
+                <a:spcPct val="105000"/>
+              </a:lnSpc>
+              <a:spcBef>
+                <a:spcPts val="0"/>
+              </a:spcBef>
+              <a:spcAft>
+                <a:spcPts val="1000"/>
+              </a:spcAft>
+            </a:pPr>
+            <a:r>
+              <a:rPr sz="1700" b="1" i="0">
+                <a:solidFill>
+                  <a:srgbClr val="EDAB0C"/>
+                </a:solidFill>
+                <a:latin typeface="Roboto"/>
+              </a:rPr>
+              <a:t>■  </a:t>
+            </a:r>
+            <a:r>
+              <a:rPr sz="1700" b="0" i="0">
+                <a:solidFill>
+                  <a:srgbClr val="2A2929"/>
+                </a:solidFill>
+                <a:latin typeface="Roboto"/>
+              </a:rPr>
+              <a:t>Workbook — tasks 6 and 7.</a:t>
+            </a:r>
+          </a:p>
+          <a:p>
+            <a:pPr marL="0" indent="0">
+              <a:lnSpc>
+                <a:spcPct val="105000"/>
+              </a:lnSpc>
+              <a:spcBef>
+                <a:spcPts val="0"/>
+              </a:spcBef>
+              <a:spcAft>
+                <a:spcPts val="1000"/>
+              </a:spcAft>
+            </a:pPr>
+            <a:r>
+              <a:rPr sz="1700" b="1" i="0">
+                <a:solidFill>
+                  <a:srgbClr val="EDAB0C"/>
+                </a:solidFill>
+                <a:latin typeface="Roboto"/>
+              </a:rPr>
+              <a:t>■  </a:t>
+            </a:r>
+            <a:r>
+              <a:rPr sz="1700" b="0" i="0">
+                <a:solidFill>
+                  <a:srgbClr val="2A2929"/>
+                </a:solidFill>
+                <a:latin typeface="Roboto"/>
+              </a:rPr>
+              <a:t>Set the business goals across the four concerns, then confirm the design decisions you will carry into the design work.</a:t>
+            </a:r>
+          </a:p>
+        </p:txBody>
+      </p:sp>
+      <p:sp>
+        <p:nvSpPr>
+          <p:cNvPr id="6" name="Rounded Rectangle 5"/>
+          <p:cNvSpPr/>
+          <p:nvPr/>
+        </p:nvSpPr>
+        <p:spPr>
+          <a:xfrm>
+            <a:off x="640080" y="5897880"/>
+            <a:ext cx="4023360" cy="457200"/>
+          </a:xfrm>
+          <a:prstGeom prst="roundRect">
+            <a:avLst/>
+          </a:prstGeom>
+          <a:solidFill>
+            <a:srgbClr val="F9F9F9"/>
+          </a:solidFill>
+          <a:ln w="12700">
+            <a:solidFill>
+              <a:srgbClr val="CCCCCC"/>
+            </a:solidFill>
+          </a:ln>
+          <a:effectLst/>
+        </p:spPr>
+        <p:style>
+          <a:lnRef idx="1">
+            <a:schemeClr val="accent1"/>
+          </a:lnRef>
+          <a:fillRef idx="3">
+            <a:schemeClr val="accent1"/>
+          </a:fillRef>
+          <a:effectRef idx="2">
+            <a:schemeClr val="accent1"/>
+          </a:effectRef>
+          <a:fontRef idx="minor">
+            <a:schemeClr val="lt1"/>
+          </a:fontRef>
+        </p:style>
+        <p:txBody>
+          <a:bodyPr rtlCol="0" anchor="ctr"/>
+          <a:lstStyle/>
+          <a:p>
+            <a:pPr algn="ctr"/>
+          </a:p>
+        </p:txBody>
+      </p:sp>
+      <p:sp>
+        <p:nvSpPr>
+          <p:cNvPr id="7" name="TextBox 6"/>
+          <p:cNvSpPr txBox="1"/>
+          <p:nvPr/>
+        </p:nvSpPr>
+        <p:spPr>
+          <a:xfrm>
+            <a:off x="822960" y="5943600"/>
+            <a:ext cx="3657600" cy="365760"/>
+          </a:xfrm>
+          <a:prstGeom prst="rect">
+            <a:avLst/>
+          </a:prstGeom>
+          <a:noFill/>
+        </p:spPr>
+        <p:txBody>
+          <a:bodyPr wrap="square" anchor="ctr" lIns="0" rIns="0" tIns="0" bIns="0">
+            <a:spAutoFit/>
+          </a:bodyPr>
+          <a:lstStyle/>
+          <a:p>
+            <a:r>
+              <a:rPr sz="1500" b="1" i="0">
+                <a:solidFill>
+                  <a:srgbClr val="2A2929"/>
+                </a:solidFill>
+                <a:latin typeface="Roboto"/>
+              </a:rPr>
+              <a:t>⏱  ~25 min</a:t>
+            </a:r>
+          </a:p>
+        </p:txBody>
+      </p:sp>
+      <p:sp>
+        <p:nvSpPr>
+          <p:cNvPr id="8" name="Rectangle 7"/>
+          <p:cNvSpPr/>
+          <p:nvPr/>
+        </p:nvSpPr>
+        <p:spPr>
+          <a:xfrm>
+            <a:off x="0" y="6565392"/>
+            <a:ext cx="12191695" cy="38100"/>
+          </a:xfrm>
+          <a:prstGeom prst="rect">
+            <a:avLst/>
+          </a:prstGeom>
+          <a:solidFill>
+            <a:srgbClr val="004488"/>
+          </a:solidFill>
+          <a:ln>
+            <a:noFill/>
+          </a:ln>
+          <a:effectLst/>
+        </p:spPr>
+        <p:style>
+          <a:lnRef idx="1">
+            <a:schemeClr val="accent1"/>
+          </a:lnRef>
+          <a:fillRef idx="3">
+            <a:schemeClr val="accent1"/>
+          </a:fillRef>
+          <a:effectRef idx="2">
+            <a:schemeClr val="accent1"/>
+          </a:effectRef>
+          <a:fontRef idx="minor">
+            <a:schemeClr val="lt1"/>
+          </a:fontRef>
+        </p:style>
+        <p:txBody>
+          <a:bodyPr rtlCol="0" anchor="ctr"/>
+          <a:lstStyle/>
+          <a:p>
+            <a:pPr algn="ctr"/>
+          </a:p>
+        </p:txBody>
+      </p:sp>
+      <p:sp>
+        <p:nvSpPr>
+          <p:cNvPr id="9" name="TextBox 8"/>
+          <p:cNvSpPr txBox="1"/>
+          <p:nvPr/>
+        </p:nvSpPr>
+        <p:spPr>
+          <a:xfrm>
+            <a:off x="502920" y="6400800"/>
+            <a:ext cx="5486400" cy="320040"/>
+          </a:xfrm>
+          <a:prstGeom prst="rect">
+            <a:avLst/>
+          </a:prstGeom>
+          <a:noFill/>
+        </p:spPr>
+        <p:txBody>
+          <a:bodyPr wrap="square" anchor="t" lIns="0" rIns="0" tIns="0" bIns="0">
+            <a:spAutoFit/>
+          </a:bodyPr>
+          <a:lstStyle/>
+          <a:p>
+            <a:r>
+              <a:rPr sz="1100" b="1" i="0">
+                <a:solidFill>
+                  <a:srgbClr val="2A2929"/>
+                </a:solidFill>
+                <a:latin typeface="Roboto"/>
+              </a:rPr>
+              <a:t>Kangan </a:t>
+            </a:r>
+            <a:r>
+              <a:rPr sz="1100" b="1" i="0">
+                <a:solidFill>
+                  <a:srgbClr val="D68E10"/>
+                </a:solidFill>
+                <a:latin typeface="Roboto"/>
+              </a:rPr>
+              <a:t>Institute</a:t>
+            </a:r>
+          </a:p>
+        </p:txBody>
+      </p:sp>
+      <p:sp>
+        <p:nvSpPr>
+          <p:cNvPr id="10" name="TextBox 9"/>
+          <p:cNvSpPr txBox="1"/>
+          <p:nvPr/>
+        </p:nvSpPr>
+        <p:spPr>
+          <a:xfrm>
+            <a:off x="10515600" y="6400800"/>
+            <a:ext cx="1188720" cy="320040"/>
+          </a:xfrm>
+          <a:prstGeom prst="rect">
+            <a:avLst/>
+          </a:prstGeom>
+          <a:noFill/>
+        </p:spPr>
+        <p:txBody>
+          <a:bodyPr wrap="square" anchor="t" lIns="0" rIns="0" tIns="0" bIns="0">
+            <a:spAutoFit/>
+          </a:bodyPr>
+          <a:lstStyle/>
+          <a:p>
+            <a:pPr algn="r"/>
+            <a:r>
+              <a:rPr sz="1100" b="0" i="0">
+                <a:solidFill>
+                  <a:srgbClr val="7A7A7A"/>
+                </a:solidFill>
+                <a:latin typeface="Roboto"/>
+              </a:rPr>
+              <a:t>17</a:t>
+            </a:r>
+          </a:p>
+        </p:txBody>
+      </p:sp>
+    </p:spTree>
+  </p:cSld>
+  <p:clrMapOvr>
+    <a:masterClrMapping/>
+  </p:clrMapOvr>
+</p:sld>
+</file>
+
+<file path=ppt/slides/slide23.xml><?xml version="1.0" encoding="utf-8"?>
+<p:sld xmlns:a="http://schemas.openxmlformats.org/drawingml/2006/main" xmlns:p="http://schemas.openxmlformats.org/presentationml/2006/main" xmlns:r="http://schemas.openxmlformats.org/officeDocument/2006/relationships">
+  <p:cSld>
+    <p:bg>
+      <p:bgPr>
+        <a:solidFill>
+          <a:srgbClr val="F9F9F9"/>
+        </a:solidFill>
+        <a:effectLst/>
+      </p:bgPr>
+    </p:bg>
+    <p:spTree>
+      <p:nvGrpSpPr>
+        <p:cNvPr id="1" name=""/>
+        <p:cNvGrpSpPr/>
+        <p:nvPr/>
+      </p:nvGrpSpPr>
+      <p:grpSpPr/>
+      <p:sp>
+        <p:nvSpPr>
+          <p:cNvPr id="2" name="TextBox 1"/>
+          <p:cNvSpPr txBox="1"/>
+          <p:nvPr/>
+        </p:nvSpPr>
+        <p:spPr>
+          <a:xfrm>
+            <a:off x="640080" y="548640"/>
+            <a:ext cx="10881360" cy="1097280"/>
+          </a:xfrm>
+          <a:prstGeom prst="rect">
+            <a:avLst/>
+          </a:prstGeom>
+          <a:noFill/>
+        </p:spPr>
+        <p:txBody>
+          <a:bodyPr wrap="square" anchor="t" lIns="0" rIns="0" tIns="0" bIns="0">
+            <a:spAutoFit/>
+          </a:bodyPr>
+          <a:lstStyle/>
+          <a:p>
+            <a:r>
+              <a:rPr sz="3200" b="1" i="0">
+                <a:solidFill>
+                  <a:srgbClr val="2A2929"/>
+                </a:solidFill>
+                <a:latin typeface="Roboto"/>
+              </a:rPr>
+              <a:t>Key takeaways</a:t>
+            </a:r>
+          </a:p>
+          <a:p>
+            <a:pPr>
+              <a:spcBef>
+                <a:spcPts val="200"/>
+              </a:spcBef>
+            </a:pPr>
+            <a:r>
+              <a:rPr sz="1800" b="1" i="0">
+                <a:solidFill>
+                  <a:srgbClr val="004488"/>
+                </a:solidFill>
+                <a:latin typeface="Roboto"/>
+              </a:rPr>
+              <a:t>Topic 1 · Key takeaways</a:t>
+            </a:r>
+          </a:p>
+        </p:txBody>
+      </p:sp>
+      <p:sp>
+        <p:nvSpPr>
+          <p:cNvPr id="3" name="Rectangle 2"/>
+          <p:cNvSpPr/>
+          <p:nvPr/>
+        </p:nvSpPr>
+        <p:spPr>
+          <a:xfrm>
+            <a:off x="658368" y="1600200"/>
+            <a:ext cx="1463040" cy="50800"/>
+          </a:xfrm>
+          <a:prstGeom prst="rect">
+            <a:avLst/>
+          </a:prstGeom>
+          <a:solidFill>
+            <a:srgbClr val="004488"/>
+          </a:solidFill>
+          <a:ln>
+            <a:noFill/>
+          </a:ln>
+          <a:effectLst/>
+        </p:spPr>
+        <p:style>
+          <a:lnRef idx="1">
+            <a:schemeClr val="accent1"/>
+          </a:lnRef>
+          <a:fillRef idx="3">
+            <a:schemeClr val="accent1"/>
+          </a:fillRef>
+          <a:effectRef idx="2">
+            <a:schemeClr val="accent1"/>
+          </a:effectRef>
+          <a:fontRef idx="minor">
+            <a:schemeClr val="lt1"/>
+          </a:fontRef>
+        </p:style>
+        <p:txBody>
+          <a:bodyPr rtlCol="0" anchor="ctr"/>
+          <a:lstStyle/>
+          <a:p>
+            <a:pPr algn="ctr"/>
+          </a:p>
+        </p:txBody>
+      </p:sp>
+      <p:sp>
+        <p:nvSpPr>
+          <p:cNvPr id="4" name="Rectangle 3"/>
+          <p:cNvSpPr/>
+          <p:nvPr/>
+        </p:nvSpPr>
+        <p:spPr>
+          <a:xfrm>
+            <a:off x="640080" y="1965960"/>
+            <a:ext cx="10927080" cy="841248"/>
+          </a:xfrm>
+          <a:prstGeom prst="rect">
+            <a:avLst/>
+          </a:prstGeom>
+          <a:solidFill>
+            <a:srgbClr val="FFFFFF"/>
+          </a:solidFill>
+          <a:ln w="12700">
+            <a:solidFill>
+              <a:srgbClr val="CCCCCC"/>
+            </a:solidFill>
+          </a:ln>
+          <a:effectLst/>
+        </p:spPr>
+        <p:style>
+          <a:lnRef idx="1">
+            <a:schemeClr val="accent1"/>
+          </a:lnRef>
+          <a:fillRef idx="3">
+            <a:schemeClr val="accent1"/>
+          </a:fillRef>
+          <a:effectRef idx="2">
+            <a:schemeClr val="accent1"/>
+          </a:effectRef>
+          <a:fontRef idx="minor">
+            <a:schemeClr val="lt1"/>
+          </a:fontRef>
+        </p:style>
+        <p:txBody>
+          <a:bodyPr rtlCol="0" anchor="ctr"/>
+          <a:lstStyle/>
+          <a:p>
+            <a:pPr algn="ctr"/>
+          </a:p>
+        </p:txBody>
+      </p:sp>
+      <p:sp>
+        <p:nvSpPr>
+          <p:cNvPr id="5" name="Rectangle 4"/>
+          <p:cNvSpPr/>
+          <p:nvPr/>
+        </p:nvSpPr>
+        <p:spPr>
+          <a:xfrm>
+            <a:off x="640080" y="1965960"/>
+            <a:ext cx="109728" cy="841248"/>
+          </a:xfrm>
+          <a:prstGeom prst="rect">
+            <a:avLst/>
+          </a:prstGeom>
+          <a:solidFill>
+            <a:srgbClr val="004488"/>
+          </a:solidFill>
+          <a:ln>
+            <a:noFill/>
+          </a:ln>
+          <a:effectLst/>
+        </p:spPr>
+        <p:style>
+          <a:lnRef idx="1">
+            <a:schemeClr val="accent1"/>
+          </a:lnRef>
+          <a:fillRef idx="3">
+            <a:schemeClr val="accent1"/>
+          </a:fillRef>
+          <a:effectRef idx="2">
+            <a:schemeClr val="accent1"/>
+          </a:effectRef>
+          <a:fontRef idx="minor">
+            <a:schemeClr val="lt1"/>
+          </a:fontRef>
+        </p:style>
+        <p:txBody>
+          <a:bodyPr rtlCol="0" anchor="ctr"/>
+          <a:lstStyle/>
+          <a:p>
+            <a:pPr algn="ctr"/>
+          </a:p>
+        </p:txBody>
+      </p:sp>
+      <p:sp>
+        <p:nvSpPr>
+          <p:cNvPr id="6" name="TextBox 5"/>
+          <p:cNvSpPr txBox="1"/>
+          <p:nvPr/>
+        </p:nvSpPr>
+        <p:spPr>
+          <a:xfrm>
+            <a:off x="960120" y="1965960"/>
+            <a:ext cx="10424160" cy="841248"/>
+          </a:xfrm>
+          <a:prstGeom prst="rect">
+            <a:avLst/>
+          </a:prstGeom>
+          <a:noFill/>
+        </p:spPr>
+        <p:txBody>
+          <a:bodyPr wrap="square" anchor="ctr" lIns="0" rIns="0" tIns="0" bIns="0">
+            <a:spAutoFit/>
+          </a:bodyPr>
+          <a:lstStyle/>
+          <a:p>
+            <a:pPr>
+              <a:lnSpc>
+                <a:spcPct val="100000"/>
+              </a:lnSpc>
+            </a:pPr>
+            <a:r>
+              <a:rPr sz="1700" b="0" i="0">
+                <a:solidFill>
+                  <a:srgbClr val="2A2929"/>
+                </a:solidFill>
+                <a:latin typeface="Roboto"/>
+              </a:rPr>
+              <a:t>Review against the pillars; state impact in business language.</a:t>
+            </a:r>
+          </a:p>
+        </p:txBody>
+      </p:sp>
+      <p:sp>
+        <p:nvSpPr>
+          <p:cNvPr id="7" name="Rectangle 6"/>
+          <p:cNvSpPr/>
+          <p:nvPr/>
+        </p:nvSpPr>
+        <p:spPr>
+          <a:xfrm>
+            <a:off x="640080" y="2916936"/>
+            <a:ext cx="10927080" cy="841248"/>
+          </a:xfrm>
+          <a:prstGeom prst="rect">
+            <a:avLst/>
+          </a:prstGeom>
+          <a:solidFill>
+            <a:srgbClr val="FFFFFF"/>
+          </a:solidFill>
+          <a:ln w="12700">
+            <a:solidFill>
+              <a:srgbClr val="CCCCCC"/>
+            </a:solidFill>
+          </a:ln>
+          <a:effectLst/>
+        </p:spPr>
+        <p:style>
+          <a:lnRef idx="1">
+            <a:schemeClr val="accent1"/>
+          </a:lnRef>
+          <a:fillRef idx="3">
+            <a:schemeClr val="accent1"/>
+          </a:fillRef>
+          <a:effectRef idx="2">
+            <a:schemeClr val="accent1"/>
+          </a:effectRef>
+          <a:fontRef idx="minor">
+            <a:schemeClr val="lt1"/>
+          </a:fontRef>
+        </p:style>
+        <p:txBody>
+          <a:bodyPr rtlCol="0" anchor="ctr"/>
+          <a:lstStyle/>
+          <a:p>
+            <a:pPr algn="ctr"/>
+          </a:p>
+        </p:txBody>
+      </p:sp>
+      <p:sp>
+        <p:nvSpPr>
+          <p:cNvPr id="8" name="Rectangle 7"/>
+          <p:cNvSpPr/>
+          <p:nvPr/>
+        </p:nvSpPr>
+        <p:spPr>
+          <a:xfrm>
+            <a:off x="640080" y="2916936"/>
+            <a:ext cx="109728" cy="841248"/>
+          </a:xfrm>
+          <a:prstGeom prst="rect">
+            <a:avLst/>
+          </a:prstGeom>
+          <a:solidFill>
+            <a:srgbClr val="004488"/>
+          </a:solidFill>
+          <a:ln>
+            <a:noFill/>
+          </a:ln>
+          <a:effectLst/>
+        </p:spPr>
+        <p:style>
+          <a:lnRef idx="1">
+            <a:schemeClr val="accent1"/>
+          </a:lnRef>
+          <a:fillRef idx="3">
+            <a:schemeClr val="accent1"/>
+          </a:fillRef>
+          <a:effectRef idx="2">
+            <a:schemeClr val="accent1"/>
+          </a:effectRef>
+          <a:fontRef idx="minor">
+            <a:schemeClr val="lt1"/>
+          </a:fontRef>
+        </p:style>
+        <p:txBody>
+          <a:bodyPr rtlCol="0" anchor="ctr"/>
+          <a:lstStyle/>
+          <a:p>
+            <a:pPr algn="ctr"/>
+          </a:p>
+        </p:txBody>
+      </p:sp>
+      <p:sp>
+        <p:nvSpPr>
+          <p:cNvPr id="9" name="TextBox 8"/>
+          <p:cNvSpPr txBox="1"/>
+          <p:nvPr/>
+        </p:nvSpPr>
+        <p:spPr>
+          <a:xfrm>
+            <a:off x="960120" y="2916936"/>
+            <a:ext cx="10424160" cy="841248"/>
+          </a:xfrm>
+          <a:prstGeom prst="rect">
+            <a:avLst/>
+          </a:prstGeom>
+          <a:noFill/>
+        </p:spPr>
+        <p:txBody>
+          <a:bodyPr wrap="square" anchor="ctr" lIns="0" rIns="0" tIns="0" bIns="0">
+            <a:spAutoFit/>
+          </a:bodyPr>
+          <a:lstStyle/>
+          <a:p>
+            <a:pPr>
+              <a:lnSpc>
+                <a:spcPct val="100000"/>
+              </a:lnSpc>
+            </a:pPr>
+            <a:r>
+              <a:rPr sz="1700" b="0" i="0">
+                <a:solidFill>
+                  <a:srgbClr val="2A2929"/>
+                </a:solidFill>
+                <a:latin typeface="Roboto"/>
+              </a:rPr>
+              <a:t>Read the obligations precisely; assess with evidence.</a:t>
+            </a:r>
+          </a:p>
+        </p:txBody>
+      </p:sp>
+      <p:sp>
+        <p:nvSpPr>
+          <p:cNvPr id="10" name="Rectangle 9"/>
+          <p:cNvSpPr/>
+          <p:nvPr/>
+        </p:nvSpPr>
+        <p:spPr>
+          <a:xfrm>
+            <a:off x="640080" y="3867912"/>
+            <a:ext cx="10927080" cy="841248"/>
+          </a:xfrm>
+          <a:prstGeom prst="rect">
+            <a:avLst/>
+          </a:prstGeom>
+          <a:solidFill>
+            <a:srgbClr val="FFFFFF"/>
+          </a:solidFill>
+          <a:ln w="12700">
+            <a:solidFill>
+              <a:srgbClr val="CCCCCC"/>
+            </a:solidFill>
+          </a:ln>
+          <a:effectLst/>
+        </p:spPr>
+        <p:style>
+          <a:lnRef idx="1">
+            <a:schemeClr val="accent1"/>
+          </a:lnRef>
+          <a:fillRef idx="3">
+            <a:schemeClr val="accent1"/>
+          </a:fillRef>
+          <a:effectRef idx="2">
+            <a:schemeClr val="accent1"/>
+          </a:effectRef>
+          <a:fontRef idx="minor">
+            <a:schemeClr val="lt1"/>
+          </a:fontRef>
+        </p:style>
+        <p:txBody>
+          <a:bodyPr rtlCol="0" anchor="ctr"/>
+          <a:lstStyle/>
+          <a:p>
+            <a:pPr algn="ctr"/>
+          </a:p>
+        </p:txBody>
+      </p:sp>
+      <p:sp>
+        <p:nvSpPr>
+          <p:cNvPr id="11" name="Rectangle 10"/>
+          <p:cNvSpPr/>
+          <p:nvPr/>
+        </p:nvSpPr>
+        <p:spPr>
+          <a:xfrm>
+            <a:off x="640080" y="3867912"/>
+            <a:ext cx="109728" cy="841248"/>
+          </a:xfrm>
+          <a:prstGeom prst="rect">
+            <a:avLst/>
+          </a:prstGeom>
+          <a:solidFill>
+            <a:srgbClr val="004488"/>
+          </a:solidFill>
+          <a:ln>
+            <a:noFill/>
+          </a:ln>
+          <a:effectLst/>
+        </p:spPr>
+        <p:style>
+          <a:lnRef idx="1">
+            <a:schemeClr val="accent1"/>
+          </a:lnRef>
+          <a:fillRef idx="3">
+            <a:schemeClr val="accent1"/>
+          </a:fillRef>
+          <a:effectRef idx="2">
+            <a:schemeClr val="accent1"/>
+          </a:effectRef>
+          <a:fontRef idx="minor">
+            <a:schemeClr val="lt1"/>
+          </a:fontRef>
+        </p:style>
+        <p:txBody>
+          <a:bodyPr rtlCol="0" anchor="ctr"/>
+          <a:lstStyle/>
+          <a:p>
+            <a:pPr algn="ctr"/>
+          </a:p>
+        </p:txBody>
+      </p:sp>
+      <p:sp>
+        <p:nvSpPr>
+          <p:cNvPr id="12" name="TextBox 11"/>
+          <p:cNvSpPr txBox="1"/>
+          <p:nvPr/>
+        </p:nvSpPr>
+        <p:spPr>
+          <a:xfrm>
+            <a:off x="960120" y="3867912"/>
+            <a:ext cx="10424160" cy="841248"/>
+          </a:xfrm>
+          <a:prstGeom prst="rect">
+            <a:avLst/>
+          </a:prstGeom>
+          <a:noFill/>
+        </p:spPr>
+        <p:txBody>
+          <a:bodyPr wrap="square" anchor="ctr" lIns="0" rIns="0" tIns="0" bIns="0">
+            <a:spAutoFit/>
+          </a:bodyPr>
+          <a:lstStyle/>
+          <a:p>
+            <a:pPr>
+              <a:lnSpc>
+                <a:spcPct val="100000"/>
+              </a:lnSpc>
+            </a:pPr>
+            <a:r>
+              <a:rPr sz="1700" b="0" i="0">
+                <a:solidFill>
+                  <a:srgbClr val="2A2929"/>
+                </a:solidFill>
+                <a:latin typeface="Roboto"/>
+              </a:rPr>
+              <a:t>Options judged for fit; goals owned by the business; decisions confirmed against them.</a:t>
+            </a:r>
+          </a:p>
+        </p:txBody>
+      </p:sp>
+      <p:sp>
+        <p:nvSpPr>
+          <p:cNvPr id="13" name="Rectangle 12"/>
+          <p:cNvSpPr/>
+          <p:nvPr/>
+        </p:nvSpPr>
+        <p:spPr>
+          <a:xfrm>
+            <a:off x="0" y="6565392"/>
+            <a:ext cx="12191695" cy="38100"/>
+          </a:xfrm>
+          <a:prstGeom prst="rect">
+            <a:avLst/>
+          </a:prstGeom>
+          <a:solidFill>
+            <a:srgbClr val="004488"/>
+          </a:solidFill>
+          <a:ln>
+            <a:noFill/>
+          </a:ln>
+          <a:effectLst/>
+        </p:spPr>
+        <p:style>
+          <a:lnRef idx="1">
+            <a:schemeClr val="accent1"/>
+          </a:lnRef>
+          <a:fillRef idx="3">
+            <a:schemeClr val="accent1"/>
+          </a:fillRef>
+          <a:effectRef idx="2">
+            <a:schemeClr val="accent1"/>
+          </a:effectRef>
+          <a:fontRef idx="minor">
+            <a:schemeClr val="lt1"/>
+          </a:fontRef>
+        </p:style>
+        <p:txBody>
+          <a:bodyPr rtlCol="0" anchor="ctr"/>
+          <a:lstStyle/>
+          <a:p>
+            <a:pPr algn="ctr"/>
+          </a:p>
+        </p:txBody>
+      </p:sp>
+      <p:sp>
+        <p:nvSpPr>
+          <p:cNvPr id="14" name="TextBox 13"/>
+          <p:cNvSpPr txBox="1"/>
+          <p:nvPr/>
+        </p:nvSpPr>
+        <p:spPr>
+          <a:xfrm>
+            <a:off x="502920" y="6400800"/>
+            <a:ext cx="5486400" cy="320040"/>
+          </a:xfrm>
+          <a:prstGeom prst="rect">
+            <a:avLst/>
+          </a:prstGeom>
+          <a:noFill/>
+        </p:spPr>
+        <p:txBody>
+          <a:bodyPr wrap="square" anchor="t" lIns="0" rIns="0" tIns="0" bIns="0">
+            <a:spAutoFit/>
+          </a:bodyPr>
+          <a:lstStyle/>
+          <a:p>
+            <a:r>
+              <a:rPr sz="1100" b="1" i="0">
+                <a:solidFill>
+                  <a:srgbClr val="2A2929"/>
+                </a:solidFill>
+                <a:latin typeface="Roboto"/>
+              </a:rPr>
+              <a:t>Kangan </a:t>
+            </a:r>
+            <a:r>
+              <a:rPr sz="1100" b="1" i="0">
+                <a:solidFill>
+                  <a:srgbClr val="D68E10"/>
+                </a:solidFill>
+                <a:latin typeface="Roboto"/>
+              </a:rPr>
+              <a:t>Institute</a:t>
+            </a:r>
+          </a:p>
+        </p:txBody>
+      </p:sp>
+      <p:sp>
+        <p:nvSpPr>
+          <p:cNvPr id="15" name="TextBox 14"/>
+          <p:cNvSpPr txBox="1"/>
+          <p:nvPr/>
+        </p:nvSpPr>
+        <p:spPr>
+          <a:xfrm>
+            <a:off x="10515600" y="6400800"/>
+            <a:ext cx="1188720" cy="320040"/>
+          </a:xfrm>
+          <a:prstGeom prst="rect">
+            <a:avLst/>
+          </a:prstGeom>
+          <a:noFill/>
+        </p:spPr>
+        <p:txBody>
+          <a:bodyPr wrap="square" anchor="t" lIns="0" rIns="0" tIns="0" bIns="0">
+            <a:spAutoFit/>
+          </a:bodyPr>
+          <a:lstStyle/>
+          <a:p>
+            <a:pPr algn="r"/>
+            <a:r>
+              <a:rPr sz="1100" b="0" i="0">
+                <a:solidFill>
+                  <a:srgbClr val="7A7A7A"/>
+                </a:solidFill>
+                <a:latin typeface="Roboto"/>
+              </a:rPr>
+              <a:t>18</a:t>
+            </a:r>
+          </a:p>
+        </p:txBody>
+      </p:sp>
+    </p:spTree>
+  </p:cSld>
+  <p:clrMapOvr>
+    <a:masterClrMapping/>
+  </p:clrMapOvr>
+</p:sld>
+</file>
+
+<file path=ppt/slides/slide24.xml><?xml version="1.0" encoding="utf-8"?>
+<p:sld xmlns:a="http://schemas.openxmlformats.org/drawingml/2006/main" xmlns:p="http://schemas.openxmlformats.org/presentationml/2006/main" xmlns:r="http://schemas.openxmlformats.org/officeDocument/2006/relationships">
+  <p:cSld>
+    <p:bg>
+      <p:bgPr>
+        <a:solidFill>
+          <a:srgbClr val="2A2929"/>
+        </a:solidFill>
+        <a:effectLst/>
+      </p:bgPr>
+    </p:bg>
+    <p:spTree>
+      <p:nvGrpSpPr>
+        <p:cNvPr id="1" name=""/>
+        <p:cNvGrpSpPr/>
+        <p:nvPr/>
+      </p:nvGrpSpPr>
+      <p:grpSpPr/>
+      <p:sp>
+        <p:nvSpPr>
+          <p:cNvPr id="2" name="Rectangle 1"/>
+          <p:cNvSpPr/>
+          <p:nvPr/>
+        </p:nvSpPr>
+        <p:spPr>
+          <a:xfrm>
+            <a:off x="0" y="0"/>
+            <a:ext cx="411480" cy="6858000"/>
+          </a:xfrm>
+          <a:prstGeom prst="rect">
+            <a:avLst/>
+          </a:prstGeom>
+          <a:solidFill>
+            <a:srgbClr val="EDAB0C"/>
+          </a:solidFill>
+          <a:ln>
+            <a:noFill/>
+          </a:ln>
+          <a:effectLst/>
+        </p:spPr>
+        <p:style>
+          <a:lnRef idx="1">
+            <a:schemeClr val="accent1"/>
+          </a:lnRef>
+          <a:fillRef idx="3">
+            <a:schemeClr val="accent1"/>
+          </a:fillRef>
+          <a:effectRef idx="2">
+            <a:schemeClr val="accent1"/>
+          </a:effectRef>
+          <a:fontRef idx="minor">
+            <a:schemeClr val="lt1"/>
+          </a:fontRef>
+        </p:style>
+        <p:txBody>
+          <a:bodyPr rtlCol="0" anchor="ctr"/>
+          <a:lstStyle/>
+          <a:p>
+            <a:pPr algn="ctr"/>
+          </a:p>
+        </p:txBody>
+      </p:sp>
+      <p:sp>
+        <p:nvSpPr>
+          <p:cNvPr id="3" name="TextBox 2"/>
+          <p:cNvSpPr txBox="1"/>
+          <p:nvPr/>
+        </p:nvSpPr>
+        <p:spPr>
+          <a:xfrm>
+            <a:off x="914400" y="1463040"/>
+            <a:ext cx="10515600" cy="4023360"/>
+          </a:xfrm>
+          <a:prstGeom prst="rect">
+            <a:avLst/>
+          </a:prstGeom>
+          <a:noFill/>
+        </p:spPr>
+        <p:txBody>
+          <a:bodyPr wrap="square" anchor="t" lIns="0" rIns="0" tIns="0" bIns="0">
+            <a:spAutoFit/>
+          </a:bodyPr>
+          <a:lstStyle/>
+          <a:p>
+            <a:r>
+              <a:rPr sz="4000" b="1" i="0">
+                <a:solidFill>
+                  <a:srgbClr val="FFFFFF"/>
+                </a:solidFill>
+                <a:latin typeface="Roboto"/>
+              </a:rPr>
+              <a:t>Next: Topic 2 — metrics, and the four-component design</a:t>
+            </a:r>
+          </a:p>
+          <a:p>
+            <a:pPr>
+              <a:lnSpc>
+                <a:spcPct val="105000"/>
+              </a:lnSpc>
+              <a:spcBef>
+                <a:spcPts val="1200"/>
+              </a:spcBef>
+            </a:pPr>
+            <a:r>
+              <a:rPr sz="1900" b="0" i="0">
+                <a:solidFill>
+                  <a:srgbClr val="E8E8E8"/>
+                </a:solidFill>
+                <a:latin typeface="Roboto Light"/>
+              </a:rPr>
+              <a:t>The analysis is done: baseline understood, compliance assessed, options weighed, goals set, decisions confirmed.</a:t>
+            </a:r>
+          </a:p>
+          <a:p>
+            <a:pPr>
+              <a:lnSpc>
+                <a:spcPct val="105000"/>
+              </a:lnSpc>
+              <a:spcBef>
+                <a:spcPts val="1200"/>
+              </a:spcBef>
+            </a:pPr>
+            <a:r>
+              <a:rPr sz="1900" b="0" i="0">
+                <a:solidFill>
+                  <a:srgbClr val="E8E8E8"/>
+                </a:solidFill>
+                <a:latin typeface="Roboto Light"/>
+              </a:rPr>
+              <a:t>Next the design starts — the metrics that prove it, and the four resource components.</a:t>
             </a:r>
           </a:p>
         </p:txBody>
@@ -8837,7 +11076,7 @@
                 </a:solidFill>
                 <a:latin typeface="Roboto"/>
               </a:rPr>
-              <a:t>Reviewing the baseline</a:t>
+              <a:t>Review the baseline, and evaluate it</a:t>
             </a:r>
           </a:p>
           <a:p>
@@ -9164,7 +11403,7 @@
                 </a:solidFill>
                 <a:latin typeface="Roboto"/>
               </a:rPr>
-              <a:t>Frame the review with industry technology standards used in cloud solutions (KE 1) and the standard hardware/software products the platform is built on — compute families, managed databases, object/block storage (KE 2).</a:t>
+              <a:t>Frame it with the industry standards used in cloud solutions and the standard products the platform is built on.</a:t>
             </a:r>
           </a:p>
           <a:p>
@@ -9195,7 +11434,7 @@
                 </a:solidFill>
                 <a:latin typeface="Roboto"/>
               </a:rPr>
-              <a:t>Keep the method vendor-neutral here; you apply it to Ledgerline (a real AWS baseline) next.</a:t>
+              <a:t>The method is vendor-neutral; you apply it to a real baseline next.</a:t>
             </a:r>
           </a:p>
         </p:txBody>
@@ -9475,7 +11714,7 @@
                 </a:solidFill>
                 <a:latin typeface="Roboto"/>
               </a:rPr>
-              <a:t>Identify and review Ledgerline's current cloud architecture: a VPC, one Availability Zone, an app tier and a single RDS database.</a:t>
+              <a:t>The current architecture: a VPC, one Availability Zone, an app tier and a single database.</a:t>
             </a:r>
           </a:p>
           <a:p>
@@ -9506,7 +11745,7 @@
                 </a:solidFill>
                 <a:latin typeface="Roboto"/>
               </a:rPr>
-              <a:t>Read the topology top-down — network, compute, database, storage — and note how each resource is deployed today.</a:t>
+              <a:t>Read the topology top-down — network, compute, database, storage — noting how each resource is deployed today.</a:t>
             </a:r>
           </a:p>
           <a:p>
@@ -9537,7 +11776,7 @@
                 </a:solidFill>
                 <a:latin typeface="Roboto"/>
               </a:rPr>
-              <a:t>Cloud adoption changes the IT system: managed services, elasticity and shared responsibility reshape how you run and improve it (KE 3).</a:t>
+              <a:t>Single-AZ means every tier shares one failure domain; one zone outage takes it all down.</a:t>
             </a:r>
           </a:p>
         </p:txBody>
@@ -9743,7 +11982,7 @@
                 </a:solidFill>
                 <a:latin typeface="Roboto"/>
               </a:rPr>
-              <a:t>Evaluate the design decisions &amp; their business impact</a:t>
+              <a:t>Evaluate the design decisions and their business impact</a:t>
             </a:r>
           </a:p>
         </p:txBody>
@@ -9841,7 +12080,7 @@
                 </a:solidFill>
                 <a:latin typeface="Roboto"/>
               </a:rPr>
-              <a:t>Evaluate the baseline and name the business impact of its design decisions: single-AZ means single points of failure — one AZ outage takes Accounting down.</a:t>
+              <a:t>Evaluate the baseline and state the business impact of its design decisions — downtime, lost billing, risk to close-of-month.</a:t>
             </a:r>
           </a:p>
           <a:p>
@@ -9872,7 +12111,7 @@
                 </a:solidFill>
                 <a:latin typeface="Roboto"/>
               </a:rPr>
-              <a:t>A seeded constraint surfaces here: the accounting product is vendor-certified single-instance only → the database cannot go Multi-AZ. Record it now — it is the reliability cost-benefit centrepiece in Topic 2.</a:t>
+              <a:t>A seeded constraint surfaces here: the accounting product is vendor-certified single-instance only, so the database cannot go Multi-AZ. Record it — it drives the reliability design later.</a:t>
             </a:r>
           </a:p>
           <a:p>
@@ -9903,7 +12142,7 @@
                 </a:solidFill>
                 <a:latin typeface="Roboto"/>
               </a:rPr>
-              <a:t>Impact is a business statement, not a technical one: downtime, lost billing, risk to close-of-month — the language the goals in C3 answer.</a:t>
+              <a:t>Impact is a business statement, not a technical one; the goals you set later answer this language.</a:t>
             </a:r>
           </a:p>
         </p:txBody>
@@ -10182,7 +12421,7 @@
                 </a:solidFill>
                 <a:latin typeface="Roboto"/>
               </a:rPr>
-              <a:t>Review the practice baseline</a:t>
+              <a:t>Review and evaluate the practice baseline</a:t>
             </a:r>
           </a:p>
         </p:txBody>
@@ -10236,7 +12475,7 @@
                 </a:solidFill>
                 <a:latin typeface="Roboto"/>
               </a:rPr>
-              <a:t>On the practice engagement (the website), identify and review its current architecture the same way.</a:t>
+              <a:t>Workbook — tasks 1 and 2.</a:t>
             </a:r>
           </a:p>
           <a:p>
@@ -10267,7 +12506,7 @@
                 </a:solidFill>
                 <a:latin typeface="Roboto"/>
               </a:rPr>
-              <a:t>Evaluate it and name the business impact of its design decisions — where would an outage or a bottleneck hurt the business?</a:t>
+              <a:t>Review the practice engagement's current architecture top-down, then evaluate it and state the business impact of its design decisions.</a:t>
             </a:r>
           </a:p>
         </p:txBody>
@@ -10347,7 +12586,7 @@
                 </a:solidFill>
                 <a:latin typeface="Roboto"/>
               </a:rPr>
-              <a:t>⏱  ~25 min</a:t>
+              <a:t>⏱  ~30 min</a:t>
             </a:r>
           </a:p>
         </p:txBody>
@@ -10488,7 +12727,7 @@
     <p:bg>
       <p:bgPr>
         <a:solidFill>
-          <a:srgbClr val="FFFFFF"/>
+          <a:srgbClr val="F9F9F9"/>
         </a:solidFill>
         <a:effectLst/>
       </p:bgPr>
@@ -10502,20 +12741,70 @@
       <p:grpSpPr/>
       <p:sp>
         <p:nvSpPr>
-          <p:cNvPr id="2" name="Rectangle 1"/>
+          <p:cNvPr id="2" name="TextBox 1"/>
+          <p:cNvSpPr txBox="1"/>
+          <p:nvPr/>
+        </p:nvSpPr>
+        <p:spPr>
+          <a:xfrm>
+            <a:off x="640080" y="548640"/>
+            <a:ext cx="10881360" cy="1097280"/>
+          </a:xfrm>
+          <a:prstGeom prst="rect">
+            <a:avLst/>
+          </a:prstGeom>
+          <a:noFill/>
+        </p:spPr>
+        <p:txBody>
+          <a:bodyPr wrap="square" anchor="t" lIns="0" rIns="0" tIns="0" bIns="0">
+            <a:spAutoFit/>
+          </a:bodyPr>
+          <a:lstStyle/>
+          <a:p>
+            <a:r>
+              <a:rPr sz="3200" b="1" i="0">
+                <a:solidFill>
+                  <a:srgbClr val="2A2929"/>
+                </a:solidFill>
+                <a:latin typeface="Roboto"/>
+              </a:rPr>
+              <a:t>Key takeaways</a:t>
+            </a:r>
+          </a:p>
+          <a:p>
+            <a:pPr>
+              <a:spcBef>
+                <a:spcPts val="200"/>
+              </a:spcBef>
+            </a:pPr>
+            <a:r>
+              <a:rPr sz="1800" b="1" i="0">
+                <a:solidFill>
+                  <a:srgbClr val="92268F"/>
+                </a:solidFill>
+                <a:latin typeface="Roboto"/>
+              </a:rPr>
+              <a:t>Section 1 · The review</a:t>
+            </a:r>
+          </a:p>
+        </p:txBody>
+      </p:sp>
+      <p:sp>
+        <p:nvSpPr>
+          <p:cNvPr id="3" name="Rectangle 2"/>
           <p:cNvSpPr/>
           <p:nvPr/>
         </p:nvSpPr>
         <p:spPr>
           <a:xfrm>
-            <a:off x="0" y="0"/>
-            <a:ext cx="3931920" cy="6858000"/>
+            <a:off x="658368" y="1600200"/>
+            <a:ext cx="1463040" cy="50800"/>
           </a:xfrm>
           <a:prstGeom prst="rect">
             <a:avLst/>
           </a:prstGeom>
           <a:solidFill>
-            <a:srgbClr val="27B5CE"/>
+            <a:srgbClr val="92268F"/>
           </a:solidFill>
           <a:ln>
             <a:noFill/>
@@ -10546,101 +12835,47 @@
       </p:sp>
       <p:sp>
         <p:nvSpPr>
-          <p:cNvPr id="3" name="TextBox 2"/>
-          <p:cNvSpPr txBox="1"/>
-          <p:nvPr/>
-        </p:nvSpPr>
-        <p:spPr>
-          <a:xfrm>
-            <a:off x="365760" y="2103120"/>
-            <a:ext cx="3291840" cy="2194560"/>
-          </a:xfrm>
-          <a:prstGeom prst="rect">
-            <a:avLst/>
-          </a:prstGeom>
-          <a:noFill/>
-        </p:spPr>
-        <p:txBody>
-          <a:bodyPr wrap="square" anchor="t" lIns="0" rIns="0" tIns="0" bIns="0">
-            <a:spAutoFit/>
-          </a:bodyPr>
-          <a:lstStyle/>
-          <a:p>
-            <a:r>
-              <a:rPr sz="13000" b="1" i="0">
-                <a:solidFill>
-                  <a:srgbClr val="FFFFFF"/>
-                </a:solidFill>
-                <a:latin typeface="Roboto"/>
-              </a:rPr>
-              <a:t>02</a:t>
-            </a:r>
-          </a:p>
-        </p:txBody>
-      </p:sp>
-      <p:sp>
-        <p:nvSpPr>
-          <p:cNvPr id="4" name="TextBox 3"/>
-          <p:cNvSpPr txBox="1"/>
-          <p:nvPr/>
-        </p:nvSpPr>
-        <p:spPr>
-          <a:xfrm>
-            <a:off x="4480560" y="2468880"/>
-            <a:ext cx="7132320" cy="2194560"/>
-          </a:xfrm>
-          <a:prstGeom prst="rect">
-            <a:avLst/>
-          </a:prstGeom>
-          <a:noFill/>
-        </p:spPr>
-        <p:txBody>
-          <a:bodyPr wrap="square" anchor="t" lIns="0" rIns="0" tIns="0" bIns="0">
-            <a:spAutoFit/>
-          </a:bodyPr>
-          <a:lstStyle/>
-          <a:p>
-            <a:r>
-              <a:rPr sz="1600" b="1" i="0">
-                <a:solidFill>
-                  <a:srgbClr val="27B5CE"/>
-                </a:solidFill>
-                <a:latin typeface="Roboto"/>
-              </a:rPr>
-              <a:t>SECTION</a:t>
-            </a:r>
-          </a:p>
-          <a:p>
-            <a:pPr>
-              <a:spcBef>
-                <a:spcPts val="600"/>
-              </a:spcBef>
-            </a:pPr>
-            <a:r>
-              <a:rPr sz="3800" b="1" i="0">
-                <a:solidFill>
-                  <a:srgbClr val="2A2929"/>
-                </a:solidFill>
-                <a:latin typeface="Roboto"/>
-              </a:rPr>
-              <a:t>Options &amp; fit against the business model</a:t>
-            </a:r>
-          </a:p>
-          <a:p>
-            <a:pPr>
-              <a:spcBef>
-                <a:spcPts val="1000"/>
-              </a:spcBef>
-            </a:pPr>
-            <a:r>
-              <a:rPr sz="2000" b="0" i="1">
-                <a:solidFill>
-                  <a:srgbClr val="484848"/>
-                </a:solidFill>
-                <a:latin typeface="Roboto Light"/>
-              </a:rPr>
-              <a:t>what could change, and what fits the business</a:t>
-            </a:r>
+          <p:cNvPr id="4" name="Rectangle 3"/>
+          <p:cNvSpPr/>
+          <p:nvPr/>
+        </p:nvSpPr>
+        <p:spPr>
+          <a:xfrm>
+            <a:off x="640080" y="1965960"/>
+            <a:ext cx="10927080" cy="841248"/>
+          </a:xfrm>
+          <a:prstGeom prst="rect">
+            <a:avLst/>
+          </a:prstGeom>
+          <a:solidFill>
+            <a:srgbClr val="FFFFFF"/>
+          </a:solidFill>
+          <a:ln w="12700">
+            <a:solidFill>
+              <a:srgbClr val="CCCCCC"/>
+            </a:solidFill>
+          </a:ln>
+          <a:effectLst/>
+        </p:spPr>
+        <p:style>
+          <a:lnRef idx="1">
+            <a:schemeClr val="accent1"/>
+          </a:lnRef>
+          <a:fillRef idx="3">
+            <a:schemeClr val="accent1"/>
+          </a:fillRef>
+          <a:effectRef idx="2">
+            <a:schemeClr val="accent1"/>
+          </a:effectRef>
+          <a:fontRef idx="minor">
+            <a:schemeClr val="lt1"/>
+          </a:fontRef>
+        </p:style>
+        <p:txBody>
+          <a:bodyPr rtlCol="0" anchor="ctr"/>
+          <a:lstStyle/>
+          <a:p>
+            <a:pPr algn="ctr"/>
           </a:p>
         </p:txBody>
       </p:sp>
@@ -10652,14 +12887,14 @@
         </p:nvSpPr>
         <p:spPr>
           <a:xfrm>
-            <a:off x="0" y="6565392"/>
-            <a:ext cx="12191695" cy="38100"/>
+            <a:off x="640080" y="1965960"/>
+            <a:ext cx="109728" cy="841248"/>
           </a:xfrm>
           <a:prstGeom prst="rect">
             <a:avLst/>
           </a:prstGeom>
           <a:solidFill>
-            <a:srgbClr val="27B5CE"/>
+            <a:srgbClr val="92268F"/>
           </a:solidFill>
           <a:ln>
             <a:noFill/>
@@ -10696,6 +12931,347 @@
         </p:nvSpPr>
         <p:spPr>
           <a:xfrm>
+            <a:off x="960120" y="1965960"/>
+            <a:ext cx="10424160" cy="841248"/>
+          </a:xfrm>
+          <a:prstGeom prst="rect">
+            <a:avLst/>
+          </a:prstGeom>
+          <a:noFill/>
+        </p:spPr>
+        <p:txBody>
+          <a:bodyPr wrap="square" anchor="ctr" lIns="0" rIns="0" tIns="0" bIns="0">
+            <a:spAutoFit/>
+          </a:bodyPr>
+          <a:lstStyle/>
+          <a:p>
+            <a:pPr>
+              <a:lnSpc>
+                <a:spcPct val="100000"/>
+              </a:lnSpc>
+            </a:pPr>
+            <a:r>
+              <a:rPr sz="1700" b="0" i="0">
+                <a:solidFill>
+                  <a:srgbClr val="2A2929"/>
+                </a:solidFill>
+                <a:latin typeface="Roboto"/>
+              </a:rPr>
+              <a:t>Four pillars: security, reliability, performance, cost.</a:t>
+            </a:r>
+          </a:p>
+        </p:txBody>
+      </p:sp>
+      <p:sp>
+        <p:nvSpPr>
+          <p:cNvPr id="7" name="Rectangle 6"/>
+          <p:cNvSpPr/>
+          <p:nvPr/>
+        </p:nvSpPr>
+        <p:spPr>
+          <a:xfrm>
+            <a:off x="640080" y="2916936"/>
+            <a:ext cx="10927080" cy="841248"/>
+          </a:xfrm>
+          <a:prstGeom prst="rect">
+            <a:avLst/>
+          </a:prstGeom>
+          <a:solidFill>
+            <a:srgbClr val="FFFFFF"/>
+          </a:solidFill>
+          <a:ln w="12700">
+            <a:solidFill>
+              <a:srgbClr val="CCCCCC"/>
+            </a:solidFill>
+          </a:ln>
+          <a:effectLst/>
+        </p:spPr>
+        <p:style>
+          <a:lnRef idx="1">
+            <a:schemeClr val="accent1"/>
+          </a:lnRef>
+          <a:fillRef idx="3">
+            <a:schemeClr val="accent1"/>
+          </a:fillRef>
+          <a:effectRef idx="2">
+            <a:schemeClr val="accent1"/>
+          </a:effectRef>
+          <a:fontRef idx="minor">
+            <a:schemeClr val="lt1"/>
+          </a:fontRef>
+        </p:style>
+        <p:txBody>
+          <a:bodyPr rtlCol="0" anchor="ctr"/>
+          <a:lstStyle/>
+          <a:p>
+            <a:pPr algn="ctr"/>
+          </a:p>
+        </p:txBody>
+      </p:sp>
+      <p:sp>
+        <p:nvSpPr>
+          <p:cNvPr id="8" name="Rectangle 7"/>
+          <p:cNvSpPr/>
+          <p:nvPr/>
+        </p:nvSpPr>
+        <p:spPr>
+          <a:xfrm>
+            <a:off x="640080" y="2916936"/>
+            <a:ext cx="109728" cy="841248"/>
+          </a:xfrm>
+          <a:prstGeom prst="rect">
+            <a:avLst/>
+          </a:prstGeom>
+          <a:solidFill>
+            <a:srgbClr val="92268F"/>
+          </a:solidFill>
+          <a:ln>
+            <a:noFill/>
+          </a:ln>
+          <a:effectLst/>
+        </p:spPr>
+        <p:style>
+          <a:lnRef idx="1">
+            <a:schemeClr val="accent1"/>
+          </a:lnRef>
+          <a:fillRef idx="3">
+            <a:schemeClr val="accent1"/>
+          </a:fillRef>
+          <a:effectRef idx="2">
+            <a:schemeClr val="accent1"/>
+          </a:effectRef>
+          <a:fontRef idx="minor">
+            <a:schemeClr val="lt1"/>
+          </a:fontRef>
+        </p:style>
+        <p:txBody>
+          <a:bodyPr rtlCol="0" anchor="ctr"/>
+          <a:lstStyle/>
+          <a:p>
+            <a:pPr algn="ctr"/>
+          </a:p>
+        </p:txBody>
+      </p:sp>
+      <p:sp>
+        <p:nvSpPr>
+          <p:cNvPr id="9" name="TextBox 8"/>
+          <p:cNvSpPr txBox="1"/>
+          <p:nvPr/>
+        </p:nvSpPr>
+        <p:spPr>
+          <a:xfrm>
+            <a:off x="960120" y="2916936"/>
+            <a:ext cx="10424160" cy="841248"/>
+          </a:xfrm>
+          <a:prstGeom prst="rect">
+            <a:avLst/>
+          </a:prstGeom>
+          <a:noFill/>
+        </p:spPr>
+        <p:txBody>
+          <a:bodyPr wrap="square" anchor="ctr" lIns="0" rIns="0" tIns="0" bIns="0">
+            <a:spAutoFit/>
+          </a:bodyPr>
+          <a:lstStyle/>
+          <a:p>
+            <a:pPr>
+              <a:lnSpc>
+                <a:spcPct val="100000"/>
+              </a:lnSpc>
+            </a:pPr>
+            <a:r>
+              <a:rPr sz="1700" b="0" i="0">
+                <a:solidFill>
+                  <a:srgbClr val="2A2929"/>
+                </a:solidFill>
+                <a:latin typeface="Roboto"/>
+              </a:rPr>
+              <a:t>Impact in business language, tied to each design decision.</a:t>
+            </a:r>
+          </a:p>
+        </p:txBody>
+      </p:sp>
+      <p:sp>
+        <p:nvSpPr>
+          <p:cNvPr id="10" name="Rectangle 9"/>
+          <p:cNvSpPr/>
+          <p:nvPr/>
+        </p:nvSpPr>
+        <p:spPr>
+          <a:xfrm>
+            <a:off x="640080" y="3867912"/>
+            <a:ext cx="10927080" cy="841248"/>
+          </a:xfrm>
+          <a:prstGeom prst="rect">
+            <a:avLst/>
+          </a:prstGeom>
+          <a:solidFill>
+            <a:srgbClr val="FFFFFF"/>
+          </a:solidFill>
+          <a:ln w="12700">
+            <a:solidFill>
+              <a:srgbClr val="CCCCCC"/>
+            </a:solidFill>
+          </a:ln>
+          <a:effectLst/>
+        </p:spPr>
+        <p:style>
+          <a:lnRef idx="1">
+            <a:schemeClr val="accent1"/>
+          </a:lnRef>
+          <a:fillRef idx="3">
+            <a:schemeClr val="accent1"/>
+          </a:fillRef>
+          <a:effectRef idx="2">
+            <a:schemeClr val="accent1"/>
+          </a:effectRef>
+          <a:fontRef idx="minor">
+            <a:schemeClr val="lt1"/>
+          </a:fontRef>
+        </p:style>
+        <p:txBody>
+          <a:bodyPr rtlCol="0" anchor="ctr"/>
+          <a:lstStyle/>
+          <a:p>
+            <a:pPr algn="ctr"/>
+          </a:p>
+        </p:txBody>
+      </p:sp>
+      <p:sp>
+        <p:nvSpPr>
+          <p:cNvPr id="11" name="Rectangle 10"/>
+          <p:cNvSpPr/>
+          <p:nvPr/>
+        </p:nvSpPr>
+        <p:spPr>
+          <a:xfrm>
+            <a:off x="640080" y="3867912"/>
+            <a:ext cx="109728" cy="841248"/>
+          </a:xfrm>
+          <a:prstGeom prst="rect">
+            <a:avLst/>
+          </a:prstGeom>
+          <a:solidFill>
+            <a:srgbClr val="92268F"/>
+          </a:solidFill>
+          <a:ln>
+            <a:noFill/>
+          </a:ln>
+          <a:effectLst/>
+        </p:spPr>
+        <p:style>
+          <a:lnRef idx="1">
+            <a:schemeClr val="accent1"/>
+          </a:lnRef>
+          <a:fillRef idx="3">
+            <a:schemeClr val="accent1"/>
+          </a:fillRef>
+          <a:effectRef idx="2">
+            <a:schemeClr val="accent1"/>
+          </a:effectRef>
+          <a:fontRef idx="minor">
+            <a:schemeClr val="lt1"/>
+          </a:fontRef>
+        </p:style>
+        <p:txBody>
+          <a:bodyPr rtlCol="0" anchor="ctr"/>
+          <a:lstStyle/>
+          <a:p>
+            <a:pPr algn="ctr"/>
+          </a:p>
+        </p:txBody>
+      </p:sp>
+      <p:sp>
+        <p:nvSpPr>
+          <p:cNvPr id="12" name="TextBox 11"/>
+          <p:cNvSpPr txBox="1"/>
+          <p:nvPr/>
+        </p:nvSpPr>
+        <p:spPr>
+          <a:xfrm>
+            <a:off x="960120" y="3867912"/>
+            <a:ext cx="10424160" cy="841248"/>
+          </a:xfrm>
+          <a:prstGeom prst="rect">
+            <a:avLst/>
+          </a:prstGeom>
+          <a:noFill/>
+        </p:spPr>
+        <p:txBody>
+          <a:bodyPr wrap="square" anchor="ctr" lIns="0" rIns="0" tIns="0" bIns="0">
+            <a:spAutoFit/>
+          </a:bodyPr>
+          <a:lstStyle/>
+          <a:p>
+            <a:pPr>
+              <a:lnSpc>
+                <a:spcPct val="100000"/>
+              </a:lnSpc>
+            </a:pPr>
+            <a:r>
+              <a:rPr sz="1700" b="0" i="0">
+                <a:solidFill>
+                  <a:srgbClr val="2A2929"/>
+                </a:solidFill>
+                <a:latin typeface="Roboto"/>
+              </a:rPr>
+              <a:t>Record the constraints you find — they shape everything after.</a:t>
+            </a:r>
+          </a:p>
+        </p:txBody>
+      </p:sp>
+      <p:sp>
+        <p:nvSpPr>
+          <p:cNvPr id="13" name="Rectangle 12"/>
+          <p:cNvSpPr/>
+          <p:nvPr/>
+        </p:nvSpPr>
+        <p:spPr>
+          <a:xfrm>
+            <a:off x="0" y="6565392"/>
+            <a:ext cx="12191695" cy="38100"/>
+          </a:xfrm>
+          <a:prstGeom prst="rect">
+            <a:avLst/>
+          </a:prstGeom>
+          <a:solidFill>
+            <a:srgbClr val="92268F"/>
+          </a:solidFill>
+          <a:ln>
+            <a:noFill/>
+          </a:ln>
+          <a:effectLst/>
+        </p:spPr>
+        <p:style>
+          <a:lnRef idx="1">
+            <a:schemeClr val="accent1"/>
+          </a:lnRef>
+          <a:fillRef idx="3">
+            <a:schemeClr val="accent1"/>
+          </a:fillRef>
+          <a:effectRef idx="2">
+            <a:schemeClr val="accent1"/>
+          </a:effectRef>
+          <a:fontRef idx="minor">
+            <a:schemeClr val="lt1"/>
+          </a:fontRef>
+        </p:style>
+        <p:txBody>
+          <a:bodyPr rtlCol="0" anchor="ctr"/>
+          <a:lstStyle/>
+          <a:p>
+            <a:pPr algn="ctr"/>
+          </a:p>
+        </p:txBody>
+      </p:sp>
+      <p:sp>
+        <p:nvSpPr>
+          <p:cNvPr id="14" name="TextBox 13"/>
+          <p:cNvSpPr txBox="1"/>
+          <p:nvPr/>
+        </p:nvSpPr>
+        <p:spPr>
+          <a:xfrm>
             <a:off x="502920" y="6400800"/>
             <a:ext cx="5486400" cy="320040"/>
           </a:xfrm>
@@ -10733,7 +13309,7 @@
       </p:sp>
       <p:sp>
         <p:nvSpPr>
-          <p:cNvPr id="7" name="TextBox 6"/>
+          <p:cNvPr id="15" name="TextBox 14"/>
           <p:cNvSpPr txBox="1"/>
           <p:nvPr/>
         </p:nvSpPr>
@@ -10761,7 +13337,7 @@
                 </a:solidFill>
                 <a:latin typeface="Roboto"/>
               </a:rPr>
-              <a:t/>
+              <a:t>6</a:t>
             </a:r>
           </a:p>
         </p:txBody>
@@ -10794,48 +13370,14 @@
       <p:grpSpPr/>
       <p:sp>
         <p:nvSpPr>
-          <p:cNvPr id="2" name="TextBox 1"/>
-          <p:cNvSpPr txBox="1"/>
-          <p:nvPr/>
-        </p:nvSpPr>
-        <p:spPr>
-          <a:xfrm>
-            <a:off x="640080" y="457200"/>
-            <a:ext cx="10881360" cy="960120"/>
-          </a:xfrm>
-          <a:prstGeom prst="rect">
-            <a:avLst/>
-          </a:prstGeom>
-          <a:noFill/>
-        </p:spPr>
-        <p:txBody>
-          <a:bodyPr wrap="square" anchor="t" lIns="0" rIns="0" tIns="0" bIns="0">
-            <a:spAutoFit/>
-          </a:bodyPr>
-          <a:lstStyle/>
-          <a:p>
-            <a:r>
-              <a:rPr sz="2800" b="1" i="0">
-                <a:solidFill>
-                  <a:srgbClr val="2A2929"/>
-                </a:solidFill>
-                <a:latin typeface="Roboto"/>
-              </a:rPr>
-              <a:t>Design patterns &amp; architectural options</a:t>
-            </a:r>
-          </a:p>
-        </p:txBody>
-      </p:sp>
-      <p:sp>
-        <p:nvSpPr>
-          <p:cNvPr id="3" name="Rectangle 2"/>
+          <p:cNvPr id="2" name="Rectangle 1"/>
           <p:cNvSpPr/>
           <p:nvPr/>
         </p:nvSpPr>
         <p:spPr>
           <a:xfrm>
-            <a:off x="658368" y="1371600"/>
-            <a:ext cx="1463040" cy="50800"/>
+            <a:off x="0" y="0"/>
+            <a:ext cx="3931920" cy="6858000"/>
           </a:xfrm>
           <a:prstGeom prst="rect">
             <a:avLst/>
@@ -10872,14 +13414,48 @@
       </p:sp>
       <p:sp>
         <p:nvSpPr>
+          <p:cNvPr id="3" name="TextBox 2"/>
+          <p:cNvSpPr txBox="1"/>
+          <p:nvPr/>
+        </p:nvSpPr>
+        <p:spPr>
+          <a:xfrm>
+            <a:off x="365760" y="2103120"/>
+            <a:ext cx="3291840" cy="2194560"/>
+          </a:xfrm>
+          <a:prstGeom prst="rect">
+            <a:avLst/>
+          </a:prstGeom>
+          <a:noFill/>
+        </p:spPr>
+        <p:txBody>
+          <a:bodyPr wrap="square" anchor="t" lIns="0" rIns="0" tIns="0" bIns="0">
+            <a:spAutoFit/>
+          </a:bodyPr>
+          <a:lstStyle/>
+          <a:p>
+            <a:r>
+              <a:rPr sz="13000" b="1" i="0">
+                <a:solidFill>
+                  <a:srgbClr val="FFFFFF"/>
+                </a:solidFill>
+                <a:latin typeface="Roboto"/>
+              </a:rPr>
+              <a:t>02</a:t>
+            </a:r>
+          </a:p>
+        </p:txBody>
+      </p:sp>
+      <p:sp>
+        <p:nvSpPr>
           <p:cNvPr id="4" name="TextBox 3"/>
           <p:cNvSpPr txBox="1"/>
           <p:nvPr/>
         </p:nvSpPr>
         <p:spPr>
           <a:xfrm>
-            <a:off x="658368" y="1691640"/>
-            <a:ext cx="10881360" cy="4480560"/>
+            <a:off x="4480560" y="2468880"/>
+            <a:ext cx="7132320" cy="2194560"/>
           </a:xfrm>
           <a:prstGeom prst="rect">
             <a:avLst/>
@@ -10887,101 +13463,51 @@
           <a:noFill/>
         </p:spPr>
         <p:txBody>
-          <a:bodyPr wrap="square" anchor="ctr" lIns="0" rIns="0" tIns="0" bIns="0">
+          <a:bodyPr wrap="square" anchor="t" lIns="0" rIns="0" tIns="0" bIns="0">
             <a:spAutoFit/>
           </a:bodyPr>
           <a:lstStyle/>
           <a:p>
-            <a:pPr marL="0" indent="0">
-              <a:lnSpc>
-                <a:spcPct val="105000"/>
-              </a:lnSpc>
+            <a:r>
+              <a:rPr sz="1600" b="1" i="0">
+                <a:solidFill>
+                  <a:srgbClr val="27B5CE"/>
+                </a:solidFill>
+                <a:latin typeface="Roboto"/>
+              </a:rPr>
+              <a:t>SECTION</a:t>
+            </a:r>
+          </a:p>
+          <a:p>
+            <a:pPr>
               <a:spcBef>
-                <a:spcPts val="0"/>
+                <a:spcPts val="600"/>
               </a:spcBef>
-              <a:spcAft>
+            </a:pPr>
+            <a:r>
+              <a:rPr sz="3800" b="1" i="0">
+                <a:solidFill>
+                  <a:srgbClr val="2A2929"/>
+                </a:solidFill>
+                <a:latin typeface="Roboto"/>
+              </a:rPr>
+              <a:t>The compliance obligation</a:t>
+            </a:r>
+          </a:p>
+          <a:p>
+            <a:pPr>
+              <a:spcBef>
                 <a:spcPts val="1000"/>
-              </a:spcAft>
+              </a:spcBef>
             </a:pPr>
             <a:r>
-              <a:rPr sz="2400" b="1" i="0">
-                <a:solidFill>
-                  <a:srgbClr val="EDAB0C"/>
-                </a:solidFill>
-                <a:latin typeface="Roboto"/>
-              </a:rPr>
-              <a:t>■  </a:t>
-            </a:r>
-            <a:r>
-              <a:rPr sz="2400" b="0" i="0">
-                <a:solidFill>
-                  <a:srgbClr val="2A2929"/>
-                </a:solidFill>
-                <a:latin typeface="Roboto"/>
-              </a:rPr>
-              <a:t>Identify the options available to a cloud architecture: multi-AZ redundancy, horizontal scaling and load balancing, managed vs self-run data tiers, caching, decoupling.</a:t>
-            </a:r>
-          </a:p>
-          <a:p>
-            <a:pPr marL="0" indent="0">
-              <a:lnSpc>
-                <a:spcPct val="105000"/>
-              </a:lnSpc>
-              <a:spcBef>
-                <a:spcPts val="0"/>
-              </a:spcBef>
-              <a:spcAft>
-                <a:spcPts val="1000"/>
-              </a:spcAft>
-            </a:pPr>
-            <a:r>
-              <a:rPr sz="2400" b="1" i="0">
-                <a:solidFill>
-                  <a:srgbClr val="EDAB0C"/>
-                </a:solidFill>
-                <a:latin typeface="Roboto"/>
-              </a:rPr>
-              <a:t>■  </a:t>
-            </a:r>
-            <a:r>
-              <a:rPr sz="2400" b="0" i="0">
-                <a:solidFill>
-                  <a:srgbClr val="2A2929"/>
-                </a:solidFill>
-                <a:latin typeface="Roboto"/>
-              </a:rPr>
-              <a:t>Each option is a pattern with a cost and a benefit — there is no single right answer, only a fit.</a:t>
-            </a:r>
-          </a:p>
-          <a:p>
-            <a:pPr marL="0" indent="0">
-              <a:lnSpc>
-                <a:spcPct val="105000"/>
-              </a:lnSpc>
-              <a:spcBef>
-                <a:spcPts val="0"/>
-              </a:spcBef>
-              <a:spcAft>
-                <a:spcPts val="1000"/>
-              </a:spcAft>
-            </a:pPr>
-            <a:r>
-              <a:rPr sz="2400" b="1" i="0">
-                <a:solidFill>
-                  <a:srgbClr val="EDAB0C"/>
-                </a:solidFill>
-                <a:latin typeface="Roboto"/>
-              </a:rPr>
-              <a:t>■  </a:t>
-            </a:r>
-            <a:r>
-              <a:rPr sz="2400" b="0" i="0">
-                <a:solidFill>
-                  <a:srgbClr val="2A2929"/>
-                </a:solidFill>
-                <a:latin typeface="Roboto"/>
-              </a:rPr>
-              <a:t>The four improvement concerns to weigh against: security, reliability, scalability, cost.</a:t>
+              <a:rPr sz="2000" b="0" i="1">
+                <a:solidFill>
+                  <a:srgbClr val="484848"/>
+                </a:solidFill>
+                <a:latin typeface="Roboto Light"/>
+              </a:rPr>
+              <a:t>read what it obliges, record where you stand</a:t>
             </a:r>
           </a:p>
         </p:txBody>
@@ -11103,7 +13629,7 @@
                 </a:solidFill>
                 <a:latin typeface="Roboto"/>
               </a:rPr>
-              <a:t>6</a:t>
+              <a:t/>
             </a:r>
           </a:p>
         </p:txBody>
